--- a/大学生学习与求职智能助手-介绍.pptx
+++ b/大学生学习与求职智能助手-介绍.pptx
@@ -4,22 +4,25 @@
   <p:sldMasterIdLst>
     <p:sldMasterId id="2147483648" r:id="rId1"/>
   </p:sldMasterIdLst>
+  <p:notesMasterIdLst>
+    <p:notesMasterId r:id="rId15"/>
+  </p:notesMasterIdLst>
   <p:sldIdLst>
-    <p:sldId id="256" r:id="rId7"/>
-    <p:sldId id="257" r:id="rId8"/>
-    <p:sldId id="258" r:id="rId9"/>
-    <p:sldId id="259" r:id="rId10"/>
-    <p:sldId id="260" r:id="rId11"/>
-    <p:sldId id="261" r:id="rId12"/>
-    <p:sldId id="262" r:id="rId13"/>
-    <p:sldId id="263" r:id="rId14"/>
-    <p:sldId id="264" r:id="rId15"/>
-    <p:sldId id="265" r:id="rId16"/>
-    <p:sldId id="266" r:id="rId17"/>
-    <p:sldId id="267" r:id="rId18"/>
-    <p:sldId id="268" r:id="rId19"/>
+    <p:sldId id="256" r:id="rId2"/>
+    <p:sldId id="257" r:id="rId3"/>
+    <p:sldId id="258" r:id="rId4"/>
+    <p:sldId id="259" r:id="rId5"/>
+    <p:sldId id="260" r:id="rId6"/>
+    <p:sldId id="261" r:id="rId7"/>
+    <p:sldId id="262" r:id="rId8"/>
+    <p:sldId id="263" r:id="rId9"/>
+    <p:sldId id="264" r:id="rId10"/>
+    <p:sldId id="265" r:id="rId11"/>
+    <p:sldId id="266" r:id="rId12"/>
+    <p:sldId id="267" r:id="rId13"/>
+    <p:sldId id="268" r:id="rId14"/>
   </p:sldIdLst>
-  <p:sldSz cx="12191695" cy="6858000" type="screen4x3"/>
+  <p:sldSz cx="12192000" cy="6858000"/>
   <p:notesSz cx="6858000" cy="9144000"/>
   <p:defaultTextStyle>
     <a:defPPr>
@@ -116,7 +119,544 @@
       </a:defRPr>
     </a:lvl9pPr>
   </p:defaultTextStyle>
+  <p:extLst>
+    <p:ext uri="{EFAFB233-063F-42B5-8137-9DF3F51BA10A}">
+      <p15:sldGuideLst xmlns:p15="http://schemas.microsoft.com/office/powerpoint/2012/main">
+        <p15:guide id="1" orient="horz" pos="2160">
+          <p15:clr>
+            <a:srgbClr val="A4A3A4"/>
+          </p15:clr>
+        </p15:guide>
+        <p15:guide id="2" pos="2880">
+          <p15:clr>
+            <a:srgbClr val="A4A3A4"/>
+          </p15:clr>
+        </p15:guide>
+      </p15:sldGuideLst>
+    </p:ext>
+  </p:extLst>
 </p:presentation>
+</file>
+
+<file path=ppt/notesMasters/notesMaster1.xml><?xml version="1.0" encoding="utf-8"?>
+<p:notesMaster xmlns:a="http://schemas.openxmlformats.org/drawingml/2006/main" xmlns:r="http://schemas.openxmlformats.org/officeDocument/2006/relationships" xmlns:p="http://schemas.openxmlformats.org/presentationml/2006/main">
+  <p:cSld>
+    <p:bg>
+      <p:bgRef idx="1001">
+        <a:schemeClr val="bg1"/>
+      </p:bgRef>
+    </p:bg>
+    <p:spTree>
+      <p:nvGrpSpPr>
+        <p:cNvPr id="1" name=""/>
+        <p:cNvGrpSpPr/>
+        <p:nvPr/>
+      </p:nvGrpSpPr>
+      <p:grpSpPr>
+        <a:xfrm>
+          <a:off x="0" y="0"/>
+          <a:ext cx="0" cy="0"/>
+          <a:chOff x="0" y="0"/>
+          <a:chExt cx="0" cy="0"/>
+        </a:xfrm>
+      </p:grpSpPr>
+      <p:sp>
+        <p:nvSpPr>
+          <p:cNvPr id="2" name="页眉占位符 1"/>
+          <p:cNvSpPr>
+            <a:spLocks noGrp="1"/>
+          </p:cNvSpPr>
+          <p:nvPr>
+            <p:ph type="hdr" sz="quarter"/>
+          </p:nvPr>
+        </p:nvSpPr>
+        <p:spPr>
+          <a:xfrm>
+            <a:off x="0" y="0"/>
+            <a:ext cx="2971800" cy="458788"/>
+          </a:xfrm>
+          <a:prstGeom prst="rect">
+            <a:avLst/>
+          </a:prstGeom>
+        </p:spPr>
+        <p:txBody>
+          <a:bodyPr vert="horz" lIns="91440" tIns="45720" rIns="91440" bIns="45720" rtlCol="0"/>
+          <a:lstStyle>
+            <a:lvl1pPr algn="l">
+              <a:defRPr sz="1200"/>
+            </a:lvl1pPr>
+          </a:lstStyle>
+          <a:p>
+            <a:endParaRPr lang="zh-CN" altLang="en-US"/>
+          </a:p>
+        </p:txBody>
+      </p:sp>
+      <p:sp>
+        <p:nvSpPr>
+          <p:cNvPr id="3" name="日期占位符 2"/>
+          <p:cNvSpPr>
+            <a:spLocks noGrp="1"/>
+          </p:cNvSpPr>
+          <p:nvPr>
+            <p:ph type="dt" idx="1"/>
+          </p:nvPr>
+        </p:nvSpPr>
+        <p:spPr>
+          <a:xfrm>
+            <a:off x="3884613" y="0"/>
+            <a:ext cx="2971800" cy="458788"/>
+          </a:xfrm>
+          <a:prstGeom prst="rect">
+            <a:avLst/>
+          </a:prstGeom>
+        </p:spPr>
+        <p:txBody>
+          <a:bodyPr vert="horz" lIns="91440" tIns="45720" rIns="91440" bIns="45720" rtlCol="0"/>
+          <a:lstStyle>
+            <a:lvl1pPr algn="r">
+              <a:defRPr sz="1200"/>
+            </a:lvl1pPr>
+          </a:lstStyle>
+          <a:p>
+            <a:fld id="{50DC3C21-FA98-431E-9140-C2786AC5AF30}" type="datetimeFigureOut">
+              <a:rPr lang="zh-CN" altLang="en-US" smtClean="0"/>
+              <a:t>2026/8/27</a:t>
+            </a:fld>
+            <a:endParaRPr lang="zh-CN" altLang="en-US"/>
+          </a:p>
+        </p:txBody>
+      </p:sp>
+      <p:sp>
+        <p:nvSpPr>
+          <p:cNvPr id="4" name="幻灯片图像占位符 3"/>
+          <p:cNvSpPr>
+            <a:spLocks noGrp="1" noRot="1" noChangeAspect="1"/>
+          </p:cNvSpPr>
+          <p:nvPr>
+            <p:ph type="sldImg" idx="2"/>
+          </p:nvPr>
+        </p:nvSpPr>
+        <p:spPr>
+          <a:xfrm>
+            <a:off x="685800" y="1143000"/>
+            <a:ext cx="5486400" cy="3086100"/>
+          </a:xfrm>
+          <a:prstGeom prst="rect">
+            <a:avLst/>
+          </a:prstGeom>
+          <a:noFill/>
+          <a:ln w="12700">
+            <a:solidFill>
+              <a:prstClr val="black"/>
+            </a:solidFill>
+          </a:ln>
+        </p:spPr>
+        <p:txBody>
+          <a:bodyPr vert="horz" lIns="91440" tIns="45720" rIns="91440" bIns="45720" rtlCol="0" anchor="ctr"/>
+          <a:lstStyle/>
+          <a:p>
+            <a:endParaRPr lang="zh-CN" altLang="en-US"/>
+          </a:p>
+        </p:txBody>
+      </p:sp>
+      <p:sp>
+        <p:nvSpPr>
+          <p:cNvPr id="5" name="备注占位符 4"/>
+          <p:cNvSpPr>
+            <a:spLocks noGrp="1"/>
+          </p:cNvSpPr>
+          <p:nvPr>
+            <p:ph type="body" sz="quarter" idx="3"/>
+          </p:nvPr>
+        </p:nvSpPr>
+        <p:spPr>
+          <a:xfrm>
+            <a:off x="685800" y="4400550"/>
+            <a:ext cx="5486400" cy="3600450"/>
+          </a:xfrm>
+          <a:prstGeom prst="rect">
+            <a:avLst/>
+          </a:prstGeom>
+        </p:spPr>
+        <p:txBody>
+          <a:bodyPr vert="horz" lIns="91440" tIns="45720" rIns="91440" bIns="45720" rtlCol="0"/>
+          <a:lstStyle/>
+          <a:p>
+            <a:pPr lvl="0"/>
+            <a:r>
+              <a:rPr lang="zh-CN" altLang="en-US"/>
+              <a:t>单击此处编辑母版文本样式</a:t>
+            </a:r>
+          </a:p>
+          <a:p>
+            <a:pPr lvl="1"/>
+            <a:r>
+              <a:rPr lang="zh-CN" altLang="en-US"/>
+              <a:t>二级</a:t>
+            </a:r>
+          </a:p>
+          <a:p>
+            <a:pPr lvl="2"/>
+            <a:r>
+              <a:rPr lang="zh-CN" altLang="en-US"/>
+              <a:t>三级</a:t>
+            </a:r>
+          </a:p>
+          <a:p>
+            <a:pPr lvl="3"/>
+            <a:r>
+              <a:rPr lang="zh-CN" altLang="en-US"/>
+              <a:t>四级</a:t>
+            </a:r>
+          </a:p>
+          <a:p>
+            <a:pPr lvl="4"/>
+            <a:r>
+              <a:rPr lang="zh-CN" altLang="en-US"/>
+              <a:t>五级</a:t>
+            </a:r>
+          </a:p>
+        </p:txBody>
+      </p:sp>
+      <p:sp>
+        <p:nvSpPr>
+          <p:cNvPr id="6" name="页脚占位符 5"/>
+          <p:cNvSpPr>
+            <a:spLocks noGrp="1"/>
+          </p:cNvSpPr>
+          <p:nvPr>
+            <p:ph type="ftr" sz="quarter" idx="4"/>
+          </p:nvPr>
+        </p:nvSpPr>
+        <p:spPr>
+          <a:xfrm>
+            <a:off x="0" y="8685213"/>
+            <a:ext cx="2971800" cy="458787"/>
+          </a:xfrm>
+          <a:prstGeom prst="rect">
+            <a:avLst/>
+          </a:prstGeom>
+        </p:spPr>
+        <p:txBody>
+          <a:bodyPr vert="horz" lIns="91440" tIns="45720" rIns="91440" bIns="45720" rtlCol="0" anchor="b"/>
+          <a:lstStyle>
+            <a:lvl1pPr algn="l">
+              <a:defRPr sz="1200"/>
+            </a:lvl1pPr>
+          </a:lstStyle>
+          <a:p>
+            <a:endParaRPr lang="zh-CN" altLang="en-US"/>
+          </a:p>
+        </p:txBody>
+      </p:sp>
+      <p:sp>
+        <p:nvSpPr>
+          <p:cNvPr id="7" name="灯片编号占位符 6"/>
+          <p:cNvSpPr>
+            <a:spLocks noGrp="1"/>
+          </p:cNvSpPr>
+          <p:nvPr>
+            <p:ph type="sldNum" sz="quarter" idx="5"/>
+          </p:nvPr>
+        </p:nvSpPr>
+        <p:spPr>
+          <a:xfrm>
+            <a:off x="3884613" y="8685213"/>
+            <a:ext cx="2971800" cy="458787"/>
+          </a:xfrm>
+          <a:prstGeom prst="rect">
+            <a:avLst/>
+          </a:prstGeom>
+        </p:spPr>
+        <p:txBody>
+          <a:bodyPr vert="horz" lIns="91440" tIns="45720" rIns="91440" bIns="45720" rtlCol="0" anchor="b"/>
+          <a:lstStyle>
+            <a:lvl1pPr algn="r">
+              <a:defRPr sz="1200"/>
+            </a:lvl1pPr>
+          </a:lstStyle>
+          <a:p>
+            <a:fld id="{8DEDC7AE-5C7B-48A7-9915-232DC18D7063}" type="slidenum">
+              <a:rPr lang="zh-CN" altLang="en-US" smtClean="0"/>
+              <a:t>‹#›</a:t>
+            </a:fld>
+            <a:endParaRPr lang="zh-CN" altLang="en-US"/>
+          </a:p>
+        </p:txBody>
+      </p:sp>
+    </p:spTree>
+    <p:extLst>
+      <p:ext uri="{BB962C8B-B14F-4D97-AF65-F5344CB8AC3E}">
+        <p14:creationId xmlns:p14="http://schemas.microsoft.com/office/powerpoint/2010/main" val="1850132850"/>
+      </p:ext>
+    </p:extLst>
+  </p:cSld>
+  <p:clrMap bg1="lt1" tx1="dk1" bg2="lt2" tx2="dk2" accent1="accent1" accent2="accent2" accent3="accent3" accent4="accent4" accent5="accent5" accent6="accent6" hlink="hlink" folHlink="folHlink"/>
+  <p:notesStyle>
+    <a:lvl1pPr marL="0" algn="l" defTabSz="914400" rtl="0" eaLnBrk="1" latinLnBrk="0" hangingPunct="1">
+      <a:defRPr sz="1200" kern="1200">
+        <a:solidFill>
+          <a:schemeClr val="tx1"/>
+        </a:solidFill>
+        <a:latin typeface="+mn-lt"/>
+        <a:ea typeface="+mn-ea"/>
+        <a:cs typeface="+mn-cs"/>
+      </a:defRPr>
+    </a:lvl1pPr>
+    <a:lvl2pPr marL="457200" algn="l" defTabSz="914400" rtl="0" eaLnBrk="1" latinLnBrk="0" hangingPunct="1">
+      <a:defRPr sz="1200" kern="1200">
+        <a:solidFill>
+          <a:schemeClr val="tx1"/>
+        </a:solidFill>
+        <a:latin typeface="+mn-lt"/>
+        <a:ea typeface="+mn-ea"/>
+        <a:cs typeface="+mn-cs"/>
+      </a:defRPr>
+    </a:lvl2pPr>
+    <a:lvl3pPr marL="914400" algn="l" defTabSz="914400" rtl="0" eaLnBrk="1" latinLnBrk="0" hangingPunct="1">
+      <a:defRPr sz="1200" kern="1200">
+        <a:solidFill>
+          <a:schemeClr val="tx1"/>
+        </a:solidFill>
+        <a:latin typeface="+mn-lt"/>
+        <a:ea typeface="+mn-ea"/>
+        <a:cs typeface="+mn-cs"/>
+      </a:defRPr>
+    </a:lvl3pPr>
+    <a:lvl4pPr marL="1371600" algn="l" defTabSz="914400" rtl="0" eaLnBrk="1" latinLnBrk="0" hangingPunct="1">
+      <a:defRPr sz="1200" kern="1200">
+        <a:solidFill>
+          <a:schemeClr val="tx1"/>
+        </a:solidFill>
+        <a:latin typeface="+mn-lt"/>
+        <a:ea typeface="+mn-ea"/>
+        <a:cs typeface="+mn-cs"/>
+      </a:defRPr>
+    </a:lvl4pPr>
+    <a:lvl5pPr marL="1828800" algn="l" defTabSz="914400" rtl="0" eaLnBrk="1" latinLnBrk="0" hangingPunct="1">
+      <a:defRPr sz="1200" kern="1200">
+        <a:solidFill>
+          <a:schemeClr val="tx1"/>
+        </a:solidFill>
+        <a:latin typeface="+mn-lt"/>
+        <a:ea typeface="+mn-ea"/>
+        <a:cs typeface="+mn-cs"/>
+      </a:defRPr>
+    </a:lvl5pPr>
+    <a:lvl6pPr marL="2286000" algn="l" defTabSz="914400" rtl="0" eaLnBrk="1" latinLnBrk="0" hangingPunct="1">
+      <a:defRPr sz="1200" kern="1200">
+        <a:solidFill>
+          <a:schemeClr val="tx1"/>
+        </a:solidFill>
+        <a:latin typeface="+mn-lt"/>
+        <a:ea typeface="+mn-ea"/>
+        <a:cs typeface="+mn-cs"/>
+      </a:defRPr>
+    </a:lvl6pPr>
+    <a:lvl7pPr marL="2743200" algn="l" defTabSz="914400" rtl="0" eaLnBrk="1" latinLnBrk="0" hangingPunct="1">
+      <a:defRPr sz="1200" kern="1200">
+        <a:solidFill>
+          <a:schemeClr val="tx1"/>
+        </a:solidFill>
+        <a:latin typeface="+mn-lt"/>
+        <a:ea typeface="+mn-ea"/>
+        <a:cs typeface="+mn-cs"/>
+      </a:defRPr>
+    </a:lvl7pPr>
+    <a:lvl8pPr marL="3200400" algn="l" defTabSz="914400" rtl="0" eaLnBrk="1" latinLnBrk="0" hangingPunct="1">
+      <a:defRPr sz="1200" kern="1200">
+        <a:solidFill>
+          <a:schemeClr val="tx1"/>
+        </a:solidFill>
+        <a:latin typeface="+mn-lt"/>
+        <a:ea typeface="+mn-ea"/>
+        <a:cs typeface="+mn-cs"/>
+      </a:defRPr>
+    </a:lvl8pPr>
+    <a:lvl9pPr marL="3657600" algn="l" defTabSz="914400" rtl="0" eaLnBrk="1" latinLnBrk="0" hangingPunct="1">
+      <a:defRPr sz="1200" kern="1200">
+        <a:solidFill>
+          <a:schemeClr val="tx1"/>
+        </a:solidFill>
+        <a:latin typeface="+mn-lt"/>
+        <a:ea typeface="+mn-ea"/>
+        <a:cs typeface="+mn-cs"/>
+      </a:defRPr>
+    </a:lvl9pPr>
+  </p:notesStyle>
+</p:notesMaster>
+</file>
+
+<file path=ppt/notesSlides/notesSlide1.xml><?xml version="1.0" encoding="utf-8"?>
+<p:notes xmlns:a="http://schemas.openxmlformats.org/drawingml/2006/main" xmlns:r="http://schemas.openxmlformats.org/officeDocument/2006/relationships" xmlns:p="http://schemas.openxmlformats.org/presentationml/2006/main">
+  <p:cSld>
+    <p:spTree>
+      <p:nvGrpSpPr>
+        <p:cNvPr id="1" name=""/>
+        <p:cNvGrpSpPr/>
+        <p:nvPr/>
+      </p:nvGrpSpPr>
+      <p:grpSpPr>
+        <a:xfrm>
+          <a:off x="0" y="0"/>
+          <a:ext cx="0" cy="0"/>
+          <a:chOff x="0" y="0"/>
+          <a:chExt cx="0" cy="0"/>
+        </a:xfrm>
+      </p:grpSpPr>
+      <p:sp>
+        <p:nvSpPr>
+          <p:cNvPr id="2" name="幻灯片图像占位符 1"/>
+          <p:cNvSpPr>
+            <a:spLocks noGrp="1" noRot="1" noChangeAspect="1"/>
+          </p:cNvSpPr>
+          <p:nvPr>
+            <p:ph type="sldImg"/>
+          </p:nvPr>
+        </p:nvSpPr>
+        <p:spPr/>
+      </p:sp>
+      <p:sp>
+        <p:nvSpPr>
+          <p:cNvPr id="3" name="备注占位符 2"/>
+          <p:cNvSpPr>
+            <a:spLocks noGrp="1"/>
+          </p:cNvSpPr>
+          <p:nvPr>
+            <p:ph type="body" idx="1"/>
+          </p:nvPr>
+        </p:nvSpPr>
+        <p:spPr/>
+        <p:txBody>
+          <a:bodyPr/>
+          <a:lstStyle/>
+          <a:p>
+            <a:r>
+              <a:rPr lang="en-US" altLang="zh-CN" dirty="0"/>
+              <a:t>0</a:t>
+            </a:r>
+            <a:endParaRPr lang="zh-CN" altLang="en-US" dirty="0"/>
+          </a:p>
+        </p:txBody>
+      </p:sp>
+      <p:sp>
+        <p:nvSpPr>
+          <p:cNvPr id="4" name="灯片编号占位符 3"/>
+          <p:cNvSpPr>
+            <a:spLocks noGrp="1"/>
+          </p:cNvSpPr>
+          <p:nvPr>
+            <p:ph type="sldNum" sz="quarter" idx="5"/>
+          </p:nvPr>
+        </p:nvSpPr>
+        <p:spPr/>
+        <p:txBody>
+          <a:bodyPr/>
+          <a:lstStyle/>
+          <a:p>
+            <a:fld id="{8DEDC7AE-5C7B-48A7-9915-232DC18D7063}" type="slidenum">
+              <a:rPr lang="zh-CN" altLang="en-US" smtClean="0"/>
+              <a:t>4</a:t>
+            </a:fld>
+            <a:endParaRPr lang="zh-CN" altLang="en-US"/>
+          </a:p>
+        </p:txBody>
+      </p:sp>
+    </p:spTree>
+    <p:extLst>
+      <p:ext uri="{BB962C8B-B14F-4D97-AF65-F5344CB8AC3E}">
+        <p14:creationId xmlns:p14="http://schemas.microsoft.com/office/powerpoint/2010/main" val="2524328151"/>
+      </p:ext>
+    </p:extLst>
+  </p:cSld>
+  <p:clrMapOvr>
+    <a:masterClrMapping/>
+  </p:clrMapOvr>
+</p:notes>
+</file>
+
+<file path=ppt/notesSlides/notesSlide2.xml><?xml version="1.0" encoding="utf-8"?>
+<p:notes xmlns:a="http://schemas.openxmlformats.org/drawingml/2006/main" xmlns:r="http://schemas.openxmlformats.org/officeDocument/2006/relationships" xmlns:p="http://schemas.openxmlformats.org/presentationml/2006/main">
+  <p:cSld>
+    <p:spTree>
+      <p:nvGrpSpPr>
+        <p:cNvPr id="1" name=""/>
+        <p:cNvGrpSpPr/>
+        <p:nvPr/>
+      </p:nvGrpSpPr>
+      <p:grpSpPr>
+        <a:xfrm>
+          <a:off x="0" y="0"/>
+          <a:ext cx="0" cy="0"/>
+          <a:chOff x="0" y="0"/>
+          <a:chExt cx="0" cy="0"/>
+        </a:xfrm>
+      </p:grpSpPr>
+      <p:sp>
+        <p:nvSpPr>
+          <p:cNvPr id="2" name="幻灯片图像占位符 1"/>
+          <p:cNvSpPr>
+            <a:spLocks noGrp="1" noRot="1" noChangeAspect="1"/>
+          </p:cNvSpPr>
+          <p:nvPr>
+            <p:ph type="sldImg"/>
+          </p:nvPr>
+        </p:nvSpPr>
+        <p:spPr/>
+      </p:sp>
+      <p:sp>
+        <p:nvSpPr>
+          <p:cNvPr id="3" name="备注占位符 2"/>
+          <p:cNvSpPr>
+            <a:spLocks noGrp="1"/>
+          </p:cNvSpPr>
+          <p:nvPr>
+            <p:ph type="body" idx="1"/>
+          </p:nvPr>
+        </p:nvSpPr>
+        <p:spPr/>
+        <p:txBody>
+          <a:bodyPr/>
+          <a:lstStyle/>
+          <a:p>
+            <a:endParaRPr lang="zh-CN" altLang="en-US"/>
+          </a:p>
+        </p:txBody>
+      </p:sp>
+      <p:sp>
+        <p:nvSpPr>
+          <p:cNvPr id="4" name="灯片编号占位符 3"/>
+          <p:cNvSpPr>
+            <a:spLocks noGrp="1"/>
+          </p:cNvSpPr>
+          <p:nvPr>
+            <p:ph type="sldNum" sz="quarter" idx="5"/>
+          </p:nvPr>
+        </p:nvSpPr>
+        <p:spPr/>
+        <p:txBody>
+          <a:bodyPr/>
+          <a:lstStyle/>
+          <a:p>
+            <a:fld id="{8DEDC7AE-5C7B-48A7-9915-232DC18D7063}" type="slidenum">
+              <a:rPr lang="zh-CN" altLang="en-US" smtClean="0"/>
+              <a:t>6</a:t>
+            </a:fld>
+            <a:endParaRPr lang="zh-CN" altLang="en-US"/>
+          </a:p>
+        </p:txBody>
+      </p:sp>
+    </p:spTree>
+    <p:extLst>
+      <p:ext uri="{BB962C8B-B14F-4D97-AF65-F5344CB8AC3E}">
+        <p14:creationId xmlns:p14="http://schemas.microsoft.com/office/powerpoint/2010/main" val="2169756402"/>
+      </p:ext>
+    </p:extLst>
+  </p:cSld>
+  <p:clrMapOvr>
+    <a:masterClrMapping/>
+  </p:clrMapOvr>
+</p:notes>
 </file>
 
 <file path=ppt/slideLayouts/slideLayout1.xml><?xml version="1.0" encoding="utf-8"?>
@@ -157,10 +697,9 @@
           <a:lstStyle/>
           <a:p>
             <a:r>
-              <a:rPr lang="en-US" smtClean="0"/>
+              <a:rPr lang="en-US"/>
               <a:t>Click to edit Master title style</a:t>
             </a:r>
-            <a:endParaRPr lang="en-US"/>
           </a:p>
         </p:txBody>
       </p:sp>
@@ -276,10 +815,9 @@
           </a:lstStyle>
           <a:p>
             <a:r>
-              <a:rPr lang="en-US" smtClean="0"/>
+              <a:rPr lang="en-US"/>
               <a:t>Click to edit Master subtitle style</a:t>
             </a:r>
-            <a:endParaRPr lang="en-US"/>
           </a:p>
         </p:txBody>
       </p:sp>
@@ -300,7 +838,7 @@
           <a:p>
             <a:fld id="{5BCAD085-E8A6-8845-BD4E-CB4CCA059FC4}" type="datetimeFigureOut">
               <a:rPr lang="en-US" smtClean="0"/>
-              <a:t>1/27/13</a:t>
+              <a:t>8/27/2026</a:t>
             </a:fld>
             <a:endParaRPr lang="en-US"/>
           </a:p>
@@ -394,10 +932,9 @@
           <a:lstStyle/>
           <a:p>
             <a:r>
-              <a:rPr lang="en-US" smtClean="0"/>
+              <a:rPr lang="en-US"/>
               <a:t>Click to edit Master title style</a:t>
             </a:r>
-            <a:endParaRPr lang="en-US"/>
           </a:p>
         </p:txBody>
       </p:sp>
@@ -418,38 +955,37 @@
           <a:p>
             <a:pPr lvl="0"/>
             <a:r>
-              <a:rPr lang="en-US" smtClean="0"/>
+              <a:rPr lang="en-US"/>
               <a:t>Click to edit Master text styles</a:t>
             </a:r>
           </a:p>
           <a:p>
             <a:pPr lvl="1"/>
             <a:r>
-              <a:rPr lang="en-US" smtClean="0"/>
+              <a:rPr lang="en-US"/>
               <a:t>Second level</a:t>
             </a:r>
           </a:p>
           <a:p>
             <a:pPr lvl="2"/>
             <a:r>
-              <a:rPr lang="en-US" smtClean="0"/>
+              <a:rPr lang="en-US"/>
               <a:t>Third level</a:t>
             </a:r>
           </a:p>
           <a:p>
             <a:pPr lvl="3"/>
             <a:r>
-              <a:rPr lang="en-US" smtClean="0"/>
+              <a:rPr lang="en-US"/>
               <a:t>Fourth level</a:t>
             </a:r>
           </a:p>
           <a:p>
             <a:pPr lvl="4"/>
             <a:r>
-              <a:rPr lang="en-US" smtClean="0"/>
+              <a:rPr lang="en-US"/>
               <a:t>Fifth level</a:t>
             </a:r>
-            <a:endParaRPr lang="en-US"/>
           </a:p>
         </p:txBody>
       </p:sp>
@@ -470,7 +1006,7 @@
           <a:p>
             <a:fld id="{5BCAD085-E8A6-8845-BD4E-CB4CCA059FC4}" type="datetimeFigureOut">
               <a:rPr lang="en-US" smtClean="0"/>
-              <a:t>1/27/13</a:t>
+              <a:t>8/27/2026</a:t>
             </a:fld>
             <a:endParaRPr lang="en-US"/>
           </a:p>
@@ -569,10 +1105,9 @@
           <a:lstStyle/>
           <a:p>
             <a:r>
-              <a:rPr lang="en-US" smtClean="0"/>
+              <a:rPr lang="en-US"/>
               <a:t>Click to edit Master title style</a:t>
             </a:r>
-            <a:endParaRPr lang="en-US"/>
           </a:p>
         </p:txBody>
       </p:sp>
@@ -598,38 +1133,37 @@
           <a:p>
             <a:pPr lvl="0"/>
             <a:r>
-              <a:rPr lang="en-US" smtClean="0"/>
+              <a:rPr lang="en-US"/>
               <a:t>Click to edit Master text styles</a:t>
             </a:r>
           </a:p>
           <a:p>
             <a:pPr lvl="1"/>
             <a:r>
-              <a:rPr lang="en-US" smtClean="0"/>
+              <a:rPr lang="en-US"/>
               <a:t>Second level</a:t>
             </a:r>
           </a:p>
           <a:p>
             <a:pPr lvl="2"/>
             <a:r>
-              <a:rPr lang="en-US" smtClean="0"/>
+              <a:rPr lang="en-US"/>
               <a:t>Third level</a:t>
             </a:r>
           </a:p>
           <a:p>
             <a:pPr lvl="3"/>
             <a:r>
-              <a:rPr lang="en-US" smtClean="0"/>
+              <a:rPr lang="en-US"/>
               <a:t>Fourth level</a:t>
             </a:r>
           </a:p>
           <a:p>
             <a:pPr lvl="4"/>
             <a:r>
-              <a:rPr lang="en-US" smtClean="0"/>
+              <a:rPr lang="en-US"/>
               <a:t>Fifth level</a:t>
             </a:r>
-            <a:endParaRPr lang="en-US"/>
           </a:p>
         </p:txBody>
       </p:sp>
@@ -650,7 +1184,7 @@
           <a:p>
             <a:fld id="{5BCAD085-E8A6-8845-BD4E-CB4CCA059FC4}" type="datetimeFigureOut">
               <a:rPr lang="en-US" smtClean="0"/>
-              <a:t>1/27/13</a:t>
+              <a:t>8/27/2026</a:t>
             </a:fld>
             <a:endParaRPr lang="en-US"/>
           </a:p>
@@ -744,10 +1278,9 @@
           <a:lstStyle/>
           <a:p>
             <a:r>
-              <a:rPr lang="en-US" smtClean="0"/>
+              <a:rPr lang="en-US"/>
               <a:t>Click to edit Master title style</a:t>
             </a:r>
-            <a:endParaRPr lang="en-US"/>
           </a:p>
         </p:txBody>
       </p:sp>
@@ -768,38 +1301,37 @@
           <a:p>
             <a:pPr lvl="0"/>
             <a:r>
-              <a:rPr lang="en-US" smtClean="0"/>
+              <a:rPr lang="en-US"/>
               <a:t>Click to edit Master text styles</a:t>
             </a:r>
           </a:p>
           <a:p>
             <a:pPr lvl="1"/>
             <a:r>
-              <a:rPr lang="en-US" smtClean="0"/>
+              <a:rPr lang="en-US"/>
               <a:t>Second level</a:t>
             </a:r>
           </a:p>
           <a:p>
             <a:pPr lvl="2"/>
             <a:r>
-              <a:rPr lang="en-US" smtClean="0"/>
+              <a:rPr lang="en-US"/>
               <a:t>Third level</a:t>
             </a:r>
           </a:p>
           <a:p>
             <a:pPr lvl="3"/>
             <a:r>
-              <a:rPr lang="en-US" smtClean="0"/>
+              <a:rPr lang="en-US"/>
               <a:t>Fourth level</a:t>
             </a:r>
           </a:p>
           <a:p>
             <a:pPr lvl="4"/>
             <a:r>
-              <a:rPr lang="en-US" smtClean="0"/>
+              <a:rPr lang="en-US"/>
               <a:t>Fifth level</a:t>
             </a:r>
-            <a:endParaRPr lang="en-US"/>
           </a:p>
         </p:txBody>
       </p:sp>
@@ -820,7 +1352,7 @@
           <a:p>
             <a:fld id="{5BCAD085-E8A6-8845-BD4E-CB4CCA059FC4}" type="datetimeFigureOut">
               <a:rPr lang="en-US" smtClean="0"/>
-              <a:t>1/27/13</a:t>
+              <a:t>8/27/2026</a:t>
             </a:fld>
             <a:endParaRPr lang="en-US"/>
           </a:p>
@@ -923,10 +1455,9 @@
           </a:lstStyle>
           <a:p>
             <a:r>
-              <a:rPr lang="en-US" smtClean="0"/>
+              <a:rPr lang="en-US"/>
               <a:t>Click to edit Master title style</a:t>
             </a:r>
-            <a:endParaRPr lang="en-US"/>
           </a:p>
         </p:txBody>
       </p:sp>
@@ -1043,7 +1574,7 @@
           <a:p>
             <a:pPr lvl="0"/>
             <a:r>
-              <a:rPr lang="en-US" smtClean="0"/>
+              <a:rPr lang="en-US"/>
               <a:t>Click to edit Master text styles</a:t>
             </a:r>
           </a:p>
@@ -1066,7 +1597,7 @@
           <a:p>
             <a:fld id="{5BCAD085-E8A6-8845-BD4E-CB4CCA059FC4}" type="datetimeFigureOut">
               <a:rPr lang="en-US" smtClean="0"/>
-              <a:t>1/27/13</a:t>
+              <a:t>8/27/2026</a:t>
             </a:fld>
             <a:endParaRPr lang="en-US"/>
           </a:p>
@@ -1160,10 +1691,9 @@
           <a:lstStyle/>
           <a:p>
             <a:r>
-              <a:rPr lang="en-US" smtClean="0"/>
+              <a:rPr lang="en-US"/>
               <a:t>Click to edit Master title style</a:t>
             </a:r>
-            <a:endParaRPr lang="en-US"/>
           </a:p>
         </p:txBody>
       </p:sp>
@@ -1217,38 +1747,37 @@
           <a:p>
             <a:pPr lvl="0"/>
             <a:r>
-              <a:rPr lang="en-US" smtClean="0"/>
+              <a:rPr lang="en-US"/>
               <a:t>Click to edit Master text styles</a:t>
             </a:r>
           </a:p>
           <a:p>
             <a:pPr lvl="1"/>
             <a:r>
-              <a:rPr lang="en-US" smtClean="0"/>
+              <a:rPr lang="en-US"/>
               <a:t>Second level</a:t>
             </a:r>
           </a:p>
           <a:p>
             <a:pPr lvl="2"/>
             <a:r>
-              <a:rPr lang="en-US" smtClean="0"/>
+              <a:rPr lang="en-US"/>
               <a:t>Third level</a:t>
             </a:r>
           </a:p>
           <a:p>
             <a:pPr lvl="3"/>
             <a:r>
-              <a:rPr lang="en-US" smtClean="0"/>
+              <a:rPr lang="en-US"/>
               <a:t>Fourth level</a:t>
             </a:r>
           </a:p>
           <a:p>
             <a:pPr lvl="4"/>
             <a:r>
-              <a:rPr lang="en-US" smtClean="0"/>
+              <a:rPr lang="en-US"/>
               <a:t>Fifth level</a:t>
             </a:r>
-            <a:endParaRPr lang="en-US"/>
           </a:p>
         </p:txBody>
       </p:sp>
@@ -1302,38 +1831,37 @@
           <a:p>
             <a:pPr lvl="0"/>
             <a:r>
-              <a:rPr lang="en-US" smtClean="0"/>
+              <a:rPr lang="en-US"/>
               <a:t>Click to edit Master text styles</a:t>
             </a:r>
           </a:p>
           <a:p>
             <a:pPr lvl="1"/>
             <a:r>
-              <a:rPr lang="en-US" smtClean="0"/>
+              <a:rPr lang="en-US"/>
               <a:t>Second level</a:t>
             </a:r>
           </a:p>
           <a:p>
             <a:pPr lvl="2"/>
             <a:r>
-              <a:rPr lang="en-US" smtClean="0"/>
+              <a:rPr lang="en-US"/>
               <a:t>Third level</a:t>
             </a:r>
           </a:p>
           <a:p>
             <a:pPr lvl="3"/>
             <a:r>
-              <a:rPr lang="en-US" smtClean="0"/>
+              <a:rPr lang="en-US"/>
               <a:t>Fourth level</a:t>
             </a:r>
           </a:p>
           <a:p>
             <a:pPr lvl="4"/>
             <a:r>
-              <a:rPr lang="en-US" smtClean="0"/>
+              <a:rPr lang="en-US"/>
               <a:t>Fifth level</a:t>
             </a:r>
-            <a:endParaRPr lang="en-US"/>
           </a:p>
         </p:txBody>
       </p:sp>
@@ -1354,7 +1882,7 @@
           <a:p>
             <a:fld id="{5BCAD085-E8A6-8845-BD4E-CB4CCA059FC4}" type="datetimeFigureOut">
               <a:rPr lang="en-US" smtClean="0"/>
-              <a:t>1/27/13</a:t>
+              <a:t>8/27/2026</a:t>
             </a:fld>
             <a:endParaRPr lang="en-US"/>
           </a:p>
@@ -1452,10 +1980,9 @@
           </a:lstStyle>
           <a:p>
             <a:r>
-              <a:rPr lang="en-US" smtClean="0"/>
+              <a:rPr lang="en-US"/>
               <a:t>Click to edit Master title style</a:t>
             </a:r>
-            <a:endParaRPr lang="en-US"/>
           </a:p>
         </p:txBody>
       </p:sp>
@@ -1518,7 +2045,7 @@
           <a:p>
             <a:pPr lvl="0"/>
             <a:r>
-              <a:rPr lang="en-US" smtClean="0"/>
+              <a:rPr lang="en-US"/>
               <a:t>Click to edit Master text styles</a:t>
             </a:r>
           </a:p>
@@ -1574,38 +2101,37 @@
           <a:p>
             <a:pPr lvl="0"/>
             <a:r>
-              <a:rPr lang="en-US" smtClean="0"/>
+              <a:rPr lang="en-US"/>
               <a:t>Click to edit Master text styles</a:t>
             </a:r>
           </a:p>
           <a:p>
             <a:pPr lvl="1"/>
             <a:r>
-              <a:rPr lang="en-US" smtClean="0"/>
+              <a:rPr lang="en-US"/>
               <a:t>Second level</a:t>
             </a:r>
           </a:p>
           <a:p>
             <a:pPr lvl="2"/>
             <a:r>
-              <a:rPr lang="en-US" smtClean="0"/>
+              <a:rPr lang="en-US"/>
               <a:t>Third level</a:t>
             </a:r>
           </a:p>
           <a:p>
             <a:pPr lvl="3"/>
             <a:r>
-              <a:rPr lang="en-US" smtClean="0"/>
+              <a:rPr lang="en-US"/>
               <a:t>Fourth level</a:t>
             </a:r>
           </a:p>
           <a:p>
             <a:pPr lvl="4"/>
             <a:r>
-              <a:rPr lang="en-US" smtClean="0"/>
+              <a:rPr lang="en-US"/>
               <a:t>Fifth level</a:t>
             </a:r>
-            <a:endParaRPr lang="en-US"/>
           </a:p>
         </p:txBody>
       </p:sp>
@@ -1668,7 +2194,7 @@
           <a:p>
             <a:pPr lvl="0"/>
             <a:r>
-              <a:rPr lang="en-US" smtClean="0"/>
+              <a:rPr lang="en-US"/>
               <a:t>Click to edit Master text styles</a:t>
             </a:r>
           </a:p>
@@ -1724,38 +2250,37 @@
           <a:p>
             <a:pPr lvl="0"/>
             <a:r>
-              <a:rPr lang="en-US" smtClean="0"/>
+              <a:rPr lang="en-US"/>
               <a:t>Click to edit Master text styles</a:t>
             </a:r>
           </a:p>
           <a:p>
             <a:pPr lvl="1"/>
             <a:r>
-              <a:rPr lang="en-US" smtClean="0"/>
+              <a:rPr lang="en-US"/>
               <a:t>Second level</a:t>
             </a:r>
           </a:p>
           <a:p>
             <a:pPr lvl="2"/>
             <a:r>
-              <a:rPr lang="en-US" smtClean="0"/>
+              <a:rPr lang="en-US"/>
               <a:t>Third level</a:t>
             </a:r>
           </a:p>
           <a:p>
             <a:pPr lvl="3"/>
             <a:r>
-              <a:rPr lang="en-US" smtClean="0"/>
+              <a:rPr lang="en-US"/>
               <a:t>Fourth level</a:t>
             </a:r>
           </a:p>
           <a:p>
             <a:pPr lvl="4"/>
             <a:r>
-              <a:rPr lang="en-US" smtClean="0"/>
+              <a:rPr lang="en-US"/>
               <a:t>Fifth level</a:t>
             </a:r>
-            <a:endParaRPr lang="en-US"/>
           </a:p>
         </p:txBody>
       </p:sp>
@@ -1776,7 +2301,7 @@
           <a:p>
             <a:fld id="{5BCAD085-E8A6-8845-BD4E-CB4CCA059FC4}" type="datetimeFigureOut">
               <a:rPr lang="en-US" smtClean="0"/>
-              <a:t>1/27/13</a:t>
+              <a:t>8/27/2026</a:t>
             </a:fld>
             <a:endParaRPr lang="en-US"/>
           </a:p>
@@ -1870,10 +2395,9 @@
           <a:lstStyle/>
           <a:p>
             <a:r>
-              <a:rPr lang="en-US" smtClean="0"/>
+              <a:rPr lang="en-US"/>
               <a:t>Click to edit Master title style</a:t>
             </a:r>
-            <a:endParaRPr lang="en-US"/>
           </a:p>
         </p:txBody>
       </p:sp>
@@ -1894,7 +2418,7 @@
           <a:p>
             <a:fld id="{5BCAD085-E8A6-8845-BD4E-CB4CCA059FC4}" type="datetimeFigureOut">
               <a:rPr lang="en-US" smtClean="0"/>
-              <a:t>1/27/13</a:t>
+              <a:t>8/27/2026</a:t>
             </a:fld>
             <a:endParaRPr lang="en-US"/>
           </a:p>
@@ -1989,7 +2513,7 @@
           <a:p>
             <a:fld id="{5BCAD085-E8A6-8845-BD4E-CB4CCA059FC4}" type="datetimeFigureOut">
               <a:rPr lang="en-US" smtClean="0"/>
-              <a:t>1/27/13</a:t>
+              <a:t>8/27/2026</a:t>
             </a:fld>
             <a:endParaRPr lang="en-US"/>
           </a:p>
@@ -2092,10 +2616,9 @@
           </a:lstStyle>
           <a:p>
             <a:r>
-              <a:rPr lang="en-US" smtClean="0"/>
+              <a:rPr lang="en-US"/>
               <a:t>Click to edit Master title style</a:t>
             </a:r>
-            <a:endParaRPr lang="en-US"/>
           </a:p>
         </p:txBody>
       </p:sp>
@@ -2149,38 +2672,37 @@
           <a:p>
             <a:pPr lvl="0"/>
             <a:r>
-              <a:rPr lang="en-US" smtClean="0"/>
+              <a:rPr lang="en-US"/>
               <a:t>Click to edit Master text styles</a:t>
             </a:r>
           </a:p>
           <a:p>
             <a:pPr lvl="1"/>
             <a:r>
-              <a:rPr lang="en-US" smtClean="0"/>
+              <a:rPr lang="en-US"/>
               <a:t>Second level</a:t>
             </a:r>
           </a:p>
           <a:p>
             <a:pPr lvl="2"/>
             <a:r>
-              <a:rPr lang="en-US" smtClean="0"/>
+              <a:rPr lang="en-US"/>
               <a:t>Third level</a:t>
             </a:r>
           </a:p>
           <a:p>
             <a:pPr lvl="3"/>
             <a:r>
-              <a:rPr lang="en-US" smtClean="0"/>
+              <a:rPr lang="en-US"/>
               <a:t>Fourth level</a:t>
             </a:r>
           </a:p>
           <a:p>
             <a:pPr lvl="4"/>
             <a:r>
-              <a:rPr lang="en-US" smtClean="0"/>
+              <a:rPr lang="en-US"/>
               <a:t>Fifth level</a:t>
             </a:r>
-            <a:endParaRPr lang="en-US"/>
           </a:p>
         </p:txBody>
       </p:sp>
@@ -2243,7 +2765,7 @@
           <a:p>
             <a:pPr lvl="0"/>
             <a:r>
-              <a:rPr lang="en-US" smtClean="0"/>
+              <a:rPr lang="en-US"/>
               <a:t>Click to edit Master text styles</a:t>
             </a:r>
           </a:p>
@@ -2266,7 +2788,7 @@
           <a:p>
             <a:fld id="{5BCAD085-E8A6-8845-BD4E-CB4CCA059FC4}" type="datetimeFigureOut">
               <a:rPr lang="en-US" smtClean="0"/>
-              <a:t>1/27/13</a:t>
+              <a:t>8/27/2026</a:t>
             </a:fld>
             <a:endParaRPr lang="en-US"/>
           </a:p>
@@ -2369,10 +2891,9 @@
           </a:lstStyle>
           <a:p>
             <a:r>
-              <a:rPr lang="en-US" smtClean="0"/>
+              <a:rPr lang="en-US"/>
               <a:t>Click to edit Master title style</a:t>
             </a:r>
-            <a:endParaRPr lang="en-US"/>
           </a:p>
         </p:txBody>
       </p:sp>
@@ -2496,7 +3017,7 @@
           <a:p>
             <a:pPr lvl="0"/>
             <a:r>
-              <a:rPr lang="en-US" smtClean="0"/>
+              <a:rPr lang="en-US"/>
               <a:t>Click to edit Master text styles</a:t>
             </a:r>
           </a:p>
@@ -2519,7 +3040,7 @@
           <a:p>
             <a:fld id="{5BCAD085-E8A6-8845-BD4E-CB4CCA059FC4}" type="datetimeFigureOut">
               <a:rPr lang="en-US" smtClean="0"/>
-              <a:t>1/27/13</a:t>
+              <a:t>8/27/2026</a:t>
             </a:fld>
             <a:endParaRPr lang="en-US"/>
           </a:p>
@@ -2628,10 +3149,9 @@
           <a:lstStyle/>
           <a:p>
             <a:r>
-              <a:rPr lang="en-US" smtClean="0"/>
+              <a:rPr lang="en-US"/>
               <a:t>Click to edit Master title style</a:t>
             </a:r>
-            <a:endParaRPr lang="en-US"/>
           </a:p>
         </p:txBody>
       </p:sp>
@@ -2662,38 +3182,37 @@
           <a:p>
             <a:pPr lvl="0"/>
             <a:r>
-              <a:rPr lang="en-US" smtClean="0"/>
+              <a:rPr lang="en-US"/>
               <a:t>Click to edit Master text styles</a:t>
             </a:r>
           </a:p>
           <a:p>
             <a:pPr lvl="1"/>
             <a:r>
-              <a:rPr lang="en-US" smtClean="0"/>
+              <a:rPr lang="en-US"/>
               <a:t>Second level</a:t>
             </a:r>
           </a:p>
           <a:p>
             <a:pPr lvl="2"/>
             <a:r>
-              <a:rPr lang="en-US" smtClean="0"/>
+              <a:rPr lang="en-US"/>
               <a:t>Third level</a:t>
             </a:r>
           </a:p>
           <a:p>
             <a:pPr lvl="3"/>
             <a:r>
-              <a:rPr lang="en-US" smtClean="0"/>
+              <a:rPr lang="en-US"/>
               <a:t>Fourth level</a:t>
             </a:r>
           </a:p>
           <a:p>
             <a:pPr lvl="4"/>
             <a:r>
-              <a:rPr lang="en-US" smtClean="0"/>
+              <a:rPr lang="en-US"/>
               <a:t>Fifth level</a:t>
             </a:r>
-            <a:endParaRPr lang="en-US"/>
           </a:p>
         </p:txBody>
       </p:sp>
@@ -2732,7 +3251,7 @@
           <a:p>
             <a:fld id="{5BCAD085-E8A6-8845-BD4E-CB4CCA059FC4}" type="datetimeFigureOut">
               <a:rPr lang="en-US" smtClean="0"/>
-              <a:t>1/27/13</a:t>
+              <a:t>8/27/2026</a:t>
             </a:fld>
             <a:endParaRPr lang="en-US"/>
           </a:p>
@@ -3091,7 +3610,7 @@
 </file>
 
 <file path=ppt/slides/slide1.xml><?xml version="1.0" encoding="utf-8"?>
-<p:sld xmlns:a="http://schemas.openxmlformats.org/drawingml/2006/main" xmlns:p="http://schemas.openxmlformats.org/presentationml/2006/main" xmlns:r="http://schemas.openxmlformats.org/officeDocument/2006/relationships">
+<p:sld xmlns:a="http://schemas.openxmlformats.org/drawingml/2006/main" xmlns:r="http://schemas.openxmlformats.org/officeDocument/2006/relationships" xmlns:p="http://schemas.openxmlformats.org/presentationml/2006/main">
   <p:cSld>
     <p:spTree>
       <p:nvGrpSpPr>
@@ -3099,7 +3618,14 @@
         <p:cNvGrpSpPr/>
         <p:nvPr/>
       </p:nvGrpSpPr>
-      <p:grpSpPr/>
+      <p:grpSpPr>
+        <a:xfrm>
+          <a:off x="0" y="0"/>
+          <a:ext cx="0" cy="0"/>
+          <a:chOff x="0" y="0"/>
+          <a:chExt cx="0" cy="0"/>
+        </a:xfrm>
+      </p:grpSpPr>
       <p:sp>
         <p:nvSpPr>
           <p:cNvPr id="2" name="Rectangle 1"/>
@@ -3137,10 +3663,11 @@
           </a:fontRef>
         </p:style>
         <p:txBody>
-          <a:bodyPr rtlCol="0" anchor="ctr" wrap="square"/>
+          <a:bodyPr wrap="square" rtlCol="0" anchor="ctr"/>
           <a:lstStyle/>
           <a:p>
             <a:pPr algn="ctr"/>
+            <a:endParaRPr/>
           </a:p>
         </p:txBody>
       </p:sp>
@@ -3181,10 +3708,11 @@
           </a:fontRef>
         </p:style>
         <p:txBody>
-          <a:bodyPr rtlCol="0" anchor="ctr" wrap="square"/>
+          <a:bodyPr wrap="square" rtlCol="0" anchor="ctr"/>
           <a:lstStyle/>
           <a:p>
             <a:pPr algn="ctr"/>
+            <a:endParaRPr/>
           </a:p>
         </p:txBody>
       </p:sp>
@@ -3225,10 +3753,11 @@
           </a:fontRef>
         </p:style>
         <p:txBody>
-          <a:bodyPr rtlCol="0" anchor="ctr" wrap="square"/>
+          <a:bodyPr wrap="square" rtlCol="0" anchor="ctr"/>
           <a:lstStyle/>
           <a:p>
             <a:pPr algn="ctr"/>
+            <a:endParaRPr/>
           </a:p>
         </p:txBody>
       </p:sp>
@@ -3271,10 +3800,11 @@
           </a:fontRef>
         </p:style>
         <p:txBody>
-          <a:bodyPr rtlCol="0" anchor="ctr" wrap="square"/>
+          <a:bodyPr wrap="square" rtlCol="0" anchor="ctr"/>
           <a:lstStyle/>
           <a:p>
             <a:pPr algn="ctr"/>
+            <a:endParaRPr/>
           </a:p>
         </p:txBody>
       </p:sp>
@@ -3317,10 +3847,11 @@
           </a:fontRef>
         </p:style>
         <p:txBody>
-          <a:bodyPr rtlCol="0" anchor="ctr" wrap="square"/>
+          <a:bodyPr wrap="square" rtlCol="0" anchor="ctr"/>
           <a:lstStyle/>
           <a:p>
             <a:pPr algn="ctr"/>
+            <a:endParaRPr/>
           </a:p>
         </p:txBody>
       </p:sp>
@@ -3548,7 +4079,7 @@
 </file>
 
 <file path=ppt/slides/slide10.xml><?xml version="1.0" encoding="utf-8"?>
-<p:sld xmlns:a="http://schemas.openxmlformats.org/drawingml/2006/main" xmlns:p="http://schemas.openxmlformats.org/presentationml/2006/main" xmlns:r="http://schemas.openxmlformats.org/officeDocument/2006/relationships">
+<p:sld xmlns:a="http://schemas.openxmlformats.org/drawingml/2006/main" xmlns:r="http://schemas.openxmlformats.org/officeDocument/2006/relationships" xmlns:p="http://schemas.openxmlformats.org/presentationml/2006/main">
   <p:cSld>
     <p:spTree>
       <p:nvGrpSpPr>
@@ -3556,7 +4087,14 @@
         <p:cNvGrpSpPr/>
         <p:nvPr/>
       </p:nvGrpSpPr>
-      <p:grpSpPr/>
+      <p:grpSpPr>
+        <a:xfrm>
+          <a:off x="0" y="0"/>
+          <a:ext cx="0" cy="0"/>
+          <a:chOff x="0" y="0"/>
+          <a:chExt cx="0" cy="0"/>
+        </a:xfrm>
+      </p:grpSpPr>
       <p:sp>
         <p:nvSpPr>
           <p:cNvPr id="2" name="Rectangle 1"/>
@@ -3594,10 +4132,11 @@
           </a:fontRef>
         </p:style>
         <p:txBody>
-          <a:bodyPr rtlCol="0" anchor="ctr" wrap="square"/>
+          <a:bodyPr wrap="square" rtlCol="0" anchor="ctr"/>
           <a:lstStyle/>
           <a:p>
             <a:pPr algn="ctr"/>
+            <a:endParaRPr/>
           </a:p>
         </p:txBody>
       </p:sp>
@@ -3724,10 +4263,11 @@
           </a:fontRef>
         </p:style>
         <p:txBody>
-          <a:bodyPr rtlCol="0" anchor="ctr" wrap="square"/>
+          <a:bodyPr wrap="square" rtlCol="0" anchor="ctr"/>
           <a:lstStyle/>
           <a:p>
             <a:pPr algn="ctr"/>
+            <a:endParaRPr/>
           </a:p>
         </p:txBody>
       </p:sp>
@@ -3770,10 +4310,11 @@
           </a:fontRef>
         </p:style>
         <p:txBody>
-          <a:bodyPr rtlCol="0" anchor="ctr" wrap="square"/>
+          <a:bodyPr wrap="square" rtlCol="0" anchor="ctr"/>
           <a:lstStyle/>
           <a:p>
             <a:pPr algn="ctr"/>
+            <a:endParaRPr/>
           </a:p>
         </p:txBody>
       </p:sp>
@@ -3962,10 +4503,11 @@
           </a:fontRef>
         </p:style>
         <p:txBody>
-          <a:bodyPr rtlCol="0" anchor="ctr" wrap="square"/>
+          <a:bodyPr wrap="square" rtlCol="0" anchor="ctr"/>
           <a:lstStyle/>
           <a:p>
             <a:pPr algn="ctr"/>
+            <a:endParaRPr/>
           </a:p>
         </p:txBody>
       </p:sp>
@@ -4154,10 +4696,11 @@
           </a:fontRef>
         </p:style>
         <p:txBody>
-          <a:bodyPr rtlCol="0" anchor="ctr" wrap="square"/>
+          <a:bodyPr wrap="square" rtlCol="0" anchor="ctr"/>
           <a:lstStyle/>
           <a:p>
             <a:pPr algn="ctr"/>
+            <a:endParaRPr/>
           </a:p>
         </p:txBody>
       </p:sp>
@@ -4346,10 +4889,11 @@
           </a:fontRef>
         </p:style>
         <p:txBody>
-          <a:bodyPr rtlCol="0" anchor="ctr" wrap="square"/>
+          <a:bodyPr wrap="square" rtlCol="0" anchor="ctr"/>
           <a:lstStyle/>
           <a:p>
             <a:pPr algn="ctr"/>
+            <a:endParaRPr/>
           </a:p>
         </p:txBody>
       </p:sp>
@@ -4551,7 +5095,7 @@
 </file>
 
 <file path=ppt/slides/slide11.xml><?xml version="1.0" encoding="utf-8"?>
-<p:sld xmlns:a="http://schemas.openxmlformats.org/drawingml/2006/main" xmlns:p="http://schemas.openxmlformats.org/presentationml/2006/main" xmlns:r="http://schemas.openxmlformats.org/officeDocument/2006/relationships">
+<p:sld xmlns:a="http://schemas.openxmlformats.org/drawingml/2006/main" xmlns:r="http://schemas.openxmlformats.org/officeDocument/2006/relationships" xmlns:p="http://schemas.openxmlformats.org/presentationml/2006/main">
   <p:cSld>
     <p:spTree>
       <p:nvGrpSpPr>
@@ -4559,7 +5103,14 @@
         <p:cNvGrpSpPr/>
         <p:nvPr/>
       </p:nvGrpSpPr>
-      <p:grpSpPr/>
+      <p:grpSpPr>
+        <a:xfrm>
+          <a:off x="0" y="0"/>
+          <a:ext cx="0" cy="0"/>
+          <a:chOff x="0" y="0"/>
+          <a:chExt cx="0" cy="0"/>
+        </a:xfrm>
+      </p:grpSpPr>
       <p:sp>
         <p:nvSpPr>
           <p:cNvPr id="2" name="Rectangle 1"/>
@@ -4597,10 +5148,11 @@
           </a:fontRef>
         </p:style>
         <p:txBody>
-          <a:bodyPr rtlCol="0" anchor="ctr" wrap="square"/>
+          <a:bodyPr wrap="square" rtlCol="0" anchor="ctr"/>
           <a:lstStyle/>
           <a:p>
             <a:pPr algn="ctr"/>
+            <a:endParaRPr/>
           </a:p>
         </p:txBody>
       </p:sp>
@@ -4727,10 +5279,11 @@
           </a:fontRef>
         </p:style>
         <p:txBody>
-          <a:bodyPr rtlCol="0" anchor="ctr" wrap="square"/>
+          <a:bodyPr wrap="square" rtlCol="0" anchor="ctr"/>
           <a:lstStyle/>
           <a:p>
             <a:pPr algn="ctr"/>
+            <a:endParaRPr/>
           </a:p>
         </p:txBody>
       </p:sp>
@@ -4773,10 +5326,11 @@
           </a:fontRef>
         </p:style>
         <p:txBody>
-          <a:bodyPr rtlCol="0" anchor="ctr" wrap="square"/>
+          <a:bodyPr wrap="square" rtlCol="0" anchor="ctr"/>
           <a:lstStyle/>
           <a:p>
             <a:pPr algn="ctr"/>
+            <a:endParaRPr/>
           </a:p>
         </p:txBody>
       </p:sp>
@@ -4965,10 +5519,11 @@
           </a:fontRef>
         </p:style>
         <p:txBody>
-          <a:bodyPr rtlCol="0" anchor="ctr" wrap="square"/>
+          <a:bodyPr wrap="square" rtlCol="0" anchor="ctr"/>
           <a:lstStyle/>
           <a:p>
             <a:pPr algn="ctr"/>
+            <a:endParaRPr/>
           </a:p>
         </p:txBody>
       </p:sp>
@@ -5170,7 +5725,7 @@
 </file>
 
 <file path=ppt/slides/slide12.xml><?xml version="1.0" encoding="utf-8"?>
-<p:sld xmlns:a="http://schemas.openxmlformats.org/drawingml/2006/main" xmlns:p="http://schemas.openxmlformats.org/presentationml/2006/main" xmlns:r="http://schemas.openxmlformats.org/officeDocument/2006/relationships">
+<p:sld xmlns:a="http://schemas.openxmlformats.org/drawingml/2006/main" xmlns:r="http://schemas.openxmlformats.org/officeDocument/2006/relationships" xmlns:p="http://schemas.openxmlformats.org/presentationml/2006/main">
   <p:cSld>
     <p:spTree>
       <p:nvGrpSpPr>
@@ -5178,7 +5733,14 @@
         <p:cNvGrpSpPr/>
         <p:nvPr/>
       </p:nvGrpSpPr>
-      <p:grpSpPr/>
+      <p:grpSpPr>
+        <a:xfrm>
+          <a:off x="0" y="0"/>
+          <a:ext cx="0" cy="0"/>
+          <a:chOff x="0" y="0"/>
+          <a:chExt cx="0" cy="0"/>
+        </a:xfrm>
+      </p:grpSpPr>
       <p:sp>
         <p:nvSpPr>
           <p:cNvPr id="2" name="Rectangle 1"/>
@@ -5216,10 +5778,11 @@
           </a:fontRef>
         </p:style>
         <p:txBody>
-          <a:bodyPr rtlCol="0" anchor="ctr" wrap="square"/>
+          <a:bodyPr wrap="square" rtlCol="0" anchor="ctr"/>
           <a:lstStyle/>
           <a:p>
             <a:pPr algn="ctr"/>
+            <a:endParaRPr/>
           </a:p>
         </p:txBody>
       </p:sp>
@@ -5346,10 +5909,11 @@
           </a:fontRef>
         </p:style>
         <p:txBody>
-          <a:bodyPr rtlCol="0" anchor="ctr" wrap="square"/>
+          <a:bodyPr wrap="square" rtlCol="0" anchor="ctr"/>
           <a:lstStyle/>
           <a:p>
             <a:pPr algn="ctr"/>
+            <a:endParaRPr/>
           </a:p>
         </p:txBody>
       </p:sp>
@@ -5390,10 +5954,11 @@
           </a:fontRef>
         </p:style>
         <p:txBody>
-          <a:bodyPr rtlCol="0" anchor="ctr" wrap="square"/>
+          <a:bodyPr wrap="square" rtlCol="0" anchor="ctr"/>
           <a:lstStyle/>
           <a:p>
             <a:pPr algn="ctr"/>
+            <a:endParaRPr/>
           </a:p>
         </p:txBody>
       </p:sp>
@@ -5563,10 +6128,11 @@
           </a:fontRef>
         </p:style>
         <p:txBody>
-          <a:bodyPr rtlCol="0" anchor="ctr" wrap="square"/>
+          <a:bodyPr wrap="square" rtlCol="0" anchor="ctr"/>
           <a:lstStyle/>
           <a:p>
             <a:pPr algn="ctr"/>
+            <a:endParaRPr/>
           </a:p>
         </p:txBody>
       </p:sp>
@@ -5736,10 +6302,11 @@
           </a:fontRef>
         </p:style>
         <p:txBody>
-          <a:bodyPr rtlCol="0" anchor="ctr" wrap="square"/>
+          <a:bodyPr wrap="square" rtlCol="0" anchor="ctr"/>
           <a:lstStyle/>
           <a:p>
             <a:pPr algn="ctr"/>
+            <a:endParaRPr/>
           </a:p>
         </p:txBody>
       </p:sp>
@@ -5909,10 +6476,11 @@
           </a:fontRef>
         </p:style>
         <p:txBody>
-          <a:bodyPr rtlCol="0" anchor="ctr" wrap="square"/>
+          <a:bodyPr wrap="square" rtlCol="0" anchor="ctr"/>
           <a:lstStyle/>
           <a:p>
             <a:pPr algn="ctr"/>
+            <a:endParaRPr/>
           </a:p>
         </p:txBody>
       </p:sp>
@@ -6082,10 +6650,11 @@
           </a:fontRef>
         </p:style>
         <p:txBody>
-          <a:bodyPr rtlCol="0" anchor="ctr" wrap="square"/>
+          <a:bodyPr wrap="square" rtlCol="0" anchor="ctr"/>
           <a:lstStyle/>
           <a:p>
             <a:pPr algn="ctr"/>
+            <a:endParaRPr/>
           </a:p>
         </p:txBody>
       </p:sp>
@@ -6255,10 +6824,11 @@
           </a:fontRef>
         </p:style>
         <p:txBody>
-          <a:bodyPr rtlCol="0" anchor="ctr" wrap="square"/>
+          <a:bodyPr wrap="square" rtlCol="0" anchor="ctr"/>
           <a:lstStyle/>
           <a:p>
             <a:pPr algn="ctr"/>
+            <a:endParaRPr/>
           </a:p>
         </p:txBody>
       </p:sp>
@@ -6428,10 +6998,11 @@
           </a:fontRef>
         </p:style>
         <p:txBody>
-          <a:bodyPr rtlCol="0" anchor="ctr" wrap="square"/>
+          <a:bodyPr wrap="square" rtlCol="0" anchor="ctr"/>
           <a:lstStyle/>
           <a:p>
             <a:pPr algn="ctr"/>
+            <a:endParaRPr/>
           </a:p>
         </p:txBody>
       </p:sp>
@@ -6616,7 +7187,7 @@
 </file>
 
 <file path=ppt/slides/slide13.xml><?xml version="1.0" encoding="utf-8"?>
-<p:sld xmlns:a="http://schemas.openxmlformats.org/drawingml/2006/main" xmlns:p="http://schemas.openxmlformats.org/presentationml/2006/main" xmlns:r="http://schemas.openxmlformats.org/officeDocument/2006/relationships">
+<p:sld xmlns:a="http://schemas.openxmlformats.org/drawingml/2006/main" xmlns:r="http://schemas.openxmlformats.org/officeDocument/2006/relationships" xmlns:p="http://schemas.openxmlformats.org/presentationml/2006/main">
   <p:cSld>
     <p:spTree>
       <p:nvGrpSpPr>
@@ -6624,7 +7195,14 @@
         <p:cNvGrpSpPr/>
         <p:nvPr/>
       </p:nvGrpSpPr>
-      <p:grpSpPr/>
+      <p:grpSpPr>
+        <a:xfrm>
+          <a:off x="0" y="0"/>
+          <a:ext cx="0" cy="0"/>
+          <a:chOff x="0" y="0"/>
+          <a:chExt cx="0" cy="0"/>
+        </a:xfrm>
+      </p:grpSpPr>
       <p:sp>
         <p:nvSpPr>
           <p:cNvPr id="2" name="Rectangle 1"/>
@@ -6662,10 +7240,11 @@
           </a:fontRef>
         </p:style>
         <p:txBody>
-          <a:bodyPr rtlCol="0" anchor="ctr" wrap="square"/>
+          <a:bodyPr wrap="square" rtlCol="0" anchor="ctr"/>
           <a:lstStyle/>
           <a:p>
             <a:pPr algn="ctr"/>
+            <a:endParaRPr/>
           </a:p>
         </p:txBody>
       </p:sp>
@@ -6792,10 +7371,11 @@
           </a:fontRef>
         </p:style>
         <p:txBody>
-          <a:bodyPr rtlCol="0" anchor="ctr" wrap="square"/>
+          <a:bodyPr wrap="square" rtlCol="0" anchor="ctr"/>
           <a:lstStyle/>
           <a:p>
             <a:pPr algn="ctr"/>
+            <a:endParaRPr/>
           </a:p>
         </p:txBody>
       </p:sp>
@@ -6838,10 +7418,11 @@
           </a:fontRef>
         </p:style>
         <p:txBody>
-          <a:bodyPr rtlCol="0" anchor="ctr" wrap="square"/>
+          <a:bodyPr wrap="square" rtlCol="0" anchor="ctr"/>
           <a:lstStyle/>
           <a:p>
             <a:pPr algn="ctr"/>
+            <a:endParaRPr/>
           </a:p>
         </p:txBody>
       </p:sp>
@@ -7050,10 +7631,11 @@
           </a:fontRef>
         </p:style>
         <p:txBody>
-          <a:bodyPr rtlCol="0" anchor="ctr" wrap="square"/>
+          <a:bodyPr wrap="square" rtlCol="0" anchor="ctr"/>
           <a:lstStyle/>
           <a:p>
             <a:pPr algn="ctr"/>
+            <a:endParaRPr/>
           </a:p>
         </p:txBody>
       </p:sp>
@@ -7298,7 +7880,7 @@
 </file>
 
 <file path=ppt/slides/slide2.xml><?xml version="1.0" encoding="utf-8"?>
-<p:sld xmlns:a="http://schemas.openxmlformats.org/drawingml/2006/main" xmlns:p="http://schemas.openxmlformats.org/presentationml/2006/main" xmlns:r="http://schemas.openxmlformats.org/officeDocument/2006/relationships">
+<p:sld xmlns:a="http://schemas.openxmlformats.org/drawingml/2006/main" xmlns:r="http://schemas.openxmlformats.org/officeDocument/2006/relationships" xmlns:p="http://schemas.openxmlformats.org/presentationml/2006/main">
   <p:cSld>
     <p:spTree>
       <p:nvGrpSpPr>
@@ -7306,7 +7888,14 @@
         <p:cNvGrpSpPr/>
         <p:nvPr/>
       </p:nvGrpSpPr>
-      <p:grpSpPr/>
+      <p:grpSpPr>
+        <a:xfrm>
+          <a:off x="0" y="0"/>
+          <a:ext cx="0" cy="0"/>
+          <a:chOff x="0" y="0"/>
+          <a:chExt cx="0" cy="0"/>
+        </a:xfrm>
+      </p:grpSpPr>
       <p:sp>
         <p:nvSpPr>
           <p:cNvPr id="2" name="Rectangle 1"/>
@@ -7344,10 +7933,11 @@
           </a:fontRef>
         </p:style>
         <p:txBody>
-          <a:bodyPr rtlCol="0" anchor="ctr" wrap="square"/>
+          <a:bodyPr wrap="square" rtlCol="0" anchor="ctr"/>
           <a:lstStyle/>
           <a:p>
             <a:pPr algn="ctr"/>
+            <a:endParaRPr/>
           </a:p>
         </p:txBody>
       </p:sp>
@@ -7474,10 +8064,11 @@
           </a:fontRef>
         </p:style>
         <p:txBody>
-          <a:bodyPr rtlCol="0" anchor="ctr" wrap="square"/>
+          <a:bodyPr wrap="square" rtlCol="0" anchor="ctr"/>
           <a:lstStyle/>
           <a:p>
             <a:pPr algn="ctr"/>
+            <a:endParaRPr/>
           </a:p>
         </p:txBody>
       </p:sp>
@@ -7520,10 +8111,11 @@
           </a:fontRef>
         </p:style>
         <p:txBody>
-          <a:bodyPr rtlCol="0" anchor="ctr" wrap="square"/>
+          <a:bodyPr wrap="square" rtlCol="0" anchor="ctr"/>
           <a:lstStyle/>
           <a:p>
             <a:pPr algn="ctr"/>
+            <a:endParaRPr/>
           </a:p>
         </p:txBody>
       </p:sp>
@@ -7652,10 +8244,11 @@
           </a:fontRef>
         </p:style>
         <p:txBody>
-          <a:bodyPr rtlCol="0" anchor="ctr" wrap="square"/>
+          <a:bodyPr wrap="square" rtlCol="0" anchor="ctr"/>
           <a:lstStyle/>
           <a:p>
             <a:pPr algn="ctr"/>
+            <a:endParaRPr/>
           </a:p>
         </p:txBody>
       </p:sp>
@@ -7784,10 +8377,11 @@
           </a:fontRef>
         </p:style>
         <p:txBody>
-          <a:bodyPr rtlCol="0" anchor="ctr" wrap="square"/>
+          <a:bodyPr wrap="square" rtlCol="0" anchor="ctr"/>
           <a:lstStyle/>
           <a:p>
             <a:pPr algn="ctr"/>
+            <a:endParaRPr/>
           </a:p>
         </p:txBody>
       </p:sp>
@@ -7916,10 +8510,11 @@
           </a:fontRef>
         </p:style>
         <p:txBody>
-          <a:bodyPr rtlCol="0" anchor="ctr" wrap="square"/>
+          <a:bodyPr wrap="square" rtlCol="0" anchor="ctr"/>
           <a:lstStyle/>
           <a:p>
             <a:pPr algn="ctr"/>
+            <a:endParaRPr/>
           </a:p>
         </p:txBody>
       </p:sp>
@@ -8038,7 +8633,7 @@
 </file>
 
 <file path=ppt/slides/slide3.xml><?xml version="1.0" encoding="utf-8"?>
-<p:sld xmlns:a="http://schemas.openxmlformats.org/drawingml/2006/main" xmlns:p="http://schemas.openxmlformats.org/presentationml/2006/main" xmlns:r="http://schemas.openxmlformats.org/officeDocument/2006/relationships">
+<p:sld xmlns:a="http://schemas.openxmlformats.org/drawingml/2006/main" xmlns:r="http://schemas.openxmlformats.org/officeDocument/2006/relationships" xmlns:p="http://schemas.openxmlformats.org/presentationml/2006/main">
   <p:cSld>
     <p:spTree>
       <p:nvGrpSpPr>
@@ -8046,7 +8641,14 @@
         <p:cNvGrpSpPr/>
         <p:nvPr/>
       </p:nvGrpSpPr>
-      <p:grpSpPr/>
+      <p:grpSpPr>
+        <a:xfrm>
+          <a:off x="0" y="0"/>
+          <a:ext cx="0" cy="0"/>
+          <a:chOff x="0" y="0"/>
+          <a:chExt cx="0" cy="0"/>
+        </a:xfrm>
+      </p:grpSpPr>
       <p:sp>
         <p:nvSpPr>
           <p:cNvPr id="2" name="Rectangle 1"/>
@@ -8084,10 +8686,11 @@
           </a:fontRef>
         </p:style>
         <p:txBody>
-          <a:bodyPr rtlCol="0" anchor="ctr" wrap="square"/>
+          <a:bodyPr wrap="square" rtlCol="0" anchor="ctr"/>
           <a:lstStyle/>
           <a:p>
             <a:pPr algn="ctr"/>
+            <a:endParaRPr/>
           </a:p>
         </p:txBody>
       </p:sp>
@@ -8214,10 +8817,11 @@
           </a:fontRef>
         </p:style>
         <p:txBody>
-          <a:bodyPr rtlCol="0" anchor="ctr" wrap="square"/>
+          <a:bodyPr wrap="square" rtlCol="0" anchor="ctr"/>
           <a:lstStyle/>
           <a:p>
             <a:pPr algn="ctr"/>
+            <a:endParaRPr/>
           </a:p>
         </p:txBody>
       </p:sp>
@@ -8323,10 +8927,11 @@
           </a:fontRef>
         </p:style>
         <p:txBody>
-          <a:bodyPr rtlCol="0" anchor="ctr" wrap="square"/>
+          <a:bodyPr wrap="square" rtlCol="0" anchor="ctr"/>
           <a:lstStyle/>
           <a:p>
             <a:pPr algn="ctr"/>
+            <a:endParaRPr/>
           </a:p>
         </p:txBody>
       </p:sp>
@@ -8541,10 +9146,11 @@
           </a:fontRef>
         </p:style>
         <p:txBody>
-          <a:bodyPr rtlCol="0" anchor="ctr" wrap="square"/>
+          <a:bodyPr wrap="square" rtlCol="0" anchor="ctr"/>
           <a:lstStyle/>
           <a:p>
             <a:pPr algn="ctr"/>
+            <a:endParaRPr/>
           </a:p>
         </p:txBody>
       </p:sp>
@@ -8759,10 +9365,11 @@
           </a:fontRef>
         </p:style>
         <p:txBody>
-          <a:bodyPr rtlCol="0" anchor="ctr" wrap="square"/>
+          <a:bodyPr wrap="square" rtlCol="0" anchor="ctr"/>
           <a:lstStyle/>
           <a:p>
             <a:pPr algn="ctr"/>
+            <a:endParaRPr/>
           </a:p>
         </p:txBody>
       </p:sp>
@@ -8926,7 +9533,7 @@
               </a:spcAft>
             </a:pPr>
             <a:r>
-              <a:rPr sz="1400" b="0">
+              <a:rPr sz="1400" b="0" dirty="0" err="1">
                 <a:solidFill>
                   <a:srgbClr val="DDE2FF"/>
                 </a:solidFill>
@@ -8935,6 +9542,13 @@
               </a:rPr>
               <a:t>执行代码</a:t>
             </a:r>
+            <a:endParaRPr sz="1400" b="0" dirty="0">
+              <a:solidFill>
+                <a:srgbClr val="DDE2FF"/>
+              </a:solidFill>
+              <a:latin typeface="微软雅黑"/>
+              <a:ea typeface="微软雅黑"/>
+            </a:endParaRPr>
           </a:p>
         </p:txBody>
       </p:sp>
@@ -8977,10 +9591,11 @@
           </a:fontRef>
         </p:style>
         <p:txBody>
-          <a:bodyPr rtlCol="0" anchor="ctr" wrap="square"/>
+          <a:bodyPr wrap="square" rtlCol="0" anchor="ctr"/>
           <a:lstStyle/>
           <a:p>
             <a:pPr algn="ctr"/>
+            <a:endParaRPr/>
           </a:p>
         </p:txBody>
       </p:sp>
@@ -9208,7 +9823,7 @@
 </file>
 
 <file path=ppt/slides/slide4.xml><?xml version="1.0" encoding="utf-8"?>
-<p:sld xmlns:a="http://schemas.openxmlformats.org/drawingml/2006/main" xmlns:p="http://schemas.openxmlformats.org/presentationml/2006/main" xmlns:r="http://schemas.openxmlformats.org/officeDocument/2006/relationships">
+<p:sld xmlns:a="http://schemas.openxmlformats.org/drawingml/2006/main" xmlns:r="http://schemas.openxmlformats.org/officeDocument/2006/relationships" xmlns:p="http://schemas.openxmlformats.org/presentationml/2006/main">
   <p:cSld>
     <p:spTree>
       <p:nvGrpSpPr>
@@ -9216,7 +9831,14 @@
         <p:cNvGrpSpPr/>
         <p:nvPr/>
       </p:nvGrpSpPr>
-      <p:grpSpPr/>
+      <p:grpSpPr>
+        <a:xfrm>
+          <a:off x="0" y="0"/>
+          <a:ext cx="0" cy="0"/>
+          <a:chOff x="0" y="0"/>
+          <a:chExt cx="0" cy="0"/>
+        </a:xfrm>
+      </p:grpSpPr>
       <p:sp>
         <p:nvSpPr>
           <p:cNvPr id="2" name="Rectangle 1"/>
@@ -9254,10 +9876,11 @@
           </a:fontRef>
         </p:style>
         <p:txBody>
-          <a:bodyPr rtlCol="0" anchor="ctr" wrap="square"/>
+          <a:bodyPr wrap="square" rtlCol="0" anchor="ctr"/>
           <a:lstStyle/>
           <a:p>
             <a:pPr algn="ctr"/>
+            <a:endParaRPr/>
           </a:p>
         </p:txBody>
       </p:sp>
@@ -9384,10 +10007,11 @@
           </a:fontRef>
         </p:style>
         <p:txBody>
-          <a:bodyPr rtlCol="0" anchor="ctr" wrap="square"/>
+          <a:bodyPr wrap="square" rtlCol="0" anchor="ctr"/>
           <a:lstStyle/>
           <a:p>
             <a:pPr algn="ctr"/>
+            <a:endParaRPr/>
           </a:p>
         </p:txBody>
       </p:sp>
@@ -9410,14 +10034,32 @@
                 <a:tableStyleId>{5C22544A-7EE6-4342-B048-85BDC9FD1C3A}</a:tableStyleId>
               </a:tblPr>
               <a:tblGrid>
-                <a:gridCol w="2194560"/>
-                <a:gridCol w="5623560"/>
-                <a:gridCol w="3291840"/>
+                <a:gridCol w="2194560">
+                  <a:extLst>
+                    <a:ext uri="{9D8B030D-6E8A-4147-A177-3AD203B41FA5}">
+                      <a16:colId xmlns:a16="http://schemas.microsoft.com/office/drawing/2014/main" val="20000"/>
+                    </a:ext>
+                  </a:extLst>
+                </a:gridCol>
+                <a:gridCol w="5623560">
+                  <a:extLst>
+                    <a:ext uri="{9D8B030D-6E8A-4147-A177-3AD203B41FA5}">
+                      <a16:colId xmlns:a16="http://schemas.microsoft.com/office/drawing/2014/main" val="20001"/>
+                    </a:ext>
+                  </a:extLst>
+                </a:gridCol>
+                <a:gridCol w="3291840">
+                  <a:extLst>
+                    <a:ext uri="{9D8B030D-6E8A-4147-A177-3AD203B41FA5}">
+                      <a16:colId xmlns:a16="http://schemas.microsoft.com/office/drawing/2014/main" val="20002"/>
+                    </a:ext>
+                  </a:extLst>
+                </a:gridCol>
               </a:tblGrid>
               <a:tr h="716280">
                 <a:tc>
                   <a:txBody>
-                    <a:bodyPr wrap="square"/>
+                    <a:bodyPr/>
                     <a:lstStyle/>
                     <a:p>
                       <a:pPr algn="ctr"/>
@@ -9433,7 +10075,7 @@
                       </a:r>
                     </a:p>
                   </a:txBody>
-                  <a:tcPr marL="137160" marR="91440" marT="54864" marB="54864" anchor="ctr">
+                  <a:tcPr marL="137160" marT="54864" marB="54864" anchor="ctr">
                     <a:solidFill>
                       <a:srgbClr val="4F46E5"/>
                     </a:solidFill>
@@ -9441,12 +10083,12 @@
                 </a:tc>
                 <a:tc>
                   <a:txBody>
-                    <a:bodyPr wrap="square"/>
+                    <a:bodyPr/>
                     <a:lstStyle/>
                     <a:p>
                       <a:pPr algn="ctr"/>
                       <a:r>
-                        <a:rPr sz="1600" b="1">
+                        <a:rPr sz="1600" b="1" dirty="0" err="1">
                           <a:solidFill>
                             <a:srgbClr val="FFFFFF"/>
                           </a:solidFill>
@@ -9455,9 +10097,16 @@
                         </a:rPr>
                         <a:t>核心能力</a:t>
                       </a:r>
+                      <a:endParaRPr sz="1600" b="1" dirty="0">
+                        <a:solidFill>
+                          <a:srgbClr val="FFFFFF"/>
+                        </a:solidFill>
+                        <a:latin typeface="微软雅黑"/>
+                        <a:ea typeface="微软雅黑"/>
+                      </a:endParaRPr>
                     </a:p>
                   </a:txBody>
-                  <a:tcPr marL="137160" marR="91440" marT="54864" marB="54864" anchor="ctr">
+                  <a:tcPr marL="137160" marT="54864" marB="54864" anchor="ctr">
                     <a:solidFill>
                       <a:srgbClr val="4F46E5"/>
                     </a:solidFill>
@@ -9465,7 +10114,7 @@
                 </a:tc>
                 <a:tc>
                   <a:txBody>
-                    <a:bodyPr wrap="square"/>
+                    <a:bodyPr/>
                     <a:lstStyle/>
                     <a:p>
                       <a:pPr algn="ctr"/>
@@ -9481,17 +10130,22 @@
                       </a:r>
                     </a:p>
                   </a:txBody>
-                  <a:tcPr marL="137160" marR="91440" marT="54864" marB="54864" anchor="ctr">
+                  <a:tcPr marL="137160" marT="54864" marB="54864" anchor="ctr">
                     <a:solidFill>
                       <a:srgbClr val="4F46E5"/>
                     </a:solidFill>
                   </a:tcPr>
                 </a:tc>
+                <a:extLst>
+                  <a:ext uri="{0D108BD9-81ED-4DB2-BD59-A6C34878D82A}">
+                    <a16:rowId xmlns:a16="http://schemas.microsoft.com/office/drawing/2014/main" val="10000"/>
+                  </a:ext>
+                </a:extLst>
               </a:tr>
               <a:tr h="716280">
                 <a:tc>
                   <a:txBody>
-                    <a:bodyPr wrap="square"/>
+                    <a:bodyPr/>
                     <a:lstStyle/>
                     <a:p>
                       <a:pPr algn="l"/>
@@ -9507,7 +10161,7 @@
                       </a:r>
                     </a:p>
                   </a:txBody>
-                  <a:tcPr marL="137160" marR="91440" marT="54864" marB="54864" anchor="ctr">
+                  <a:tcPr marL="137160" marT="54864" marB="54864" anchor="ctr">
                     <a:solidFill>
                       <a:srgbClr val="F5F6FA"/>
                     </a:solidFill>
@@ -9515,7 +10169,7 @@
                 </a:tc>
                 <a:tc>
                   <a:txBody>
-                    <a:bodyPr wrap="square"/>
+                    <a:bodyPr/>
                     <a:lstStyle/>
                     <a:p>
                       <a:pPr algn="l"/>
@@ -9531,7 +10185,7 @@
                       </a:r>
                     </a:p>
                   </a:txBody>
-                  <a:tcPr marL="137160" marR="91440" marT="54864" marB="54864" anchor="ctr">
+                  <a:tcPr marL="137160" marT="54864" marB="54864" anchor="ctr">
                     <a:solidFill>
                       <a:srgbClr val="F5F6FA"/>
                     </a:solidFill>
@@ -9539,7 +10193,7 @@
                 </a:tc>
                 <a:tc>
                   <a:txBody>
-                    <a:bodyPr wrap="square"/>
+                    <a:bodyPr/>
                     <a:lstStyle/>
                     <a:p>
                       <a:pPr algn="l"/>
@@ -9555,17 +10209,22 @@
                       </a:r>
                     </a:p>
                   </a:txBody>
-                  <a:tcPr marL="137160" marR="91440" marT="54864" marB="54864" anchor="ctr">
+                  <a:tcPr marL="137160" marT="54864" marB="54864" anchor="ctr">
                     <a:solidFill>
                       <a:srgbClr val="F5F6FA"/>
                     </a:solidFill>
                   </a:tcPr>
                 </a:tc>
+                <a:extLst>
+                  <a:ext uri="{0D108BD9-81ED-4DB2-BD59-A6C34878D82A}">
+                    <a16:rowId xmlns:a16="http://schemas.microsoft.com/office/drawing/2014/main" val="10001"/>
+                  </a:ext>
+                </a:extLst>
               </a:tr>
               <a:tr h="716280">
                 <a:tc>
                   <a:txBody>
-                    <a:bodyPr wrap="square"/>
+                    <a:bodyPr/>
                     <a:lstStyle/>
                     <a:p>
                       <a:pPr algn="l"/>
@@ -9581,7 +10240,7 @@
                       </a:r>
                     </a:p>
                   </a:txBody>
-                  <a:tcPr marL="137160" marR="91440" marT="54864" marB="54864" anchor="ctr">
+                  <a:tcPr marL="137160" marT="54864" marB="54864" anchor="ctr">
                     <a:solidFill>
                       <a:srgbClr val="EEF2FF"/>
                     </a:solidFill>
@@ -9589,7 +10248,7 @@
                 </a:tc>
                 <a:tc>
                   <a:txBody>
-                    <a:bodyPr wrap="square"/>
+                    <a:bodyPr/>
                     <a:lstStyle/>
                     <a:p>
                       <a:pPr algn="l"/>
@@ -9605,7 +10264,7 @@
                       </a:r>
                     </a:p>
                   </a:txBody>
-                  <a:tcPr marL="137160" marR="91440" marT="54864" marB="54864" anchor="ctr">
+                  <a:tcPr marL="137160" marT="54864" marB="54864" anchor="ctr">
                     <a:solidFill>
                       <a:srgbClr val="EEF2FF"/>
                     </a:solidFill>
@@ -9613,7 +10272,7 @@
                 </a:tc>
                 <a:tc>
                   <a:txBody>
-                    <a:bodyPr wrap="square"/>
+                    <a:bodyPr/>
                     <a:lstStyle/>
                     <a:p>
                       <a:pPr algn="l"/>
@@ -9629,17 +10288,22 @@
                       </a:r>
                     </a:p>
                   </a:txBody>
-                  <a:tcPr marL="137160" marR="91440" marT="54864" marB="54864" anchor="ctr">
+                  <a:tcPr marL="137160" marT="54864" marB="54864" anchor="ctr">
                     <a:solidFill>
                       <a:srgbClr val="EEF2FF"/>
                     </a:solidFill>
                   </a:tcPr>
                 </a:tc>
+                <a:extLst>
+                  <a:ext uri="{0D108BD9-81ED-4DB2-BD59-A6C34878D82A}">
+                    <a16:rowId xmlns:a16="http://schemas.microsoft.com/office/drawing/2014/main" val="10002"/>
+                  </a:ext>
+                </a:extLst>
               </a:tr>
               <a:tr h="716280">
                 <a:tc>
                   <a:txBody>
-                    <a:bodyPr wrap="square"/>
+                    <a:bodyPr/>
                     <a:lstStyle/>
                     <a:p>
                       <a:pPr algn="l"/>
@@ -9655,7 +10319,7 @@
                       </a:r>
                     </a:p>
                   </a:txBody>
-                  <a:tcPr marL="137160" marR="91440" marT="54864" marB="54864" anchor="ctr">
+                  <a:tcPr marL="137160" marT="54864" marB="54864" anchor="ctr">
                     <a:solidFill>
                       <a:srgbClr val="F5F6FA"/>
                     </a:solidFill>
@@ -9663,7 +10327,7 @@
                 </a:tc>
                 <a:tc>
                   <a:txBody>
-                    <a:bodyPr wrap="square"/>
+                    <a:bodyPr/>
                     <a:lstStyle/>
                     <a:p>
                       <a:pPr algn="l"/>
@@ -9679,7 +10343,7 @@
                       </a:r>
                     </a:p>
                   </a:txBody>
-                  <a:tcPr marL="137160" marR="91440" marT="54864" marB="54864" anchor="ctr">
+                  <a:tcPr marL="137160" marT="54864" marB="54864" anchor="ctr">
                     <a:solidFill>
                       <a:srgbClr val="F5F6FA"/>
                     </a:solidFill>
@@ -9687,7 +10351,7 @@
                 </a:tc>
                 <a:tc>
                   <a:txBody>
-                    <a:bodyPr wrap="square"/>
+                    <a:bodyPr/>
                     <a:lstStyle/>
                     <a:p>
                       <a:pPr algn="l"/>
@@ -9703,17 +10367,22 @@
                       </a:r>
                     </a:p>
                   </a:txBody>
-                  <a:tcPr marL="137160" marR="91440" marT="54864" marB="54864" anchor="ctr">
+                  <a:tcPr marL="137160" marT="54864" marB="54864" anchor="ctr">
                     <a:solidFill>
                       <a:srgbClr val="F5F6FA"/>
                     </a:solidFill>
                   </a:tcPr>
                 </a:tc>
+                <a:extLst>
+                  <a:ext uri="{0D108BD9-81ED-4DB2-BD59-A6C34878D82A}">
+                    <a16:rowId xmlns:a16="http://schemas.microsoft.com/office/drawing/2014/main" val="10003"/>
+                  </a:ext>
+                </a:extLst>
               </a:tr>
               <a:tr h="716280">
                 <a:tc>
                   <a:txBody>
-                    <a:bodyPr wrap="square"/>
+                    <a:bodyPr/>
                     <a:lstStyle/>
                     <a:p>
                       <a:pPr algn="l"/>
@@ -9729,7 +10398,7 @@
                       </a:r>
                     </a:p>
                   </a:txBody>
-                  <a:tcPr marL="137160" marR="91440" marT="54864" marB="54864" anchor="ctr">
+                  <a:tcPr marL="137160" marT="54864" marB="54864" anchor="ctr">
                     <a:solidFill>
                       <a:srgbClr val="EEF2FF"/>
                     </a:solidFill>
@@ -9737,7 +10406,7 @@
                 </a:tc>
                 <a:tc>
                   <a:txBody>
-                    <a:bodyPr wrap="square"/>
+                    <a:bodyPr/>
                     <a:lstStyle/>
                     <a:p>
                       <a:pPr algn="l"/>
@@ -9753,7 +10422,7 @@
                       </a:r>
                     </a:p>
                   </a:txBody>
-                  <a:tcPr marL="137160" marR="91440" marT="54864" marB="54864" anchor="ctr">
+                  <a:tcPr marL="137160" marT="54864" marB="54864" anchor="ctr">
                     <a:solidFill>
                       <a:srgbClr val="EEF2FF"/>
                     </a:solidFill>
@@ -9761,7 +10430,7 @@
                 </a:tc>
                 <a:tc>
                   <a:txBody>
-                    <a:bodyPr wrap="square"/>
+                    <a:bodyPr/>
                     <a:lstStyle/>
                     <a:p>
                       <a:pPr algn="l"/>
@@ -9777,17 +10446,22 @@
                       </a:r>
                     </a:p>
                   </a:txBody>
-                  <a:tcPr marL="137160" marR="91440" marT="54864" marB="54864" anchor="ctr">
+                  <a:tcPr marL="137160" marT="54864" marB="54864" anchor="ctr">
                     <a:solidFill>
                       <a:srgbClr val="EEF2FF"/>
                     </a:solidFill>
                   </a:tcPr>
                 </a:tc>
+                <a:extLst>
+                  <a:ext uri="{0D108BD9-81ED-4DB2-BD59-A6C34878D82A}">
+                    <a16:rowId xmlns:a16="http://schemas.microsoft.com/office/drawing/2014/main" val="10004"/>
+                  </a:ext>
+                </a:extLst>
               </a:tr>
               <a:tr h="716280">
                 <a:tc>
                   <a:txBody>
-                    <a:bodyPr wrap="square"/>
+                    <a:bodyPr/>
                     <a:lstStyle/>
                     <a:p>
                       <a:pPr algn="l"/>
@@ -9803,7 +10477,7 @@
                       </a:r>
                     </a:p>
                   </a:txBody>
-                  <a:tcPr marL="137160" marR="91440" marT="54864" marB="54864" anchor="ctr">
+                  <a:tcPr marL="137160" marT="54864" marB="54864" anchor="ctr">
                     <a:solidFill>
                       <a:srgbClr val="F5F6FA"/>
                     </a:solidFill>
@@ -9811,7 +10485,7 @@
                 </a:tc>
                 <a:tc>
                   <a:txBody>
-                    <a:bodyPr wrap="square"/>
+                    <a:bodyPr/>
                     <a:lstStyle/>
                     <a:p>
                       <a:pPr algn="l"/>
@@ -9827,7 +10501,7 @@
                       </a:r>
                     </a:p>
                   </a:txBody>
-                  <a:tcPr marL="137160" marR="91440" marT="54864" marB="54864" anchor="ctr">
+                  <a:tcPr marL="137160" marT="54864" marB="54864" anchor="ctr">
                     <a:solidFill>
                       <a:srgbClr val="F5F6FA"/>
                     </a:solidFill>
@@ -9835,12 +10509,12 @@
                 </a:tc>
                 <a:tc>
                   <a:txBody>
-                    <a:bodyPr wrap="square"/>
+                    <a:bodyPr/>
                     <a:lstStyle/>
                     <a:p>
                       <a:pPr algn="l"/>
                       <a:r>
-                        <a:rPr sz="1500" b="0">
+                        <a:rPr sz="1500" b="0" dirty="0" err="1">
                           <a:solidFill>
                             <a:srgbClr val="6B7280"/>
                           </a:solidFill>
@@ -9849,14 +10523,26 @@
                         </a:rPr>
                         <a:t>移动端适配，一键脚本部署</a:t>
                       </a:r>
+                      <a:endParaRPr sz="1500" b="0" dirty="0">
+                        <a:solidFill>
+                          <a:srgbClr val="6B7280"/>
+                        </a:solidFill>
+                        <a:latin typeface="微软雅黑"/>
+                        <a:ea typeface="微软雅黑"/>
+                      </a:endParaRPr>
                     </a:p>
                   </a:txBody>
-                  <a:tcPr marL="137160" marR="91440" marT="54864" marB="54864" anchor="ctr">
+                  <a:tcPr marL="137160" marT="54864" marB="54864" anchor="ctr">
                     <a:solidFill>
                       <a:srgbClr val="F5F6FA"/>
                     </a:solidFill>
                   </a:tcPr>
                 </a:tc>
+                <a:extLst>
+                  <a:ext uri="{0D108BD9-81ED-4DB2-BD59-A6C34878D82A}">
+                    <a16:rowId xmlns:a16="http://schemas.microsoft.com/office/drawing/2014/main" val="10005"/>
+                  </a:ext>
+                </a:extLst>
               </a:tr>
             </a:tbl>
           </a:graphicData>
@@ -9914,7 +10600,7 @@
 </file>
 
 <file path=ppt/slides/slide5.xml><?xml version="1.0" encoding="utf-8"?>
-<p:sld xmlns:a="http://schemas.openxmlformats.org/drawingml/2006/main" xmlns:p="http://schemas.openxmlformats.org/presentationml/2006/main" xmlns:r="http://schemas.openxmlformats.org/officeDocument/2006/relationships">
+<p:sld xmlns:a="http://schemas.openxmlformats.org/drawingml/2006/main" xmlns:r="http://schemas.openxmlformats.org/officeDocument/2006/relationships" xmlns:p="http://schemas.openxmlformats.org/presentationml/2006/main">
   <p:cSld>
     <p:spTree>
       <p:nvGrpSpPr>
@@ -9922,7 +10608,14 @@
         <p:cNvGrpSpPr/>
         <p:nvPr/>
       </p:nvGrpSpPr>
-      <p:grpSpPr/>
+      <p:grpSpPr>
+        <a:xfrm>
+          <a:off x="0" y="0"/>
+          <a:ext cx="0" cy="0"/>
+          <a:chOff x="0" y="0"/>
+          <a:chExt cx="0" cy="0"/>
+        </a:xfrm>
+      </p:grpSpPr>
       <p:sp>
         <p:nvSpPr>
           <p:cNvPr id="2" name="Rectangle 1"/>
@@ -9960,10 +10653,11 @@
           </a:fontRef>
         </p:style>
         <p:txBody>
-          <a:bodyPr rtlCol="0" anchor="ctr" wrap="square"/>
+          <a:bodyPr wrap="square" rtlCol="0" anchor="ctr"/>
           <a:lstStyle/>
           <a:p>
             <a:pPr algn="ctr"/>
+            <a:endParaRPr/>
           </a:p>
         </p:txBody>
       </p:sp>
@@ -10090,10 +10784,11 @@
           </a:fontRef>
         </p:style>
         <p:txBody>
-          <a:bodyPr rtlCol="0" anchor="ctr" wrap="square"/>
+          <a:bodyPr wrap="square" rtlCol="0" anchor="ctr"/>
           <a:lstStyle/>
           <a:p>
             <a:pPr algn="ctr"/>
+            <a:endParaRPr/>
           </a:p>
         </p:txBody>
       </p:sp>
@@ -10136,10 +10831,11 @@
           </a:fontRef>
         </p:style>
         <p:txBody>
-          <a:bodyPr rtlCol="0" anchor="ctr" wrap="square"/>
+          <a:bodyPr wrap="square" rtlCol="0" anchor="ctr"/>
           <a:lstStyle/>
           <a:p>
             <a:pPr algn="ctr"/>
+            <a:endParaRPr/>
           </a:p>
         </p:txBody>
       </p:sp>
@@ -10348,10 +11044,11 @@
           </a:fontRef>
         </p:style>
         <p:txBody>
-          <a:bodyPr rtlCol="0" anchor="ctr" wrap="square"/>
+          <a:bodyPr wrap="square" rtlCol="0" anchor="ctr"/>
           <a:lstStyle/>
           <a:p>
             <a:pPr algn="ctr"/>
+            <a:endParaRPr/>
           </a:p>
         </p:txBody>
       </p:sp>
@@ -10593,7 +11290,7 @@
 </file>
 
 <file path=ppt/slides/slide6.xml><?xml version="1.0" encoding="utf-8"?>
-<p:sld xmlns:a="http://schemas.openxmlformats.org/drawingml/2006/main" xmlns:p="http://schemas.openxmlformats.org/presentationml/2006/main" xmlns:r="http://schemas.openxmlformats.org/officeDocument/2006/relationships">
+<p:sld xmlns:a="http://schemas.openxmlformats.org/drawingml/2006/main" xmlns:r="http://schemas.openxmlformats.org/officeDocument/2006/relationships" xmlns:p="http://schemas.openxmlformats.org/presentationml/2006/main">
   <p:cSld>
     <p:spTree>
       <p:nvGrpSpPr>
@@ -10601,7 +11298,14 @@
         <p:cNvGrpSpPr/>
         <p:nvPr/>
       </p:nvGrpSpPr>
-      <p:grpSpPr/>
+      <p:grpSpPr>
+        <a:xfrm>
+          <a:off x="0" y="0"/>
+          <a:ext cx="0" cy="0"/>
+          <a:chOff x="0" y="0"/>
+          <a:chExt cx="0" cy="0"/>
+        </a:xfrm>
+      </p:grpSpPr>
       <p:sp>
         <p:nvSpPr>
           <p:cNvPr id="2" name="Rectangle 1"/>
@@ -10639,10 +11343,11 @@
           </a:fontRef>
         </p:style>
         <p:txBody>
-          <a:bodyPr rtlCol="0" anchor="ctr" wrap="square"/>
+          <a:bodyPr wrap="square" rtlCol="0" anchor="ctr"/>
           <a:lstStyle/>
           <a:p>
             <a:pPr algn="ctr"/>
+            <a:endParaRPr/>
           </a:p>
         </p:txBody>
       </p:sp>
@@ -10769,10 +11474,11 @@
           </a:fontRef>
         </p:style>
         <p:txBody>
-          <a:bodyPr rtlCol="0" anchor="ctr" wrap="square"/>
+          <a:bodyPr wrap="square" rtlCol="0" anchor="ctr"/>
           <a:lstStyle/>
           <a:p>
             <a:pPr algn="ctr"/>
+            <a:endParaRPr/>
           </a:p>
         </p:txBody>
       </p:sp>
@@ -10858,10 +11564,11 @@
           </a:fontRef>
         </p:style>
         <p:txBody>
-          <a:bodyPr rtlCol="0" anchor="ctr" wrap="square"/>
+          <a:bodyPr wrap="square" rtlCol="0" anchor="ctr"/>
           <a:lstStyle/>
           <a:p>
             <a:pPr algn="ctr"/>
+            <a:endParaRPr/>
           </a:p>
         </p:txBody>
       </p:sp>
@@ -10990,10 +11697,11 @@
           </a:fontRef>
         </p:style>
         <p:txBody>
-          <a:bodyPr rtlCol="0" anchor="ctr" wrap="square"/>
+          <a:bodyPr wrap="square" rtlCol="0" anchor="ctr"/>
           <a:lstStyle/>
           <a:p>
             <a:pPr algn="ctr"/>
+            <a:endParaRPr/>
           </a:p>
         </p:txBody>
       </p:sp>
@@ -11122,10 +11830,11 @@
           </a:fontRef>
         </p:style>
         <p:txBody>
-          <a:bodyPr rtlCol="0" anchor="ctr" wrap="square"/>
+          <a:bodyPr wrap="square" rtlCol="0" anchor="ctr"/>
           <a:lstStyle/>
           <a:p>
             <a:pPr algn="ctr"/>
+            <a:endParaRPr/>
           </a:p>
         </p:txBody>
       </p:sp>
@@ -11254,10 +11963,11 @@
           </a:fontRef>
         </p:style>
         <p:txBody>
-          <a:bodyPr rtlCol="0" anchor="ctr" wrap="square"/>
+          <a:bodyPr wrap="square" rtlCol="0" anchor="ctr"/>
           <a:lstStyle/>
           <a:p>
             <a:pPr algn="ctr"/>
+            <a:endParaRPr/>
           </a:p>
         </p:txBody>
       </p:sp>
@@ -11386,10 +12096,11 @@
           </a:fontRef>
         </p:style>
         <p:txBody>
-          <a:bodyPr rtlCol="0" anchor="ctr" wrap="square"/>
+          <a:bodyPr wrap="square" rtlCol="0" anchor="ctr"/>
           <a:lstStyle/>
           <a:p>
             <a:pPr algn="ctr"/>
+            <a:endParaRPr/>
           </a:p>
         </p:txBody>
       </p:sp>
@@ -11518,10 +12229,11 @@
           </a:fontRef>
         </p:style>
         <p:txBody>
-          <a:bodyPr rtlCol="0" anchor="ctr" wrap="square"/>
+          <a:bodyPr wrap="square" rtlCol="0" anchor="ctr"/>
           <a:lstStyle/>
           <a:p>
             <a:pPr algn="ctr"/>
+            <a:endParaRPr/>
           </a:p>
         </p:txBody>
       </p:sp>
@@ -11650,10 +12362,11 @@
           </a:fontRef>
         </p:style>
         <p:txBody>
-          <a:bodyPr rtlCol="0" anchor="ctr" wrap="square"/>
+          <a:bodyPr wrap="square" rtlCol="0" anchor="ctr"/>
           <a:lstStyle/>
           <a:p>
             <a:pPr algn="ctr"/>
+            <a:endParaRPr/>
           </a:p>
         </p:txBody>
       </p:sp>
@@ -11694,10 +12407,11 @@
           </a:fontRef>
         </p:style>
         <p:txBody>
-          <a:bodyPr rtlCol="0" anchor="ctr" wrap="square"/>
+          <a:bodyPr wrap="square" rtlCol="0" anchor="ctr"/>
           <a:lstStyle/>
           <a:p>
             <a:pPr algn="ctr"/>
+            <a:endParaRPr/>
           </a:p>
         </p:txBody>
       </p:sp>
@@ -11869,10 +12583,11 @@
           </a:fontRef>
         </p:style>
         <p:txBody>
-          <a:bodyPr rtlCol="0" anchor="ctr" wrap="square"/>
+          <a:bodyPr wrap="square" rtlCol="0" anchor="ctr"/>
           <a:lstStyle/>
           <a:p>
             <a:pPr algn="ctr"/>
+            <a:endParaRPr/>
           </a:p>
         </p:txBody>
       </p:sp>
@@ -11913,10 +12628,11 @@
           </a:fontRef>
         </p:style>
         <p:txBody>
-          <a:bodyPr rtlCol="0" anchor="ctr" wrap="square"/>
+          <a:bodyPr wrap="square" rtlCol="0" anchor="ctr"/>
           <a:lstStyle/>
           <a:p>
             <a:pPr algn="ctr"/>
+            <a:endParaRPr/>
           </a:p>
         </p:txBody>
       </p:sp>
@@ -12088,10 +12804,11 @@
           </a:fontRef>
         </p:style>
         <p:txBody>
-          <a:bodyPr rtlCol="0" anchor="ctr" wrap="square"/>
+          <a:bodyPr wrap="square" rtlCol="0" anchor="ctr"/>
           <a:lstStyle/>
           <a:p>
             <a:pPr algn="ctr"/>
+            <a:endParaRPr/>
           </a:p>
         </p:txBody>
       </p:sp>
@@ -12132,10 +12849,11 @@
           </a:fontRef>
         </p:style>
         <p:txBody>
-          <a:bodyPr rtlCol="0" anchor="ctr" wrap="square"/>
+          <a:bodyPr wrap="square" rtlCol="0" anchor="ctr"/>
           <a:lstStyle/>
           <a:p>
             <a:pPr algn="ctr"/>
+            <a:endParaRPr/>
           </a:p>
         </p:txBody>
       </p:sp>
@@ -12383,7 +13101,7 @@
 </file>
 
 <file path=ppt/slides/slide7.xml><?xml version="1.0" encoding="utf-8"?>
-<p:sld xmlns:a="http://schemas.openxmlformats.org/drawingml/2006/main" xmlns:p="http://schemas.openxmlformats.org/presentationml/2006/main" xmlns:r="http://schemas.openxmlformats.org/officeDocument/2006/relationships">
+<p:sld xmlns:a="http://schemas.openxmlformats.org/drawingml/2006/main" xmlns:r="http://schemas.openxmlformats.org/officeDocument/2006/relationships" xmlns:p="http://schemas.openxmlformats.org/presentationml/2006/main">
   <p:cSld>
     <p:spTree>
       <p:nvGrpSpPr>
@@ -12391,7 +13109,14 @@
         <p:cNvGrpSpPr/>
         <p:nvPr/>
       </p:nvGrpSpPr>
-      <p:grpSpPr/>
+      <p:grpSpPr>
+        <a:xfrm>
+          <a:off x="0" y="0"/>
+          <a:ext cx="0" cy="0"/>
+          <a:chOff x="0" y="0"/>
+          <a:chExt cx="0" cy="0"/>
+        </a:xfrm>
+      </p:grpSpPr>
       <p:sp>
         <p:nvSpPr>
           <p:cNvPr id="2" name="Rectangle 1"/>
@@ -12429,10 +13154,11 @@
           </a:fontRef>
         </p:style>
         <p:txBody>
-          <a:bodyPr rtlCol="0" anchor="ctr" wrap="square"/>
+          <a:bodyPr wrap="square" rtlCol="0" anchor="ctr"/>
           <a:lstStyle/>
           <a:p>
             <a:pPr algn="ctr"/>
+            <a:endParaRPr/>
           </a:p>
         </p:txBody>
       </p:sp>
@@ -12559,10 +13285,11 @@
           </a:fontRef>
         </p:style>
         <p:txBody>
-          <a:bodyPr rtlCol="0" anchor="ctr" wrap="square"/>
+          <a:bodyPr wrap="square" rtlCol="0" anchor="ctr"/>
           <a:lstStyle/>
           <a:p>
             <a:pPr algn="ctr"/>
+            <a:endParaRPr/>
           </a:p>
         </p:txBody>
       </p:sp>
@@ -12648,10 +13375,11 @@
           </a:fontRef>
         </p:style>
         <p:txBody>
-          <a:bodyPr rtlCol="0" anchor="ctr" wrap="square"/>
+          <a:bodyPr wrap="square" rtlCol="0" anchor="ctr"/>
           <a:lstStyle/>
           <a:p>
             <a:pPr algn="ctr"/>
+            <a:endParaRPr/>
           </a:p>
         </p:txBody>
       </p:sp>
@@ -12860,10 +13588,11 @@
           </a:fontRef>
         </p:style>
         <p:txBody>
-          <a:bodyPr rtlCol="0" anchor="ctr" wrap="square"/>
+          <a:bodyPr wrap="square" rtlCol="0" anchor="ctr"/>
           <a:lstStyle/>
           <a:p>
             <a:pPr algn="ctr"/>
+            <a:endParaRPr/>
           </a:p>
         </p:txBody>
       </p:sp>
@@ -13128,7 +13857,7 @@
 </file>
 
 <file path=ppt/slides/slide8.xml><?xml version="1.0" encoding="utf-8"?>
-<p:sld xmlns:a="http://schemas.openxmlformats.org/drawingml/2006/main" xmlns:p="http://schemas.openxmlformats.org/presentationml/2006/main" xmlns:r="http://schemas.openxmlformats.org/officeDocument/2006/relationships">
+<p:sld xmlns:a="http://schemas.openxmlformats.org/drawingml/2006/main" xmlns:r="http://schemas.openxmlformats.org/officeDocument/2006/relationships" xmlns:p="http://schemas.openxmlformats.org/presentationml/2006/main">
   <p:cSld>
     <p:spTree>
       <p:nvGrpSpPr>
@@ -13136,7 +13865,14 @@
         <p:cNvGrpSpPr/>
         <p:nvPr/>
       </p:nvGrpSpPr>
-      <p:grpSpPr/>
+      <p:grpSpPr>
+        <a:xfrm>
+          <a:off x="0" y="0"/>
+          <a:ext cx="0" cy="0"/>
+          <a:chOff x="0" y="0"/>
+          <a:chExt cx="0" cy="0"/>
+        </a:xfrm>
+      </p:grpSpPr>
       <p:sp>
         <p:nvSpPr>
           <p:cNvPr id="2" name="Rectangle 1"/>
@@ -13174,10 +13910,11 @@
           </a:fontRef>
         </p:style>
         <p:txBody>
-          <a:bodyPr rtlCol="0" anchor="ctr" wrap="square"/>
+          <a:bodyPr wrap="square" rtlCol="0" anchor="ctr"/>
           <a:lstStyle/>
           <a:p>
             <a:pPr algn="ctr"/>
+            <a:endParaRPr/>
           </a:p>
         </p:txBody>
       </p:sp>
@@ -13304,10 +14041,11 @@
           </a:fontRef>
         </p:style>
         <p:txBody>
-          <a:bodyPr rtlCol="0" anchor="ctr" wrap="square"/>
+          <a:bodyPr wrap="square" rtlCol="0" anchor="ctr"/>
           <a:lstStyle/>
           <a:p>
             <a:pPr algn="ctr"/>
+            <a:endParaRPr/>
           </a:p>
         </p:txBody>
       </p:sp>
@@ -13350,10 +14088,11 @@
           </a:fontRef>
         </p:style>
         <p:txBody>
-          <a:bodyPr rtlCol="0" anchor="ctr" wrap="square"/>
+          <a:bodyPr wrap="square" rtlCol="0" anchor="ctr"/>
           <a:lstStyle/>
           <a:p>
             <a:pPr algn="ctr"/>
+            <a:endParaRPr/>
           </a:p>
         </p:txBody>
       </p:sp>
@@ -13482,10 +14221,11 @@
           </a:fontRef>
         </p:style>
         <p:txBody>
-          <a:bodyPr rtlCol="0" anchor="ctr" wrap="square"/>
+          <a:bodyPr wrap="square" rtlCol="0" anchor="ctr"/>
           <a:lstStyle/>
           <a:p>
             <a:pPr algn="ctr"/>
+            <a:endParaRPr/>
           </a:p>
         </p:txBody>
       </p:sp>
@@ -13614,10 +14354,11 @@
           </a:fontRef>
         </p:style>
         <p:txBody>
-          <a:bodyPr rtlCol="0" anchor="ctr" wrap="square"/>
+          <a:bodyPr wrap="square" rtlCol="0" anchor="ctr"/>
           <a:lstStyle/>
           <a:p>
             <a:pPr algn="ctr"/>
+            <a:endParaRPr/>
           </a:p>
         </p:txBody>
       </p:sp>
@@ -13703,138 +14444,6 @@
                 <a:ea typeface="微软雅黑"/>
               </a:rPr>
               <a:t>窄屏自动切换抽屉式会话列表，触控友好</a:t>
-            </a:r>
-          </a:p>
-        </p:txBody>
-      </p:sp>
-      <p:sp>
-        <p:nvSpPr>
-          <p:cNvPr id="15" name="Rounded Rectangle 14"/>
-          <p:cNvSpPr/>
-          <p:nvPr/>
-        </p:nvSpPr>
-        <p:spPr>
-          <a:xfrm>
-            <a:off x="6172200" y="4206240"/>
-            <a:ext cx="5440680" cy="2011680"/>
-          </a:xfrm>
-          <a:prstGeom prst="roundRect">
-            <a:avLst>
-              <a:gd name="adj" fmla="val 6000"/>
-            </a:avLst>
-          </a:prstGeom>
-          <a:solidFill>
-            <a:srgbClr val="FFF6E9"/>
-          </a:solidFill>
-          <a:ln>
-            <a:noFill/>
-          </a:ln>
-          <a:effectLst/>
-        </p:spPr>
-        <p:style>
-          <a:lnRef idx="1">
-            <a:schemeClr val="accent1"/>
-          </a:lnRef>
-          <a:fillRef idx="3">
-            <a:schemeClr val="accent1"/>
-          </a:fillRef>
-          <a:effectRef idx="2">
-            <a:schemeClr val="accent1"/>
-          </a:effectRef>
-          <a:fontRef idx="minor">
-            <a:schemeClr val="lt1"/>
-          </a:fontRef>
-        </p:style>
-        <p:txBody>
-          <a:bodyPr rtlCol="0" anchor="ctr" wrap="square"/>
-          <a:lstStyle/>
-          <a:p>
-            <a:pPr algn="ctr"/>
-          </a:p>
-        </p:txBody>
-      </p:sp>
-      <p:sp>
-        <p:nvSpPr>
-          <p:cNvPr id="16" name="TextBox 15"/>
-          <p:cNvSpPr txBox="1"/>
-          <p:nvPr/>
-        </p:nvSpPr>
-        <p:spPr>
-          <a:xfrm>
-            <a:off x="6400800" y="4370831"/>
-            <a:ext cx="4983480" cy="457200"/>
-          </a:xfrm>
-          <a:prstGeom prst="rect">
-            <a:avLst/>
-          </a:prstGeom>
-          <a:noFill/>
-        </p:spPr>
-        <p:txBody>
-          <a:bodyPr wrap="square" anchor="t">
-            <a:spAutoFit/>
-          </a:bodyPr>
-          <a:lstStyle/>
-          <a:p>
-            <a:pPr algn="l">
-              <a:lnSpc>
-                <a:spcPct val="112000"/>
-              </a:lnSpc>
-              <a:spcAft>
-                <a:spcPts val="500"/>
-              </a:spcAft>
-            </a:pPr>
-            <a:r>
-              <a:rPr sz="1800" b="1">
-                <a:solidFill>
-                  <a:srgbClr val="F59E0B"/>
-                </a:solidFill>
-                <a:latin typeface="微软雅黑"/>
-                <a:ea typeface="微软雅黑"/>
-              </a:rPr>
-              <a:t>⚡  PWA 应用</a:t>
-            </a:r>
-          </a:p>
-        </p:txBody>
-      </p:sp>
-      <p:sp>
-        <p:nvSpPr>
-          <p:cNvPr id="17" name="TextBox 16"/>
-          <p:cNvSpPr txBox="1"/>
-          <p:nvPr/>
-        </p:nvSpPr>
-        <p:spPr>
-          <a:xfrm>
-            <a:off x="6400800" y="4864607"/>
-            <a:ext cx="4983480" cy="1188720"/>
-          </a:xfrm>
-          <a:prstGeom prst="rect">
-            <a:avLst/>
-          </a:prstGeom>
-          <a:noFill/>
-        </p:spPr>
-        <p:txBody>
-          <a:bodyPr wrap="square" anchor="t">
-            <a:spAutoFit/>
-          </a:bodyPr>
-          <a:lstStyle/>
-          <a:p>
-            <a:pPr algn="l">
-              <a:lnSpc>
-                <a:spcPct val="112000"/>
-              </a:lnSpc>
-              <a:spcAft>
-                <a:spcPts val="500"/>
-              </a:spcAft>
-            </a:pPr>
-            <a:r>
-              <a:rPr sz="1400" b="0">
-                <a:solidFill>
-                  <a:srgbClr val="6B7280"/>
-                </a:solidFill>
-                <a:latin typeface="微软雅黑"/>
-                <a:ea typeface="微软雅黑"/>
-              </a:rPr>
-              <a:t>可安装到桌面、独立窗口运行、离线可用</a:t>
             </a:r>
           </a:p>
         </p:txBody>
@@ -13891,7 +14500,7 @@
 </file>
 
 <file path=ppt/slides/slide9.xml><?xml version="1.0" encoding="utf-8"?>
-<p:sld xmlns:a="http://schemas.openxmlformats.org/drawingml/2006/main" xmlns:p="http://schemas.openxmlformats.org/presentationml/2006/main" xmlns:r="http://schemas.openxmlformats.org/officeDocument/2006/relationships">
+<p:sld xmlns:a="http://schemas.openxmlformats.org/drawingml/2006/main" xmlns:r="http://schemas.openxmlformats.org/officeDocument/2006/relationships" xmlns:p="http://schemas.openxmlformats.org/presentationml/2006/main">
   <p:cSld>
     <p:spTree>
       <p:nvGrpSpPr>
@@ -13899,7 +14508,14 @@
         <p:cNvGrpSpPr/>
         <p:nvPr/>
       </p:nvGrpSpPr>
-      <p:grpSpPr/>
+      <p:grpSpPr>
+        <a:xfrm>
+          <a:off x="0" y="0"/>
+          <a:ext cx="0" cy="0"/>
+          <a:chOff x="0" y="0"/>
+          <a:chExt cx="0" cy="0"/>
+        </a:xfrm>
+      </p:grpSpPr>
       <p:sp>
         <p:nvSpPr>
           <p:cNvPr id="2" name="Rectangle 1"/>
@@ -13937,10 +14553,11 @@
           </a:fontRef>
         </p:style>
         <p:txBody>
-          <a:bodyPr rtlCol="0" anchor="ctr" wrap="square"/>
+          <a:bodyPr wrap="square" rtlCol="0" anchor="ctr"/>
           <a:lstStyle/>
           <a:p>
             <a:pPr algn="ctr"/>
+            <a:endParaRPr/>
           </a:p>
         </p:txBody>
       </p:sp>
@@ -14067,10 +14684,11 @@
           </a:fontRef>
         </p:style>
         <p:txBody>
-          <a:bodyPr rtlCol="0" anchor="ctr" wrap="square"/>
+          <a:bodyPr wrap="square" rtlCol="0" anchor="ctr"/>
           <a:lstStyle/>
           <a:p>
             <a:pPr algn="ctr"/>
+            <a:endParaRPr/>
           </a:p>
         </p:txBody>
       </p:sp>
@@ -14113,10 +14731,11 @@
           </a:fontRef>
         </p:style>
         <p:txBody>
-          <a:bodyPr rtlCol="0" anchor="ctr" wrap="square"/>
+          <a:bodyPr wrap="square" rtlCol="0" anchor="ctr"/>
           <a:lstStyle/>
           <a:p>
             <a:pPr algn="ctr"/>
+            <a:endParaRPr/>
           </a:p>
         </p:txBody>
       </p:sp>
@@ -14200,10 +14819,11 @@
           </a:fontRef>
         </p:style>
         <p:txBody>
-          <a:bodyPr rtlCol="0" anchor="ctr" wrap="square"/>
+          <a:bodyPr wrap="square" rtlCol="0" anchor="ctr"/>
           <a:lstStyle/>
           <a:p>
             <a:pPr algn="ctr"/>
+            <a:endParaRPr/>
           </a:p>
         </p:txBody>
       </p:sp>
@@ -14246,10 +14866,11 @@
           </a:fontRef>
         </p:style>
         <p:txBody>
-          <a:bodyPr rtlCol="0" anchor="ctr" wrap="square"/>
+          <a:bodyPr wrap="square" rtlCol="0" anchor="ctr"/>
           <a:lstStyle/>
           <a:p>
             <a:pPr algn="ctr"/>
+            <a:endParaRPr/>
           </a:p>
         </p:txBody>
       </p:sp>
@@ -14333,10 +14954,11 @@
           </a:fontRef>
         </p:style>
         <p:txBody>
-          <a:bodyPr rtlCol="0" anchor="ctr" wrap="square"/>
+          <a:bodyPr wrap="square" rtlCol="0" anchor="ctr"/>
           <a:lstStyle/>
           <a:p>
             <a:pPr algn="ctr"/>
+            <a:endParaRPr/>
           </a:p>
         </p:txBody>
       </p:sp>
@@ -14379,10 +15001,11 @@
           </a:fontRef>
         </p:style>
         <p:txBody>
-          <a:bodyPr rtlCol="0" anchor="ctr" wrap="square"/>
+          <a:bodyPr wrap="square" rtlCol="0" anchor="ctr"/>
           <a:lstStyle/>
           <a:p>
             <a:pPr algn="ctr"/>
+            <a:endParaRPr/>
           </a:p>
         </p:txBody>
       </p:sp>
@@ -14469,10 +15092,11 @@
           </a:fontRef>
         </p:style>
         <p:txBody>
-          <a:bodyPr rtlCol="0" anchor="ctr" wrap="square"/>
+          <a:bodyPr wrap="square" rtlCol="0" anchor="ctr"/>
           <a:lstStyle/>
           <a:p>
             <a:pPr algn="ctr"/>
+            <a:endParaRPr/>
           </a:p>
         </p:txBody>
       </p:sp>
@@ -14559,10 +15183,11 @@
           </a:fontRef>
         </p:style>
         <p:txBody>
-          <a:bodyPr rtlCol="0" anchor="ctr" wrap="square"/>
+          <a:bodyPr wrap="square" rtlCol="0" anchor="ctr"/>
           <a:lstStyle/>
           <a:p>
             <a:pPr algn="ctr"/>
+            <a:endParaRPr/>
           </a:p>
         </p:txBody>
       </p:sp>
@@ -14647,10 +15272,11 @@
           </a:fontRef>
         </p:style>
         <p:txBody>
-          <a:bodyPr rtlCol="0" anchor="ctr" wrap="square"/>
+          <a:bodyPr wrap="square" rtlCol="0" anchor="ctr"/>
           <a:lstStyle/>
           <a:p>
             <a:pPr algn="ctr"/>
+            <a:endParaRPr/>
           </a:p>
         </p:txBody>
       </p:sp>
@@ -14693,10 +15319,11 @@
           </a:fontRef>
         </p:style>
         <p:txBody>
-          <a:bodyPr rtlCol="0" anchor="ctr" wrap="square"/>
+          <a:bodyPr wrap="square" rtlCol="0" anchor="ctr"/>
           <a:lstStyle/>
           <a:p>
             <a:pPr algn="ctr"/>
+            <a:endParaRPr/>
           </a:p>
         </p:txBody>
       </p:sp>
@@ -15155,4 +15782,299 @@
   </a:objectDefaults>
   <a:extraClrSchemeLst/>
 </a:theme>
+</file>
+
+<file path=ppt/theme/theme2.xml><?xml version="1.0" encoding="utf-8"?>
+<a:theme xmlns:a="http://schemas.openxmlformats.org/drawingml/2006/main" name="Office 主题​​">
+  <a:themeElements>
+    <a:clrScheme name="Office">
+      <a:dk1>
+        <a:sysClr val="windowText" lastClr="000000"/>
+      </a:dk1>
+      <a:lt1>
+        <a:sysClr val="window" lastClr="FFFFFF"/>
+      </a:lt1>
+      <a:dk2>
+        <a:srgbClr val="44546A"/>
+      </a:dk2>
+      <a:lt2>
+        <a:srgbClr val="E7E6E6"/>
+      </a:lt2>
+      <a:accent1>
+        <a:srgbClr val="4472C4"/>
+      </a:accent1>
+      <a:accent2>
+        <a:srgbClr val="ED7D31"/>
+      </a:accent2>
+      <a:accent3>
+        <a:srgbClr val="A5A5A5"/>
+      </a:accent3>
+      <a:accent4>
+        <a:srgbClr val="FFC000"/>
+      </a:accent4>
+      <a:accent5>
+        <a:srgbClr val="5B9BD5"/>
+      </a:accent5>
+      <a:accent6>
+        <a:srgbClr val="70AD47"/>
+      </a:accent6>
+      <a:hlink>
+        <a:srgbClr val="0563C1"/>
+      </a:hlink>
+      <a:folHlink>
+        <a:srgbClr val="954F72"/>
+      </a:folHlink>
+    </a:clrScheme>
+    <a:fontScheme name="Office">
+      <a:majorFont>
+        <a:latin typeface="等线 Light" panose="020F0302020204030204"/>
+        <a:ea typeface=""/>
+        <a:cs typeface=""/>
+        <a:font script="Jpan" typeface="游ゴシック Light"/>
+        <a:font script="Hang" typeface="맑은 고딕"/>
+        <a:font script="Hans" typeface="等线 Light"/>
+        <a:font script="Hant" typeface="新細明體"/>
+        <a:font script="Arab" typeface="Times New Roman"/>
+        <a:font script="Hebr" typeface="Times New Roman"/>
+        <a:font script="Thai" typeface="Angsana New"/>
+        <a:font script="Ethi" typeface="Nyala"/>
+        <a:font script="Beng" typeface="Vrinda"/>
+        <a:font script="Gujr" typeface="Shruti"/>
+        <a:font script="Khmr" typeface="MoolBoran"/>
+        <a:font script="Knda" typeface="Tunga"/>
+        <a:font script="Guru" typeface="Raavi"/>
+        <a:font script="Cans" typeface="Euphemia"/>
+        <a:font script="Cher" typeface="Plantagenet Cherokee"/>
+        <a:font script="Yiii" typeface="Microsoft Yi Baiti"/>
+        <a:font script="Tibt" typeface="Microsoft Himalaya"/>
+        <a:font script="Thaa" typeface="MV Boli"/>
+        <a:font script="Deva" typeface="Mangal"/>
+        <a:font script="Telu" typeface="Gautami"/>
+        <a:font script="Taml" typeface="Latha"/>
+        <a:font script="Syrc" typeface="Estrangelo Edessa"/>
+        <a:font script="Orya" typeface="Kalinga"/>
+        <a:font script="Mlym" typeface="Kartika"/>
+        <a:font script="Laoo" typeface="DokChampa"/>
+        <a:font script="Sinh" typeface="Iskoola Pota"/>
+        <a:font script="Mong" typeface="Mongolian Baiti"/>
+        <a:font script="Viet" typeface="Times New Roman"/>
+        <a:font script="Uigh" typeface="Microsoft Uighur"/>
+        <a:font script="Geor" typeface="Sylfaen"/>
+        <a:font script="Armn" typeface="Arial"/>
+        <a:font script="Bugi" typeface="Leelawadee UI"/>
+        <a:font script="Bopo" typeface="Microsoft JhengHei"/>
+        <a:font script="Java" typeface="Javanese Text"/>
+        <a:font script="Lisu" typeface="Segoe UI"/>
+        <a:font script="Mymr" typeface="Myanmar Text"/>
+        <a:font script="Nkoo" typeface="Ebrima"/>
+        <a:font script="Olck" typeface="Nirmala UI"/>
+        <a:font script="Osma" typeface="Ebrima"/>
+        <a:font script="Phag" typeface="Phagspa"/>
+        <a:font script="Syrn" typeface="Estrangelo Edessa"/>
+        <a:font script="Syrj" typeface="Estrangelo Edessa"/>
+        <a:font script="Syre" typeface="Estrangelo Edessa"/>
+        <a:font script="Sora" typeface="Nirmala UI"/>
+        <a:font script="Tale" typeface="Microsoft Tai Le"/>
+        <a:font script="Talu" typeface="Microsoft New Tai Lue"/>
+        <a:font script="Tfng" typeface="Ebrima"/>
+      </a:majorFont>
+      <a:minorFont>
+        <a:latin typeface="等线" panose="020F0502020204030204"/>
+        <a:ea typeface=""/>
+        <a:cs typeface=""/>
+        <a:font script="Jpan" typeface="游ゴシック"/>
+        <a:font script="Hang" typeface="맑은 고딕"/>
+        <a:font script="Hans" typeface="等线"/>
+        <a:font script="Hant" typeface="新細明體"/>
+        <a:font script="Arab" typeface="Arial"/>
+        <a:font script="Hebr" typeface="Arial"/>
+        <a:font script="Thai" typeface="Cordia New"/>
+        <a:font script="Ethi" typeface="Nyala"/>
+        <a:font script="Beng" typeface="Vrinda"/>
+        <a:font script="Gujr" typeface="Shruti"/>
+        <a:font script="Khmr" typeface="DaunPenh"/>
+        <a:font script="Knda" typeface="Tunga"/>
+        <a:font script="Guru" typeface="Raavi"/>
+        <a:font script="Cans" typeface="Euphemia"/>
+        <a:font script="Cher" typeface="Plantagenet Cherokee"/>
+        <a:font script="Yiii" typeface="Microsoft Yi Baiti"/>
+        <a:font script="Tibt" typeface="Microsoft Himalaya"/>
+        <a:font script="Thaa" typeface="MV Boli"/>
+        <a:font script="Deva" typeface="Mangal"/>
+        <a:font script="Telu" typeface="Gautami"/>
+        <a:font script="Taml" typeface="Latha"/>
+        <a:font script="Syrc" typeface="Estrangelo Edessa"/>
+        <a:font script="Orya" typeface="Kalinga"/>
+        <a:font script="Mlym" typeface="Kartika"/>
+        <a:font script="Laoo" typeface="DokChampa"/>
+        <a:font script="Sinh" typeface="Iskoola Pota"/>
+        <a:font script="Mong" typeface="Mongolian Baiti"/>
+        <a:font script="Viet" typeface="Arial"/>
+        <a:font script="Uigh" typeface="Microsoft Uighur"/>
+        <a:font script="Geor" typeface="Sylfaen"/>
+        <a:font script="Armn" typeface="Arial"/>
+        <a:font script="Bugi" typeface="Leelawadee UI"/>
+        <a:font script="Bopo" typeface="Microsoft JhengHei"/>
+        <a:font script="Java" typeface="Javanese Text"/>
+        <a:font script="Lisu" typeface="Segoe UI"/>
+        <a:font script="Mymr" typeface="Myanmar Text"/>
+        <a:font script="Nkoo" typeface="Ebrima"/>
+        <a:font script="Olck" typeface="Nirmala UI"/>
+        <a:font script="Osma" typeface="Ebrima"/>
+        <a:font script="Phag" typeface="Phagspa"/>
+        <a:font script="Syrn" typeface="Estrangelo Edessa"/>
+        <a:font script="Syrj" typeface="Estrangelo Edessa"/>
+        <a:font script="Syre" typeface="Estrangelo Edessa"/>
+        <a:font script="Sora" typeface="Nirmala UI"/>
+        <a:font script="Tale" typeface="Microsoft Tai Le"/>
+        <a:font script="Talu" typeface="Microsoft New Tai Lue"/>
+        <a:font script="Tfng" typeface="Ebrima"/>
+      </a:minorFont>
+    </a:fontScheme>
+    <a:fmtScheme name="Office">
+      <a:fillStyleLst>
+        <a:solidFill>
+          <a:schemeClr val="phClr"/>
+        </a:solidFill>
+        <a:gradFill rotWithShape="1">
+          <a:gsLst>
+            <a:gs pos="0">
+              <a:schemeClr val="phClr">
+                <a:lumMod val="110000"/>
+                <a:satMod val="105000"/>
+                <a:tint val="67000"/>
+              </a:schemeClr>
+            </a:gs>
+            <a:gs pos="50000">
+              <a:schemeClr val="phClr">
+                <a:lumMod val="105000"/>
+                <a:satMod val="103000"/>
+                <a:tint val="73000"/>
+              </a:schemeClr>
+            </a:gs>
+            <a:gs pos="100000">
+              <a:schemeClr val="phClr">
+                <a:lumMod val="105000"/>
+                <a:satMod val="109000"/>
+                <a:tint val="81000"/>
+              </a:schemeClr>
+            </a:gs>
+          </a:gsLst>
+          <a:lin ang="5400000" scaled="0"/>
+        </a:gradFill>
+        <a:gradFill rotWithShape="1">
+          <a:gsLst>
+            <a:gs pos="0">
+              <a:schemeClr val="phClr">
+                <a:satMod val="103000"/>
+                <a:lumMod val="102000"/>
+                <a:tint val="94000"/>
+              </a:schemeClr>
+            </a:gs>
+            <a:gs pos="50000">
+              <a:schemeClr val="phClr">
+                <a:satMod val="110000"/>
+                <a:lumMod val="100000"/>
+                <a:shade val="100000"/>
+              </a:schemeClr>
+            </a:gs>
+            <a:gs pos="100000">
+              <a:schemeClr val="phClr">
+                <a:lumMod val="99000"/>
+                <a:satMod val="120000"/>
+                <a:shade val="78000"/>
+              </a:schemeClr>
+            </a:gs>
+          </a:gsLst>
+          <a:lin ang="5400000" scaled="0"/>
+        </a:gradFill>
+      </a:fillStyleLst>
+      <a:lnStyleLst>
+        <a:ln w="6350" cap="flat" cmpd="sng" algn="ctr">
+          <a:solidFill>
+            <a:schemeClr val="phClr"/>
+          </a:solidFill>
+          <a:prstDash val="solid"/>
+          <a:miter lim="800000"/>
+        </a:ln>
+        <a:ln w="12700" cap="flat" cmpd="sng" algn="ctr">
+          <a:solidFill>
+            <a:schemeClr val="phClr"/>
+          </a:solidFill>
+          <a:prstDash val="solid"/>
+          <a:miter lim="800000"/>
+        </a:ln>
+        <a:ln w="19050" cap="flat" cmpd="sng" algn="ctr">
+          <a:solidFill>
+            <a:schemeClr val="phClr"/>
+          </a:solidFill>
+          <a:prstDash val="solid"/>
+          <a:miter lim="800000"/>
+        </a:ln>
+      </a:lnStyleLst>
+      <a:effectStyleLst>
+        <a:effectStyle>
+          <a:effectLst/>
+        </a:effectStyle>
+        <a:effectStyle>
+          <a:effectLst/>
+        </a:effectStyle>
+        <a:effectStyle>
+          <a:effectLst>
+            <a:outerShdw blurRad="57150" dist="19050" dir="5400000" algn="ctr" rotWithShape="0">
+              <a:srgbClr val="000000">
+                <a:alpha val="63000"/>
+              </a:srgbClr>
+            </a:outerShdw>
+          </a:effectLst>
+        </a:effectStyle>
+      </a:effectStyleLst>
+      <a:bgFillStyleLst>
+        <a:solidFill>
+          <a:schemeClr val="phClr"/>
+        </a:solidFill>
+        <a:solidFill>
+          <a:schemeClr val="phClr">
+            <a:tint val="95000"/>
+            <a:satMod val="170000"/>
+          </a:schemeClr>
+        </a:solidFill>
+        <a:gradFill rotWithShape="1">
+          <a:gsLst>
+            <a:gs pos="0">
+              <a:schemeClr val="phClr">
+                <a:tint val="93000"/>
+                <a:satMod val="150000"/>
+                <a:shade val="98000"/>
+                <a:lumMod val="102000"/>
+              </a:schemeClr>
+            </a:gs>
+            <a:gs pos="50000">
+              <a:schemeClr val="phClr">
+                <a:tint val="98000"/>
+                <a:satMod val="130000"/>
+                <a:shade val="90000"/>
+                <a:lumMod val="103000"/>
+              </a:schemeClr>
+            </a:gs>
+            <a:gs pos="100000">
+              <a:schemeClr val="phClr">
+                <a:shade val="63000"/>
+                <a:satMod val="120000"/>
+              </a:schemeClr>
+            </a:gs>
+          </a:gsLst>
+          <a:lin ang="5400000" scaled="0"/>
+        </a:gradFill>
+      </a:bgFillStyleLst>
+    </a:fmtScheme>
+  </a:themeElements>
+  <a:objectDefaults/>
+  <a:extraClrSchemeLst/>
+  <a:extLst>
+    <a:ext uri="{05A4C25C-085E-4340-85A3-A5531E510DB2}">
+      <thm15:themeFamily xmlns:thm15="http://schemas.microsoft.com/office/thememl/2012/main" name="Office Theme" id="{62F939B6-93AF-4DB8-9C6B-D6C7DFDC589F}" vid="{4A3C46E8-61CC-4603-A589-7422A47A8E4A}"/>
+    </a:ext>
+  </a:extLst>
+</a:theme>
 </file>
--- a/大学生学习与求职智能助手-介绍.pptx
+++ b/大学生学习与求职智能助手-介绍.pptx
@@ -4,25 +4,23 @@
   <p:sldMasterIdLst>
     <p:sldMasterId id="2147483648" r:id="rId1"/>
   </p:sldMasterIdLst>
-  <p:notesMasterIdLst>
-    <p:notesMasterId r:id="rId15"/>
-  </p:notesMasterIdLst>
   <p:sldIdLst>
-    <p:sldId id="256" r:id="rId2"/>
-    <p:sldId id="257" r:id="rId3"/>
-    <p:sldId id="258" r:id="rId4"/>
-    <p:sldId id="259" r:id="rId5"/>
-    <p:sldId id="260" r:id="rId6"/>
-    <p:sldId id="261" r:id="rId7"/>
-    <p:sldId id="262" r:id="rId8"/>
-    <p:sldId id="263" r:id="rId9"/>
-    <p:sldId id="264" r:id="rId10"/>
-    <p:sldId id="265" r:id="rId11"/>
-    <p:sldId id="266" r:id="rId12"/>
-    <p:sldId id="267" r:id="rId13"/>
-    <p:sldId id="268" r:id="rId14"/>
+    <p:sldId id="256" r:id="rId7"/>
+    <p:sldId id="257" r:id="rId8"/>
+    <p:sldId id="258" r:id="rId9"/>
+    <p:sldId id="259" r:id="rId10"/>
+    <p:sldId id="260" r:id="rId11"/>
+    <p:sldId id="261" r:id="rId12"/>
+    <p:sldId id="262" r:id="rId13"/>
+    <p:sldId id="263" r:id="rId14"/>
+    <p:sldId id="264" r:id="rId15"/>
+    <p:sldId id="265" r:id="rId16"/>
+    <p:sldId id="266" r:id="rId17"/>
+    <p:sldId id="267" r:id="rId18"/>
+    <p:sldId id="268" r:id="rId19"/>
+    <p:sldId id="269" r:id="rId20"/>
   </p:sldIdLst>
-  <p:sldSz cx="12192000" cy="6858000"/>
+  <p:sldSz cx="12191695" cy="6858000" type="screen4x3"/>
   <p:notesSz cx="6858000" cy="9144000"/>
   <p:defaultTextStyle>
     <a:defPPr>
@@ -119,544 +117,7 @@
       </a:defRPr>
     </a:lvl9pPr>
   </p:defaultTextStyle>
-  <p:extLst>
-    <p:ext uri="{EFAFB233-063F-42B5-8137-9DF3F51BA10A}">
-      <p15:sldGuideLst xmlns:p15="http://schemas.microsoft.com/office/powerpoint/2012/main">
-        <p15:guide id="1" orient="horz" pos="2160">
-          <p15:clr>
-            <a:srgbClr val="A4A3A4"/>
-          </p15:clr>
-        </p15:guide>
-        <p15:guide id="2" pos="2880">
-          <p15:clr>
-            <a:srgbClr val="A4A3A4"/>
-          </p15:clr>
-        </p15:guide>
-      </p15:sldGuideLst>
-    </p:ext>
-  </p:extLst>
 </p:presentation>
-</file>
-
-<file path=ppt/notesMasters/notesMaster1.xml><?xml version="1.0" encoding="utf-8"?>
-<p:notesMaster xmlns:a="http://schemas.openxmlformats.org/drawingml/2006/main" xmlns:r="http://schemas.openxmlformats.org/officeDocument/2006/relationships" xmlns:p="http://schemas.openxmlformats.org/presentationml/2006/main">
-  <p:cSld>
-    <p:bg>
-      <p:bgRef idx="1001">
-        <a:schemeClr val="bg1"/>
-      </p:bgRef>
-    </p:bg>
-    <p:spTree>
-      <p:nvGrpSpPr>
-        <p:cNvPr id="1" name=""/>
-        <p:cNvGrpSpPr/>
-        <p:nvPr/>
-      </p:nvGrpSpPr>
-      <p:grpSpPr>
-        <a:xfrm>
-          <a:off x="0" y="0"/>
-          <a:ext cx="0" cy="0"/>
-          <a:chOff x="0" y="0"/>
-          <a:chExt cx="0" cy="0"/>
-        </a:xfrm>
-      </p:grpSpPr>
-      <p:sp>
-        <p:nvSpPr>
-          <p:cNvPr id="2" name="页眉占位符 1"/>
-          <p:cNvSpPr>
-            <a:spLocks noGrp="1"/>
-          </p:cNvSpPr>
-          <p:nvPr>
-            <p:ph type="hdr" sz="quarter"/>
-          </p:nvPr>
-        </p:nvSpPr>
-        <p:spPr>
-          <a:xfrm>
-            <a:off x="0" y="0"/>
-            <a:ext cx="2971800" cy="458788"/>
-          </a:xfrm>
-          <a:prstGeom prst="rect">
-            <a:avLst/>
-          </a:prstGeom>
-        </p:spPr>
-        <p:txBody>
-          <a:bodyPr vert="horz" lIns="91440" tIns="45720" rIns="91440" bIns="45720" rtlCol="0"/>
-          <a:lstStyle>
-            <a:lvl1pPr algn="l">
-              <a:defRPr sz="1200"/>
-            </a:lvl1pPr>
-          </a:lstStyle>
-          <a:p>
-            <a:endParaRPr lang="zh-CN" altLang="en-US"/>
-          </a:p>
-        </p:txBody>
-      </p:sp>
-      <p:sp>
-        <p:nvSpPr>
-          <p:cNvPr id="3" name="日期占位符 2"/>
-          <p:cNvSpPr>
-            <a:spLocks noGrp="1"/>
-          </p:cNvSpPr>
-          <p:nvPr>
-            <p:ph type="dt" idx="1"/>
-          </p:nvPr>
-        </p:nvSpPr>
-        <p:spPr>
-          <a:xfrm>
-            <a:off x="3884613" y="0"/>
-            <a:ext cx="2971800" cy="458788"/>
-          </a:xfrm>
-          <a:prstGeom prst="rect">
-            <a:avLst/>
-          </a:prstGeom>
-        </p:spPr>
-        <p:txBody>
-          <a:bodyPr vert="horz" lIns="91440" tIns="45720" rIns="91440" bIns="45720" rtlCol="0"/>
-          <a:lstStyle>
-            <a:lvl1pPr algn="r">
-              <a:defRPr sz="1200"/>
-            </a:lvl1pPr>
-          </a:lstStyle>
-          <a:p>
-            <a:fld id="{50DC3C21-FA98-431E-9140-C2786AC5AF30}" type="datetimeFigureOut">
-              <a:rPr lang="zh-CN" altLang="en-US" smtClean="0"/>
-              <a:t>2026/8/27</a:t>
-            </a:fld>
-            <a:endParaRPr lang="zh-CN" altLang="en-US"/>
-          </a:p>
-        </p:txBody>
-      </p:sp>
-      <p:sp>
-        <p:nvSpPr>
-          <p:cNvPr id="4" name="幻灯片图像占位符 3"/>
-          <p:cNvSpPr>
-            <a:spLocks noGrp="1" noRot="1" noChangeAspect="1"/>
-          </p:cNvSpPr>
-          <p:nvPr>
-            <p:ph type="sldImg" idx="2"/>
-          </p:nvPr>
-        </p:nvSpPr>
-        <p:spPr>
-          <a:xfrm>
-            <a:off x="685800" y="1143000"/>
-            <a:ext cx="5486400" cy="3086100"/>
-          </a:xfrm>
-          <a:prstGeom prst="rect">
-            <a:avLst/>
-          </a:prstGeom>
-          <a:noFill/>
-          <a:ln w="12700">
-            <a:solidFill>
-              <a:prstClr val="black"/>
-            </a:solidFill>
-          </a:ln>
-        </p:spPr>
-        <p:txBody>
-          <a:bodyPr vert="horz" lIns="91440" tIns="45720" rIns="91440" bIns="45720" rtlCol="0" anchor="ctr"/>
-          <a:lstStyle/>
-          <a:p>
-            <a:endParaRPr lang="zh-CN" altLang="en-US"/>
-          </a:p>
-        </p:txBody>
-      </p:sp>
-      <p:sp>
-        <p:nvSpPr>
-          <p:cNvPr id="5" name="备注占位符 4"/>
-          <p:cNvSpPr>
-            <a:spLocks noGrp="1"/>
-          </p:cNvSpPr>
-          <p:nvPr>
-            <p:ph type="body" sz="quarter" idx="3"/>
-          </p:nvPr>
-        </p:nvSpPr>
-        <p:spPr>
-          <a:xfrm>
-            <a:off x="685800" y="4400550"/>
-            <a:ext cx="5486400" cy="3600450"/>
-          </a:xfrm>
-          <a:prstGeom prst="rect">
-            <a:avLst/>
-          </a:prstGeom>
-        </p:spPr>
-        <p:txBody>
-          <a:bodyPr vert="horz" lIns="91440" tIns="45720" rIns="91440" bIns="45720" rtlCol="0"/>
-          <a:lstStyle/>
-          <a:p>
-            <a:pPr lvl="0"/>
-            <a:r>
-              <a:rPr lang="zh-CN" altLang="en-US"/>
-              <a:t>单击此处编辑母版文本样式</a:t>
-            </a:r>
-          </a:p>
-          <a:p>
-            <a:pPr lvl="1"/>
-            <a:r>
-              <a:rPr lang="zh-CN" altLang="en-US"/>
-              <a:t>二级</a:t>
-            </a:r>
-          </a:p>
-          <a:p>
-            <a:pPr lvl="2"/>
-            <a:r>
-              <a:rPr lang="zh-CN" altLang="en-US"/>
-              <a:t>三级</a:t>
-            </a:r>
-          </a:p>
-          <a:p>
-            <a:pPr lvl="3"/>
-            <a:r>
-              <a:rPr lang="zh-CN" altLang="en-US"/>
-              <a:t>四级</a:t>
-            </a:r>
-          </a:p>
-          <a:p>
-            <a:pPr lvl="4"/>
-            <a:r>
-              <a:rPr lang="zh-CN" altLang="en-US"/>
-              <a:t>五级</a:t>
-            </a:r>
-          </a:p>
-        </p:txBody>
-      </p:sp>
-      <p:sp>
-        <p:nvSpPr>
-          <p:cNvPr id="6" name="页脚占位符 5"/>
-          <p:cNvSpPr>
-            <a:spLocks noGrp="1"/>
-          </p:cNvSpPr>
-          <p:nvPr>
-            <p:ph type="ftr" sz="quarter" idx="4"/>
-          </p:nvPr>
-        </p:nvSpPr>
-        <p:spPr>
-          <a:xfrm>
-            <a:off x="0" y="8685213"/>
-            <a:ext cx="2971800" cy="458787"/>
-          </a:xfrm>
-          <a:prstGeom prst="rect">
-            <a:avLst/>
-          </a:prstGeom>
-        </p:spPr>
-        <p:txBody>
-          <a:bodyPr vert="horz" lIns="91440" tIns="45720" rIns="91440" bIns="45720" rtlCol="0" anchor="b"/>
-          <a:lstStyle>
-            <a:lvl1pPr algn="l">
-              <a:defRPr sz="1200"/>
-            </a:lvl1pPr>
-          </a:lstStyle>
-          <a:p>
-            <a:endParaRPr lang="zh-CN" altLang="en-US"/>
-          </a:p>
-        </p:txBody>
-      </p:sp>
-      <p:sp>
-        <p:nvSpPr>
-          <p:cNvPr id="7" name="灯片编号占位符 6"/>
-          <p:cNvSpPr>
-            <a:spLocks noGrp="1"/>
-          </p:cNvSpPr>
-          <p:nvPr>
-            <p:ph type="sldNum" sz="quarter" idx="5"/>
-          </p:nvPr>
-        </p:nvSpPr>
-        <p:spPr>
-          <a:xfrm>
-            <a:off x="3884613" y="8685213"/>
-            <a:ext cx="2971800" cy="458787"/>
-          </a:xfrm>
-          <a:prstGeom prst="rect">
-            <a:avLst/>
-          </a:prstGeom>
-        </p:spPr>
-        <p:txBody>
-          <a:bodyPr vert="horz" lIns="91440" tIns="45720" rIns="91440" bIns="45720" rtlCol="0" anchor="b"/>
-          <a:lstStyle>
-            <a:lvl1pPr algn="r">
-              <a:defRPr sz="1200"/>
-            </a:lvl1pPr>
-          </a:lstStyle>
-          <a:p>
-            <a:fld id="{8DEDC7AE-5C7B-48A7-9915-232DC18D7063}" type="slidenum">
-              <a:rPr lang="zh-CN" altLang="en-US" smtClean="0"/>
-              <a:t>‹#›</a:t>
-            </a:fld>
-            <a:endParaRPr lang="zh-CN" altLang="en-US"/>
-          </a:p>
-        </p:txBody>
-      </p:sp>
-    </p:spTree>
-    <p:extLst>
-      <p:ext uri="{BB962C8B-B14F-4D97-AF65-F5344CB8AC3E}">
-        <p14:creationId xmlns:p14="http://schemas.microsoft.com/office/powerpoint/2010/main" val="1850132850"/>
-      </p:ext>
-    </p:extLst>
-  </p:cSld>
-  <p:clrMap bg1="lt1" tx1="dk1" bg2="lt2" tx2="dk2" accent1="accent1" accent2="accent2" accent3="accent3" accent4="accent4" accent5="accent5" accent6="accent6" hlink="hlink" folHlink="folHlink"/>
-  <p:notesStyle>
-    <a:lvl1pPr marL="0" algn="l" defTabSz="914400" rtl="0" eaLnBrk="1" latinLnBrk="0" hangingPunct="1">
-      <a:defRPr sz="1200" kern="1200">
-        <a:solidFill>
-          <a:schemeClr val="tx1"/>
-        </a:solidFill>
-        <a:latin typeface="+mn-lt"/>
-        <a:ea typeface="+mn-ea"/>
-        <a:cs typeface="+mn-cs"/>
-      </a:defRPr>
-    </a:lvl1pPr>
-    <a:lvl2pPr marL="457200" algn="l" defTabSz="914400" rtl="0" eaLnBrk="1" latinLnBrk="0" hangingPunct="1">
-      <a:defRPr sz="1200" kern="1200">
-        <a:solidFill>
-          <a:schemeClr val="tx1"/>
-        </a:solidFill>
-        <a:latin typeface="+mn-lt"/>
-        <a:ea typeface="+mn-ea"/>
-        <a:cs typeface="+mn-cs"/>
-      </a:defRPr>
-    </a:lvl2pPr>
-    <a:lvl3pPr marL="914400" algn="l" defTabSz="914400" rtl="0" eaLnBrk="1" latinLnBrk="0" hangingPunct="1">
-      <a:defRPr sz="1200" kern="1200">
-        <a:solidFill>
-          <a:schemeClr val="tx1"/>
-        </a:solidFill>
-        <a:latin typeface="+mn-lt"/>
-        <a:ea typeface="+mn-ea"/>
-        <a:cs typeface="+mn-cs"/>
-      </a:defRPr>
-    </a:lvl3pPr>
-    <a:lvl4pPr marL="1371600" algn="l" defTabSz="914400" rtl="0" eaLnBrk="1" latinLnBrk="0" hangingPunct="1">
-      <a:defRPr sz="1200" kern="1200">
-        <a:solidFill>
-          <a:schemeClr val="tx1"/>
-        </a:solidFill>
-        <a:latin typeface="+mn-lt"/>
-        <a:ea typeface="+mn-ea"/>
-        <a:cs typeface="+mn-cs"/>
-      </a:defRPr>
-    </a:lvl4pPr>
-    <a:lvl5pPr marL="1828800" algn="l" defTabSz="914400" rtl="0" eaLnBrk="1" latinLnBrk="0" hangingPunct="1">
-      <a:defRPr sz="1200" kern="1200">
-        <a:solidFill>
-          <a:schemeClr val="tx1"/>
-        </a:solidFill>
-        <a:latin typeface="+mn-lt"/>
-        <a:ea typeface="+mn-ea"/>
-        <a:cs typeface="+mn-cs"/>
-      </a:defRPr>
-    </a:lvl5pPr>
-    <a:lvl6pPr marL="2286000" algn="l" defTabSz="914400" rtl="0" eaLnBrk="1" latinLnBrk="0" hangingPunct="1">
-      <a:defRPr sz="1200" kern="1200">
-        <a:solidFill>
-          <a:schemeClr val="tx1"/>
-        </a:solidFill>
-        <a:latin typeface="+mn-lt"/>
-        <a:ea typeface="+mn-ea"/>
-        <a:cs typeface="+mn-cs"/>
-      </a:defRPr>
-    </a:lvl6pPr>
-    <a:lvl7pPr marL="2743200" algn="l" defTabSz="914400" rtl="0" eaLnBrk="1" latinLnBrk="0" hangingPunct="1">
-      <a:defRPr sz="1200" kern="1200">
-        <a:solidFill>
-          <a:schemeClr val="tx1"/>
-        </a:solidFill>
-        <a:latin typeface="+mn-lt"/>
-        <a:ea typeface="+mn-ea"/>
-        <a:cs typeface="+mn-cs"/>
-      </a:defRPr>
-    </a:lvl7pPr>
-    <a:lvl8pPr marL="3200400" algn="l" defTabSz="914400" rtl="0" eaLnBrk="1" latinLnBrk="0" hangingPunct="1">
-      <a:defRPr sz="1200" kern="1200">
-        <a:solidFill>
-          <a:schemeClr val="tx1"/>
-        </a:solidFill>
-        <a:latin typeface="+mn-lt"/>
-        <a:ea typeface="+mn-ea"/>
-        <a:cs typeface="+mn-cs"/>
-      </a:defRPr>
-    </a:lvl8pPr>
-    <a:lvl9pPr marL="3657600" algn="l" defTabSz="914400" rtl="0" eaLnBrk="1" latinLnBrk="0" hangingPunct="1">
-      <a:defRPr sz="1200" kern="1200">
-        <a:solidFill>
-          <a:schemeClr val="tx1"/>
-        </a:solidFill>
-        <a:latin typeface="+mn-lt"/>
-        <a:ea typeface="+mn-ea"/>
-        <a:cs typeface="+mn-cs"/>
-      </a:defRPr>
-    </a:lvl9pPr>
-  </p:notesStyle>
-</p:notesMaster>
-</file>
-
-<file path=ppt/notesSlides/notesSlide1.xml><?xml version="1.0" encoding="utf-8"?>
-<p:notes xmlns:a="http://schemas.openxmlformats.org/drawingml/2006/main" xmlns:r="http://schemas.openxmlformats.org/officeDocument/2006/relationships" xmlns:p="http://schemas.openxmlformats.org/presentationml/2006/main">
-  <p:cSld>
-    <p:spTree>
-      <p:nvGrpSpPr>
-        <p:cNvPr id="1" name=""/>
-        <p:cNvGrpSpPr/>
-        <p:nvPr/>
-      </p:nvGrpSpPr>
-      <p:grpSpPr>
-        <a:xfrm>
-          <a:off x="0" y="0"/>
-          <a:ext cx="0" cy="0"/>
-          <a:chOff x="0" y="0"/>
-          <a:chExt cx="0" cy="0"/>
-        </a:xfrm>
-      </p:grpSpPr>
-      <p:sp>
-        <p:nvSpPr>
-          <p:cNvPr id="2" name="幻灯片图像占位符 1"/>
-          <p:cNvSpPr>
-            <a:spLocks noGrp="1" noRot="1" noChangeAspect="1"/>
-          </p:cNvSpPr>
-          <p:nvPr>
-            <p:ph type="sldImg"/>
-          </p:nvPr>
-        </p:nvSpPr>
-        <p:spPr/>
-      </p:sp>
-      <p:sp>
-        <p:nvSpPr>
-          <p:cNvPr id="3" name="备注占位符 2"/>
-          <p:cNvSpPr>
-            <a:spLocks noGrp="1"/>
-          </p:cNvSpPr>
-          <p:nvPr>
-            <p:ph type="body" idx="1"/>
-          </p:nvPr>
-        </p:nvSpPr>
-        <p:spPr/>
-        <p:txBody>
-          <a:bodyPr/>
-          <a:lstStyle/>
-          <a:p>
-            <a:r>
-              <a:rPr lang="en-US" altLang="zh-CN" dirty="0"/>
-              <a:t>0</a:t>
-            </a:r>
-            <a:endParaRPr lang="zh-CN" altLang="en-US" dirty="0"/>
-          </a:p>
-        </p:txBody>
-      </p:sp>
-      <p:sp>
-        <p:nvSpPr>
-          <p:cNvPr id="4" name="灯片编号占位符 3"/>
-          <p:cNvSpPr>
-            <a:spLocks noGrp="1"/>
-          </p:cNvSpPr>
-          <p:nvPr>
-            <p:ph type="sldNum" sz="quarter" idx="5"/>
-          </p:nvPr>
-        </p:nvSpPr>
-        <p:spPr/>
-        <p:txBody>
-          <a:bodyPr/>
-          <a:lstStyle/>
-          <a:p>
-            <a:fld id="{8DEDC7AE-5C7B-48A7-9915-232DC18D7063}" type="slidenum">
-              <a:rPr lang="zh-CN" altLang="en-US" smtClean="0"/>
-              <a:t>4</a:t>
-            </a:fld>
-            <a:endParaRPr lang="zh-CN" altLang="en-US"/>
-          </a:p>
-        </p:txBody>
-      </p:sp>
-    </p:spTree>
-    <p:extLst>
-      <p:ext uri="{BB962C8B-B14F-4D97-AF65-F5344CB8AC3E}">
-        <p14:creationId xmlns:p14="http://schemas.microsoft.com/office/powerpoint/2010/main" val="2524328151"/>
-      </p:ext>
-    </p:extLst>
-  </p:cSld>
-  <p:clrMapOvr>
-    <a:masterClrMapping/>
-  </p:clrMapOvr>
-</p:notes>
-</file>
-
-<file path=ppt/notesSlides/notesSlide2.xml><?xml version="1.0" encoding="utf-8"?>
-<p:notes xmlns:a="http://schemas.openxmlformats.org/drawingml/2006/main" xmlns:r="http://schemas.openxmlformats.org/officeDocument/2006/relationships" xmlns:p="http://schemas.openxmlformats.org/presentationml/2006/main">
-  <p:cSld>
-    <p:spTree>
-      <p:nvGrpSpPr>
-        <p:cNvPr id="1" name=""/>
-        <p:cNvGrpSpPr/>
-        <p:nvPr/>
-      </p:nvGrpSpPr>
-      <p:grpSpPr>
-        <a:xfrm>
-          <a:off x="0" y="0"/>
-          <a:ext cx="0" cy="0"/>
-          <a:chOff x="0" y="0"/>
-          <a:chExt cx="0" cy="0"/>
-        </a:xfrm>
-      </p:grpSpPr>
-      <p:sp>
-        <p:nvSpPr>
-          <p:cNvPr id="2" name="幻灯片图像占位符 1"/>
-          <p:cNvSpPr>
-            <a:spLocks noGrp="1" noRot="1" noChangeAspect="1"/>
-          </p:cNvSpPr>
-          <p:nvPr>
-            <p:ph type="sldImg"/>
-          </p:nvPr>
-        </p:nvSpPr>
-        <p:spPr/>
-      </p:sp>
-      <p:sp>
-        <p:nvSpPr>
-          <p:cNvPr id="3" name="备注占位符 2"/>
-          <p:cNvSpPr>
-            <a:spLocks noGrp="1"/>
-          </p:cNvSpPr>
-          <p:nvPr>
-            <p:ph type="body" idx="1"/>
-          </p:nvPr>
-        </p:nvSpPr>
-        <p:spPr/>
-        <p:txBody>
-          <a:bodyPr/>
-          <a:lstStyle/>
-          <a:p>
-            <a:endParaRPr lang="zh-CN" altLang="en-US"/>
-          </a:p>
-        </p:txBody>
-      </p:sp>
-      <p:sp>
-        <p:nvSpPr>
-          <p:cNvPr id="4" name="灯片编号占位符 3"/>
-          <p:cNvSpPr>
-            <a:spLocks noGrp="1"/>
-          </p:cNvSpPr>
-          <p:nvPr>
-            <p:ph type="sldNum" sz="quarter" idx="5"/>
-          </p:nvPr>
-        </p:nvSpPr>
-        <p:spPr/>
-        <p:txBody>
-          <a:bodyPr/>
-          <a:lstStyle/>
-          <a:p>
-            <a:fld id="{8DEDC7AE-5C7B-48A7-9915-232DC18D7063}" type="slidenum">
-              <a:rPr lang="zh-CN" altLang="en-US" smtClean="0"/>
-              <a:t>6</a:t>
-            </a:fld>
-            <a:endParaRPr lang="zh-CN" altLang="en-US"/>
-          </a:p>
-        </p:txBody>
-      </p:sp>
-    </p:spTree>
-    <p:extLst>
-      <p:ext uri="{BB962C8B-B14F-4D97-AF65-F5344CB8AC3E}">
-        <p14:creationId xmlns:p14="http://schemas.microsoft.com/office/powerpoint/2010/main" val="2169756402"/>
-      </p:ext>
-    </p:extLst>
-  </p:cSld>
-  <p:clrMapOvr>
-    <a:masterClrMapping/>
-  </p:clrMapOvr>
-</p:notes>
 </file>
 
 <file path=ppt/slideLayouts/slideLayout1.xml><?xml version="1.0" encoding="utf-8"?>
@@ -697,9 +158,10 @@
           <a:lstStyle/>
           <a:p>
             <a:r>
-              <a:rPr lang="en-US"/>
+              <a:rPr lang="en-US" smtClean="0"/>
               <a:t>Click to edit Master title style</a:t>
             </a:r>
+            <a:endParaRPr lang="en-US"/>
           </a:p>
         </p:txBody>
       </p:sp>
@@ -815,9 +277,10 @@
           </a:lstStyle>
           <a:p>
             <a:r>
-              <a:rPr lang="en-US"/>
+              <a:rPr lang="en-US" smtClean="0"/>
               <a:t>Click to edit Master subtitle style</a:t>
             </a:r>
+            <a:endParaRPr lang="en-US"/>
           </a:p>
         </p:txBody>
       </p:sp>
@@ -838,7 +301,7 @@
           <a:p>
             <a:fld id="{5BCAD085-E8A6-8845-BD4E-CB4CCA059FC4}" type="datetimeFigureOut">
               <a:rPr lang="en-US" smtClean="0"/>
-              <a:t>8/27/2026</a:t>
+              <a:t>1/27/13</a:t>
             </a:fld>
             <a:endParaRPr lang="en-US"/>
           </a:p>
@@ -932,9 +395,10 @@
           <a:lstStyle/>
           <a:p>
             <a:r>
-              <a:rPr lang="en-US"/>
+              <a:rPr lang="en-US" smtClean="0"/>
               <a:t>Click to edit Master title style</a:t>
             </a:r>
+            <a:endParaRPr lang="en-US"/>
           </a:p>
         </p:txBody>
       </p:sp>
@@ -955,37 +419,38 @@
           <a:p>
             <a:pPr lvl="0"/>
             <a:r>
-              <a:rPr lang="en-US"/>
+              <a:rPr lang="en-US" smtClean="0"/>
               <a:t>Click to edit Master text styles</a:t>
             </a:r>
           </a:p>
           <a:p>
             <a:pPr lvl="1"/>
             <a:r>
-              <a:rPr lang="en-US"/>
+              <a:rPr lang="en-US" smtClean="0"/>
               <a:t>Second level</a:t>
             </a:r>
           </a:p>
           <a:p>
             <a:pPr lvl="2"/>
             <a:r>
-              <a:rPr lang="en-US"/>
+              <a:rPr lang="en-US" smtClean="0"/>
               <a:t>Third level</a:t>
             </a:r>
           </a:p>
           <a:p>
             <a:pPr lvl="3"/>
             <a:r>
-              <a:rPr lang="en-US"/>
+              <a:rPr lang="en-US" smtClean="0"/>
               <a:t>Fourth level</a:t>
             </a:r>
           </a:p>
           <a:p>
             <a:pPr lvl="4"/>
             <a:r>
-              <a:rPr lang="en-US"/>
+              <a:rPr lang="en-US" smtClean="0"/>
               <a:t>Fifth level</a:t>
             </a:r>
+            <a:endParaRPr lang="en-US"/>
           </a:p>
         </p:txBody>
       </p:sp>
@@ -1006,7 +471,7 @@
           <a:p>
             <a:fld id="{5BCAD085-E8A6-8845-BD4E-CB4CCA059FC4}" type="datetimeFigureOut">
               <a:rPr lang="en-US" smtClean="0"/>
-              <a:t>8/27/2026</a:t>
+              <a:t>1/27/13</a:t>
             </a:fld>
             <a:endParaRPr lang="en-US"/>
           </a:p>
@@ -1105,9 +570,10 @@
           <a:lstStyle/>
           <a:p>
             <a:r>
-              <a:rPr lang="en-US"/>
+              <a:rPr lang="en-US" smtClean="0"/>
               <a:t>Click to edit Master title style</a:t>
             </a:r>
+            <a:endParaRPr lang="en-US"/>
           </a:p>
         </p:txBody>
       </p:sp>
@@ -1133,37 +599,38 @@
           <a:p>
             <a:pPr lvl="0"/>
             <a:r>
-              <a:rPr lang="en-US"/>
+              <a:rPr lang="en-US" smtClean="0"/>
               <a:t>Click to edit Master text styles</a:t>
             </a:r>
           </a:p>
           <a:p>
             <a:pPr lvl="1"/>
             <a:r>
-              <a:rPr lang="en-US"/>
+              <a:rPr lang="en-US" smtClean="0"/>
               <a:t>Second level</a:t>
             </a:r>
           </a:p>
           <a:p>
             <a:pPr lvl="2"/>
             <a:r>
-              <a:rPr lang="en-US"/>
+              <a:rPr lang="en-US" smtClean="0"/>
               <a:t>Third level</a:t>
             </a:r>
           </a:p>
           <a:p>
             <a:pPr lvl="3"/>
             <a:r>
-              <a:rPr lang="en-US"/>
+              <a:rPr lang="en-US" smtClean="0"/>
               <a:t>Fourth level</a:t>
             </a:r>
           </a:p>
           <a:p>
             <a:pPr lvl="4"/>
             <a:r>
-              <a:rPr lang="en-US"/>
+              <a:rPr lang="en-US" smtClean="0"/>
               <a:t>Fifth level</a:t>
             </a:r>
+            <a:endParaRPr lang="en-US"/>
           </a:p>
         </p:txBody>
       </p:sp>
@@ -1184,7 +651,7 @@
           <a:p>
             <a:fld id="{5BCAD085-E8A6-8845-BD4E-CB4CCA059FC4}" type="datetimeFigureOut">
               <a:rPr lang="en-US" smtClean="0"/>
-              <a:t>8/27/2026</a:t>
+              <a:t>1/27/13</a:t>
             </a:fld>
             <a:endParaRPr lang="en-US"/>
           </a:p>
@@ -1278,9 +745,10 @@
           <a:lstStyle/>
           <a:p>
             <a:r>
-              <a:rPr lang="en-US"/>
+              <a:rPr lang="en-US" smtClean="0"/>
               <a:t>Click to edit Master title style</a:t>
             </a:r>
+            <a:endParaRPr lang="en-US"/>
           </a:p>
         </p:txBody>
       </p:sp>
@@ -1301,37 +769,38 @@
           <a:p>
             <a:pPr lvl="0"/>
             <a:r>
-              <a:rPr lang="en-US"/>
+              <a:rPr lang="en-US" smtClean="0"/>
               <a:t>Click to edit Master text styles</a:t>
             </a:r>
           </a:p>
           <a:p>
             <a:pPr lvl="1"/>
             <a:r>
-              <a:rPr lang="en-US"/>
+              <a:rPr lang="en-US" smtClean="0"/>
               <a:t>Second level</a:t>
             </a:r>
           </a:p>
           <a:p>
             <a:pPr lvl="2"/>
             <a:r>
-              <a:rPr lang="en-US"/>
+              <a:rPr lang="en-US" smtClean="0"/>
               <a:t>Third level</a:t>
             </a:r>
           </a:p>
           <a:p>
             <a:pPr lvl="3"/>
             <a:r>
-              <a:rPr lang="en-US"/>
+              <a:rPr lang="en-US" smtClean="0"/>
               <a:t>Fourth level</a:t>
             </a:r>
           </a:p>
           <a:p>
             <a:pPr lvl="4"/>
             <a:r>
-              <a:rPr lang="en-US"/>
+              <a:rPr lang="en-US" smtClean="0"/>
               <a:t>Fifth level</a:t>
             </a:r>
+            <a:endParaRPr lang="en-US"/>
           </a:p>
         </p:txBody>
       </p:sp>
@@ -1352,7 +821,7 @@
           <a:p>
             <a:fld id="{5BCAD085-E8A6-8845-BD4E-CB4CCA059FC4}" type="datetimeFigureOut">
               <a:rPr lang="en-US" smtClean="0"/>
-              <a:t>8/27/2026</a:t>
+              <a:t>1/27/13</a:t>
             </a:fld>
             <a:endParaRPr lang="en-US"/>
           </a:p>
@@ -1455,9 +924,10 @@
           </a:lstStyle>
           <a:p>
             <a:r>
-              <a:rPr lang="en-US"/>
+              <a:rPr lang="en-US" smtClean="0"/>
               <a:t>Click to edit Master title style</a:t>
             </a:r>
+            <a:endParaRPr lang="en-US"/>
           </a:p>
         </p:txBody>
       </p:sp>
@@ -1574,7 +1044,7 @@
           <a:p>
             <a:pPr lvl="0"/>
             <a:r>
-              <a:rPr lang="en-US"/>
+              <a:rPr lang="en-US" smtClean="0"/>
               <a:t>Click to edit Master text styles</a:t>
             </a:r>
           </a:p>
@@ -1597,7 +1067,7 @@
           <a:p>
             <a:fld id="{5BCAD085-E8A6-8845-BD4E-CB4CCA059FC4}" type="datetimeFigureOut">
               <a:rPr lang="en-US" smtClean="0"/>
-              <a:t>8/27/2026</a:t>
+              <a:t>1/27/13</a:t>
             </a:fld>
             <a:endParaRPr lang="en-US"/>
           </a:p>
@@ -1691,9 +1161,10 @@
           <a:lstStyle/>
           <a:p>
             <a:r>
-              <a:rPr lang="en-US"/>
+              <a:rPr lang="en-US" smtClean="0"/>
               <a:t>Click to edit Master title style</a:t>
             </a:r>
+            <a:endParaRPr lang="en-US"/>
           </a:p>
         </p:txBody>
       </p:sp>
@@ -1747,37 +1218,38 @@
           <a:p>
             <a:pPr lvl="0"/>
             <a:r>
-              <a:rPr lang="en-US"/>
+              <a:rPr lang="en-US" smtClean="0"/>
               <a:t>Click to edit Master text styles</a:t>
             </a:r>
           </a:p>
           <a:p>
             <a:pPr lvl="1"/>
             <a:r>
-              <a:rPr lang="en-US"/>
+              <a:rPr lang="en-US" smtClean="0"/>
               <a:t>Second level</a:t>
             </a:r>
           </a:p>
           <a:p>
             <a:pPr lvl="2"/>
             <a:r>
-              <a:rPr lang="en-US"/>
+              <a:rPr lang="en-US" smtClean="0"/>
               <a:t>Third level</a:t>
             </a:r>
           </a:p>
           <a:p>
             <a:pPr lvl="3"/>
             <a:r>
-              <a:rPr lang="en-US"/>
+              <a:rPr lang="en-US" smtClean="0"/>
               <a:t>Fourth level</a:t>
             </a:r>
           </a:p>
           <a:p>
             <a:pPr lvl="4"/>
             <a:r>
-              <a:rPr lang="en-US"/>
+              <a:rPr lang="en-US" smtClean="0"/>
               <a:t>Fifth level</a:t>
             </a:r>
+            <a:endParaRPr lang="en-US"/>
           </a:p>
         </p:txBody>
       </p:sp>
@@ -1831,37 +1303,38 @@
           <a:p>
             <a:pPr lvl="0"/>
             <a:r>
-              <a:rPr lang="en-US"/>
+              <a:rPr lang="en-US" smtClean="0"/>
               <a:t>Click to edit Master text styles</a:t>
             </a:r>
           </a:p>
           <a:p>
             <a:pPr lvl="1"/>
             <a:r>
-              <a:rPr lang="en-US"/>
+              <a:rPr lang="en-US" smtClean="0"/>
               <a:t>Second level</a:t>
             </a:r>
           </a:p>
           <a:p>
             <a:pPr lvl="2"/>
             <a:r>
-              <a:rPr lang="en-US"/>
+              <a:rPr lang="en-US" smtClean="0"/>
               <a:t>Third level</a:t>
             </a:r>
           </a:p>
           <a:p>
             <a:pPr lvl="3"/>
             <a:r>
-              <a:rPr lang="en-US"/>
+              <a:rPr lang="en-US" smtClean="0"/>
               <a:t>Fourth level</a:t>
             </a:r>
           </a:p>
           <a:p>
             <a:pPr lvl="4"/>
             <a:r>
-              <a:rPr lang="en-US"/>
+              <a:rPr lang="en-US" smtClean="0"/>
               <a:t>Fifth level</a:t>
             </a:r>
+            <a:endParaRPr lang="en-US"/>
           </a:p>
         </p:txBody>
       </p:sp>
@@ -1882,7 +1355,7 @@
           <a:p>
             <a:fld id="{5BCAD085-E8A6-8845-BD4E-CB4CCA059FC4}" type="datetimeFigureOut">
               <a:rPr lang="en-US" smtClean="0"/>
-              <a:t>8/27/2026</a:t>
+              <a:t>1/27/13</a:t>
             </a:fld>
             <a:endParaRPr lang="en-US"/>
           </a:p>
@@ -1980,9 +1453,10 @@
           </a:lstStyle>
           <a:p>
             <a:r>
-              <a:rPr lang="en-US"/>
+              <a:rPr lang="en-US" smtClean="0"/>
               <a:t>Click to edit Master title style</a:t>
             </a:r>
+            <a:endParaRPr lang="en-US"/>
           </a:p>
         </p:txBody>
       </p:sp>
@@ -2045,7 +1519,7 @@
           <a:p>
             <a:pPr lvl="0"/>
             <a:r>
-              <a:rPr lang="en-US"/>
+              <a:rPr lang="en-US" smtClean="0"/>
               <a:t>Click to edit Master text styles</a:t>
             </a:r>
           </a:p>
@@ -2101,37 +1575,38 @@
           <a:p>
             <a:pPr lvl="0"/>
             <a:r>
-              <a:rPr lang="en-US"/>
+              <a:rPr lang="en-US" smtClean="0"/>
               <a:t>Click to edit Master text styles</a:t>
             </a:r>
           </a:p>
           <a:p>
             <a:pPr lvl="1"/>
             <a:r>
-              <a:rPr lang="en-US"/>
+              <a:rPr lang="en-US" smtClean="0"/>
               <a:t>Second level</a:t>
             </a:r>
           </a:p>
           <a:p>
             <a:pPr lvl="2"/>
             <a:r>
-              <a:rPr lang="en-US"/>
+              <a:rPr lang="en-US" smtClean="0"/>
               <a:t>Third level</a:t>
             </a:r>
           </a:p>
           <a:p>
             <a:pPr lvl="3"/>
             <a:r>
-              <a:rPr lang="en-US"/>
+              <a:rPr lang="en-US" smtClean="0"/>
               <a:t>Fourth level</a:t>
             </a:r>
           </a:p>
           <a:p>
             <a:pPr lvl="4"/>
             <a:r>
-              <a:rPr lang="en-US"/>
+              <a:rPr lang="en-US" smtClean="0"/>
               <a:t>Fifth level</a:t>
             </a:r>
+            <a:endParaRPr lang="en-US"/>
           </a:p>
         </p:txBody>
       </p:sp>
@@ -2194,7 +1669,7 @@
           <a:p>
             <a:pPr lvl="0"/>
             <a:r>
-              <a:rPr lang="en-US"/>
+              <a:rPr lang="en-US" smtClean="0"/>
               <a:t>Click to edit Master text styles</a:t>
             </a:r>
           </a:p>
@@ -2250,37 +1725,38 @@
           <a:p>
             <a:pPr lvl="0"/>
             <a:r>
-              <a:rPr lang="en-US"/>
+              <a:rPr lang="en-US" smtClean="0"/>
               <a:t>Click to edit Master text styles</a:t>
             </a:r>
           </a:p>
           <a:p>
             <a:pPr lvl="1"/>
             <a:r>
-              <a:rPr lang="en-US"/>
+              <a:rPr lang="en-US" smtClean="0"/>
               <a:t>Second level</a:t>
             </a:r>
           </a:p>
           <a:p>
             <a:pPr lvl="2"/>
             <a:r>
-              <a:rPr lang="en-US"/>
+              <a:rPr lang="en-US" smtClean="0"/>
               <a:t>Third level</a:t>
             </a:r>
           </a:p>
           <a:p>
             <a:pPr lvl="3"/>
             <a:r>
-              <a:rPr lang="en-US"/>
+              <a:rPr lang="en-US" smtClean="0"/>
               <a:t>Fourth level</a:t>
             </a:r>
           </a:p>
           <a:p>
             <a:pPr lvl="4"/>
             <a:r>
-              <a:rPr lang="en-US"/>
+              <a:rPr lang="en-US" smtClean="0"/>
               <a:t>Fifth level</a:t>
             </a:r>
+            <a:endParaRPr lang="en-US"/>
           </a:p>
         </p:txBody>
       </p:sp>
@@ -2301,7 +1777,7 @@
           <a:p>
             <a:fld id="{5BCAD085-E8A6-8845-BD4E-CB4CCA059FC4}" type="datetimeFigureOut">
               <a:rPr lang="en-US" smtClean="0"/>
-              <a:t>8/27/2026</a:t>
+              <a:t>1/27/13</a:t>
             </a:fld>
             <a:endParaRPr lang="en-US"/>
           </a:p>
@@ -2395,9 +1871,10 @@
           <a:lstStyle/>
           <a:p>
             <a:r>
-              <a:rPr lang="en-US"/>
+              <a:rPr lang="en-US" smtClean="0"/>
               <a:t>Click to edit Master title style</a:t>
             </a:r>
+            <a:endParaRPr lang="en-US"/>
           </a:p>
         </p:txBody>
       </p:sp>
@@ -2418,7 +1895,7 @@
           <a:p>
             <a:fld id="{5BCAD085-E8A6-8845-BD4E-CB4CCA059FC4}" type="datetimeFigureOut">
               <a:rPr lang="en-US" smtClean="0"/>
-              <a:t>8/27/2026</a:t>
+              <a:t>1/27/13</a:t>
             </a:fld>
             <a:endParaRPr lang="en-US"/>
           </a:p>
@@ -2513,7 +1990,7 @@
           <a:p>
             <a:fld id="{5BCAD085-E8A6-8845-BD4E-CB4CCA059FC4}" type="datetimeFigureOut">
               <a:rPr lang="en-US" smtClean="0"/>
-              <a:t>8/27/2026</a:t>
+              <a:t>1/27/13</a:t>
             </a:fld>
             <a:endParaRPr lang="en-US"/>
           </a:p>
@@ -2616,9 +2093,10 @@
           </a:lstStyle>
           <a:p>
             <a:r>
-              <a:rPr lang="en-US"/>
+              <a:rPr lang="en-US" smtClean="0"/>
               <a:t>Click to edit Master title style</a:t>
             </a:r>
+            <a:endParaRPr lang="en-US"/>
           </a:p>
         </p:txBody>
       </p:sp>
@@ -2672,37 +2150,38 @@
           <a:p>
             <a:pPr lvl="0"/>
             <a:r>
-              <a:rPr lang="en-US"/>
+              <a:rPr lang="en-US" smtClean="0"/>
               <a:t>Click to edit Master text styles</a:t>
             </a:r>
           </a:p>
           <a:p>
             <a:pPr lvl="1"/>
             <a:r>
-              <a:rPr lang="en-US"/>
+              <a:rPr lang="en-US" smtClean="0"/>
               <a:t>Second level</a:t>
             </a:r>
           </a:p>
           <a:p>
             <a:pPr lvl="2"/>
             <a:r>
-              <a:rPr lang="en-US"/>
+              <a:rPr lang="en-US" smtClean="0"/>
               <a:t>Third level</a:t>
             </a:r>
           </a:p>
           <a:p>
             <a:pPr lvl="3"/>
             <a:r>
-              <a:rPr lang="en-US"/>
+              <a:rPr lang="en-US" smtClean="0"/>
               <a:t>Fourth level</a:t>
             </a:r>
           </a:p>
           <a:p>
             <a:pPr lvl="4"/>
             <a:r>
-              <a:rPr lang="en-US"/>
+              <a:rPr lang="en-US" smtClean="0"/>
               <a:t>Fifth level</a:t>
             </a:r>
+            <a:endParaRPr lang="en-US"/>
           </a:p>
         </p:txBody>
       </p:sp>
@@ -2765,7 +2244,7 @@
           <a:p>
             <a:pPr lvl="0"/>
             <a:r>
-              <a:rPr lang="en-US"/>
+              <a:rPr lang="en-US" smtClean="0"/>
               <a:t>Click to edit Master text styles</a:t>
             </a:r>
           </a:p>
@@ -2788,7 +2267,7 @@
           <a:p>
             <a:fld id="{5BCAD085-E8A6-8845-BD4E-CB4CCA059FC4}" type="datetimeFigureOut">
               <a:rPr lang="en-US" smtClean="0"/>
-              <a:t>8/27/2026</a:t>
+              <a:t>1/27/13</a:t>
             </a:fld>
             <a:endParaRPr lang="en-US"/>
           </a:p>
@@ -2891,9 +2370,10 @@
           </a:lstStyle>
           <a:p>
             <a:r>
-              <a:rPr lang="en-US"/>
+              <a:rPr lang="en-US" smtClean="0"/>
               <a:t>Click to edit Master title style</a:t>
             </a:r>
+            <a:endParaRPr lang="en-US"/>
           </a:p>
         </p:txBody>
       </p:sp>
@@ -3017,7 +2497,7 @@
           <a:p>
             <a:pPr lvl="0"/>
             <a:r>
-              <a:rPr lang="en-US"/>
+              <a:rPr lang="en-US" smtClean="0"/>
               <a:t>Click to edit Master text styles</a:t>
             </a:r>
           </a:p>
@@ -3040,7 +2520,7 @@
           <a:p>
             <a:fld id="{5BCAD085-E8A6-8845-BD4E-CB4CCA059FC4}" type="datetimeFigureOut">
               <a:rPr lang="en-US" smtClean="0"/>
-              <a:t>8/27/2026</a:t>
+              <a:t>1/27/13</a:t>
             </a:fld>
             <a:endParaRPr lang="en-US"/>
           </a:p>
@@ -3149,9 +2629,10 @@
           <a:lstStyle/>
           <a:p>
             <a:r>
-              <a:rPr lang="en-US"/>
+              <a:rPr lang="en-US" smtClean="0"/>
               <a:t>Click to edit Master title style</a:t>
             </a:r>
+            <a:endParaRPr lang="en-US"/>
           </a:p>
         </p:txBody>
       </p:sp>
@@ -3182,37 +2663,38 @@
           <a:p>
             <a:pPr lvl="0"/>
             <a:r>
-              <a:rPr lang="en-US"/>
+              <a:rPr lang="en-US" smtClean="0"/>
               <a:t>Click to edit Master text styles</a:t>
             </a:r>
           </a:p>
           <a:p>
             <a:pPr lvl="1"/>
             <a:r>
-              <a:rPr lang="en-US"/>
+              <a:rPr lang="en-US" smtClean="0"/>
               <a:t>Second level</a:t>
             </a:r>
           </a:p>
           <a:p>
             <a:pPr lvl="2"/>
             <a:r>
-              <a:rPr lang="en-US"/>
+              <a:rPr lang="en-US" smtClean="0"/>
               <a:t>Third level</a:t>
             </a:r>
           </a:p>
           <a:p>
             <a:pPr lvl="3"/>
             <a:r>
-              <a:rPr lang="en-US"/>
+              <a:rPr lang="en-US" smtClean="0"/>
               <a:t>Fourth level</a:t>
             </a:r>
           </a:p>
           <a:p>
             <a:pPr lvl="4"/>
             <a:r>
-              <a:rPr lang="en-US"/>
+              <a:rPr lang="en-US" smtClean="0"/>
               <a:t>Fifth level</a:t>
             </a:r>
+            <a:endParaRPr lang="en-US"/>
           </a:p>
         </p:txBody>
       </p:sp>
@@ -3251,7 +2733,7 @@
           <a:p>
             <a:fld id="{5BCAD085-E8A6-8845-BD4E-CB4CCA059FC4}" type="datetimeFigureOut">
               <a:rPr lang="en-US" smtClean="0"/>
-              <a:t>8/27/2026</a:t>
+              <a:t>1/27/13</a:t>
             </a:fld>
             <a:endParaRPr lang="en-US"/>
           </a:p>
@@ -3610,7 +3092,7 @@
 </file>
 
 <file path=ppt/slides/slide1.xml><?xml version="1.0" encoding="utf-8"?>
-<p:sld xmlns:a="http://schemas.openxmlformats.org/drawingml/2006/main" xmlns:r="http://schemas.openxmlformats.org/officeDocument/2006/relationships" xmlns:p="http://schemas.openxmlformats.org/presentationml/2006/main">
+<p:sld xmlns:a="http://schemas.openxmlformats.org/drawingml/2006/main" xmlns:p="http://schemas.openxmlformats.org/presentationml/2006/main" xmlns:r="http://schemas.openxmlformats.org/officeDocument/2006/relationships">
   <p:cSld>
     <p:spTree>
       <p:nvGrpSpPr>
@@ -3618,14 +3100,7 @@
         <p:cNvGrpSpPr/>
         <p:nvPr/>
       </p:nvGrpSpPr>
-      <p:grpSpPr>
-        <a:xfrm>
-          <a:off x="0" y="0"/>
-          <a:ext cx="0" cy="0"/>
-          <a:chOff x="0" y="0"/>
-          <a:chExt cx="0" cy="0"/>
-        </a:xfrm>
-      </p:grpSpPr>
+      <p:grpSpPr/>
       <p:sp>
         <p:nvSpPr>
           <p:cNvPr id="2" name="Rectangle 1"/>
@@ -3663,11 +3138,10 @@
           </a:fontRef>
         </p:style>
         <p:txBody>
-          <a:bodyPr wrap="square" rtlCol="0" anchor="ctr"/>
+          <a:bodyPr rtlCol="0" anchor="ctr" wrap="square"/>
           <a:lstStyle/>
           <a:p>
             <a:pPr algn="ctr"/>
-            <a:endParaRPr/>
           </a:p>
         </p:txBody>
       </p:sp>
@@ -3708,11 +3182,10 @@
           </a:fontRef>
         </p:style>
         <p:txBody>
-          <a:bodyPr wrap="square" rtlCol="0" anchor="ctr"/>
+          <a:bodyPr rtlCol="0" anchor="ctr" wrap="square"/>
           <a:lstStyle/>
           <a:p>
             <a:pPr algn="ctr"/>
-            <a:endParaRPr/>
           </a:p>
         </p:txBody>
       </p:sp>
@@ -3753,11 +3226,10 @@
           </a:fontRef>
         </p:style>
         <p:txBody>
-          <a:bodyPr wrap="square" rtlCol="0" anchor="ctr"/>
+          <a:bodyPr rtlCol="0" anchor="ctr" wrap="square"/>
           <a:lstStyle/>
           <a:p>
             <a:pPr algn="ctr"/>
-            <a:endParaRPr/>
           </a:p>
         </p:txBody>
       </p:sp>
@@ -3800,11 +3272,10 @@
           </a:fontRef>
         </p:style>
         <p:txBody>
-          <a:bodyPr wrap="square" rtlCol="0" anchor="ctr"/>
+          <a:bodyPr rtlCol="0" anchor="ctr" wrap="square"/>
           <a:lstStyle/>
           <a:p>
             <a:pPr algn="ctr"/>
-            <a:endParaRPr/>
           </a:p>
         </p:txBody>
       </p:sp>
@@ -3847,11 +3318,10 @@
           </a:fontRef>
         </p:style>
         <p:txBody>
-          <a:bodyPr wrap="square" rtlCol="0" anchor="ctr"/>
+          <a:bodyPr rtlCol="0" anchor="ctr" wrap="square"/>
           <a:lstStyle/>
           <a:p>
             <a:pPr algn="ctr"/>
-            <a:endParaRPr/>
           </a:p>
         </p:txBody>
       </p:sp>
@@ -4079,7 +3549,7 @@
 </file>
 
 <file path=ppt/slides/slide10.xml><?xml version="1.0" encoding="utf-8"?>
-<p:sld xmlns:a="http://schemas.openxmlformats.org/drawingml/2006/main" xmlns:r="http://schemas.openxmlformats.org/officeDocument/2006/relationships" xmlns:p="http://schemas.openxmlformats.org/presentationml/2006/main">
+<p:sld xmlns:a="http://schemas.openxmlformats.org/drawingml/2006/main" xmlns:p="http://schemas.openxmlformats.org/presentationml/2006/main" xmlns:r="http://schemas.openxmlformats.org/officeDocument/2006/relationships">
   <p:cSld>
     <p:spTree>
       <p:nvGrpSpPr>
@@ -4087,14 +3557,7 @@
         <p:cNvGrpSpPr/>
         <p:nvPr/>
       </p:nvGrpSpPr>
-      <p:grpSpPr>
-        <a:xfrm>
-          <a:off x="0" y="0"/>
-          <a:ext cx="0" cy="0"/>
-          <a:chOff x="0" y="0"/>
-          <a:chExt cx="0" cy="0"/>
-        </a:xfrm>
-      </p:grpSpPr>
+      <p:grpSpPr/>
       <p:sp>
         <p:nvSpPr>
           <p:cNvPr id="2" name="Rectangle 1"/>
@@ -4132,11 +3595,10 @@
           </a:fontRef>
         </p:style>
         <p:txBody>
-          <a:bodyPr wrap="square" rtlCol="0" anchor="ctr"/>
+          <a:bodyPr rtlCol="0" anchor="ctr" wrap="square"/>
           <a:lstStyle/>
           <a:p>
             <a:pPr algn="ctr"/>
-            <a:endParaRPr/>
           </a:p>
         </p:txBody>
       </p:sp>
@@ -4178,7 +3640,7 @@
                 <a:latin typeface="微软雅黑"/>
                 <a:ea typeface="微软雅黑"/>
               </a:rPr>
-              <a:t>技术栈</a:t>
+              <a:t>系统架构</a:t>
             </a:r>
           </a:p>
         </p:txBody>
@@ -4221,7 +3683,7 @@
                 <a:latin typeface="微软雅黑"/>
                 <a:ea typeface="微软雅黑"/>
               </a:rPr>
-              <a:t>10 / 13</a:t>
+              <a:t>10 / 14</a:t>
             </a:r>
           </a:p>
         </p:txBody>
@@ -4263,11 +3725,10 @@
           </a:fontRef>
         </p:style>
         <p:txBody>
-          <a:bodyPr wrap="square" rtlCol="0" anchor="ctr"/>
+          <a:bodyPr rtlCol="0" anchor="ctr" wrap="square"/>
           <a:lstStyle/>
           <a:p>
             <a:pPr algn="ctr"/>
-            <a:endParaRPr/>
           </a:p>
         </p:txBody>
       </p:sp>
@@ -4279,16 +3740,16 @@
         </p:nvSpPr>
         <p:spPr>
           <a:xfrm>
-            <a:off x="548640" y="1828800"/>
-            <a:ext cx="2697480" cy="3840480"/>
+            <a:off x="3566160" y="1554480"/>
+            <a:ext cx="5029200" cy="822960"/>
           </a:xfrm>
           <a:prstGeom prst="roundRect">
             <a:avLst>
-              <a:gd name="adj" fmla="val 6000"/>
+              <a:gd name="adj" fmla="val 12000"/>
             </a:avLst>
           </a:prstGeom>
           <a:solidFill>
-            <a:srgbClr val="EEF2FF"/>
+            <a:srgbClr val="4F46E5"/>
           </a:solidFill>
           <a:ln>
             <a:noFill/>
@@ -4310,11 +3771,10 @@
           </a:fontRef>
         </p:style>
         <p:txBody>
-          <a:bodyPr wrap="square" rtlCol="0" anchor="ctr"/>
+          <a:bodyPr rtlCol="0" anchor="ctr" wrap="square"/>
           <a:lstStyle/>
           <a:p>
             <a:pPr algn="ctr"/>
-            <a:endParaRPr/>
           </a:p>
         </p:txBody>
       </p:sp>
@@ -4326,162 +3786,57 @@
         </p:nvSpPr>
         <p:spPr>
           <a:xfrm>
-            <a:off x="777240" y="1993392"/>
-            <a:ext cx="2240280" cy="457200"/>
-          </a:xfrm>
-          <a:prstGeom prst="rect">
-            <a:avLst/>
-          </a:prstGeom>
-          <a:noFill/>
-        </p:spPr>
-        <p:txBody>
-          <a:bodyPr wrap="square" anchor="t">
-            <a:spAutoFit/>
-          </a:bodyPr>
-          <a:lstStyle/>
-          <a:p>
-            <a:pPr algn="l">
-              <a:lnSpc>
-                <a:spcPct val="112000"/>
-              </a:lnSpc>
-              <a:spcAft>
-                <a:spcPts val="500"/>
-              </a:spcAft>
-            </a:pPr>
-            <a:r>
-              <a:rPr sz="1800" b="1">
-                <a:solidFill>
-                  <a:srgbClr val="4F46E5"/>
-                </a:solidFill>
-                <a:latin typeface="微软雅黑"/>
-                <a:ea typeface="微软雅黑"/>
-              </a:rPr>
-              <a:t>前端</a:t>
-            </a:r>
-          </a:p>
-        </p:txBody>
-      </p:sp>
-      <p:sp>
-        <p:nvSpPr>
-          <p:cNvPr id="8" name="TextBox 7"/>
-          <p:cNvSpPr txBox="1"/>
-          <p:nvPr/>
-        </p:nvSpPr>
-        <p:spPr>
-          <a:xfrm>
-            <a:off x="777240" y="2487168"/>
-            <a:ext cx="2240280" cy="3017520"/>
-          </a:xfrm>
-          <a:prstGeom prst="rect">
-            <a:avLst/>
-          </a:prstGeom>
-          <a:noFill/>
-        </p:spPr>
-        <p:txBody>
-          <a:bodyPr wrap="square" anchor="t">
-            <a:spAutoFit/>
-          </a:bodyPr>
-          <a:lstStyle/>
-          <a:p>
-            <a:pPr algn="l">
-              <a:lnSpc>
-                <a:spcPct val="112000"/>
-              </a:lnSpc>
-              <a:spcAft>
-                <a:spcPts val="500"/>
-              </a:spcAft>
-            </a:pPr>
-            <a:r>
-              <a:rPr sz="1400" b="0">
-                <a:solidFill>
-                  <a:srgbClr val="1F2937"/>
-                </a:solidFill>
-                <a:latin typeface="微软雅黑"/>
-                <a:ea typeface="微软雅黑"/>
-              </a:rPr>
-              <a:t>Vue 3 + Vite</a:t>
-            </a:r>
-          </a:p>
-          <a:p>
-            <a:pPr algn="l">
-              <a:lnSpc>
-                <a:spcPct val="112000"/>
-              </a:lnSpc>
-              <a:spcAft>
-                <a:spcPts val="500"/>
-              </a:spcAft>
-            </a:pPr>
-            <a:r>
-              <a:rPr sz="1400" b="0">
-                <a:solidFill>
-                  <a:srgbClr val="1F2937"/>
-                </a:solidFill>
-                <a:latin typeface="微软雅黑"/>
-                <a:ea typeface="微软雅黑"/>
-              </a:rPr>
-              <a:t>Element Plus UI</a:t>
-            </a:r>
-          </a:p>
-          <a:p>
-            <a:pPr algn="l">
-              <a:lnSpc>
-                <a:spcPct val="112000"/>
-              </a:lnSpc>
-              <a:spcAft>
-                <a:spcPts val="500"/>
-              </a:spcAft>
-            </a:pPr>
-            <a:r>
-              <a:rPr sz="1400" b="0">
-                <a:solidFill>
-                  <a:srgbClr val="1F2937"/>
-                </a:solidFill>
-                <a:latin typeface="微软雅黑"/>
-                <a:ea typeface="微软雅黑"/>
-              </a:rPr>
-              <a:t>Pinia 状态管理</a:t>
-            </a:r>
-          </a:p>
-          <a:p>
-            <a:pPr algn="l">
-              <a:lnSpc>
-                <a:spcPct val="112000"/>
-              </a:lnSpc>
-              <a:spcAft>
-                <a:spcPts val="500"/>
-              </a:spcAft>
-            </a:pPr>
-            <a:r>
-              <a:rPr sz="1400" b="0">
-                <a:solidFill>
-                  <a:srgbClr val="1F2937"/>
-                </a:solidFill>
-                <a:latin typeface="微软雅黑"/>
-                <a:ea typeface="微软雅黑"/>
-              </a:rPr>
-              <a:t>marked + highlight.js</a:t>
-            </a:r>
-          </a:p>
-        </p:txBody>
-      </p:sp>
-      <p:sp>
-        <p:nvSpPr>
-          <p:cNvPr id="9" name="Rounded Rectangle 8"/>
+            <a:off x="3657600" y="1554480"/>
+            <a:ext cx="4846320" cy="822960"/>
+          </a:xfrm>
+          <a:prstGeom prst="rect">
+            <a:avLst/>
+          </a:prstGeom>
+          <a:noFill/>
+        </p:spPr>
+        <p:txBody>
+          <a:bodyPr wrap="square" anchor="ctr">
+            <a:spAutoFit/>
+          </a:bodyPr>
+          <a:lstStyle/>
+          <a:p>
+            <a:pPr algn="ctr">
+              <a:lnSpc>
+                <a:spcPct val="112000"/>
+              </a:lnSpc>
+              <a:spcAft>
+                <a:spcPts val="500"/>
+              </a:spcAft>
+            </a:pPr>
+            <a:r>
+              <a:rPr sz="1500" b="1">
+                <a:solidFill>
+                  <a:srgbClr val="FFFFFF"/>
+                </a:solidFill>
+                <a:latin typeface="微软雅黑"/>
+                <a:ea typeface="微软雅黑"/>
+              </a:rPr>
+              <a:t>前端  Vue3 · Vite · Element Plus</a:t>
+            </a:r>
+          </a:p>
+        </p:txBody>
+      </p:sp>
+      <p:sp>
+        <p:nvSpPr>
+          <p:cNvPr id="8" name="Down Arrow 7"/>
           <p:cNvSpPr/>
           <p:nvPr/>
         </p:nvSpPr>
         <p:spPr>
           <a:xfrm>
-            <a:off x="3364992" y="1828800"/>
-            <a:ext cx="2697480" cy="3840480"/>
-          </a:xfrm>
-          <a:prstGeom prst="roundRect">
-            <a:avLst>
-              <a:gd name="adj" fmla="val 6000"/>
-            </a:avLst>
+            <a:off x="5394960" y="2377440"/>
+            <a:ext cx="457200" cy="384048"/>
+          </a:xfrm>
+          <a:prstGeom prst="downArrow">
+            <a:avLst/>
           </a:prstGeom>
           <a:solidFill>
-            <a:srgbClr val="F3EFFF"/>
+            <a:srgbClr val="4F46E5"/>
           </a:solidFill>
           <a:ln>
             <a:noFill/>
@@ -4503,178 +3858,31 @@
           </a:fontRef>
         </p:style>
         <p:txBody>
-          <a:bodyPr wrap="square" rtlCol="0" anchor="ctr"/>
+          <a:bodyPr rtlCol="0" anchor="ctr" wrap="square"/>
           <a:lstStyle/>
           <a:p>
             <a:pPr algn="ctr"/>
-            <a:endParaRPr/>
-          </a:p>
-        </p:txBody>
-      </p:sp>
-      <p:sp>
-        <p:nvSpPr>
-          <p:cNvPr id="10" name="TextBox 9"/>
-          <p:cNvSpPr txBox="1"/>
-          <p:nvPr/>
-        </p:nvSpPr>
-        <p:spPr>
-          <a:xfrm>
-            <a:off x="3593592" y="1993392"/>
-            <a:ext cx="2240280" cy="457200"/>
-          </a:xfrm>
-          <a:prstGeom prst="rect">
-            <a:avLst/>
-          </a:prstGeom>
-          <a:noFill/>
-        </p:spPr>
-        <p:txBody>
-          <a:bodyPr wrap="square" anchor="t">
-            <a:spAutoFit/>
-          </a:bodyPr>
-          <a:lstStyle/>
-          <a:p>
-            <a:pPr algn="l">
-              <a:lnSpc>
-                <a:spcPct val="112000"/>
-              </a:lnSpc>
-              <a:spcAft>
-                <a:spcPts val="500"/>
-              </a:spcAft>
-            </a:pPr>
-            <a:r>
-              <a:rPr sz="1800" b="1">
-                <a:solidFill>
-                  <a:srgbClr val="7C3AED"/>
-                </a:solidFill>
-                <a:latin typeface="微软雅黑"/>
-                <a:ea typeface="微软雅黑"/>
-              </a:rPr>
-              <a:t>后端</a:t>
-            </a:r>
-          </a:p>
-        </p:txBody>
-      </p:sp>
-      <p:sp>
-        <p:nvSpPr>
-          <p:cNvPr id="11" name="TextBox 10"/>
-          <p:cNvSpPr txBox="1"/>
-          <p:nvPr/>
-        </p:nvSpPr>
-        <p:spPr>
-          <a:xfrm>
-            <a:off x="3593592" y="2487168"/>
-            <a:ext cx="2240280" cy="3017520"/>
-          </a:xfrm>
-          <a:prstGeom prst="rect">
-            <a:avLst/>
-          </a:prstGeom>
-          <a:noFill/>
-        </p:spPr>
-        <p:txBody>
-          <a:bodyPr wrap="square" anchor="t">
-            <a:spAutoFit/>
-          </a:bodyPr>
-          <a:lstStyle/>
-          <a:p>
-            <a:pPr algn="l">
-              <a:lnSpc>
-                <a:spcPct val="112000"/>
-              </a:lnSpc>
-              <a:spcAft>
-                <a:spcPts val="500"/>
-              </a:spcAft>
-            </a:pPr>
-            <a:r>
-              <a:rPr sz="1400" b="0">
-                <a:solidFill>
-                  <a:srgbClr val="1F2937"/>
-                </a:solidFill>
-                <a:latin typeface="微软雅黑"/>
-                <a:ea typeface="微软雅黑"/>
-              </a:rPr>
-              <a:t>Python + FastAPI</a:t>
-            </a:r>
-          </a:p>
-          <a:p>
-            <a:pPr algn="l">
-              <a:lnSpc>
-                <a:spcPct val="112000"/>
-              </a:lnSpc>
-              <a:spcAft>
-                <a:spcPts val="500"/>
-              </a:spcAft>
-            </a:pPr>
-            <a:r>
-              <a:rPr sz="1400" b="0">
-                <a:solidFill>
-                  <a:srgbClr val="1F2937"/>
-                </a:solidFill>
-                <a:latin typeface="微软雅黑"/>
-                <a:ea typeface="微软雅黑"/>
-              </a:rPr>
-              <a:t>SQLAlchemy + Pydantic</a:t>
-            </a:r>
-          </a:p>
-          <a:p>
-            <a:pPr algn="l">
-              <a:lnSpc>
-                <a:spcPct val="112000"/>
-              </a:lnSpc>
-              <a:spcAft>
-                <a:spcPts val="500"/>
-              </a:spcAft>
-            </a:pPr>
-            <a:r>
-              <a:rPr sz="1400" b="0">
-                <a:solidFill>
-                  <a:srgbClr val="1F2937"/>
-                </a:solidFill>
-                <a:latin typeface="微软雅黑"/>
-                <a:ea typeface="微软雅黑"/>
-              </a:rPr>
-              <a:t>Uvicorn 异步服务</a:t>
-            </a:r>
-          </a:p>
-          <a:p>
-            <a:pPr algn="l">
-              <a:lnSpc>
-                <a:spcPct val="112000"/>
-              </a:lnSpc>
-              <a:spcAft>
-                <a:spcPts val="500"/>
-              </a:spcAft>
-            </a:pPr>
-            <a:r>
-              <a:rPr sz="1400" b="0">
-                <a:solidFill>
-                  <a:srgbClr val="1F2937"/>
-                </a:solidFill>
-                <a:latin typeface="微软雅黑"/>
-                <a:ea typeface="微软雅黑"/>
-              </a:rPr>
-              <a:t>SSE 流式接口</a:t>
-            </a:r>
-          </a:p>
-        </p:txBody>
-      </p:sp>
-      <p:sp>
-        <p:nvSpPr>
-          <p:cNvPr id="12" name="Rounded Rectangle 11"/>
+          </a:p>
+        </p:txBody>
+      </p:sp>
+      <p:sp>
+        <p:nvSpPr>
+          <p:cNvPr id="9" name="Rounded Rectangle 8"/>
           <p:cNvSpPr/>
           <p:nvPr/>
         </p:nvSpPr>
         <p:spPr>
           <a:xfrm>
-            <a:off x="6181344" y="1828800"/>
-            <a:ext cx="2697480" cy="3840480"/>
+            <a:off x="3566160" y="2761488"/>
+            <a:ext cx="5029200" cy="822960"/>
           </a:xfrm>
           <a:prstGeom prst="roundRect">
             <a:avLst>
-              <a:gd name="adj" fmla="val 6000"/>
+              <a:gd name="adj" fmla="val 12000"/>
             </a:avLst>
           </a:prstGeom>
           <a:solidFill>
-            <a:srgbClr val="EAFBF3"/>
+            <a:srgbClr val="7C3AED"/>
           </a:solidFill>
           <a:ln>
             <a:noFill/>
@@ -4696,178 +3904,72 @@
           </a:fontRef>
         </p:style>
         <p:txBody>
-          <a:bodyPr wrap="square" rtlCol="0" anchor="ctr"/>
+          <a:bodyPr rtlCol="0" anchor="ctr" wrap="square"/>
           <a:lstStyle/>
           <a:p>
             <a:pPr algn="ctr"/>
-            <a:endParaRPr/>
-          </a:p>
-        </p:txBody>
-      </p:sp>
-      <p:sp>
-        <p:nvSpPr>
-          <p:cNvPr id="13" name="TextBox 12"/>
-          <p:cNvSpPr txBox="1"/>
-          <p:nvPr/>
-        </p:nvSpPr>
-        <p:spPr>
-          <a:xfrm>
-            <a:off x="6409944" y="1993392"/>
-            <a:ext cx="2240280" cy="457200"/>
-          </a:xfrm>
-          <a:prstGeom prst="rect">
-            <a:avLst/>
-          </a:prstGeom>
-          <a:noFill/>
-        </p:spPr>
-        <p:txBody>
-          <a:bodyPr wrap="square" anchor="t">
-            <a:spAutoFit/>
-          </a:bodyPr>
-          <a:lstStyle/>
-          <a:p>
-            <a:pPr algn="l">
-              <a:lnSpc>
-                <a:spcPct val="112000"/>
-              </a:lnSpc>
-              <a:spcAft>
-                <a:spcPts val="500"/>
-              </a:spcAft>
-            </a:pPr>
-            <a:r>
-              <a:rPr sz="1800" b="1">
-                <a:solidFill>
-                  <a:srgbClr val="10B981"/>
-                </a:solidFill>
-                <a:latin typeface="微软雅黑"/>
-                <a:ea typeface="微软雅黑"/>
-              </a:rPr>
-              <a:t>AI 与检索</a:t>
-            </a:r>
-          </a:p>
-        </p:txBody>
-      </p:sp>
-      <p:sp>
-        <p:nvSpPr>
-          <p:cNvPr id="14" name="TextBox 13"/>
-          <p:cNvSpPr txBox="1"/>
-          <p:nvPr/>
-        </p:nvSpPr>
-        <p:spPr>
-          <a:xfrm>
-            <a:off x="6409944" y="2487168"/>
-            <a:ext cx="2240280" cy="3017520"/>
-          </a:xfrm>
-          <a:prstGeom prst="rect">
-            <a:avLst/>
-          </a:prstGeom>
-          <a:noFill/>
-        </p:spPr>
-        <p:txBody>
-          <a:bodyPr wrap="square" anchor="t">
-            <a:spAutoFit/>
-          </a:bodyPr>
-          <a:lstStyle/>
-          <a:p>
-            <a:pPr algn="l">
-              <a:lnSpc>
-                <a:spcPct val="112000"/>
-              </a:lnSpc>
-              <a:spcAft>
-                <a:spcPts val="500"/>
-              </a:spcAft>
-            </a:pPr>
-            <a:r>
-              <a:rPr sz="1400" b="0">
-                <a:solidFill>
-                  <a:srgbClr val="1F2937"/>
-                </a:solidFill>
-                <a:latin typeface="微软雅黑"/>
-                <a:ea typeface="微软雅黑"/>
-              </a:rPr>
-              <a:t>DeepSeek-chat 大模型</a:t>
-            </a:r>
-          </a:p>
-          <a:p>
-            <a:pPr algn="l">
-              <a:lnSpc>
-                <a:spcPct val="112000"/>
-              </a:lnSpc>
-              <a:spcAft>
-                <a:spcPts val="500"/>
-              </a:spcAft>
-            </a:pPr>
-            <a:r>
-              <a:rPr sz="1400" b="0">
-                <a:solidFill>
-                  <a:srgbClr val="1F2937"/>
-                </a:solidFill>
-                <a:latin typeface="微软雅黑"/>
-                <a:ea typeface="微软雅黑"/>
-              </a:rPr>
-              <a:t>LangChain bind_tools</a:t>
-            </a:r>
-          </a:p>
-          <a:p>
-            <a:pPr algn="l">
-              <a:lnSpc>
-                <a:spcPct val="112000"/>
-              </a:lnSpc>
-              <a:spcAft>
-                <a:spcPts val="500"/>
-              </a:spcAft>
-            </a:pPr>
-            <a:r>
-              <a:rPr sz="1400" b="0">
-                <a:solidFill>
-                  <a:srgbClr val="1F2937"/>
-                </a:solidFill>
-                <a:latin typeface="微软雅黑"/>
-                <a:ea typeface="微软雅黑"/>
-              </a:rPr>
-              <a:t>Chroma 向量检索</a:t>
-            </a:r>
-          </a:p>
-          <a:p>
-            <a:pPr algn="l">
-              <a:lnSpc>
-                <a:spcPct val="112000"/>
-              </a:lnSpc>
-              <a:spcAft>
-                <a:spcPts val="500"/>
-              </a:spcAft>
-            </a:pPr>
-            <a:r>
-              <a:rPr sz="1400" b="0">
-                <a:solidFill>
-                  <a:srgbClr val="1F2937"/>
-                </a:solidFill>
-                <a:latin typeface="微软雅黑"/>
-                <a:ea typeface="微软雅黑"/>
-              </a:rPr>
-              <a:t>嵌入向量生成</a:t>
-            </a:r>
-          </a:p>
-        </p:txBody>
-      </p:sp>
-      <p:sp>
-        <p:nvSpPr>
-          <p:cNvPr id="15" name="Rounded Rectangle 14"/>
+          </a:p>
+        </p:txBody>
+      </p:sp>
+      <p:sp>
+        <p:nvSpPr>
+          <p:cNvPr id="10" name="TextBox 9"/>
+          <p:cNvSpPr txBox="1"/>
+          <p:nvPr/>
+        </p:nvSpPr>
+        <p:spPr>
+          <a:xfrm>
+            <a:off x="3657600" y="2761488"/>
+            <a:ext cx="4846320" cy="822960"/>
+          </a:xfrm>
+          <a:prstGeom prst="rect">
+            <a:avLst/>
+          </a:prstGeom>
+          <a:noFill/>
+        </p:spPr>
+        <p:txBody>
+          <a:bodyPr wrap="square" anchor="ctr">
+            <a:spAutoFit/>
+          </a:bodyPr>
+          <a:lstStyle/>
+          <a:p>
+            <a:pPr algn="ctr">
+              <a:lnSpc>
+                <a:spcPct val="112000"/>
+              </a:lnSpc>
+              <a:spcAft>
+                <a:spcPts val="500"/>
+              </a:spcAft>
+            </a:pPr>
+            <a:r>
+              <a:rPr sz="1500" b="1">
+                <a:solidFill>
+                  <a:srgbClr val="FFFFFF"/>
+                </a:solidFill>
+                <a:latin typeface="微软雅黑"/>
+                <a:ea typeface="微软雅黑"/>
+              </a:rPr>
+              <a:t>后端  FastAPI · SQLAlchemy · SSE 流式</a:t>
+            </a:r>
+          </a:p>
+        </p:txBody>
+      </p:sp>
+      <p:sp>
+        <p:nvSpPr>
+          <p:cNvPr id="11" name="Down Arrow 10"/>
           <p:cNvSpPr/>
           <p:nvPr/>
         </p:nvSpPr>
         <p:spPr>
           <a:xfrm>
-            <a:off x="8997696" y="1828800"/>
-            <a:ext cx="2697480" cy="3840480"/>
-          </a:xfrm>
-          <a:prstGeom prst="roundRect">
-            <a:avLst>
-              <a:gd name="adj" fmla="val 6000"/>
-            </a:avLst>
+            <a:off x="5394960" y="3584448"/>
+            <a:ext cx="457200" cy="384048"/>
+          </a:xfrm>
+          <a:prstGeom prst="downArrow">
+            <a:avLst/>
           </a:prstGeom>
           <a:solidFill>
-            <a:srgbClr val="FFF6E9"/>
+            <a:srgbClr val="4F46E5"/>
           </a:solidFill>
           <a:ln>
             <a:noFill/>
@@ -4889,24 +3991,426 @@
           </a:fontRef>
         </p:style>
         <p:txBody>
-          <a:bodyPr wrap="square" rtlCol="0" anchor="ctr"/>
+          <a:bodyPr rtlCol="0" anchor="ctr" wrap="square"/>
           <a:lstStyle/>
           <a:p>
             <a:pPr algn="ctr"/>
-            <a:endParaRPr/>
-          </a:p>
-        </p:txBody>
-      </p:sp>
-      <p:sp>
-        <p:nvSpPr>
-          <p:cNvPr id="16" name="TextBox 15"/>
-          <p:cNvSpPr txBox="1"/>
-          <p:nvPr/>
-        </p:nvSpPr>
-        <p:spPr>
-          <a:xfrm>
-            <a:off x="9226296" y="1993392"/>
-            <a:ext cx="2240280" cy="457200"/>
+          </a:p>
+        </p:txBody>
+      </p:sp>
+      <p:sp>
+        <p:nvSpPr>
+          <p:cNvPr id="12" name="Rounded Rectangle 11"/>
+          <p:cNvSpPr/>
+          <p:nvPr/>
+        </p:nvSpPr>
+        <p:spPr>
+          <a:xfrm>
+            <a:off x="822960" y="3968496"/>
+            <a:ext cx="3200400" cy="868680"/>
+          </a:xfrm>
+          <a:prstGeom prst="roundRect">
+            <a:avLst>
+              <a:gd name="adj" fmla="val 12000"/>
+            </a:avLst>
+          </a:prstGeom>
+          <a:solidFill>
+            <a:srgbClr val="3733A1"/>
+          </a:solidFill>
+          <a:ln>
+            <a:noFill/>
+          </a:ln>
+          <a:effectLst/>
+        </p:spPr>
+        <p:style>
+          <a:lnRef idx="1">
+            <a:schemeClr val="accent1"/>
+          </a:lnRef>
+          <a:fillRef idx="3">
+            <a:schemeClr val="accent1"/>
+          </a:fillRef>
+          <a:effectRef idx="2">
+            <a:schemeClr val="accent1"/>
+          </a:effectRef>
+          <a:fontRef idx="minor">
+            <a:schemeClr val="lt1"/>
+          </a:fontRef>
+        </p:style>
+        <p:txBody>
+          <a:bodyPr rtlCol="0" anchor="ctr" wrap="square"/>
+          <a:lstStyle/>
+          <a:p>
+            <a:pPr algn="ctr"/>
+          </a:p>
+        </p:txBody>
+      </p:sp>
+      <p:sp>
+        <p:nvSpPr>
+          <p:cNvPr id="13" name="TextBox 12"/>
+          <p:cNvSpPr txBox="1"/>
+          <p:nvPr/>
+        </p:nvSpPr>
+        <p:spPr>
+          <a:xfrm>
+            <a:off x="914400" y="3968496"/>
+            <a:ext cx="3017520" cy="868680"/>
+          </a:xfrm>
+          <a:prstGeom prst="rect">
+            <a:avLst/>
+          </a:prstGeom>
+          <a:noFill/>
+        </p:spPr>
+        <p:txBody>
+          <a:bodyPr wrap="square" anchor="ctr">
+            <a:spAutoFit/>
+          </a:bodyPr>
+          <a:lstStyle/>
+          <a:p>
+            <a:pPr algn="ctr">
+              <a:lnSpc>
+                <a:spcPct val="112000"/>
+              </a:lnSpc>
+              <a:spcAft>
+                <a:spcPts val="500"/>
+              </a:spcAft>
+            </a:pPr>
+            <a:r>
+              <a:rPr sz="1300" b="1">
+                <a:solidFill>
+                  <a:srgbClr val="FFFFFF"/>
+                </a:solidFill>
+                <a:latin typeface="微软雅黑"/>
+                <a:ea typeface="微软雅黑"/>
+              </a:rPr>
+              <a:t>MySQL
+用户 / 会话 / 文档</a:t>
+            </a:r>
+          </a:p>
+        </p:txBody>
+      </p:sp>
+      <p:sp>
+        <p:nvSpPr>
+          <p:cNvPr id="14" name="Rounded Rectangle 13"/>
+          <p:cNvSpPr/>
+          <p:nvPr/>
+        </p:nvSpPr>
+        <p:spPr>
+          <a:xfrm>
+            <a:off x="4480560" y="3968496"/>
+            <a:ext cx="3200400" cy="868680"/>
+          </a:xfrm>
+          <a:prstGeom prst="roundRect">
+            <a:avLst>
+              <a:gd name="adj" fmla="val 12000"/>
+            </a:avLst>
+          </a:prstGeom>
+          <a:solidFill>
+            <a:srgbClr val="3733A1"/>
+          </a:solidFill>
+          <a:ln>
+            <a:noFill/>
+          </a:ln>
+          <a:effectLst/>
+        </p:spPr>
+        <p:style>
+          <a:lnRef idx="1">
+            <a:schemeClr val="accent1"/>
+          </a:lnRef>
+          <a:fillRef idx="3">
+            <a:schemeClr val="accent1"/>
+          </a:fillRef>
+          <a:effectRef idx="2">
+            <a:schemeClr val="accent1"/>
+          </a:effectRef>
+          <a:fontRef idx="minor">
+            <a:schemeClr val="lt1"/>
+          </a:fontRef>
+        </p:style>
+        <p:txBody>
+          <a:bodyPr rtlCol="0" anchor="ctr" wrap="square"/>
+          <a:lstStyle/>
+          <a:p>
+            <a:pPr algn="ctr"/>
+          </a:p>
+        </p:txBody>
+      </p:sp>
+      <p:sp>
+        <p:nvSpPr>
+          <p:cNvPr id="15" name="TextBox 14"/>
+          <p:cNvSpPr txBox="1"/>
+          <p:nvPr/>
+        </p:nvSpPr>
+        <p:spPr>
+          <a:xfrm>
+            <a:off x="4572000" y="3968496"/>
+            <a:ext cx="3017520" cy="868680"/>
+          </a:xfrm>
+          <a:prstGeom prst="rect">
+            <a:avLst/>
+          </a:prstGeom>
+          <a:noFill/>
+        </p:spPr>
+        <p:txBody>
+          <a:bodyPr wrap="square" anchor="ctr">
+            <a:spAutoFit/>
+          </a:bodyPr>
+          <a:lstStyle/>
+          <a:p>
+            <a:pPr algn="ctr">
+              <a:lnSpc>
+                <a:spcPct val="112000"/>
+              </a:lnSpc>
+              <a:spcAft>
+                <a:spcPts val="500"/>
+              </a:spcAft>
+            </a:pPr>
+            <a:r>
+              <a:rPr sz="1300" b="1">
+                <a:solidFill>
+                  <a:srgbClr val="FFFFFF"/>
+                </a:solidFill>
+                <a:latin typeface="微软雅黑"/>
+                <a:ea typeface="微软雅黑"/>
+              </a:rPr>
+              <a:t>Redis
+缓存 / 限流计数</a:t>
+            </a:r>
+          </a:p>
+        </p:txBody>
+      </p:sp>
+      <p:sp>
+        <p:nvSpPr>
+          <p:cNvPr id="16" name="Rounded Rectangle 15"/>
+          <p:cNvSpPr/>
+          <p:nvPr/>
+        </p:nvSpPr>
+        <p:spPr>
+          <a:xfrm>
+            <a:off x="8138160" y="3968496"/>
+            <a:ext cx="3200400" cy="868680"/>
+          </a:xfrm>
+          <a:prstGeom prst="roundRect">
+            <a:avLst>
+              <a:gd name="adj" fmla="val 12000"/>
+            </a:avLst>
+          </a:prstGeom>
+          <a:solidFill>
+            <a:srgbClr val="3733A1"/>
+          </a:solidFill>
+          <a:ln>
+            <a:noFill/>
+          </a:ln>
+          <a:effectLst/>
+        </p:spPr>
+        <p:style>
+          <a:lnRef idx="1">
+            <a:schemeClr val="accent1"/>
+          </a:lnRef>
+          <a:fillRef idx="3">
+            <a:schemeClr val="accent1"/>
+          </a:fillRef>
+          <a:effectRef idx="2">
+            <a:schemeClr val="accent1"/>
+          </a:effectRef>
+          <a:fontRef idx="minor">
+            <a:schemeClr val="lt1"/>
+          </a:fontRef>
+        </p:style>
+        <p:txBody>
+          <a:bodyPr rtlCol="0" anchor="ctr" wrap="square"/>
+          <a:lstStyle/>
+          <a:p>
+            <a:pPr algn="ctr"/>
+          </a:p>
+        </p:txBody>
+      </p:sp>
+      <p:sp>
+        <p:nvSpPr>
+          <p:cNvPr id="17" name="TextBox 16"/>
+          <p:cNvSpPr txBox="1"/>
+          <p:nvPr/>
+        </p:nvSpPr>
+        <p:spPr>
+          <a:xfrm>
+            <a:off x="8229600" y="3968496"/>
+            <a:ext cx="3017520" cy="868680"/>
+          </a:xfrm>
+          <a:prstGeom prst="rect">
+            <a:avLst/>
+          </a:prstGeom>
+          <a:noFill/>
+        </p:spPr>
+        <p:txBody>
+          <a:bodyPr wrap="square" anchor="ctr">
+            <a:spAutoFit/>
+          </a:bodyPr>
+          <a:lstStyle/>
+          <a:p>
+            <a:pPr algn="ctr">
+              <a:lnSpc>
+                <a:spcPct val="112000"/>
+              </a:lnSpc>
+              <a:spcAft>
+                <a:spcPts val="500"/>
+              </a:spcAft>
+            </a:pPr>
+            <a:r>
+              <a:rPr sz="1300" b="1">
+                <a:solidFill>
+                  <a:srgbClr val="FFFFFF"/>
+                </a:solidFill>
+                <a:latin typeface="微软雅黑"/>
+                <a:ea typeface="微软雅黑"/>
+              </a:rPr>
+              <a:t>Chroma 向量库
+文档嵌入检索</a:t>
+            </a:r>
+          </a:p>
+        </p:txBody>
+      </p:sp>
+      <p:sp>
+        <p:nvSpPr>
+          <p:cNvPr id="18" name="Down Arrow 17"/>
+          <p:cNvSpPr/>
+          <p:nvPr/>
+        </p:nvSpPr>
+        <p:spPr>
+          <a:xfrm>
+            <a:off x="5394960" y="4846320"/>
+            <a:ext cx="457200" cy="384048"/>
+          </a:xfrm>
+          <a:prstGeom prst="downArrow">
+            <a:avLst/>
+          </a:prstGeom>
+          <a:solidFill>
+            <a:srgbClr val="4F46E5"/>
+          </a:solidFill>
+          <a:ln>
+            <a:noFill/>
+          </a:ln>
+          <a:effectLst/>
+        </p:spPr>
+        <p:style>
+          <a:lnRef idx="1">
+            <a:schemeClr val="accent1"/>
+          </a:lnRef>
+          <a:fillRef idx="3">
+            <a:schemeClr val="accent1"/>
+          </a:fillRef>
+          <a:effectRef idx="2">
+            <a:schemeClr val="accent1"/>
+          </a:effectRef>
+          <a:fontRef idx="minor">
+            <a:schemeClr val="lt1"/>
+          </a:fontRef>
+        </p:style>
+        <p:txBody>
+          <a:bodyPr rtlCol="0" anchor="ctr" wrap="square"/>
+          <a:lstStyle/>
+          <a:p>
+            <a:pPr algn="ctr"/>
+          </a:p>
+        </p:txBody>
+      </p:sp>
+      <p:sp>
+        <p:nvSpPr>
+          <p:cNvPr id="19" name="Rounded Rectangle 18"/>
+          <p:cNvSpPr/>
+          <p:nvPr/>
+        </p:nvSpPr>
+        <p:spPr>
+          <a:xfrm>
+            <a:off x="3566160" y="5230368"/>
+            <a:ext cx="5029200" cy="868680"/>
+          </a:xfrm>
+          <a:prstGeom prst="roundRect">
+            <a:avLst>
+              <a:gd name="adj" fmla="val 12000"/>
+            </a:avLst>
+          </a:prstGeom>
+          <a:solidFill>
+            <a:srgbClr val="10B981"/>
+          </a:solidFill>
+          <a:ln>
+            <a:noFill/>
+          </a:ln>
+          <a:effectLst/>
+        </p:spPr>
+        <p:style>
+          <a:lnRef idx="1">
+            <a:schemeClr val="accent1"/>
+          </a:lnRef>
+          <a:fillRef idx="3">
+            <a:schemeClr val="accent1"/>
+          </a:fillRef>
+          <a:effectRef idx="2">
+            <a:schemeClr val="accent1"/>
+          </a:effectRef>
+          <a:fontRef idx="minor">
+            <a:schemeClr val="lt1"/>
+          </a:fontRef>
+        </p:style>
+        <p:txBody>
+          <a:bodyPr rtlCol="0" anchor="ctr" wrap="square"/>
+          <a:lstStyle/>
+          <a:p>
+            <a:pPr algn="ctr"/>
+          </a:p>
+        </p:txBody>
+      </p:sp>
+      <p:sp>
+        <p:nvSpPr>
+          <p:cNvPr id="20" name="TextBox 19"/>
+          <p:cNvSpPr txBox="1"/>
+          <p:nvPr/>
+        </p:nvSpPr>
+        <p:spPr>
+          <a:xfrm>
+            <a:off x="3657600" y="5230368"/>
+            <a:ext cx="4846320" cy="868680"/>
+          </a:xfrm>
+          <a:prstGeom prst="rect">
+            <a:avLst/>
+          </a:prstGeom>
+          <a:noFill/>
+        </p:spPr>
+        <p:txBody>
+          <a:bodyPr wrap="square" anchor="ctr">
+            <a:spAutoFit/>
+          </a:bodyPr>
+          <a:lstStyle/>
+          <a:p>
+            <a:pPr algn="ctr">
+              <a:lnSpc>
+                <a:spcPct val="112000"/>
+              </a:lnSpc>
+              <a:spcAft>
+                <a:spcPts val="500"/>
+              </a:spcAft>
+            </a:pPr>
+            <a:r>
+              <a:rPr sz="1400" b="1">
+                <a:solidFill>
+                  <a:srgbClr val="FFFFFF"/>
+                </a:solidFill>
+                <a:latin typeface="微软雅黑"/>
+                <a:ea typeface="微软雅黑"/>
+              </a:rPr>
+              <a:t>DeepSeek LLM · 博查搜索 · 工具 API</a:t>
+            </a:r>
+          </a:p>
+        </p:txBody>
+      </p:sp>
+      <p:sp>
+        <p:nvSpPr>
+          <p:cNvPr id="21" name="TextBox 20"/>
+          <p:cNvSpPr txBox="1"/>
+          <p:nvPr/>
+        </p:nvSpPr>
+        <p:spPr>
+          <a:xfrm>
+            <a:off x="548640" y="6309360"/>
+            <a:ext cx="11064240" cy="457200"/>
           </a:xfrm>
           <a:prstGeom prst="rect">
             <a:avLst/>
@@ -4928,124 +4432,21 @@
               </a:spcAft>
             </a:pPr>
             <a:r>
-              <a:rPr sz="1800" b="1">
-                <a:solidFill>
-                  <a:srgbClr val="F59E0B"/>
-                </a:solidFill>
-                <a:latin typeface="微软雅黑"/>
-                <a:ea typeface="微软雅黑"/>
-              </a:rPr>
-              <a:t>数据与部署</a:t>
-            </a:r>
-          </a:p>
-        </p:txBody>
-      </p:sp>
-      <p:sp>
-        <p:nvSpPr>
-          <p:cNvPr id="17" name="TextBox 16"/>
-          <p:cNvSpPr txBox="1"/>
-          <p:nvPr/>
-        </p:nvSpPr>
-        <p:spPr>
-          <a:xfrm>
-            <a:off x="9226296" y="2487168"/>
-            <a:ext cx="2240280" cy="3017520"/>
-          </a:xfrm>
-          <a:prstGeom prst="rect">
-            <a:avLst/>
-          </a:prstGeom>
-          <a:noFill/>
-        </p:spPr>
-        <p:txBody>
-          <a:bodyPr wrap="square" anchor="t">
-            <a:spAutoFit/>
-          </a:bodyPr>
-          <a:lstStyle/>
-          <a:p>
-            <a:pPr algn="l">
-              <a:lnSpc>
-                <a:spcPct val="112000"/>
-              </a:lnSpc>
-              <a:spcAft>
-                <a:spcPts val="500"/>
-              </a:spcAft>
-            </a:pPr>
-            <a:r>
               <a:rPr sz="1400" b="0">
                 <a:solidFill>
-                  <a:srgbClr val="1F2937"/>
-                </a:solidFill>
-                <a:latin typeface="微软雅黑"/>
-                <a:ea typeface="微软雅黑"/>
-              </a:rPr>
-              <a:t>MySQL 8 / Redis 7</a:t>
-            </a:r>
-          </a:p>
-          <a:p>
-            <a:pPr algn="l">
-              <a:lnSpc>
-                <a:spcPct val="112000"/>
-              </a:lnSpc>
-              <a:spcAft>
-                <a:spcPts val="500"/>
-              </a:spcAft>
-            </a:pPr>
-            <a:r>
-              <a:rPr sz="1400" b="0">
-                <a:solidFill>
-                  <a:srgbClr val="1F2937"/>
-                </a:solidFill>
-                <a:latin typeface="微软雅黑"/>
-                <a:ea typeface="微软雅黑"/>
-              </a:rPr>
-              <a:t>Docker Compose</a:t>
-            </a:r>
-          </a:p>
-          <a:p>
-            <a:pPr algn="l">
-              <a:lnSpc>
-                <a:spcPct val="112000"/>
-              </a:lnSpc>
-              <a:spcAft>
-                <a:spcPts val="500"/>
-              </a:spcAft>
-            </a:pPr>
-            <a:r>
-              <a:rPr sz="1400" b="0">
-                <a:solidFill>
-                  <a:srgbClr val="1F2937"/>
-                </a:solidFill>
-                <a:latin typeface="微软雅黑"/>
-                <a:ea typeface="微软雅黑"/>
-              </a:rPr>
-              <a:t>一键启动脚本</a:t>
-            </a:r>
-          </a:p>
-          <a:p>
-            <a:pPr algn="l">
-              <a:lnSpc>
-                <a:spcPct val="112000"/>
-              </a:lnSpc>
-              <a:spcAft>
-                <a:spcPts val="500"/>
-              </a:spcAft>
-            </a:pPr>
-            <a:r>
-              <a:rPr sz="1400" b="0">
-                <a:solidFill>
-                  <a:srgbClr val="1F2937"/>
-                </a:solidFill>
-                <a:latin typeface="微软雅黑"/>
-                <a:ea typeface="微软雅黑"/>
-              </a:rPr>
-              <a:t>PWA 离线支持</a:t>
-            </a:r>
-          </a:p>
-        </p:txBody>
-      </p:sp>
-      <p:sp>
-        <p:nvSpPr>
-          <p:cNvPr id="18" name="TextBox 17"/>
+                  <a:srgbClr val="6B7280"/>
+                </a:solidFill>
+                <a:latin typeface="微软雅黑"/>
+                <a:ea typeface="微软雅黑"/>
+              </a:rPr>
+              <a:t>部署：Docker Compose 编排数据层（MySQL + Redis + Chroma），一键启动脚本拉起全部服务。</a:t>
+            </a:r>
+          </a:p>
+        </p:txBody>
+      </p:sp>
+      <p:sp>
+        <p:nvSpPr>
+          <p:cNvPr id="22" name="TextBox 21"/>
           <p:cNvSpPr txBox="1"/>
           <p:nvPr/>
         </p:nvSpPr>
@@ -5095,7 +4496,7 @@
 </file>
 
 <file path=ppt/slides/slide11.xml><?xml version="1.0" encoding="utf-8"?>
-<p:sld xmlns:a="http://schemas.openxmlformats.org/drawingml/2006/main" xmlns:r="http://schemas.openxmlformats.org/officeDocument/2006/relationships" xmlns:p="http://schemas.openxmlformats.org/presentationml/2006/main">
+<p:sld xmlns:a="http://schemas.openxmlformats.org/drawingml/2006/main" xmlns:p="http://schemas.openxmlformats.org/presentationml/2006/main" xmlns:r="http://schemas.openxmlformats.org/officeDocument/2006/relationships">
   <p:cSld>
     <p:spTree>
       <p:nvGrpSpPr>
@@ -5103,14 +4504,7 @@
         <p:cNvGrpSpPr/>
         <p:nvPr/>
       </p:nvGrpSpPr>
-      <p:grpSpPr>
-        <a:xfrm>
-          <a:off x="0" y="0"/>
-          <a:ext cx="0" cy="0"/>
-          <a:chOff x="0" y="0"/>
-          <a:chExt cx="0" cy="0"/>
-        </a:xfrm>
-      </p:grpSpPr>
+      <p:grpSpPr/>
       <p:sp>
         <p:nvSpPr>
           <p:cNvPr id="2" name="Rectangle 1"/>
@@ -5148,11 +4542,10 @@
           </a:fontRef>
         </p:style>
         <p:txBody>
-          <a:bodyPr wrap="square" rtlCol="0" anchor="ctr"/>
+          <a:bodyPr rtlCol="0" anchor="ctr" wrap="square"/>
           <a:lstStyle/>
           <a:p>
             <a:pPr algn="ctr"/>
-            <a:endParaRPr/>
           </a:p>
         </p:txBody>
       </p:sp>
@@ -5194,7 +4587,7 @@
                 <a:latin typeface="微软雅黑"/>
                 <a:ea typeface="微软雅黑"/>
               </a:rPr>
-              <a:t>安全与健壮性设计</a:t>
+              <a:t>技术栈</a:t>
             </a:r>
           </a:p>
         </p:txBody>
@@ -5237,7 +4630,7 @@
                 <a:latin typeface="微软雅黑"/>
                 <a:ea typeface="微软雅黑"/>
               </a:rPr>
-              <a:t>11 / 13</a:t>
+              <a:t>11 / 14</a:t>
             </a:r>
           </a:p>
         </p:txBody>
@@ -5279,11 +4672,10 @@
           </a:fontRef>
         </p:style>
         <p:txBody>
-          <a:bodyPr wrap="square" rtlCol="0" anchor="ctr"/>
+          <a:bodyPr rtlCol="0" anchor="ctr" wrap="square"/>
           <a:lstStyle/>
           <a:p>
             <a:pPr algn="ctr"/>
-            <a:endParaRPr/>
           </a:p>
         </p:txBody>
       </p:sp>
@@ -5295,8 +4687,8 @@
         </p:nvSpPr>
         <p:spPr>
           <a:xfrm>
-            <a:off x="548640" y="1737360"/>
-            <a:ext cx="5486400" cy="4206240"/>
+            <a:off x="548640" y="1828800"/>
+            <a:ext cx="2697480" cy="3840480"/>
           </a:xfrm>
           <a:prstGeom prst="roundRect">
             <a:avLst>
@@ -5326,11 +4718,10 @@
           </a:fontRef>
         </p:style>
         <p:txBody>
-          <a:bodyPr wrap="square" rtlCol="0" anchor="ctr"/>
+          <a:bodyPr rtlCol="0" anchor="ctr" wrap="square"/>
           <a:lstStyle/>
           <a:p>
             <a:pPr algn="ctr"/>
-            <a:endParaRPr/>
           </a:p>
         </p:txBody>
       </p:sp>
@@ -5342,8 +4733,8 @@
         </p:nvSpPr>
         <p:spPr>
           <a:xfrm>
-            <a:off x="777240" y="1901952"/>
-            <a:ext cx="5029200" cy="457200"/>
+            <a:off x="777240" y="1993392"/>
+            <a:ext cx="2240280" cy="457200"/>
           </a:xfrm>
           <a:prstGeom prst="rect">
             <a:avLst/>
@@ -5372,7 +4763,7 @@
                 <a:latin typeface="微软雅黑"/>
                 <a:ea typeface="微软雅黑"/>
               </a:rPr>
-              <a:t>安全</a:t>
+              <a:t>前端</a:t>
             </a:r>
           </a:p>
         </p:txBody>
@@ -5385,8 +4776,8 @@
         </p:nvSpPr>
         <p:spPr>
           <a:xfrm>
-            <a:off x="777240" y="2395728"/>
-            <a:ext cx="5029200" cy="3383279"/>
+            <a:off x="777240" y="2487168"/>
+            <a:ext cx="2240280" cy="3017520"/>
           </a:xfrm>
           <a:prstGeom prst="rect">
             <a:avLst/>
@@ -5408,74 +4799,74 @@
               </a:spcAft>
             </a:pPr>
             <a:r>
-              <a:rPr sz="1500" b="0">
+              <a:rPr sz="1400" b="0">
                 <a:solidFill>
                   <a:srgbClr val="1F2937"/>
                 </a:solidFill>
                 <a:latin typeface="微软雅黑"/>
                 <a:ea typeface="微软雅黑"/>
               </a:rPr>
-              <a:t>•  JWT 令牌认证，token 存 sessionStorage 防 XSS</a:t>
-            </a:r>
-          </a:p>
-          <a:p>
-            <a:pPr algn="l">
-              <a:lnSpc>
-                <a:spcPct val="112000"/>
-              </a:lnSpc>
-              <a:spcAft>
-                <a:spcPts val="500"/>
-              </a:spcAft>
-            </a:pPr>
-            <a:r>
-              <a:rPr sz="1500" b="0">
+              <a:t>Vue 3 + Vite</a:t>
+            </a:r>
+          </a:p>
+          <a:p>
+            <a:pPr algn="l">
+              <a:lnSpc>
+                <a:spcPct val="112000"/>
+              </a:lnSpc>
+              <a:spcAft>
+                <a:spcPts val="500"/>
+              </a:spcAft>
+            </a:pPr>
+            <a:r>
+              <a:rPr sz="1400" b="0">
                 <a:solidFill>
                   <a:srgbClr val="1F2937"/>
                 </a:solidFill>
                 <a:latin typeface="微软雅黑"/>
                 <a:ea typeface="微软雅黑"/>
               </a:rPr>
-              <a:t>•  密码 bcrypt 加密存储</a:t>
-            </a:r>
-          </a:p>
-          <a:p>
-            <a:pPr algn="l">
-              <a:lnSpc>
-                <a:spcPct val="112000"/>
-              </a:lnSpc>
-              <a:spcAft>
-                <a:spcPts val="500"/>
-              </a:spcAft>
-            </a:pPr>
-            <a:r>
-              <a:rPr sz="1500" b="0">
+              <a:t>Element Plus UI</a:t>
+            </a:r>
+          </a:p>
+          <a:p>
+            <a:pPr algn="l">
+              <a:lnSpc>
+                <a:spcPct val="112000"/>
+              </a:lnSpc>
+              <a:spcAft>
+                <a:spcPts val="500"/>
+              </a:spcAft>
+            </a:pPr>
+            <a:r>
+              <a:rPr sz="1400" b="0">
                 <a:solidFill>
                   <a:srgbClr val="1F2937"/>
                 </a:solidFill>
                 <a:latin typeface="微软雅黑"/>
                 <a:ea typeface="微软雅黑"/>
               </a:rPr>
-              <a:t>•  接口限流 + 登录防爆破</a:t>
-            </a:r>
-          </a:p>
-          <a:p>
-            <a:pPr algn="l">
-              <a:lnSpc>
-                <a:spcPct val="112000"/>
-              </a:lnSpc>
-              <a:spcAft>
-                <a:spcPts val="500"/>
-              </a:spcAft>
-            </a:pPr>
-            <a:r>
-              <a:rPr sz="1500" b="0">
+              <a:t>Pinia 状态管理</a:t>
+            </a:r>
+          </a:p>
+          <a:p>
+            <a:pPr algn="l">
+              <a:lnSpc>
+                <a:spcPct val="112000"/>
+              </a:lnSpc>
+              <a:spcAft>
+                <a:spcPts val="500"/>
+              </a:spcAft>
+            </a:pPr>
+            <a:r>
+              <a:rPr sz="1400" b="0">
                 <a:solidFill>
                   <a:srgbClr val="1F2937"/>
                 </a:solidFill>
                 <a:latin typeface="微软雅黑"/>
                 <a:ea typeface="微软雅黑"/>
               </a:rPr>
-              <a:t>•  敏感词过滤，拦截违规内容</a:t>
+              <a:t>marked + highlight.js</a:t>
             </a:r>
           </a:p>
         </p:txBody>
@@ -5488,8 +4879,8 @@
         </p:nvSpPr>
         <p:spPr>
           <a:xfrm>
-            <a:off x="6309360" y="1737360"/>
-            <a:ext cx="5394960" cy="4206240"/>
+            <a:off x="3364992" y="1828800"/>
+            <a:ext cx="2697480" cy="3840480"/>
           </a:xfrm>
           <a:prstGeom prst="roundRect">
             <a:avLst>
@@ -5519,11 +4910,10 @@
           </a:fontRef>
         </p:style>
         <p:txBody>
-          <a:bodyPr wrap="square" rtlCol="0" anchor="ctr"/>
+          <a:bodyPr rtlCol="0" anchor="ctr" wrap="square"/>
           <a:lstStyle/>
           <a:p>
             <a:pPr algn="ctr"/>
-            <a:endParaRPr/>
           </a:p>
         </p:txBody>
       </p:sp>
@@ -5535,8 +4925,8 @@
         </p:nvSpPr>
         <p:spPr>
           <a:xfrm>
-            <a:off x="6537960" y="1901952"/>
-            <a:ext cx="4937760" cy="457200"/>
+            <a:off x="3593592" y="1993392"/>
+            <a:ext cx="2240280" cy="457200"/>
           </a:xfrm>
           <a:prstGeom prst="rect">
             <a:avLst/>
@@ -5565,7 +4955,7 @@
                 <a:latin typeface="微软雅黑"/>
                 <a:ea typeface="微软雅黑"/>
               </a:rPr>
-              <a:t>健壮性</a:t>
+              <a:t>后端</a:t>
             </a:r>
           </a:p>
         </p:txBody>
@@ -5578,8 +4968,8 @@
         </p:nvSpPr>
         <p:spPr>
           <a:xfrm>
-            <a:off x="6537960" y="2395728"/>
-            <a:ext cx="4937760" cy="3383279"/>
+            <a:off x="3593592" y="2487168"/>
+            <a:ext cx="2240280" cy="3017520"/>
           </a:xfrm>
           <a:prstGeom prst="rect">
             <a:avLst/>
@@ -5601,81 +4991,465 @@
               </a:spcAft>
             </a:pPr>
             <a:r>
-              <a:rPr sz="1500" b="0">
+              <a:rPr sz="1400" b="0">
                 <a:solidFill>
                   <a:srgbClr val="1F2937"/>
                 </a:solidFill>
                 <a:latin typeface="微软雅黑"/>
                 <a:ea typeface="微软雅黑"/>
               </a:rPr>
-              <a:t>•  账号 5 次 / 10 分钟、IP 20 次 / 10 分钟登录限制</a:t>
-            </a:r>
-          </a:p>
-          <a:p>
-            <a:pPr algn="l">
-              <a:lnSpc>
-                <a:spcPct val="112000"/>
-              </a:lnSpc>
-              <a:spcAft>
-                <a:spcPts val="500"/>
-              </a:spcAft>
-            </a:pPr>
-            <a:r>
-              <a:rPr sz="1500" b="0">
+              <a:t>Python + FastAPI</a:t>
+            </a:r>
+          </a:p>
+          <a:p>
+            <a:pPr algn="l">
+              <a:lnSpc>
+                <a:spcPct val="112000"/>
+              </a:lnSpc>
+              <a:spcAft>
+                <a:spcPts val="500"/>
+              </a:spcAft>
+            </a:pPr>
+            <a:r>
+              <a:rPr sz="1400" b="0">
                 <a:solidFill>
                   <a:srgbClr val="1F2937"/>
                 </a:solidFill>
                 <a:latin typeface="微软雅黑"/>
                 <a:ea typeface="微软雅黑"/>
               </a:rPr>
-              <a:t>•  全局单 IP 300 次 / 分钟限流</a:t>
-            </a:r>
-          </a:p>
-          <a:p>
-            <a:pPr algn="l">
-              <a:lnSpc>
-                <a:spcPct val="112000"/>
-              </a:lnSpc>
-              <a:spcAft>
-                <a:spcPts val="500"/>
-              </a:spcAft>
-            </a:pPr>
-            <a:r>
-              <a:rPr sz="1500" b="0">
+              <a:t>SQLAlchemy + Pydantic</a:t>
+            </a:r>
+          </a:p>
+          <a:p>
+            <a:pPr algn="l">
+              <a:lnSpc>
+                <a:spcPct val="112000"/>
+              </a:lnSpc>
+              <a:spcAft>
+                <a:spcPts val="500"/>
+              </a:spcAft>
+            </a:pPr>
+            <a:r>
+              <a:rPr sz="1400" b="0">
                 <a:solidFill>
                   <a:srgbClr val="1F2937"/>
                 </a:solidFill>
                 <a:latin typeface="微软雅黑"/>
                 <a:ea typeface="微软雅黑"/>
               </a:rPr>
-              <a:t>•  长对话上下文自动截断，防 token 超限</a:t>
-            </a:r>
-          </a:p>
-          <a:p>
-            <a:pPr algn="l">
-              <a:lnSpc>
-                <a:spcPct val="112000"/>
-              </a:lnSpc>
-              <a:spcAft>
-                <a:spcPts val="500"/>
-              </a:spcAft>
-            </a:pPr>
-            <a:r>
-              <a:rPr sz="1500" b="0">
+              <a:t>Uvicorn 异步服务</a:t>
+            </a:r>
+          </a:p>
+          <a:p>
+            <a:pPr algn="l">
+              <a:lnSpc>
+                <a:spcPct val="112000"/>
+              </a:lnSpc>
+              <a:spcAft>
+                <a:spcPts val="500"/>
+              </a:spcAft>
+            </a:pPr>
+            <a:r>
+              <a:rPr sz="1400" b="0">
                 <a:solidFill>
                   <a:srgbClr val="1F2937"/>
                 </a:solidFill>
                 <a:latin typeface="微软雅黑"/>
                 <a:ea typeface="微软雅黑"/>
               </a:rPr>
-              <a:t>•  工具名去重合并，避免 LLM 400 报错</a:t>
-            </a:r>
-          </a:p>
-        </p:txBody>
-      </p:sp>
-      <p:sp>
-        <p:nvSpPr>
-          <p:cNvPr id="12" name="TextBox 11"/>
+              <a:t>SSE 流式接口</a:t>
+            </a:r>
+          </a:p>
+        </p:txBody>
+      </p:sp>
+      <p:sp>
+        <p:nvSpPr>
+          <p:cNvPr id="12" name="Rounded Rectangle 11"/>
+          <p:cNvSpPr/>
+          <p:nvPr/>
+        </p:nvSpPr>
+        <p:spPr>
+          <a:xfrm>
+            <a:off x="6181344" y="1828800"/>
+            <a:ext cx="2697480" cy="3840480"/>
+          </a:xfrm>
+          <a:prstGeom prst="roundRect">
+            <a:avLst>
+              <a:gd name="adj" fmla="val 6000"/>
+            </a:avLst>
+          </a:prstGeom>
+          <a:solidFill>
+            <a:srgbClr val="EAFBF3"/>
+          </a:solidFill>
+          <a:ln>
+            <a:noFill/>
+          </a:ln>
+          <a:effectLst/>
+        </p:spPr>
+        <p:style>
+          <a:lnRef idx="1">
+            <a:schemeClr val="accent1"/>
+          </a:lnRef>
+          <a:fillRef idx="3">
+            <a:schemeClr val="accent1"/>
+          </a:fillRef>
+          <a:effectRef idx="2">
+            <a:schemeClr val="accent1"/>
+          </a:effectRef>
+          <a:fontRef idx="minor">
+            <a:schemeClr val="lt1"/>
+          </a:fontRef>
+        </p:style>
+        <p:txBody>
+          <a:bodyPr rtlCol="0" anchor="ctr" wrap="square"/>
+          <a:lstStyle/>
+          <a:p>
+            <a:pPr algn="ctr"/>
+          </a:p>
+        </p:txBody>
+      </p:sp>
+      <p:sp>
+        <p:nvSpPr>
+          <p:cNvPr id="13" name="TextBox 12"/>
+          <p:cNvSpPr txBox="1"/>
+          <p:nvPr/>
+        </p:nvSpPr>
+        <p:spPr>
+          <a:xfrm>
+            <a:off x="6409944" y="1993392"/>
+            <a:ext cx="2240280" cy="457200"/>
+          </a:xfrm>
+          <a:prstGeom prst="rect">
+            <a:avLst/>
+          </a:prstGeom>
+          <a:noFill/>
+        </p:spPr>
+        <p:txBody>
+          <a:bodyPr wrap="square" anchor="t">
+            <a:spAutoFit/>
+          </a:bodyPr>
+          <a:lstStyle/>
+          <a:p>
+            <a:pPr algn="l">
+              <a:lnSpc>
+                <a:spcPct val="112000"/>
+              </a:lnSpc>
+              <a:spcAft>
+                <a:spcPts val="500"/>
+              </a:spcAft>
+            </a:pPr>
+            <a:r>
+              <a:rPr sz="1800" b="1">
+                <a:solidFill>
+                  <a:srgbClr val="10B981"/>
+                </a:solidFill>
+                <a:latin typeface="微软雅黑"/>
+                <a:ea typeface="微软雅黑"/>
+              </a:rPr>
+              <a:t>AI 与检索</a:t>
+            </a:r>
+          </a:p>
+        </p:txBody>
+      </p:sp>
+      <p:sp>
+        <p:nvSpPr>
+          <p:cNvPr id="14" name="TextBox 13"/>
+          <p:cNvSpPr txBox="1"/>
+          <p:nvPr/>
+        </p:nvSpPr>
+        <p:spPr>
+          <a:xfrm>
+            <a:off x="6409944" y="2487168"/>
+            <a:ext cx="2240280" cy="3017520"/>
+          </a:xfrm>
+          <a:prstGeom prst="rect">
+            <a:avLst/>
+          </a:prstGeom>
+          <a:noFill/>
+        </p:spPr>
+        <p:txBody>
+          <a:bodyPr wrap="square" anchor="t">
+            <a:spAutoFit/>
+          </a:bodyPr>
+          <a:lstStyle/>
+          <a:p>
+            <a:pPr algn="l">
+              <a:lnSpc>
+                <a:spcPct val="112000"/>
+              </a:lnSpc>
+              <a:spcAft>
+                <a:spcPts val="500"/>
+              </a:spcAft>
+            </a:pPr>
+            <a:r>
+              <a:rPr sz="1400" b="0">
+                <a:solidFill>
+                  <a:srgbClr val="1F2937"/>
+                </a:solidFill>
+                <a:latin typeface="微软雅黑"/>
+                <a:ea typeface="微软雅黑"/>
+              </a:rPr>
+              <a:t>DeepSeek-chat 大模型</a:t>
+            </a:r>
+          </a:p>
+          <a:p>
+            <a:pPr algn="l">
+              <a:lnSpc>
+                <a:spcPct val="112000"/>
+              </a:lnSpc>
+              <a:spcAft>
+                <a:spcPts val="500"/>
+              </a:spcAft>
+            </a:pPr>
+            <a:r>
+              <a:rPr sz="1400" b="0">
+                <a:solidFill>
+                  <a:srgbClr val="1F2937"/>
+                </a:solidFill>
+                <a:latin typeface="微软雅黑"/>
+                <a:ea typeface="微软雅黑"/>
+              </a:rPr>
+              <a:t>LangChain bind_tools</a:t>
+            </a:r>
+          </a:p>
+          <a:p>
+            <a:pPr algn="l">
+              <a:lnSpc>
+                <a:spcPct val="112000"/>
+              </a:lnSpc>
+              <a:spcAft>
+                <a:spcPts val="500"/>
+              </a:spcAft>
+            </a:pPr>
+            <a:r>
+              <a:rPr sz="1400" b="0">
+                <a:solidFill>
+                  <a:srgbClr val="1F2937"/>
+                </a:solidFill>
+                <a:latin typeface="微软雅黑"/>
+                <a:ea typeface="微软雅黑"/>
+              </a:rPr>
+              <a:t>Chroma 向量检索</a:t>
+            </a:r>
+          </a:p>
+          <a:p>
+            <a:pPr algn="l">
+              <a:lnSpc>
+                <a:spcPct val="112000"/>
+              </a:lnSpc>
+              <a:spcAft>
+                <a:spcPts val="500"/>
+              </a:spcAft>
+            </a:pPr>
+            <a:r>
+              <a:rPr sz="1400" b="0">
+                <a:solidFill>
+                  <a:srgbClr val="1F2937"/>
+                </a:solidFill>
+                <a:latin typeface="微软雅黑"/>
+                <a:ea typeface="微软雅黑"/>
+              </a:rPr>
+              <a:t>嵌入向量生成</a:t>
+            </a:r>
+          </a:p>
+        </p:txBody>
+      </p:sp>
+      <p:sp>
+        <p:nvSpPr>
+          <p:cNvPr id="15" name="Rounded Rectangle 14"/>
+          <p:cNvSpPr/>
+          <p:nvPr/>
+        </p:nvSpPr>
+        <p:spPr>
+          <a:xfrm>
+            <a:off x="8997696" y="1828800"/>
+            <a:ext cx="2697480" cy="3840480"/>
+          </a:xfrm>
+          <a:prstGeom prst="roundRect">
+            <a:avLst>
+              <a:gd name="adj" fmla="val 6000"/>
+            </a:avLst>
+          </a:prstGeom>
+          <a:solidFill>
+            <a:srgbClr val="FFF6E9"/>
+          </a:solidFill>
+          <a:ln>
+            <a:noFill/>
+          </a:ln>
+          <a:effectLst/>
+        </p:spPr>
+        <p:style>
+          <a:lnRef idx="1">
+            <a:schemeClr val="accent1"/>
+          </a:lnRef>
+          <a:fillRef idx="3">
+            <a:schemeClr val="accent1"/>
+          </a:fillRef>
+          <a:effectRef idx="2">
+            <a:schemeClr val="accent1"/>
+          </a:effectRef>
+          <a:fontRef idx="minor">
+            <a:schemeClr val="lt1"/>
+          </a:fontRef>
+        </p:style>
+        <p:txBody>
+          <a:bodyPr rtlCol="0" anchor="ctr" wrap="square"/>
+          <a:lstStyle/>
+          <a:p>
+            <a:pPr algn="ctr"/>
+          </a:p>
+        </p:txBody>
+      </p:sp>
+      <p:sp>
+        <p:nvSpPr>
+          <p:cNvPr id="16" name="TextBox 15"/>
+          <p:cNvSpPr txBox="1"/>
+          <p:nvPr/>
+        </p:nvSpPr>
+        <p:spPr>
+          <a:xfrm>
+            <a:off x="9226296" y="1993392"/>
+            <a:ext cx="2240280" cy="457200"/>
+          </a:xfrm>
+          <a:prstGeom prst="rect">
+            <a:avLst/>
+          </a:prstGeom>
+          <a:noFill/>
+        </p:spPr>
+        <p:txBody>
+          <a:bodyPr wrap="square" anchor="t">
+            <a:spAutoFit/>
+          </a:bodyPr>
+          <a:lstStyle/>
+          <a:p>
+            <a:pPr algn="l">
+              <a:lnSpc>
+                <a:spcPct val="112000"/>
+              </a:lnSpc>
+              <a:spcAft>
+                <a:spcPts val="500"/>
+              </a:spcAft>
+            </a:pPr>
+            <a:r>
+              <a:rPr sz="1800" b="1">
+                <a:solidFill>
+                  <a:srgbClr val="F59E0B"/>
+                </a:solidFill>
+                <a:latin typeface="微软雅黑"/>
+                <a:ea typeface="微软雅黑"/>
+              </a:rPr>
+              <a:t>数据与部署</a:t>
+            </a:r>
+          </a:p>
+        </p:txBody>
+      </p:sp>
+      <p:sp>
+        <p:nvSpPr>
+          <p:cNvPr id="17" name="TextBox 16"/>
+          <p:cNvSpPr txBox="1"/>
+          <p:nvPr/>
+        </p:nvSpPr>
+        <p:spPr>
+          <a:xfrm>
+            <a:off x="9226296" y="2487168"/>
+            <a:ext cx="2240280" cy="3017520"/>
+          </a:xfrm>
+          <a:prstGeom prst="rect">
+            <a:avLst/>
+          </a:prstGeom>
+          <a:noFill/>
+        </p:spPr>
+        <p:txBody>
+          <a:bodyPr wrap="square" anchor="t">
+            <a:spAutoFit/>
+          </a:bodyPr>
+          <a:lstStyle/>
+          <a:p>
+            <a:pPr algn="l">
+              <a:lnSpc>
+                <a:spcPct val="112000"/>
+              </a:lnSpc>
+              <a:spcAft>
+                <a:spcPts val="500"/>
+              </a:spcAft>
+            </a:pPr>
+            <a:r>
+              <a:rPr sz="1400" b="0">
+                <a:solidFill>
+                  <a:srgbClr val="1F2937"/>
+                </a:solidFill>
+                <a:latin typeface="微软雅黑"/>
+                <a:ea typeface="微软雅黑"/>
+              </a:rPr>
+              <a:t>MySQL 8 / Redis 7</a:t>
+            </a:r>
+          </a:p>
+          <a:p>
+            <a:pPr algn="l">
+              <a:lnSpc>
+                <a:spcPct val="112000"/>
+              </a:lnSpc>
+              <a:spcAft>
+                <a:spcPts val="500"/>
+              </a:spcAft>
+            </a:pPr>
+            <a:r>
+              <a:rPr sz="1400" b="0">
+                <a:solidFill>
+                  <a:srgbClr val="1F2937"/>
+                </a:solidFill>
+                <a:latin typeface="微软雅黑"/>
+                <a:ea typeface="微软雅黑"/>
+              </a:rPr>
+              <a:t>Docker Compose</a:t>
+            </a:r>
+          </a:p>
+          <a:p>
+            <a:pPr algn="l">
+              <a:lnSpc>
+                <a:spcPct val="112000"/>
+              </a:lnSpc>
+              <a:spcAft>
+                <a:spcPts val="500"/>
+              </a:spcAft>
+            </a:pPr>
+            <a:r>
+              <a:rPr sz="1400" b="0">
+                <a:solidFill>
+                  <a:srgbClr val="1F2937"/>
+                </a:solidFill>
+                <a:latin typeface="微软雅黑"/>
+                <a:ea typeface="微软雅黑"/>
+              </a:rPr>
+              <a:t>一键启动脚本</a:t>
+            </a:r>
+          </a:p>
+          <a:p>
+            <a:pPr algn="l">
+              <a:lnSpc>
+                <a:spcPct val="112000"/>
+              </a:lnSpc>
+              <a:spcAft>
+                <a:spcPts val="500"/>
+              </a:spcAft>
+            </a:pPr>
+            <a:r>
+              <a:rPr sz="1400" b="0">
+                <a:solidFill>
+                  <a:srgbClr val="1F2937"/>
+                </a:solidFill>
+                <a:latin typeface="微软雅黑"/>
+                <a:ea typeface="微软雅黑"/>
+              </a:rPr>
+              <a:t>PWA 离线支持</a:t>
+            </a:r>
+          </a:p>
+        </p:txBody>
+      </p:sp>
+      <p:sp>
+        <p:nvSpPr>
+          <p:cNvPr id="18" name="TextBox 17"/>
           <p:cNvSpPr txBox="1"/>
           <p:nvPr/>
         </p:nvSpPr>
@@ -5725,7 +5499,7 @@
 </file>
 
 <file path=ppt/slides/slide12.xml><?xml version="1.0" encoding="utf-8"?>
-<p:sld xmlns:a="http://schemas.openxmlformats.org/drawingml/2006/main" xmlns:r="http://schemas.openxmlformats.org/officeDocument/2006/relationships" xmlns:p="http://schemas.openxmlformats.org/presentationml/2006/main">
+<p:sld xmlns:a="http://schemas.openxmlformats.org/drawingml/2006/main" xmlns:p="http://schemas.openxmlformats.org/presentationml/2006/main" xmlns:r="http://schemas.openxmlformats.org/officeDocument/2006/relationships">
   <p:cSld>
     <p:spTree>
       <p:nvGrpSpPr>
@@ -5733,14 +5507,7 @@
         <p:cNvGrpSpPr/>
         <p:nvPr/>
       </p:nvGrpSpPr>
-      <p:grpSpPr>
-        <a:xfrm>
-          <a:off x="0" y="0"/>
-          <a:ext cx="0" cy="0"/>
-          <a:chOff x="0" y="0"/>
-          <a:chExt cx="0" cy="0"/>
-        </a:xfrm>
-      </p:grpSpPr>
+      <p:grpSpPr/>
       <p:sp>
         <p:nvSpPr>
           <p:cNvPr id="2" name="Rectangle 1"/>
@@ -5778,11 +5545,10 @@
           </a:fontRef>
         </p:style>
         <p:txBody>
-          <a:bodyPr wrap="square" rtlCol="0" anchor="ctr"/>
+          <a:bodyPr rtlCol="0" anchor="ctr" wrap="square"/>
           <a:lstStyle/>
           <a:p>
             <a:pPr algn="ctr"/>
-            <a:endParaRPr/>
           </a:p>
         </p:txBody>
       </p:sp>
@@ -5824,7 +5590,7 @@
                 <a:latin typeface="微软雅黑"/>
                 <a:ea typeface="微软雅黑"/>
               </a:rPr>
-              <a:t>现场演示流程</a:t>
+              <a:t>安全与健壮性设计</a:t>
             </a:r>
           </a:p>
         </p:txBody>
@@ -5867,7 +5633,7 @@
                 <a:latin typeface="微软雅黑"/>
                 <a:ea typeface="微软雅黑"/>
               </a:rPr>
-              <a:t>12 / 13</a:t>
+              <a:t>12 / 14</a:t>
             </a:r>
           </a:p>
         </p:txBody>
@@ -5909,30 +5675,31 @@
           </a:fontRef>
         </p:style>
         <p:txBody>
-          <a:bodyPr wrap="square" rtlCol="0" anchor="ctr"/>
+          <a:bodyPr rtlCol="0" anchor="ctr" wrap="square"/>
           <a:lstStyle/>
           <a:p>
             <a:pPr algn="ctr"/>
-            <a:endParaRPr/>
-          </a:p>
-        </p:txBody>
-      </p:sp>
-      <p:sp>
-        <p:nvSpPr>
-          <p:cNvPr id="6" name="Oval 5"/>
+          </a:p>
+        </p:txBody>
+      </p:sp>
+      <p:sp>
+        <p:nvSpPr>
+          <p:cNvPr id="6" name="Rounded Rectangle 5"/>
           <p:cNvSpPr/>
           <p:nvPr/>
         </p:nvSpPr>
         <p:spPr>
           <a:xfrm>
-            <a:off x="548640" y="1691640"/>
-            <a:ext cx="548640" cy="566928"/>
-          </a:xfrm>
-          <a:prstGeom prst="ellipse">
-            <a:avLst/>
+            <a:off x="548640" y="1737360"/>
+            <a:ext cx="5486400" cy="4206240"/>
+          </a:xfrm>
+          <a:prstGeom prst="roundRect">
+            <a:avLst>
+              <a:gd name="adj" fmla="val 6000"/>
+            </a:avLst>
           </a:prstGeom>
           <a:solidFill>
-            <a:srgbClr val="4F46E5"/>
+            <a:srgbClr val="EEF2FF"/>
           </a:solidFill>
           <a:ln>
             <a:noFill/>
@@ -5954,11 +5721,10 @@
           </a:fontRef>
         </p:style>
         <p:txBody>
-          <a:bodyPr wrap="square" rtlCol="0" anchor="ctr"/>
+          <a:bodyPr rtlCol="0" anchor="ctr" wrap="square"/>
           <a:lstStyle/>
           <a:p>
             <a:pPr algn="ctr"/>
-            <a:endParaRPr/>
           </a:p>
         </p:txBody>
       </p:sp>
@@ -5970,21 +5736,21 @@
         </p:nvSpPr>
         <p:spPr>
           <a:xfrm>
-            <a:off x="548640" y="1709928"/>
-            <a:ext cx="548640" cy="548640"/>
-          </a:xfrm>
-          <a:prstGeom prst="rect">
-            <a:avLst/>
-          </a:prstGeom>
-          <a:noFill/>
-        </p:spPr>
-        <p:txBody>
-          <a:bodyPr wrap="square" anchor="ctr">
-            <a:spAutoFit/>
-          </a:bodyPr>
-          <a:lstStyle/>
-          <a:p>
-            <a:pPr algn="ctr">
+            <a:off x="777240" y="1901952"/>
+            <a:ext cx="5029200" cy="457200"/>
+          </a:xfrm>
+          <a:prstGeom prst="rect">
+            <a:avLst/>
+          </a:prstGeom>
+          <a:noFill/>
+        </p:spPr>
+        <p:txBody>
+          <a:bodyPr wrap="square" anchor="t">
+            <a:spAutoFit/>
+          </a:bodyPr>
+          <a:lstStyle/>
+          <a:p>
+            <a:pPr algn="l">
               <a:lnSpc>
                 <a:spcPct val="112000"/>
               </a:lnSpc>
@@ -5995,12 +5761,12 @@
             <a:r>
               <a:rPr sz="1800" b="1">
                 <a:solidFill>
-                  <a:srgbClr val="FFFFFF"/>
-                </a:solidFill>
-                <a:latin typeface="微软雅黑"/>
-                <a:ea typeface="微软雅黑"/>
-              </a:rPr>
-              <a:t>1</a:t>
+                  <a:srgbClr val="4F46E5"/>
+                </a:solidFill>
+                <a:latin typeface="微软雅黑"/>
+                <a:ea typeface="微软雅黑"/>
+              </a:rPr>
+              <a:t>安全</a:t>
             </a:r>
           </a:p>
         </p:txBody>
@@ -6013,8 +5779,8 @@
         </p:nvSpPr>
         <p:spPr>
           <a:xfrm>
-            <a:off x="1325880" y="1737360"/>
-            <a:ext cx="3291840" cy="457200"/>
+            <a:off x="777240" y="2395728"/>
+            <a:ext cx="5029200" cy="3383279"/>
           </a:xfrm>
           <a:prstGeom prst="rect">
             <a:avLst/>
@@ -6036,39 +5802,16 @@
               </a:spcAft>
             </a:pPr>
             <a:r>
-              <a:rPr sz="1700" b="1">
+              <a:rPr sz="1500" b="0">
                 <a:solidFill>
                   <a:srgbClr val="1F2937"/>
                 </a:solidFill>
                 <a:latin typeface="微软雅黑"/>
                 <a:ea typeface="微软雅黑"/>
               </a:rPr>
-              <a:t>登录系统</a:t>
-            </a:r>
-          </a:p>
-        </p:txBody>
-      </p:sp>
-      <p:sp>
-        <p:nvSpPr>
-          <p:cNvPr id="9" name="TextBox 8"/>
-          <p:cNvSpPr txBox="1"/>
-          <p:nvPr/>
-        </p:nvSpPr>
-        <p:spPr>
-          <a:xfrm>
-            <a:off x="4754880" y="1783080"/>
-            <a:ext cx="6766560" cy="457200"/>
-          </a:xfrm>
-          <a:prstGeom prst="rect">
-            <a:avLst/>
-          </a:prstGeom>
-          <a:noFill/>
-        </p:spPr>
-        <p:txBody>
-          <a:bodyPr wrap="square" anchor="t">
-            <a:spAutoFit/>
-          </a:bodyPr>
-          <a:lstStyle/>
+              <a:t>•  JWT 令牌认证，token 存 sessionStorage 防 XSS</a:t>
+            </a:r>
+          </a:p>
           <a:p>
             <a:pPr algn="l">
               <a:lnSpc>
@@ -6081,32 +5824,74 @@
             <a:r>
               <a:rPr sz="1500" b="0">
                 <a:solidFill>
-                  <a:srgbClr val="6B7280"/>
-                </a:solidFill>
-                <a:latin typeface="微软雅黑"/>
-                <a:ea typeface="微软雅黑"/>
-              </a:rPr>
-              <a:t>进入主界面</a:t>
-            </a:r>
-          </a:p>
-        </p:txBody>
-      </p:sp>
-      <p:sp>
-        <p:nvSpPr>
-          <p:cNvPr id="10" name="Oval 9"/>
+                  <a:srgbClr val="1F2937"/>
+                </a:solidFill>
+                <a:latin typeface="微软雅黑"/>
+                <a:ea typeface="微软雅黑"/>
+              </a:rPr>
+              <a:t>•  密码 bcrypt 加密存储</a:t>
+            </a:r>
+          </a:p>
+          <a:p>
+            <a:pPr algn="l">
+              <a:lnSpc>
+                <a:spcPct val="112000"/>
+              </a:lnSpc>
+              <a:spcAft>
+                <a:spcPts val="500"/>
+              </a:spcAft>
+            </a:pPr>
+            <a:r>
+              <a:rPr sz="1500" b="0">
+                <a:solidFill>
+                  <a:srgbClr val="1F2937"/>
+                </a:solidFill>
+                <a:latin typeface="微软雅黑"/>
+                <a:ea typeface="微软雅黑"/>
+              </a:rPr>
+              <a:t>•  接口限流 + 登录防爆破</a:t>
+            </a:r>
+          </a:p>
+          <a:p>
+            <a:pPr algn="l">
+              <a:lnSpc>
+                <a:spcPct val="112000"/>
+              </a:lnSpc>
+              <a:spcAft>
+                <a:spcPts val="500"/>
+              </a:spcAft>
+            </a:pPr>
+            <a:r>
+              <a:rPr sz="1500" b="0">
+                <a:solidFill>
+                  <a:srgbClr val="1F2937"/>
+                </a:solidFill>
+                <a:latin typeface="微软雅黑"/>
+                <a:ea typeface="微软雅黑"/>
+              </a:rPr>
+              <a:t>•  敏感词过滤，拦截违规内容</a:t>
+            </a:r>
+          </a:p>
+        </p:txBody>
+      </p:sp>
+      <p:sp>
+        <p:nvSpPr>
+          <p:cNvPr id="9" name="Rounded Rectangle 8"/>
           <p:cNvSpPr/>
           <p:nvPr/>
         </p:nvSpPr>
         <p:spPr>
           <a:xfrm>
-            <a:off x="548640" y="2350008"/>
-            <a:ext cx="548640" cy="566928"/>
-          </a:xfrm>
-          <a:prstGeom prst="ellipse">
-            <a:avLst/>
+            <a:off x="6309360" y="1737360"/>
+            <a:ext cx="5394960" cy="4206240"/>
+          </a:xfrm>
+          <a:prstGeom prst="roundRect">
+            <a:avLst>
+              <a:gd name="adj" fmla="val 6000"/>
+            </a:avLst>
           </a:prstGeom>
           <a:solidFill>
-            <a:srgbClr val="7C3AED"/>
+            <a:srgbClr val="F3EFFF"/>
           </a:solidFill>
           <a:ln>
             <a:noFill/>
@@ -6128,11 +5913,53 @@
           </a:fontRef>
         </p:style>
         <p:txBody>
-          <a:bodyPr wrap="square" rtlCol="0" anchor="ctr"/>
+          <a:bodyPr rtlCol="0" anchor="ctr" wrap="square"/>
           <a:lstStyle/>
           <a:p>
             <a:pPr algn="ctr"/>
-            <a:endParaRPr/>
+          </a:p>
+        </p:txBody>
+      </p:sp>
+      <p:sp>
+        <p:nvSpPr>
+          <p:cNvPr id="10" name="TextBox 9"/>
+          <p:cNvSpPr txBox="1"/>
+          <p:nvPr/>
+        </p:nvSpPr>
+        <p:spPr>
+          <a:xfrm>
+            <a:off x="6537960" y="1901952"/>
+            <a:ext cx="4937760" cy="457200"/>
+          </a:xfrm>
+          <a:prstGeom prst="rect">
+            <a:avLst/>
+          </a:prstGeom>
+          <a:noFill/>
+        </p:spPr>
+        <p:txBody>
+          <a:bodyPr wrap="square" anchor="t">
+            <a:spAutoFit/>
+          </a:bodyPr>
+          <a:lstStyle/>
+          <a:p>
+            <a:pPr algn="l">
+              <a:lnSpc>
+                <a:spcPct val="112000"/>
+              </a:lnSpc>
+              <a:spcAft>
+                <a:spcPts val="500"/>
+              </a:spcAft>
+            </a:pPr>
+            <a:r>
+              <a:rPr sz="1800" b="1">
+                <a:solidFill>
+                  <a:srgbClr val="7C3AED"/>
+                </a:solidFill>
+                <a:latin typeface="微软雅黑"/>
+                <a:ea typeface="微软雅黑"/>
+              </a:rPr>
+              <a:t>健壮性</a:t>
+            </a:r>
           </a:p>
         </p:txBody>
       </p:sp>
@@ -6144,37 +5971,97 @@
         </p:nvSpPr>
         <p:spPr>
           <a:xfrm>
-            <a:off x="548640" y="2368296"/>
-            <a:ext cx="548640" cy="548640"/>
-          </a:xfrm>
-          <a:prstGeom prst="rect">
-            <a:avLst/>
-          </a:prstGeom>
-          <a:noFill/>
-        </p:spPr>
-        <p:txBody>
-          <a:bodyPr wrap="square" anchor="ctr">
-            <a:spAutoFit/>
-          </a:bodyPr>
-          <a:lstStyle/>
-          <a:p>
-            <a:pPr algn="ctr">
-              <a:lnSpc>
-                <a:spcPct val="112000"/>
-              </a:lnSpc>
-              <a:spcAft>
-                <a:spcPts val="500"/>
-              </a:spcAft>
-            </a:pPr>
-            <a:r>
-              <a:rPr sz="1800" b="1">
-                <a:solidFill>
-                  <a:srgbClr val="FFFFFF"/>
-                </a:solidFill>
-                <a:latin typeface="微软雅黑"/>
-                <a:ea typeface="微软雅黑"/>
-              </a:rPr>
-              <a:t>2</a:t>
+            <a:off x="6537960" y="2395728"/>
+            <a:ext cx="4937760" cy="3383279"/>
+          </a:xfrm>
+          <a:prstGeom prst="rect">
+            <a:avLst/>
+          </a:prstGeom>
+          <a:noFill/>
+        </p:spPr>
+        <p:txBody>
+          <a:bodyPr wrap="square" anchor="t">
+            <a:spAutoFit/>
+          </a:bodyPr>
+          <a:lstStyle/>
+          <a:p>
+            <a:pPr algn="l">
+              <a:lnSpc>
+                <a:spcPct val="112000"/>
+              </a:lnSpc>
+              <a:spcAft>
+                <a:spcPts val="500"/>
+              </a:spcAft>
+            </a:pPr>
+            <a:r>
+              <a:rPr sz="1500" b="0">
+                <a:solidFill>
+                  <a:srgbClr val="1F2937"/>
+                </a:solidFill>
+                <a:latin typeface="微软雅黑"/>
+                <a:ea typeface="微软雅黑"/>
+              </a:rPr>
+              <a:t>•  账号 5 次 / 10 分钟、IP 20 次 / 10 分钟登录限制</a:t>
+            </a:r>
+          </a:p>
+          <a:p>
+            <a:pPr algn="l">
+              <a:lnSpc>
+                <a:spcPct val="112000"/>
+              </a:lnSpc>
+              <a:spcAft>
+                <a:spcPts val="500"/>
+              </a:spcAft>
+            </a:pPr>
+            <a:r>
+              <a:rPr sz="1500" b="0">
+                <a:solidFill>
+                  <a:srgbClr val="1F2937"/>
+                </a:solidFill>
+                <a:latin typeface="微软雅黑"/>
+                <a:ea typeface="微软雅黑"/>
+              </a:rPr>
+              <a:t>•  全局单 IP 300 次 / 分钟限流</a:t>
+            </a:r>
+          </a:p>
+          <a:p>
+            <a:pPr algn="l">
+              <a:lnSpc>
+                <a:spcPct val="112000"/>
+              </a:lnSpc>
+              <a:spcAft>
+                <a:spcPts val="500"/>
+              </a:spcAft>
+            </a:pPr>
+            <a:r>
+              <a:rPr sz="1500" b="0">
+                <a:solidFill>
+                  <a:srgbClr val="1F2937"/>
+                </a:solidFill>
+                <a:latin typeface="微软雅黑"/>
+                <a:ea typeface="微软雅黑"/>
+              </a:rPr>
+              <a:t>•  长对话上下文自动截断，防 token 超限</a:t>
+            </a:r>
+          </a:p>
+          <a:p>
+            <a:pPr algn="l">
+              <a:lnSpc>
+                <a:spcPct val="112000"/>
+              </a:lnSpc>
+              <a:spcAft>
+                <a:spcPts val="500"/>
+              </a:spcAft>
+            </a:pPr>
+            <a:r>
+              <a:rPr sz="1500" b="0">
+                <a:solidFill>
+                  <a:srgbClr val="1F2937"/>
+                </a:solidFill>
+                <a:latin typeface="微软雅黑"/>
+                <a:ea typeface="微软雅黑"/>
+              </a:rPr>
+              <a:t>•  工具名去重合并，避免 LLM 400 报错</a:t>
             </a:r>
           </a:p>
         </p:txBody>
@@ -6182,962 +6069,6 @@
       <p:sp>
         <p:nvSpPr>
           <p:cNvPr id="12" name="TextBox 11"/>
-          <p:cNvSpPr txBox="1"/>
-          <p:nvPr/>
-        </p:nvSpPr>
-        <p:spPr>
-          <a:xfrm>
-            <a:off x="1325880" y="2395728"/>
-            <a:ext cx="3291840" cy="457200"/>
-          </a:xfrm>
-          <a:prstGeom prst="rect">
-            <a:avLst/>
-          </a:prstGeom>
-          <a:noFill/>
-        </p:spPr>
-        <p:txBody>
-          <a:bodyPr wrap="square" anchor="t">
-            <a:spAutoFit/>
-          </a:bodyPr>
-          <a:lstStyle/>
-          <a:p>
-            <a:pPr algn="l">
-              <a:lnSpc>
-                <a:spcPct val="112000"/>
-              </a:lnSpc>
-              <a:spcAft>
-                <a:spcPts val="500"/>
-              </a:spcAft>
-            </a:pPr>
-            <a:r>
-              <a:rPr sz="1700" b="1">
-                <a:solidFill>
-                  <a:srgbClr val="1F2937"/>
-                </a:solidFill>
-                <a:latin typeface="微软雅黑"/>
-                <a:ea typeface="微软雅黑"/>
-              </a:rPr>
-              <a:t>普通问答</a:t>
-            </a:r>
-          </a:p>
-        </p:txBody>
-      </p:sp>
-      <p:sp>
-        <p:nvSpPr>
-          <p:cNvPr id="13" name="TextBox 12"/>
-          <p:cNvSpPr txBox="1"/>
-          <p:nvPr/>
-        </p:nvSpPr>
-        <p:spPr>
-          <a:xfrm>
-            <a:off x="4754880" y="2441448"/>
-            <a:ext cx="6766560" cy="457200"/>
-          </a:xfrm>
-          <a:prstGeom prst="rect">
-            <a:avLst/>
-          </a:prstGeom>
-          <a:noFill/>
-        </p:spPr>
-        <p:txBody>
-          <a:bodyPr wrap="square" anchor="t">
-            <a:spAutoFit/>
-          </a:bodyPr>
-          <a:lstStyle/>
-          <a:p>
-            <a:pPr algn="l">
-              <a:lnSpc>
-                <a:spcPct val="112000"/>
-              </a:lnSpc>
-              <a:spcAft>
-                <a:spcPts val="500"/>
-              </a:spcAft>
-            </a:pPr>
-            <a:r>
-              <a:rPr sz="1500" b="0">
-                <a:solidFill>
-                  <a:srgbClr val="6B7280"/>
-                </a:solidFill>
-                <a:latin typeface="微软雅黑"/>
-                <a:ea typeface="微软雅黑"/>
-              </a:rPr>
-              <a:t>打字机流式输出</a:t>
-            </a:r>
-          </a:p>
-        </p:txBody>
-      </p:sp>
-      <p:sp>
-        <p:nvSpPr>
-          <p:cNvPr id="14" name="Oval 13"/>
-          <p:cNvSpPr/>
-          <p:nvPr/>
-        </p:nvSpPr>
-        <p:spPr>
-          <a:xfrm>
-            <a:off x="548640" y="3008376"/>
-            <a:ext cx="548640" cy="566928"/>
-          </a:xfrm>
-          <a:prstGeom prst="ellipse">
-            <a:avLst/>
-          </a:prstGeom>
-          <a:solidFill>
-            <a:srgbClr val="4F46E5"/>
-          </a:solidFill>
-          <a:ln>
-            <a:noFill/>
-          </a:ln>
-          <a:effectLst/>
-        </p:spPr>
-        <p:style>
-          <a:lnRef idx="1">
-            <a:schemeClr val="accent1"/>
-          </a:lnRef>
-          <a:fillRef idx="3">
-            <a:schemeClr val="accent1"/>
-          </a:fillRef>
-          <a:effectRef idx="2">
-            <a:schemeClr val="accent1"/>
-          </a:effectRef>
-          <a:fontRef idx="minor">
-            <a:schemeClr val="lt1"/>
-          </a:fontRef>
-        </p:style>
-        <p:txBody>
-          <a:bodyPr wrap="square" rtlCol="0" anchor="ctr"/>
-          <a:lstStyle/>
-          <a:p>
-            <a:pPr algn="ctr"/>
-            <a:endParaRPr/>
-          </a:p>
-        </p:txBody>
-      </p:sp>
-      <p:sp>
-        <p:nvSpPr>
-          <p:cNvPr id="15" name="TextBox 14"/>
-          <p:cNvSpPr txBox="1"/>
-          <p:nvPr/>
-        </p:nvSpPr>
-        <p:spPr>
-          <a:xfrm>
-            <a:off x="548640" y="3026664"/>
-            <a:ext cx="548640" cy="548640"/>
-          </a:xfrm>
-          <a:prstGeom prst="rect">
-            <a:avLst/>
-          </a:prstGeom>
-          <a:noFill/>
-        </p:spPr>
-        <p:txBody>
-          <a:bodyPr wrap="square" anchor="ctr">
-            <a:spAutoFit/>
-          </a:bodyPr>
-          <a:lstStyle/>
-          <a:p>
-            <a:pPr algn="ctr">
-              <a:lnSpc>
-                <a:spcPct val="112000"/>
-              </a:lnSpc>
-              <a:spcAft>
-                <a:spcPts val="500"/>
-              </a:spcAft>
-            </a:pPr>
-            <a:r>
-              <a:rPr sz="1800" b="1">
-                <a:solidFill>
-                  <a:srgbClr val="FFFFFF"/>
-                </a:solidFill>
-                <a:latin typeface="微软雅黑"/>
-                <a:ea typeface="微软雅黑"/>
-              </a:rPr>
-              <a:t>3</a:t>
-            </a:r>
-          </a:p>
-        </p:txBody>
-      </p:sp>
-      <p:sp>
-        <p:nvSpPr>
-          <p:cNvPr id="16" name="TextBox 15"/>
-          <p:cNvSpPr txBox="1"/>
-          <p:nvPr/>
-        </p:nvSpPr>
-        <p:spPr>
-          <a:xfrm>
-            <a:off x="1325880" y="3054096"/>
-            <a:ext cx="3291840" cy="457200"/>
-          </a:xfrm>
-          <a:prstGeom prst="rect">
-            <a:avLst/>
-          </a:prstGeom>
-          <a:noFill/>
-        </p:spPr>
-        <p:txBody>
-          <a:bodyPr wrap="square" anchor="t">
-            <a:spAutoFit/>
-          </a:bodyPr>
-          <a:lstStyle/>
-          <a:p>
-            <a:pPr algn="l">
-              <a:lnSpc>
-                <a:spcPct val="112000"/>
-              </a:lnSpc>
-              <a:spcAft>
-                <a:spcPts val="500"/>
-              </a:spcAft>
-            </a:pPr>
-            <a:r>
-              <a:rPr sz="1700" b="1">
-                <a:solidFill>
-                  <a:srgbClr val="1F2937"/>
-                </a:solidFill>
-                <a:latin typeface="微软雅黑"/>
-                <a:ea typeface="微软雅黑"/>
-              </a:rPr>
-              <a:t>文档模式</a:t>
-            </a:r>
-          </a:p>
-        </p:txBody>
-      </p:sp>
-      <p:sp>
-        <p:nvSpPr>
-          <p:cNvPr id="17" name="TextBox 16"/>
-          <p:cNvSpPr txBox="1"/>
-          <p:nvPr/>
-        </p:nvSpPr>
-        <p:spPr>
-          <a:xfrm>
-            <a:off x="4754880" y="3099816"/>
-            <a:ext cx="6766560" cy="457200"/>
-          </a:xfrm>
-          <a:prstGeom prst="rect">
-            <a:avLst/>
-          </a:prstGeom>
-          <a:noFill/>
-        </p:spPr>
-        <p:txBody>
-          <a:bodyPr wrap="square" anchor="t">
-            <a:spAutoFit/>
-          </a:bodyPr>
-          <a:lstStyle/>
-          <a:p>
-            <a:pPr algn="l">
-              <a:lnSpc>
-                <a:spcPct val="112000"/>
-              </a:lnSpc>
-              <a:spcAft>
-                <a:spcPts val="500"/>
-              </a:spcAft>
-            </a:pPr>
-            <a:r>
-              <a:rPr sz="1500" b="0">
-                <a:solidFill>
-                  <a:srgbClr val="6B7280"/>
-                </a:solidFill>
-                <a:latin typeface="微软雅黑"/>
-                <a:ea typeface="微软雅黑"/>
-              </a:rPr>
-              <a:t>提问《视觉问答系统》看引用</a:t>
-            </a:r>
-          </a:p>
-        </p:txBody>
-      </p:sp>
-      <p:sp>
-        <p:nvSpPr>
-          <p:cNvPr id="18" name="Oval 17"/>
-          <p:cNvSpPr/>
-          <p:nvPr/>
-        </p:nvSpPr>
-        <p:spPr>
-          <a:xfrm>
-            <a:off x="548640" y="3666744"/>
-            <a:ext cx="548640" cy="566928"/>
-          </a:xfrm>
-          <a:prstGeom prst="ellipse">
-            <a:avLst/>
-          </a:prstGeom>
-          <a:solidFill>
-            <a:srgbClr val="7C3AED"/>
-          </a:solidFill>
-          <a:ln>
-            <a:noFill/>
-          </a:ln>
-          <a:effectLst/>
-        </p:spPr>
-        <p:style>
-          <a:lnRef idx="1">
-            <a:schemeClr val="accent1"/>
-          </a:lnRef>
-          <a:fillRef idx="3">
-            <a:schemeClr val="accent1"/>
-          </a:fillRef>
-          <a:effectRef idx="2">
-            <a:schemeClr val="accent1"/>
-          </a:effectRef>
-          <a:fontRef idx="minor">
-            <a:schemeClr val="lt1"/>
-          </a:fontRef>
-        </p:style>
-        <p:txBody>
-          <a:bodyPr wrap="square" rtlCol="0" anchor="ctr"/>
-          <a:lstStyle/>
-          <a:p>
-            <a:pPr algn="ctr"/>
-            <a:endParaRPr/>
-          </a:p>
-        </p:txBody>
-      </p:sp>
-      <p:sp>
-        <p:nvSpPr>
-          <p:cNvPr id="19" name="TextBox 18"/>
-          <p:cNvSpPr txBox="1"/>
-          <p:nvPr/>
-        </p:nvSpPr>
-        <p:spPr>
-          <a:xfrm>
-            <a:off x="548640" y="3685031"/>
-            <a:ext cx="548640" cy="548640"/>
-          </a:xfrm>
-          <a:prstGeom prst="rect">
-            <a:avLst/>
-          </a:prstGeom>
-          <a:noFill/>
-        </p:spPr>
-        <p:txBody>
-          <a:bodyPr wrap="square" anchor="ctr">
-            <a:spAutoFit/>
-          </a:bodyPr>
-          <a:lstStyle/>
-          <a:p>
-            <a:pPr algn="ctr">
-              <a:lnSpc>
-                <a:spcPct val="112000"/>
-              </a:lnSpc>
-              <a:spcAft>
-                <a:spcPts val="500"/>
-              </a:spcAft>
-            </a:pPr>
-            <a:r>
-              <a:rPr sz="1800" b="1">
-                <a:solidFill>
-                  <a:srgbClr val="FFFFFF"/>
-                </a:solidFill>
-                <a:latin typeface="微软雅黑"/>
-                <a:ea typeface="微软雅黑"/>
-              </a:rPr>
-              <a:t>4</a:t>
-            </a:r>
-          </a:p>
-        </p:txBody>
-      </p:sp>
-      <p:sp>
-        <p:nvSpPr>
-          <p:cNvPr id="20" name="TextBox 19"/>
-          <p:cNvSpPr txBox="1"/>
-          <p:nvPr/>
-        </p:nvSpPr>
-        <p:spPr>
-          <a:xfrm>
-            <a:off x="1325880" y="3712463"/>
-            <a:ext cx="3291840" cy="457200"/>
-          </a:xfrm>
-          <a:prstGeom prst="rect">
-            <a:avLst/>
-          </a:prstGeom>
-          <a:noFill/>
-        </p:spPr>
-        <p:txBody>
-          <a:bodyPr wrap="square" anchor="t">
-            <a:spAutoFit/>
-          </a:bodyPr>
-          <a:lstStyle/>
-          <a:p>
-            <a:pPr algn="l">
-              <a:lnSpc>
-                <a:spcPct val="112000"/>
-              </a:lnSpc>
-              <a:spcAft>
-                <a:spcPts val="500"/>
-              </a:spcAft>
-            </a:pPr>
-            <a:r>
-              <a:rPr sz="1700" b="1">
-                <a:solidFill>
-                  <a:srgbClr val="1F2937"/>
-                </a:solidFill>
-                <a:latin typeface="微软雅黑"/>
-                <a:ea typeface="微软雅黑"/>
-              </a:rPr>
-              <a:t>工具调用</a:t>
-            </a:r>
-          </a:p>
-        </p:txBody>
-      </p:sp>
-      <p:sp>
-        <p:nvSpPr>
-          <p:cNvPr id="21" name="TextBox 20"/>
-          <p:cNvSpPr txBox="1"/>
-          <p:nvPr/>
-        </p:nvSpPr>
-        <p:spPr>
-          <a:xfrm>
-            <a:off x="4754880" y="3758183"/>
-            <a:ext cx="6766560" cy="457200"/>
-          </a:xfrm>
-          <a:prstGeom prst="rect">
-            <a:avLst/>
-          </a:prstGeom>
-          <a:noFill/>
-        </p:spPr>
-        <p:txBody>
-          <a:bodyPr wrap="square" anchor="t">
-            <a:spAutoFit/>
-          </a:bodyPr>
-          <a:lstStyle/>
-          <a:p>
-            <a:pPr algn="l">
-              <a:lnSpc>
-                <a:spcPct val="112000"/>
-              </a:lnSpc>
-              <a:spcAft>
-                <a:spcPts val="500"/>
-              </a:spcAft>
-            </a:pPr>
-            <a:r>
-              <a:rPr sz="1500" b="0">
-                <a:solidFill>
-                  <a:srgbClr val="6B7280"/>
-                </a:solidFill>
-                <a:latin typeface="微软雅黑"/>
-                <a:ea typeface="微软雅黑"/>
-              </a:rPr>
-              <a:t>12×34 自动调计算器</a:t>
-            </a:r>
-          </a:p>
-        </p:txBody>
-      </p:sp>
-      <p:sp>
-        <p:nvSpPr>
-          <p:cNvPr id="22" name="Oval 21"/>
-          <p:cNvSpPr/>
-          <p:nvPr/>
-        </p:nvSpPr>
-        <p:spPr>
-          <a:xfrm>
-            <a:off x="548640" y="4325112"/>
-            <a:ext cx="548640" cy="566928"/>
-          </a:xfrm>
-          <a:prstGeom prst="ellipse">
-            <a:avLst/>
-          </a:prstGeom>
-          <a:solidFill>
-            <a:srgbClr val="4F46E5"/>
-          </a:solidFill>
-          <a:ln>
-            <a:noFill/>
-          </a:ln>
-          <a:effectLst/>
-        </p:spPr>
-        <p:style>
-          <a:lnRef idx="1">
-            <a:schemeClr val="accent1"/>
-          </a:lnRef>
-          <a:fillRef idx="3">
-            <a:schemeClr val="accent1"/>
-          </a:fillRef>
-          <a:effectRef idx="2">
-            <a:schemeClr val="accent1"/>
-          </a:effectRef>
-          <a:fontRef idx="minor">
-            <a:schemeClr val="lt1"/>
-          </a:fontRef>
-        </p:style>
-        <p:txBody>
-          <a:bodyPr wrap="square" rtlCol="0" anchor="ctr"/>
-          <a:lstStyle/>
-          <a:p>
-            <a:pPr algn="ctr"/>
-            <a:endParaRPr/>
-          </a:p>
-        </p:txBody>
-      </p:sp>
-      <p:sp>
-        <p:nvSpPr>
-          <p:cNvPr id="23" name="TextBox 22"/>
-          <p:cNvSpPr txBox="1"/>
-          <p:nvPr/>
-        </p:nvSpPr>
-        <p:spPr>
-          <a:xfrm>
-            <a:off x="548640" y="4343399"/>
-            <a:ext cx="548640" cy="548640"/>
-          </a:xfrm>
-          <a:prstGeom prst="rect">
-            <a:avLst/>
-          </a:prstGeom>
-          <a:noFill/>
-        </p:spPr>
-        <p:txBody>
-          <a:bodyPr wrap="square" anchor="ctr">
-            <a:spAutoFit/>
-          </a:bodyPr>
-          <a:lstStyle/>
-          <a:p>
-            <a:pPr algn="ctr">
-              <a:lnSpc>
-                <a:spcPct val="112000"/>
-              </a:lnSpc>
-              <a:spcAft>
-                <a:spcPts val="500"/>
-              </a:spcAft>
-            </a:pPr>
-            <a:r>
-              <a:rPr sz="1800" b="1">
-                <a:solidFill>
-                  <a:srgbClr val="FFFFFF"/>
-                </a:solidFill>
-                <a:latin typeface="微软雅黑"/>
-                <a:ea typeface="微软雅黑"/>
-              </a:rPr>
-              <a:t>5</a:t>
-            </a:r>
-          </a:p>
-        </p:txBody>
-      </p:sp>
-      <p:sp>
-        <p:nvSpPr>
-          <p:cNvPr id="24" name="TextBox 23"/>
-          <p:cNvSpPr txBox="1"/>
-          <p:nvPr/>
-        </p:nvSpPr>
-        <p:spPr>
-          <a:xfrm>
-            <a:off x="1325880" y="4370831"/>
-            <a:ext cx="3291840" cy="457200"/>
-          </a:xfrm>
-          <a:prstGeom prst="rect">
-            <a:avLst/>
-          </a:prstGeom>
-          <a:noFill/>
-        </p:spPr>
-        <p:txBody>
-          <a:bodyPr wrap="square" anchor="t">
-            <a:spAutoFit/>
-          </a:bodyPr>
-          <a:lstStyle/>
-          <a:p>
-            <a:pPr algn="l">
-              <a:lnSpc>
-                <a:spcPct val="112000"/>
-              </a:lnSpc>
-              <a:spcAft>
-                <a:spcPts val="500"/>
-              </a:spcAft>
-            </a:pPr>
-            <a:r>
-              <a:rPr sz="1700" b="1">
-                <a:solidFill>
-                  <a:srgbClr val="1F2937"/>
-                </a:solidFill>
-                <a:latin typeface="微软雅黑"/>
-                <a:ea typeface="微软雅黑"/>
-              </a:rPr>
-              <a:t>技能市场</a:t>
-            </a:r>
-          </a:p>
-        </p:txBody>
-      </p:sp>
-      <p:sp>
-        <p:nvSpPr>
-          <p:cNvPr id="25" name="TextBox 24"/>
-          <p:cNvSpPr txBox="1"/>
-          <p:nvPr/>
-        </p:nvSpPr>
-        <p:spPr>
-          <a:xfrm>
-            <a:off x="4754880" y="4416551"/>
-            <a:ext cx="6766560" cy="457200"/>
-          </a:xfrm>
-          <a:prstGeom prst="rect">
-            <a:avLst/>
-          </a:prstGeom>
-          <a:noFill/>
-        </p:spPr>
-        <p:txBody>
-          <a:bodyPr wrap="square" anchor="t">
-            <a:spAutoFit/>
-          </a:bodyPr>
-          <a:lstStyle/>
-          <a:p>
-            <a:pPr algn="l">
-              <a:lnSpc>
-                <a:spcPct val="112000"/>
-              </a:lnSpc>
-              <a:spcAft>
-                <a:spcPts val="500"/>
-              </a:spcAft>
-            </a:pPr>
-            <a:r>
-              <a:rPr sz="1500" b="0">
-                <a:solidFill>
-                  <a:srgbClr val="6B7280"/>
-                </a:solidFill>
-                <a:latin typeface="微软雅黑"/>
-                <a:ea typeface="微软雅黑"/>
-              </a:rPr>
-              <a:t>启用 / 禁用工具</a:t>
-            </a:r>
-          </a:p>
-        </p:txBody>
-      </p:sp>
-      <p:sp>
-        <p:nvSpPr>
-          <p:cNvPr id="26" name="Oval 25"/>
-          <p:cNvSpPr/>
-          <p:nvPr/>
-        </p:nvSpPr>
-        <p:spPr>
-          <a:xfrm>
-            <a:off x="548640" y="4983479"/>
-            <a:ext cx="548640" cy="566928"/>
-          </a:xfrm>
-          <a:prstGeom prst="ellipse">
-            <a:avLst/>
-          </a:prstGeom>
-          <a:solidFill>
-            <a:srgbClr val="7C3AED"/>
-          </a:solidFill>
-          <a:ln>
-            <a:noFill/>
-          </a:ln>
-          <a:effectLst/>
-        </p:spPr>
-        <p:style>
-          <a:lnRef idx="1">
-            <a:schemeClr val="accent1"/>
-          </a:lnRef>
-          <a:fillRef idx="3">
-            <a:schemeClr val="accent1"/>
-          </a:fillRef>
-          <a:effectRef idx="2">
-            <a:schemeClr val="accent1"/>
-          </a:effectRef>
-          <a:fontRef idx="minor">
-            <a:schemeClr val="lt1"/>
-          </a:fontRef>
-        </p:style>
-        <p:txBody>
-          <a:bodyPr wrap="square" rtlCol="0" anchor="ctr"/>
-          <a:lstStyle/>
-          <a:p>
-            <a:pPr algn="ctr"/>
-            <a:endParaRPr/>
-          </a:p>
-        </p:txBody>
-      </p:sp>
-      <p:sp>
-        <p:nvSpPr>
-          <p:cNvPr id="27" name="TextBox 26"/>
-          <p:cNvSpPr txBox="1"/>
-          <p:nvPr/>
-        </p:nvSpPr>
-        <p:spPr>
-          <a:xfrm>
-            <a:off x="548640" y="5001767"/>
-            <a:ext cx="548640" cy="548640"/>
-          </a:xfrm>
-          <a:prstGeom prst="rect">
-            <a:avLst/>
-          </a:prstGeom>
-          <a:noFill/>
-        </p:spPr>
-        <p:txBody>
-          <a:bodyPr wrap="square" anchor="ctr">
-            <a:spAutoFit/>
-          </a:bodyPr>
-          <a:lstStyle/>
-          <a:p>
-            <a:pPr algn="ctr">
-              <a:lnSpc>
-                <a:spcPct val="112000"/>
-              </a:lnSpc>
-              <a:spcAft>
-                <a:spcPts val="500"/>
-              </a:spcAft>
-            </a:pPr>
-            <a:r>
-              <a:rPr sz="1800" b="1">
-                <a:solidFill>
-                  <a:srgbClr val="FFFFFF"/>
-                </a:solidFill>
-                <a:latin typeface="微软雅黑"/>
-                <a:ea typeface="微软雅黑"/>
-              </a:rPr>
-              <a:t>6</a:t>
-            </a:r>
-          </a:p>
-        </p:txBody>
-      </p:sp>
-      <p:sp>
-        <p:nvSpPr>
-          <p:cNvPr id="28" name="TextBox 27"/>
-          <p:cNvSpPr txBox="1"/>
-          <p:nvPr/>
-        </p:nvSpPr>
-        <p:spPr>
-          <a:xfrm>
-            <a:off x="1325880" y="5029199"/>
-            <a:ext cx="3291840" cy="457200"/>
-          </a:xfrm>
-          <a:prstGeom prst="rect">
-            <a:avLst/>
-          </a:prstGeom>
-          <a:noFill/>
-        </p:spPr>
-        <p:txBody>
-          <a:bodyPr wrap="square" anchor="t">
-            <a:spAutoFit/>
-          </a:bodyPr>
-          <a:lstStyle/>
-          <a:p>
-            <a:pPr algn="l">
-              <a:lnSpc>
-                <a:spcPct val="112000"/>
-              </a:lnSpc>
-              <a:spcAft>
-                <a:spcPts val="500"/>
-              </a:spcAft>
-            </a:pPr>
-            <a:r>
-              <a:rPr sz="1700" b="1">
-                <a:solidFill>
-                  <a:srgbClr val="1F2937"/>
-                </a:solidFill>
-                <a:latin typeface="微软雅黑"/>
-                <a:ea typeface="微软雅黑"/>
-              </a:rPr>
-              <a:t>求职辅助</a:t>
-            </a:r>
-          </a:p>
-        </p:txBody>
-      </p:sp>
-      <p:sp>
-        <p:nvSpPr>
-          <p:cNvPr id="29" name="TextBox 28"/>
-          <p:cNvSpPr txBox="1"/>
-          <p:nvPr/>
-        </p:nvSpPr>
-        <p:spPr>
-          <a:xfrm>
-            <a:off x="4754880" y="5074919"/>
-            <a:ext cx="6766560" cy="457200"/>
-          </a:xfrm>
-          <a:prstGeom prst="rect">
-            <a:avLst/>
-          </a:prstGeom>
-          <a:noFill/>
-        </p:spPr>
-        <p:txBody>
-          <a:bodyPr wrap="square" anchor="t">
-            <a:spAutoFit/>
-          </a:bodyPr>
-          <a:lstStyle/>
-          <a:p>
-            <a:pPr algn="l">
-              <a:lnSpc>
-                <a:spcPct val="112000"/>
-              </a:lnSpc>
-              <a:spcAft>
-                <a:spcPts val="500"/>
-              </a:spcAft>
-            </a:pPr>
-            <a:r>
-              <a:rPr sz="1500" b="0">
-                <a:solidFill>
-                  <a:srgbClr val="6B7280"/>
-                </a:solidFill>
-                <a:latin typeface="微软雅黑"/>
-                <a:ea typeface="微软雅黑"/>
-              </a:rPr>
-              <a:t>简历检查、面试问答</a:t>
-            </a:r>
-          </a:p>
-        </p:txBody>
-      </p:sp>
-      <p:sp>
-        <p:nvSpPr>
-          <p:cNvPr id="30" name="Oval 29"/>
-          <p:cNvSpPr/>
-          <p:nvPr/>
-        </p:nvSpPr>
-        <p:spPr>
-          <a:xfrm>
-            <a:off x="548640" y="5641847"/>
-            <a:ext cx="548640" cy="566928"/>
-          </a:xfrm>
-          <a:prstGeom prst="ellipse">
-            <a:avLst/>
-          </a:prstGeom>
-          <a:solidFill>
-            <a:srgbClr val="4F46E5"/>
-          </a:solidFill>
-          <a:ln>
-            <a:noFill/>
-          </a:ln>
-          <a:effectLst/>
-        </p:spPr>
-        <p:style>
-          <a:lnRef idx="1">
-            <a:schemeClr val="accent1"/>
-          </a:lnRef>
-          <a:fillRef idx="3">
-            <a:schemeClr val="accent1"/>
-          </a:fillRef>
-          <a:effectRef idx="2">
-            <a:schemeClr val="accent1"/>
-          </a:effectRef>
-          <a:fontRef idx="minor">
-            <a:schemeClr val="lt1"/>
-          </a:fontRef>
-        </p:style>
-        <p:txBody>
-          <a:bodyPr wrap="square" rtlCol="0" anchor="ctr"/>
-          <a:lstStyle/>
-          <a:p>
-            <a:pPr algn="ctr"/>
-            <a:endParaRPr/>
-          </a:p>
-        </p:txBody>
-      </p:sp>
-      <p:sp>
-        <p:nvSpPr>
-          <p:cNvPr id="31" name="TextBox 30"/>
-          <p:cNvSpPr txBox="1"/>
-          <p:nvPr/>
-        </p:nvSpPr>
-        <p:spPr>
-          <a:xfrm>
-            <a:off x="548640" y="5660135"/>
-            <a:ext cx="548640" cy="548640"/>
-          </a:xfrm>
-          <a:prstGeom prst="rect">
-            <a:avLst/>
-          </a:prstGeom>
-          <a:noFill/>
-        </p:spPr>
-        <p:txBody>
-          <a:bodyPr wrap="square" anchor="ctr">
-            <a:spAutoFit/>
-          </a:bodyPr>
-          <a:lstStyle/>
-          <a:p>
-            <a:pPr algn="ctr">
-              <a:lnSpc>
-                <a:spcPct val="112000"/>
-              </a:lnSpc>
-              <a:spcAft>
-                <a:spcPts val="500"/>
-              </a:spcAft>
-            </a:pPr>
-            <a:r>
-              <a:rPr sz="1800" b="1">
-                <a:solidFill>
-                  <a:srgbClr val="FFFFFF"/>
-                </a:solidFill>
-                <a:latin typeface="微软雅黑"/>
-                <a:ea typeface="微软雅黑"/>
-              </a:rPr>
-              <a:t>7</a:t>
-            </a:r>
-          </a:p>
-        </p:txBody>
-      </p:sp>
-      <p:sp>
-        <p:nvSpPr>
-          <p:cNvPr id="32" name="TextBox 31"/>
-          <p:cNvSpPr txBox="1"/>
-          <p:nvPr/>
-        </p:nvSpPr>
-        <p:spPr>
-          <a:xfrm>
-            <a:off x="1325880" y="5687567"/>
-            <a:ext cx="3291840" cy="457200"/>
-          </a:xfrm>
-          <a:prstGeom prst="rect">
-            <a:avLst/>
-          </a:prstGeom>
-          <a:noFill/>
-        </p:spPr>
-        <p:txBody>
-          <a:bodyPr wrap="square" anchor="t">
-            <a:spAutoFit/>
-          </a:bodyPr>
-          <a:lstStyle/>
-          <a:p>
-            <a:pPr algn="l">
-              <a:lnSpc>
-                <a:spcPct val="112000"/>
-              </a:lnSpc>
-              <a:spcAft>
-                <a:spcPts val="500"/>
-              </a:spcAft>
-            </a:pPr>
-            <a:r>
-              <a:rPr sz="1700" b="1">
-                <a:solidFill>
-                  <a:srgbClr val="1F2937"/>
-                </a:solidFill>
-                <a:latin typeface="微软雅黑"/>
-                <a:ea typeface="微软雅黑"/>
-              </a:rPr>
-              <a:t>体验亮点</a:t>
-            </a:r>
-          </a:p>
-        </p:txBody>
-      </p:sp>
-      <p:sp>
-        <p:nvSpPr>
-          <p:cNvPr id="33" name="TextBox 32"/>
-          <p:cNvSpPr txBox="1"/>
-          <p:nvPr/>
-        </p:nvSpPr>
-        <p:spPr>
-          <a:xfrm>
-            <a:off x="4754880" y="5733287"/>
-            <a:ext cx="6766560" cy="457200"/>
-          </a:xfrm>
-          <a:prstGeom prst="rect">
-            <a:avLst/>
-          </a:prstGeom>
-          <a:noFill/>
-        </p:spPr>
-        <p:txBody>
-          <a:bodyPr wrap="square" anchor="t">
-            <a:spAutoFit/>
-          </a:bodyPr>
-          <a:lstStyle/>
-          <a:p>
-            <a:pPr algn="l">
-              <a:lnSpc>
-                <a:spcPct val="112000"/>
-              </a:lnSpc>
-              <a:spcAft>
-                <a:spcPts val="500"/>
-              </a:spcAft>
-            </a:pPr>
-            <a:r>
-              <a:rPr sz="1500" b="0">
-                <a:solidFill>
-                  <a:srgbClr val="6B7280"/>
-                </a:solidFill>
-                <a:latin typeface="微软雅黑"/>
-                <a:ea typeface="微软雅黑"/>
-              </a:rPr>
-              <a:t>暗色、引用下载、管理后台</a:t>
-            </a:r>
-          </a:p>
-        </p:txBody>
-      </p:sp>
-      <p:sp>
-        <p:nvSpPr>
-          <p:cNvPr id="34" name="TextBox 33"/>
           <p:cNvSpPr txBox="1"/>
           <p:nvPr/>
         </p:nvSpPr>
@@ -7187,7 +6118,7 @@
 </file>
 
 <file path=ppt/slides/slide13.xml><?xml version="1.0" encoding="utf-8"?>
-<p:sld xmlns:a="http://schemas.openxmlformats.org/drawingml/2006/main" xmlns:r="http://schemas.openxmlformats.org/officeDocument/2006/relationships" xmlns:p="http://schemas.openxmlformats.org/presentationml/2006/main">
+<p:sld xmlns:a="http://schemas.openxmlformats.org/drawingml/2006/main" xmlns:p="http://schemas.openxmlformats.org/presentationml/2006/main" xmlns:r="http://schemas.openxmlformats.org/officeDocument/2006/relationships">
   <p:cSld>
     <p:spTree>
       <p:nvGrpSpPr>
@@ -7195,14 +6126,7 @@
         <p:cNvGrpSpPr/>
         <p:nvPr/>
       </p:nvGrpSpPr>
-      <p:grpSpPr>
-        <a:xfrm>
-          <a:off x="0" y="0"/>
-          <a:ext cx="0" cy="0"/>
-          <a:chOff x="0" y="0"/>
-          <a:chExt cx="0" cy="0"/>
-        </a:xfrm>
-      </p:grpSpPr>
+      <p:grpSpPr/>
       <p:sp>
         <p:nvSpPr>
           <p:cNvPr id="2" name="Rectangle 1"/>
@@ -7240,11 +6164,10 @@
           </a:fontRef>
         </p:style>
         <p:txBody>
-          <a:bodyPr wrap="square" rtlCol="0" anchor="ctr"/>
+          <a:bodyPr rtlCol="0" anchor="ctr" wrap="square"/>
           <a:lstStyle/>
           <a:p>
             <a:pPr algn="ctr"/>
-            <a:endParaRPr/>
           </a:p>
         </p:txBody>
       </p:sp>
@@ -7286,7 +6209,7 @@
                 <a:latin typeface="微软雅黑"/>
                 <a:ea typeface="微软雅黑"/>
               </a:rPr>
-              <a:t>总结与展望</a:t>
+              <a:t>现场演示流程</a:t>
             </a:r>
           </a:p>
         </p:txBody>
@@ -7329,7 +6252,7 @@
                 <a:latin typeface="微软雅黑"/>
                 <a:ea typeface="微软雅黑"/>
               </a:rPr>
-              <a:t>13 / 13</a:t>
+              <a:t>13 / 14</a:t>
             </a:r>
           </a:p>
         </p:txBody>
@@ -7371,11 +6294,1456 @@
           </a:fontRef>
         </p:style>
         <p:txBody>
-          <a:bodyPr wrap="square" rtlCol="0" anchor="ctr"/>
+          <a:bodyPr rtlCol="0" anchor="ctr" wrap="square"/>
           <a:lstStyle/>
           <a:p>
             <a:pPr algn="ctr"/>
-            <a:endParaRPr/>
+          </a:p>
+        </p:txBody>
+      </p:sp>
+      <p:sp>
+        <p:nvSpPr>
+          <p:cNvPr id="6" name="Oval 5"/>
+          <p:cNvSpPr/>
+          <p:nvPr/>
+        </p:nvSpPr>
+        <p:spPr>
+          <a:xfrm>
+            <a:off x="548640" y="1691640"/>
+            <a:ext cx="548640" cy="566928"/>
+          </a:xfrm>
+          <a:prstGeom prst="ellipse">
+            <a:avLst/>
+          </a:prstGeom>
+          <a:solidFill>
+            <a:srgbClr val="4F46E5"/>
+          </a:solidFill>
+          <a:ln>
+            <a:noFill/>
+          </a:ln>
+          <a:effectLst/>
+        </p:spPr>
+        <p:style>
+          <a:lnRef idx="1">
+            <a:schemeClr val="accent1"/>
+          </a:lnRef>
+          <a:fillRef idx="3">
+            <a:schemeClr val="accent1"/>
+          </a:fillRef>
+          <a:effectRef idx="2">
+            <a:schemeClr val="accent1"/>
+          </a:effectRef>
+          <a:fontRef idx="minor">
+            <a:schemeClr val="lt1"/>
+          </a:fontRef>
+        </p:style>
+        <p:txBody>
+          <a:bodyPr rtlCol="0" anchor="ctr" wrap="square"/>
+          <a:lstStyle/>
+          <a:p>
+            <a:pPr algn="ctr"/>
+          </a:p>
+        </p:txBody>
+      </p:sp>
+      <p:sp>
+        <p:nvSpPr>
+          <p:cNvPr id="7" name="TextBox 6"/>
+          <p:cNvSpPr txBox="1"/>
+          <p:nvPr/>
+        </p:nvSpPr>
+        <p:spPr>
+          <a:xfrm>
+            <a:off x="548640" y="1709928"/>
+            <a:ext cx="548640" cy="548640"/>
+          </a:xfrm>
+          <a:prstGeom prst="rect">
+            <a:avLst/>
+          </a:prstGeom>
+          <a:noFill/>
+        </p:spPr>
+        <p:txBody>
+          <a:bodyPr wrap="square" anchor="ctr">
+            <a:spAutoFit/>
+          </a:bodyPr>
+          <a:lstStyle/>
+          <a:p>
+            <a:pPr algn="ctr">
+              <a:lnSpc>
+                <a:spcPct val="112000"/>
+              </a:lnSpc>
+              <a:spcAft>
+                <a:spcPts val="500"/>
+              </a:spcAft>
+            </a:pPr>
+            <a:r>
+              <a:rPr sz="1800" b="1">
+                <a:solidFill>
+                  <a:srgbClr val="FFFFFF"/>
+                </a:solidFill>
+                <a:latin typeface="微软雅黑"/>
+                <a:ea typeface="微软雅黑"/>
+              </a:rPr>
+              <a:t>1</a:t>
+            </a:r>
+          </a:p>
+        </p:txBody>
+      </p:sp>
+      <p:sp>
+        <p:nvSpPr>
+          <p:cNvPr id="8" name="TextBox 7"/>
+          <p:cNvSpPr txBox="1"/>
+          <p:nvPr/>
+        </p:nvSpPr>
+        <p:spPr>
+          <a:xfrm>
+            <a:off x="1325880" y="1737360"/>
+            <a:ext cx="3291840" cy="457200"/>
+          </a:xfrm>
+          <a:prstGeom prst="rect">
+            <a:avLst/>
+          </a:prstGeom>
+          <a:noFill/>
+        </p:spPr>
+        <p:txBody>
+          <a:bodyPr wrap="square" anchor="t">
+            <a:spAutoFit/>
+          </a:bodyPr>
+          <a:lstStyle/>
+          <a:p>
+            <a:pPr algn="l">
+              <a:lnSpc>
+                <a:spcPct val="112000"/>
+              </a:lnSpc>
+              <a:spcAft>
+                <a:spcPts val="500"/>
+              </a:spcAft>
+            </a:pPr>
+            <a:r>
+              <a:rPr sz="1700" b="1">
+                <a:solidFill>
+                  <a:srgbClr val="1F2937"/>
+                </a:solidFill>
+                <a:latin typeface="微软雅黑"/>
+                <a:ea typeface="微软雅黑"/>
+              </a:rPr>
+              <a:t>登录系统</a:t>
+            </a:r>
+          </a:p>
+        </p:txBody>
+      </p:sp>
+      <p:sp>
+        <p:nvSpPr>
+          <p:cNvPr id="9" name="TextBox 8"/>
+          <p:cNvSpPr txBox="1"/>
+          <p:nvPr/>
+        </p:nvSpPr>
+        <p:spPr>
+          <a:xfrm>
+            <a:off x="4754880" y="1783080"/>
+            <a:ext cx="6766560" cy="457200"/>
+          </a:xfrm>
+          <a:prstGeom prst="rect">
+            <a:avLst/>
+          </a:prstGeom>
+          <a:noFill/>
+        </p:spPr>
+        <p:txBody>
+          <a:bodyPr wrap="square" anchor="t">
+            <a:spAutoFit/>
+          </a:bodyPr>
+          <a:lstStyle/>
+          <a:p>
+            <a:pPr algn="l">
+              <a:lnSpc>
+                <a:spcPct val="112000"/>
+              </a:lnSpc>
+              <a:spcAft>
+                <a:spcPts val="500"/>
+              </a:spcAft>
+            </a:pPr>
+            <a:r>
+              <a:rPr sz="1500" b="0">
+                <a:solidFill>
+                  <a:srgbClr val="6B7280"/>
+                </a:solidFill>
+                <a:latin typeface="微软雅黑"/>
+                <a:ea typeface="微软雅黑"/>
+              </a:rPr>
+              <a:t>进入主界面</a:t>
+            </a:r>
+          </a:p>
+        </p:txBody>
+      </p:sp>
+      <p:sp>
+        <p:nvSpPr>
+          <p:cNvPr id="10" name="Oval 9"/>
+          <p:cNvSpPr/>
+          <p:nvPr/>
+        </p:nvSpPr>
+        <p:spPr>
+          <a:xfrm>
+            <a:off x="548640" y="2350008"/>
+            <a:ext cx="548640" cy="566928"/>
+          </a:xfrm>
+          <a:prstGeom prst="ellipse">
+            <a:avLst/>
+          </a:prstGeom>
+          <a:solidFill>
+            <a:srgbClr val="7C3AED"/>
+          </a:solidFill>
+          <a:ln>
+            <a:noFill/>
+          </a:ln>
+          <a:effectLst/>
+        </p:spPr>
+        <p:style>
+          <a:lnRef idx="1">
+            <a:schemeClr val="accent1"/>
+          </a:lnRef>
+          <a:fillRef idx="3">
+            <a:schemeClr val="accent1"/>
+          </a:fillRef>
+          <a:effectRef idx="2">
+            <a:schemeClr val="accent1"/>
+          </a:effectRef>
+          <a:fontRef idx="minor">
+            <a:schemeClr val="lt1"/>
+          </a:fontRef>
+        </p:style>
+        <p:txBody>
+          <a:bodyPr rtlCol="0" anchor="ctr" wrap="square"/>
+          <a:lstStyle/>
+          <a:p>
+            <a:pPr algn="ctr"/>
+          </a:p>
+        </p:txBody>
+      </p:sp>
+      <p:sp>
+        <p:nvSpPr>
+          <p:cNvPr id="11" name="TextBox 10"/>
+          <p:cNvSpPr txBox="1"/>
+          <p:nvPr/>
+        </p:nvSpPr>
+        <p:spPr>
+          <a:xfrm>
+            <a:off x="548640" y="2368296"/>
+            <a:ext cx="548640" cy="548640"/>
+          </a:xfrm>
+          <a:prstGeom prst="rect">
+            <a:avLst/>
+          </a:prstGeom>
+          <a:noFill/>
+        </p:spPr>
+        <p:txBody>
+          <a:bodyPr wrap="square" anchor="ctr">
+            <a:spAutoFit/>
+          </a:bodyPr>
+          <a:lstStyle/>
+          <a:p>
+            <a:pPr algn="ctr">
+              <a:lnSpc>
+                <a:spcPct val="112000"/>
+              </a:lnSpc>
+              <a:spcAft>
+                <a:spcPts val="500"/>
+              </a:spcAft>
+            </a:pPr>
+            <a:r>
+              <a:rPr sz="1800" b="1">
+                <a:solidFill>
+                  <a:srgbClr val="FFFFFF"/>
+                </a:solidFill>
+                <a:latin typeface="微软雅黑"/>
+                <a:ea typeface="微软雅黑"/>
+              </a:rPr>
+              <a:t>2</a:t>
+            </a:r>
+          </a:p>
+        </p:txBody>
+      </p:sp>
+      <p:sp>
+        <p:nvSpPr>
+          <p:cNvPr id="12" name="TextBox 11"/>
+          <p:cNvSpPr txBox="1"/>
+          <p:nvPr/>
+        </p:nvSpPr>
+        <p:spPr>
+          <a:xfrm>
+            <a:off x="1325880" y="2395728"/>
+            <a:ext cx="3291840" cy="457200"/>
+          </a:xfrm>
+          <a:prstGeom prst="rect">
+            <a:avLst/>
+          </a:prstGeom>
+          <a:noFill/>
+        </p:spPr>
+        <p:txBody>
+          <a:bodyPr wrap="square" anchor="t">
+            <a:spAutoFit/>
+          </a:bodyPr>
+          <a:lstStyle/>
+          <a:p>
+            <a:pPr algn="l">
+              <a:lnSpc>
+                <a:spcPct val="112000"/>
+              </a:lnSpc>
+              <a:spcAft>
+                <a:spcPts val="500"/>
+              </a:spcAft>
+            </a:pPr>
+            <a:r>
+              <a:rPr sz="1700" b="1">
+                <a:solidFill>
+                  <a:srgbClr val="1F2937"/>
+                </a:solidFill>
+                <a:latin typeface="微软雅黑"/>
+                <a:ea typeface="微软雅黑"/>
+              </a:rPr>
+              <a:t>普通问答</a:t>
+            </a:r>
+          </a:p>
+        </p:txBody>
+      </p:sp>
+      <p:sp>
+        <p:nvSpPr>
+          <p:cNvPr id="13" name="TextBox 12"/>
+          <p:cNvSpPr txBox="1"/>
+          <p:nvPr/>
+        </p:nvSpPr>
+        <p:spPr>
+          <a:xfrm>
+            <a:off x="4754880" y="2441448"/>
+            <a:ext cx="6766560" cy="457200"/>
+          </a:xfrm>
+          <a:prstGeom prst="rect">
+            <a:avLst/>
+          </a:prstGeom>
+          <a:noFill/>
+        </p:spPr>
+        <p:txBody>
+          <a:bodyPr wrap="square" anchor="t">
+            <a:spAutoFit/>
+          </a:bodyPr>
+          <a:lstStyle/>
+          <a:p>
+            <a:pPr algn="l">
+              <a:lnSpc>
+                <a:spcPct val="112000"/>
+              </a:lnSpc>
+              <a:spcAft>
+                <a:spcPts val="500"/>
+              </a:spcAft>
+            </a:pPr>
+            <a:r>
+              <a:rPr sz="1500" b="0">
+                <a:solidFill>
+                  <a:srgbClr val="6B7280"/>
+                </a:solidFill>
+                <a:latin typeface="微软雅黑"/>
+                <a:ea typeface="微软雅黑"/>
+              </a:rPr>
+              <a:t>打字机流式输出</a:t>
+            </a:r>
+          </a:p>
+        </p:txBody>
+      </p:sp>
+      <p:sp>
+        <p:nvSpPr>
+          <p:cNvPr id="14" name="Oval 13"/>
+          <p:cNvSpPr/>
+          <p:nvPr/>
+        </p:nvSpPr>
+        <p:spPr>
+          <a:xfrm>
+            <a:off x="548640" y="3008376"/>
+            <a:ext cx="548640" cy="566928"/>
+          </a:xfrm>
+          <a:prstGeom prst="ellipse">
+            <a:avLst/>
+          </a:prstGeom>
+          <a:solidFill>
+            <a:srgbClr val="4F46E5"/>
+          </a:solidFill>
+          <a:ln>
+            <a:noFill/>
+          </a:ln>
+          <a:effectLst/>
+        </p:spPr>
+        <p:style>
+          <a:lnRef idx="1">
+            <a:schemeClr val="accent1"/>
+          </a:lnRef>
+          <a:fillRef idx="3">
+            <a:schemeClr val="accent1"/>
+          </a:fillRef>
+          <a:effectRef idx="2">
+            <a:schemeClr val="accent1"/>
+          </a:effectRef>
+          <a:fontRef idx="minor">
+            <a:schemeClr val="lt1"/>
+          </a:fontRef>
+        </p:style>
+        <p:txBody>
+          <a:bodyPr rtlCol="0" anchor="ctr" wrap="square"/>
+          <a:lstStyle/>
+          <a:p>
+            <a:pPr algn="ctr"/>
+          </a:p>
+        </p:txBody>
+      </p:sp>
+      <p:sp>
+        <p:nvSpPr>
+          <p:cNvPr id="15" name="TextBox 14"/>
+          <p:cNvSpPr txBox="1"/>
+          <p:nvPr/>
+        </p:nvSpPr>
+        <p:spPr>
+          <a:xfrm>
+            <a:off x="548640" y="3026664"/>
+            <a:ext cx="548640" cy="548640"/>
+          </a:xfrm>
+          <a:prstGeom prst="rect">
+            <a:avLst/>
+          </a:prstGeom>
+          <a:noFill/>
+        </p:spPr>
+        <p:txBody>
+          <a:bodyPr wrap="square" anchor="ctr">
+            <a:spAutoFit/>
+          </a:bodyPr>
+          <a:lstStyle/>
+          <a:p>
+            <a:pPr algn="ctr">
+              <a:lnSpc>
+                <a:spcPct val="112000"/>
+              </a:lnSpc>
+              <a:spcAft>
+                <a:spcPts val="500"/>
+              </a:spcAft>
+            </a:pPr>
+            <a:r>
+              <a:rPr sz="1800" b="1">
+                <a:solidFill>
+                  <a:srgbClr val="FFFFFF"/>
+                </a:solidFill>
+                <a:latin typeface="微软雅黑"/>
+                <a:ea typeface="微软雅黑"/>
+              </a:rPr>
+              <a:t>3</a:t>
+            </a:r>
+          </a:p>
+        </p:txBody>
+      </p:sp>
+      <p:sp>
+        <p:nvSpPr>
+          <p:cNvPr id="16" name="TextBox 15"/>
+          <p:cNvSpPr txBox="1"/>
+          <p:nvPr/>
+        </p:nvSpPr>
+        <p:spPr>
+          <a:xfrm>
+            <a:off x="1325880" y="3054096"/>
+            <a:ext cx="3291840" cy="457200"/>
+          </a:xfrm>
+          <a:prstGeom prst="rect">
+            <a:avLst/>
+          </a:prstGeom>
+          <a:noFill/>
+        </p:spPr>
+        <p:txBody>
+          <a:bodyPr wrap="square" anchor="t">
+            <a:spAutoFit/>
+          </a:bodyPr>
+          <a:lstStyle/>
+          <a:p>
+            <a:pPr algn="l">
+              <a:lnSpc>
+                <a:spcPct val="112000"/>
+              </a:lnSpc>
+              <a:spcAft>
+                <a:spcPts val="500"/>
+              </a:spcAft>
+            </a:pPr>
+            <a:r>
+              <a:rPr sz="1700" b="1">
+                <a:solidFill>
+                  <a:srgbClr val="1F2937"/>
+                </a:solidFill>
+                <a:latin typeface="微软雅黑"/>
+                <a:ea typeface="微软雅黑"/>
+              </a:rPr>
+              <a:t>文档模式</a:t>
+            </a:r>
+          </a:p>
+        </p:txBody>
+      </p:sp>
+      <p:sp>
+        <p:nvSpPr>
+          <p:cNvPr id="17" name="TextBox 16"/>
+          <p:cNvSpPr txBox="1"/>
+          <p:nvPr/>
+        </p:nvSpPr>
+        <p:spPr>
+          <a:xfrm>
+            <a:off x="4754880" y="3099816"/>
+            <a:ext cx="6766560" cy="457200"/>
+          </a:xfrm>
+          <a:prstGeom prst="rect">
+            <a:avLst/>
+          </a:prstGeom>
+          <a:noFill/>
+        </p:spPr>
+        <p:txBody>
+          <a:bodyPr wrap="square" anchor="t">
+            <a:spAutoFit/>
+          </a:bodyPr>
+          <a:lstStyle/>
+          <a:p>
+            <a:pPr algn="l">
+              <a:lnSpc>
+                <a:spcPct val="112000"/>
+              </a:lnSpc>
+              <a:spcAft>
+                <a:spcPts val="500"/>
+              </a:spcAft>
+            </a:pPr>
+            <a:r>
+              <a:rPr sz="1500" b="0">
+                <a:solidFill>
+                  <a:srgbClr val="6B7280"/>
+                </a:solidFill>
+                <a:latin typeface="微软雅黑"/>
+                <a:ea typeface="微软雅黑"/>
+              </a:rPr>
+              <a:t>提问《视觉问答系统》看引用</a:t>
+            </a:r>
+          </a:p>
+        </p:txBody>
+      </p:sp>
+      <p:sp>
+        <p:nvSpPr>
+          <p:cNvPr id="18" name="Oval 17"/>
+          <p:cNvSpPr/>
+          <p:nvPr/>
+        </p:nvSpPr>
+        <p:spPr>
+          <a:xfrm>
+            <a:off x="548640" y="3666744"/>
+            <a:ext cx="548640" cy="566928"/>
+          </a:xfrm>
+          <a:prstGeom prst="ellipse">
+            <a:avLst/>
+          </a:prstGeom>
+          <a:solidFill>
+            <a:srgbClr val="7C3AED"/>
+          </a:solidFill>
+          <a:ln>
+            <a:noFill/>
+          </a:ln>
+          <a:effectLst/>
+        </p:spPr>
+        <p:style>
+          <a:lnRef idx="1">
+            <a:schemeClr val="accent1"/>
+          </a:lnRef>
+          <a:fillRef idx="3">
+            <a:schemeClr val="accent1"/>
+          </a:fillRef>
+          <a:effectRef idx="2">
+            <a:schemeClr val="accent1"/>
+          </a:effectRef>
+          <a:fontRef idx="minor">
+            <a:schemeClr val="lt1"/>
+          </a:fontRef>
+        </p:style>
+        <p:txBody>
+          <a:bodyPr rtlCol="0" anchor="ctr" wrap="square"/>
+          <a:lstStyle/>
+          <a:p>
+            <a:pPr algn="ctr"/>
+          </a:p>
+        </p:txBody>
+      </p:sp>
+      <p:sp>
+        <p:nvSpPr>
+          <p:cNvPr id="19" name="TextBox 18"/>
+          <p:cNvSpPr txBox="1"/>
+          <p:nvPr/>
+        </p:nvSpPr>
+        <p:spPr>
+          <a:xfrm>
+            <a:off x="548640" y="3685031"/>
+            <a:ext cx="548640" cy="548640"/>
+          </a:xfrm>
+          <a:prstGeom prst="rect">
+            <a:avLst/>
+          </a:prstGeom>
+          <a:noFill/>
+        </p:spPr>
+        <p:txBody>
+          <a:bodyPr wrap="square" anchor="ctr">
+            <a:spAutoFit/>
+          </a:bodyPr>
+          <a:lstStyle/>
+          <a:p>
+            <a:pPr algn="ctr">
+              <a:lnSpc>
+                <a:spcPct val="112000"/>
+              </a:lnSpc>
+              <a:spcAft>
+                <a:spcPts val="500"/>
+              </a:spcAft>
+            </a:pPr>
+            <a:r>
+              <a:rPr sz="1800" b="1">
+                <a:solidFill>
+                  <a:srgbClr val="FFFFFF"/>
+                </a:solidFill>
+                <a:latin typeface="微软雅黑"/>
+                <a:ea typeface="微软雅黑"/>
+              </a:rPr>
+              <a:t>4</a:t>
+            </a:r>
+          </a:p>
+        </p:txBody>
+      </p:sp>
+      <p:sp>
+        <p:nvSpPr>
+          <p:cNvPr id="20" name="TextBox 19"/>
+          <p:cNvSpPr txBox="1"/>
+          <p:nvPr/>
+        </p:nvSpPr>
+        <p:spPr>
+          <a:xfrm>
+            <a:off x="1325880" y="3712463"/>
+            <a:ext cx="3291840" cy="457200"/>
+          </a:xfrm>
+          <a:prstGeom prst="rect">
+            <a:avLst/>
+          </a:prstGeom>
+          <a:noFill/>
+        </p:spPr>
+        <p:txBody>
+          <a:bodyPr wrap="square" anchor="t">
+            <a:spAutoFit/>
+          </a:bodyPr>
+          <a:lstStyle/>
+          <a:p>
+            <a:pPr algn="l">
+              <a:lnSpc>
+                <a:spcPct val="112000"/>
+              </a:lnSpc>
+              <a:spcAft>
+                <a:spcPts val="500"/>
+              </a:spcAft>
+            </a:pPr>
+            <a:r>
+              <a:rPr sz="1700" b="1">
+                <a:solidFill>
+                  <a:srgbClr val="1F2937"/>
+                </a:solidFill>
+                <a:latin typeface="微软雅黑"/>
+                <a:ea typeface="微软雅黑"/>
+              </a:rPr>
+              <a:t>工具调用</a:t>
+            </a:r>
+          </a:p>
+        </p:txBody>
+      </p:sp>
+      <p:sp>
+        <p:nvSpPr>
+          <p:cNvPr id="21" name="TextBox 20"/>
+          <p:cNvSpPr txBox="1"/>
+          <p:nvPr/>
+        </p:nvSpPr>
+        <p:spPr>
+          <a:xfrm>
+            <a:off x="4754880" y="3758183"/>
+            <a:ext cx="6766560" cy="457200"/>
+          </a:xfrm>
+          <a:prstGeom prst="rect">
+            <a:avLst/>
+          </a:prstGeom>
+          <a:noFill/>
+        </p:spPr>
+        <p:txBody>
+          <a:bodyPr wrap="square" anchor="t">
+            <a:spAutoFit/>
+          </a:bodyPr>
+          <a:lstStyle/>
+          <a:p>
+            <a:pPr algn="l">
+              <a:lnSpc>
+                <a:spcPct val="112000"/>
+              </a:lnSpc>
+              <a:spcAft>
+                <a:spcPts val="500"/>
+              </a:spcAft>
+            </a:pPr>
+            <a:r>
+              <a:rPr sz="1500" b="0">
+                <a:solidFill>
+                  <a:srgbClr val="6B7280"/>
+                </a:solidFill>
+                <a:latin typeface="微软雅黑"/>
+                <a:ea typeface="微软雅黑"/>
+              </a:rPr>
+              <a:t>12×34 自动调计算器</a:t>
+            </a:r>
+          </a:p>
+        </p:txBody>
+      </p:sp>
+      <p:sp>
+        <p:nvSpPr>
+          <p:cNvPr id="22" name="Oval 21"/>
+          <p:cNvSpPr/>
+          <p:nvPr/>
+        </p:nvSpPr>
+        <p:spPr>
+          <a:xfrm>
+            <a:off x="548640" y="4325112"/>
+            <a:ext cx="548640" cy="566928"/>
+          </a:xfrm>
+          <a:prstGeom prst="ellipse">
+            <a:avLst/>
+          </a:prstGeom>
+          <a:solidFill>
+            <a:srgbClr val="4F46E5"/>
+          </a:solidFill>
+          <a:ln>
+            <a:noFill/>
+          </a:ln>
+          <a:effectLst/>
+        </p:spPr>
+        <p:style>
+          <a:lnRef idx="1">
+            <a:schemeClr val="accent1"/>
+          </a:lnRef>
+          <a:fillRef idx="3">
+            <a:schemeClr val="accent1"/>
+          </a:fillRef>
+          <a:effectRef idx="2">
+            <a:schemeClr val="accent1"/>
+          </a:effectRef>
+          <a:fontRef idx="minor">
+            <a:schemeClr val="lt1"/>
+          </a:fontRef>
+        </p:style>
+        <p:txBody>
+          <a:bodyPr rtlCol="0" anchor="ctr" wrap="square"/>
+          <a:lstStyle/>
+          <a:p>
+            <a:pPr algn="ctr"/>
+          </a:p>
+        </p:txBody>
+      </p:sp>
+      <p:sp>
+        <p:nvSpPr>
+          <p:cNvPr id="23" name="TextBox 22"/>
+          <p:cNvSpPr txBox="1"/>
+          <p:nvPr/>
+        </p:nvSpPr>
+        <p:spPr>
+          <a:xfrm>
+            <a:off x="548640" y="4343399"/>
+            <a:ext cx="548640" cy="548640"/>
+          </a:xfrm>
+          <a:prstGeom prst="rect">
+            <a:avLst/>
+          </a:prstGeom>
+          <a:noFill/>
+        </p:spPr>
+        <p:txBody>
+          <a:bodyPr wrap="square" anchor="ctr">
+            <a:spAutoFit/>
+          </a:bodyPr>
+          <a:lstStyle/>
+          <a:p>
+            <a:pPr algn="ctr">
+              <a:lnSpc>
+                <a:spcPct val="112000"/>
+              </a:lnSpc>
+              <a:spcAft>
+                <a:spcPts val="500"/>
+              </a:spcAft>
+            </a:pPr>
+            <a:r>
+              <a:rPr sz="1800" b="1">
+                <a:solidFill>
+                  <a:srgbClr val="FFFFFF"/>
+                </a:solidFill>
+                <a:latin typeface="微软雅黑"/>
+                <a:ea typeface="微软雅黑"/>
+              </a:rPr>
+              <a:t>5</a:t>
+            </a:r>
+          </a:p>
+        </p:txBody>
+      </p:sp>
+      <p:sp>
+        <p:nvSpPr>
+          <p:cNvPr id="24" name="TextBox 23"/>
+          <p:cNvSpPr txBox="1"/>
+          <p:nvPr/>
+        </p:nvSpPr>
+        <p:spPr>
+          <a:xfrm>
+            <a:off x="1325880" y="4370831"/>
+            <a:ext cx="3291840" cy="457200"/>
+          </a:xfrm>
+          <a:prstGeom prst="rect">
+            <a:avLst/>
+          </a:prstGeom>
+          <a:noFill/>
+        </p:spPr>
+        <p:txBody>
+          <a:bodyPr wrap="square" anchor="t">
+            <a:spAutoFit/>
+          </a:bodyPr>
+          <a:lstStyle/>
+          <a:p>
+            <a:pPr algn="l">
+              <a:lnSpc>
+                <a:spcPct val="112000"/>
+              </a:lnSpc>
+              <a:spcAft>
+                <a:spcPts val="500"/>
+              </a:spcAft>
+            </a:pPr>
+            <a:r>
+              <a:rPr sz="1700" b="1">
+                <a:solidFill>
+                  <a:srgbClr val="1F2937"/>
+                </a:solidFill>
+                <a:latin typeface="微软雅黑"/>
+                <a:ea typeface="微软雅黑"/>
+              </a:rPr>
+              <a:t>技能市场</a:t>
+            </a:r>
+          </a:p>
+        </p:txBody>
+      </p:sp>
+      <p:sp>
+        <p:nvSpPr>
+          <p:cNvPr id="25" name="TextBox 24"/>
+          <p:cNvSpPr txBox="1"/>
+          <p:nvPr/>
+        </p:nvSpPr>
+        <p:spPr>
+          <a:xfrm>
+            <a:off x="4754880" y="4416551"/>
+            <a:ext cx="6766560" cy="457200"/>
+          </a:xfrm>
+          <a:prstGeom prst="rect">
+            <a:avLst/>
+          </a:prstGeom>
+          <a:noFill/>
+        </p:spPr>
+        <p:txBody>
+          <a:bodyPr wrap="square" anchor="t">
+            <a:spAutoFit/>
+          </a:bodyPr>
+          <a:lstStyle/>
+          <a:p>
+            <a:pPr algn="l">
+              <a:lnSpc>
+                <a:spcPct val="112000"/>
+              </a:lnSpc>
+              <a:spcAft>
+                <a:spcPts val="500"/>
+              </a:spcAft>
+            </a:pPr>
+            <a:r>
+              <a:rPr sz="1500" b="0">
+                <a:solidFill>
+                  <a:srgbClr val="6B7280"/>
+                </a:solidFill>
+                <a:latin typeface="微软雅黑"/>
+                <a:ea typeface="微软雅黑"/>
+              </a:rPr>
+              <a:t>启用 / 禁用工具</a:t>
+            </a:r>
+          </a:p>
+        </p:txBody>
+      </p:sp>
+      <p:sp>
+        <p:nvSpPr>
+          <p:cNvPr id="26" name="Oval 25"/>
+          <p:cNvSpPr/>
+          <p:nvPr/>
+        </p:nvSpPr>
+        <p:spPr>
+          <a:xfrm>
+            <a:off x="548640" y="4983479"/>
+            <a:ext cx="548640" cy="566928"/>
+          </a:xfrm>
+          <a:prstGeom prst="ellipse">
+            <a:avLst/>
+          </a:prstGeom>
+          <a:solidFill>
+            <a:srgbClr val="7C3AED"/>
+          </a:solidFill>
+          <a:ln>
+            <a:noFill/>
+          </a:ln>
+          <a:effectLst/>
+        </p:spPr>
+        <p:style>
+          <a:lnRef idx="1">
+            <a:schemeClr val="accent1"/>
+          </a:lnRef>
+          <a:fillRef idx="3">
+            <a:schemeClr val="accent1"/>
+          </a:fillRef>
+          <a:effectRef idx="2">
+            <a:schemeClr val="accent1"/>
+          </a:effectRef>
+          <a:fontRef idx="minor">
+            <a:schemeClr val="lt1"/>
+          </a:fontRef>
+        </p:style>
+        <p:txBody>
+          <a:bodyPr rtlCol="0" anchor="ctr" wrap="square"/>
+          <a:lstStyle/>
+          <a:p>
+            <a:pPr algn="ctr"/>
+          </a:p>
+        </p:txBody>
+      </p:sp>
+      <p:sp>
+        <p:nvSpPr>
+          <p:cNvPr id="27" name="TextBox 26"/>
+          <p:cNvSpPr txBox="1"/>
+          <p:nvPr/>
+        </p:nvSpPr>
+        <p:spPr>
+          <a:xfrm>
+            <a:off x="548640" y="5001767"/>
+            <a:ext cx="548640" cy="548640"/>
+          </a:xfrm>
+          <a:prstGeom prst="rect">
+            <a:avLst/>
+          </a:prstGeom>
+          <a:noFill/>
+        </p:spPr>
+        <p:txBody>
+          <a:bodyPr wrap="square" anchor="ctr">
+            <a:spAutoFit/>
+          </a:bodyPr>
+          <a:lstStyle/>
+          <a:p>
+            <a:pPr algn="ctr">
+              <a:lnSpc>
+                <a:spcPct val="112000"/>
+              </a:lnSpc>
+              <a:spcAft>
+                <a:spcPts val="500"/>
+              </a:spcAft>
+            </a:pPr>
+            <a:r>
+              <a:rPr sz="1800" b="1">
+                <a:solidFill>
+                  <a:srgbClr val="FFFFFF"/>
+                </a:solidFill>
+                <a:latin typeface="微软雅黑"/>
+                <a:ea typeface="微软雅黑"/>
+              </a:rPr>
+              <a:t>6</a:t>
+            </a:r>
+          </a:p>
+        </p:txBody>
+      </p:sp>
+      <p:sp>
+        <p:nvSpPr>
+          <p:cNvPr id="28" name="TextBox 27"/>
+          <p:cNvSpPr txBox="1"/>
+          <p:nvPr/>
+        </p:nvSpPr>
+        <p:spPr>
+          <a:xfrm>
+            <a:off x="1325880" y="5029199"/>
+            <a:ext cx="3291840" cy="457200"/>
+          </a:xfrm>
+          <a:prstGeom prst="rect">
+            <a:avLst/>
+          </a:prstGeom>
+          <a:noFill/>
+        </p:spPr>
+        <p:txBody>
+          <a:bodyPr wrap="square" anchor="t">
+            <a:spAutoFit/>
+          </a:bodyPr>
+          <a:lstStyle/>
+          <a:p>
+            <a:pPr algn="l">
+              <a:lnSpc>
+                <a:spcPct val="112000"/>
+              </a:lnSpc>
+              <a:spcAft>
+                <a:spcPts val="500"/>
+              </a:spcAft>
+            </a:pPr>
+            <a:r>
+              <a:rPr sz="1700" b="1">
+                <a:solidFill>
+                  <a:srgbClr val="1F2937"/>
+                </a:solidFill>
+                <a:latin typeface="微软雅黑"/>
+                <a:ea typeface="微软雅黑"/>
+              </a:rPr>
+              <a:t>求职辅助</a:t>
+            </a:r>
+          </a:p>
+        </p:txBody>
+      </p:sp>
+      <p:sp>
+        <p:nvSpPr>
+          <p:cNvPr id="29" name="TextBox 28"/>
+          <p:cNvSpPr txBox="1"/>
+          <p:nvPr/>
+        </p:nvSpPr>
+        <p:spPr>
+          <a:xfrm>
+            <a:off x="4754880" y="5074919"/>
+            <a:ext cx="6766560" cy="457200"/>
+          </a:xfrm>
+          <a:prstGeom prst="rect">
+            <a:avLst/>
+          </a:prstGeom>
+          <a:noFill/>
+        </p:spPr>
+        <p:txBody>
+          <a:bodyPr wrap="square" anchor="t">
+            <a:spAutoFit/>
+          </a:bodyPr>
+          <a:lstStyle/>
+          <a:p>
+            <a:pPr algn="l">
+              <a:lnSpc>
+                <a:spcPct val="112000"/>
+              </a:lnSpc>
+              <a:spcAft>
+                <a:spcPts val="500"/>
+              </a:spcAft>
+            </a:pPr>
+            <a:r>
+              <a:rPr sz="1500" b="0">
+                <a:solidFill>
+                  <a:srgbClr val="6B7280"/>
+                </a:solidFill>
+                <a:latin typeface="微软雅黑"/>
+                <a:ea typeface="微软雅黑"/>
+              </a:rPr>
+              <a:t>简历检查、面试问答</a:t>
+            </a:r>
+          </a:p>
+        </p:txBody>
+      </p:sp>
+      <p:sp>
+        <p:nvSpPr>
+          <p:cNvPr id="30" name="Oval 29"/>
+          <p:cNvSpPr/>
+          <p:nvPr/>
+        </p:nvSpPr>
+        <p:spPr>
+          <a:xfrm>
+            <a:off x="548640" y="5641847"/>
+            <a:ext cx="548640" cy="566928"/>
+          </a:xfrm>
+          <a:prstGeom prst="ellipse">
+            <a:avLst/>
+          </a:prstGeom>
+          <a:solidFill>
+            <a:srgbClr val="4F46E5"/>
+          </a:solidFill>
+          <a:ln>
+            <a:noFill/>
+          </a:ln>
+          <a:effectLst/>
+        </p:spPr>
+        <p:style>
+          <a:lnRef idx="1">
+            <a:schemeClr val="accent1"/>
+          </a:lnRef>
+          <a:fillRef idx="3">
+            <a:schemeClr val="accent1"/>
+          </a:fillRef>
+          <a:effectRef idx="2">
+            <a:schemeClr val="accent1"/>
+          </a:effectRef>
+          <a:fontRef idx="minor">
+            <a:schemeClr val="lt1"/>
+          </a:fontRef>
+        </p:style>
+        <p:txBody>
+          <a:bodyPr rtlCol="0" anchor="ctr" wrap="square"/>
+          <a:lstStyle/>
+          <a:p>
+            <a:pPr algn="ctr"/>
+          </a:p>
+        </p:txBody>
+      </p:sp>
+      <p:sp>
+        <p:nvSpPr>
+          <p:cNvPr id="31" name="TextBox 30"/>
+          <p:cNvSpPr txBox="1"/>
+          <p:nvPr/>
+        </p:nvSpPr>
+        <p:spPr>
+          <a:xfrm>
+            <a:off x="548640" y="5660135"/>
+            <a:ext cx="548640" cy="548640"/>
+          </a:xfrm>
+          <a:prstGeom prst="rect">
+            <a:avLst/>
+          </a:prstGeom>
+          <a:noFill/>
+        </p:spPr>
+        <p:txBody>
+          <a:bodyPr wrap="square" anchor="ctr">
+            <a:spAutoFit/>
+          </a:bodyPr>
+          <a:lstStyle/>
+          <a:p>
+            <a:pPr algn="ctr">
+              <a:lnSpc>
+                <a:spcPct val="112000"/>
+              </a:lnSpc>
+              <a:spcAft>
+                <a:spcPts val="500"/>
+              </a:spcAft>
+            </a:pPr>
+            <a:r>
+              <a:rPr sz="1800" b="1">
+                <a:solidFill>
+                  <a:srgbClr val="FFFFFF"/>
+                </a:solidFill>
+                <a:latin typeface="微软雅黑"/>
+                <a:ea typeface="微软雅黑"/>
+              </a:rPr>
+              <a:t>7</a:t>
+            </a:r>
+          </a:p>
+        </p:txBody>
+      </p:sp>
+      <p:sp>
+        <p:nvSpPr>
+          <p:cNvPr id="32" name="TextBox 31"/>
+          <p:cNvSpPr txBox="1"/>
+          <p:nvPr/>
+        </p:nvSpPr>
+        <p:spPr>
+          <a:xfrm>
+            <a:off x="1325880" y="5687567"/>
+            <a:ext cx="3291840" cy="457200"/>
+          </a:xfrm>
+          <a:prstGeom prst="rect">
+            <a:avLst/>
+          </a:prstGeom>
+          <a:noFill/>
+        </p:spPr>
+        <p:txBody>
+          <a:bodyPr wrap="square" anchor="t">
+            <a:spAutoFit/>
+          </a:bodyPr>
+          <a:lstStyle/>
+          <a:p>
+            <a:pPr algn="l">
+              <a:lnSpc>
+                <a:spcPct val="112000"/>
+              </a:lnSpc>
+              <a:spcAft>
+                <a:spcPts val="500"/>
+              </a:spcAft>
+            </a:pPr>
+            <a:r>
+              <a:rPr sz="1700" b="1">
+                <a:solidFill>
+                  <a:srgbClr val="1F2937"/>
+                </a:solidFill>
+                <a:latin typeface="微软雅黑"/>
+                <a:ea typeface="微软雅黑"/>
+              </a:rPr>
+              <a:t>体验亮点</a:t>
+            </a:r>
+          </a:p>
+        </p:txBody>
+      </p:sp>
+      <p:sp>
+        <p:nvSpPr>
+          <p:cNvPr id="33" name="TextBox 32"/>
+          <p:cNvSpPr txBox="1"/>
+          <p:nvPr/>
+        </p:nvSpPr>
+        <p:spPr>
+          <a:xfrm>
+            <a:off x="4754880" y="5733287"/>
+            <a:ext cx="6766560" cy="457200"/>
+          </a:xfrm>
+          <a:prstGeom prst="rect">
+            <a:avLst/>
+          </a:prstGeom>
+          <a:noFill/>
+        </p:spPr>
+        <p:txBody>
+          <a:bodyPr wrap="square" anchor="t">
+            <a:spAutoFit/>
+          </a:bodyPr>
+          <a:lstStyle/>
+          <a:p>
+            <a:pPr algn="l">
+              <a:lnSpc>
+                <a:spcPct val="112000"/>
+              </a:lnSpc>
+              <a:spcAft>
+                <a:spcPts val="500"/>
+              </a:spcAft>
+            </a:pPr>
+            <a:r>
+              <a:rPr sz="1500" b="0">
+                <a:solidFill>
+                  <a:srgbClr val="6B7280"/>
+                </a:solidFill>
+                <a:latin typeface="微软雅黑"/>
+                <a:ea typeface="微软雅黑"/>
+              </a:rPr>
+              <a:t>暗色、引用下载、管理后台</a:t>
+            </a:r>
+          </a:p>
+        </p:txBody>
+      </p:sp>
+      <p:sp>
+        <p:nvSpPr>
+          <p:cNvPr id="34" name="TextBox 33"/>
+          <p:cNvSpPr txBox="1"/>
+          <p:nvPr/>
+        </p:nvSpPr>
+        <p:spPr>
+          <a:xfrm>
+            <a:off x="502920" y="6446520"/>
+            <a:ext cx="11155680" cy="274320"/>
+          </a:xfrm>
+          <a:prstGeom prst="rect">
+            <a:avLst/>
+          </a:prstGeom>
+          <a:noFill/>
+        </p:spPr>
+        <p:txBody>
+          <a:bodyPr wrap="square" anchor="t">
+            <a:spAutoFit/>
+          </a:bodyPr>
+          <a:lstStyle/>
+          <a:p>
+            <a:pPr algn="l">
+              <a:lnSpc>
+                <a:spcPct val="112000"/>
+              </a:lnSpc>
+              <a:spcAft>
+                <a:spcPts val="500"/>
+              </a:spcAft>
+            </a:pPr>
+            <a:r>
+              <a:rPr sz="1000" b="0">
+                <a:solidFill>
+                  <a:srgbClr val="6B7280"/>
+                </a:solidFill>
+                <a:latin typeface="微软雅黑"/>
+                <a:ea typeface="微软雅黑"/>
+              </a:rPr>
+              <a:t>大学生学习与求职智能助手</a:t>
+            </a:r>
+          </a:p>
+        </p:txBody>
+      </p:sp>
+    </p:spTree>
+  </p:cSld>
+  <p:clrMapOvr>
+    <a:masterClrMapping/>
+  </p:clrMapOvr>
+</p:sld>
+</file>
+
+<file path=ppt/slides/slide14.xml><?xml version="1.0" encoding="utf-8"?>
+<p:sld xmlns:a="http://schemas.openxmlformats.org/drawingml/2006/main" xmlns:p="http://schemas.openxmlformats.org/presentationml/2006/main" xmlns:r="http://schemas.openxmlformats.org/officeDocument/2006/relationships">
+  <p:cSld>
+    <p:spTree>
+      <p:nvGrpSpPr>
+        <p:cNvPr id="1" name=""/>
+        <p:cNvGrpSpPr/>
+        <p:nvPr/>
+      </p:nvGrpSpPr>
+      <p:grpSpPr/>
+      <p:sp>
+        <p:nvSpPr>
+          <p:cNvPr id="2" name="Rectangle 1"/>
+          <p:cNvSpPr/>
+          <p:nvPr/>
+        </p:nvSpPr>
+        <p:spPr>
+          <a:xfrm>
+            <a:off x="502920" y="457200"/>
+            <a:ext cx="118872" cy="658368"/>
+          </a:xfrm>
+          <a:prstGeom prst="rect">
+            <a:avLst/>
+          </a:prstGeom>
+          <a:solidFill>
+            <a:srgbClr val="4F46E5"/>
+          </a:solidFill>
+          <a:ln>
+            <a:noFill/>
+          </a:ln>
+          <a:effectLst/>
+        </p:spPr>
+        <p:style>
+          <a:lnRef idx="1">
+            <a:schemeClr val="accent1"/>
+          </a:lnRef>
+          <a:fillRef idx="3">
+            <a:schemeClr val="accent1"/>
+          </a:fillRef>
+          <a:effectRef idx="2">
+            <a:schemeClr val="accent1"/>
+          </a:effectRef>
+          <a:fontRef idx="minor">
+            <a:schemeClr val="lt1"/>
+          </a:fontRef>
+        </p:style>
+        <p:txBody>
+          <a:bodyPr rtlCol="0" anchor="ctr" wrap="square"/>
+          <a:lstStyle/>
+          <a:p>
+            <a:pPr algn="ctr"/>
+          </a:p>
+        </p:txBody>
+      </p:sp>
+      <p:sp>
+        <p:nvSpPr>
+          <p:cNvPr id="3" name="TextBox 2"/>
+          <p:cNvSpPr txBox="1"/>
+          <p:nvPr/>
+        </p:nvSpPr>
+        <p:spPr>
+          <a:xfrm>
+            <a:off x="749808" y="402336"/>
+            <a:ext cx="9326880" cy="822960"/>
+          </a:xfrm>
+          <a:prstGeom prst="rect">
+            <a:avLst/>
+          </a:prstGeom>
+          <a:noFill/>
+        </p:spPr>
+        <p:txBody>
+          <a:bodyPr wrap="square" anchor="t">
+            <a:spAutoFit/>
+          </a:bodyPr>
+          <a:lstStyle/>
+          <a:p>
+            <a:pPr algn="l">
+              <a:lnSpc>
+                <a:spcPct val="112000"/>
+              </a:lnSpc>
+              <a:spcAft>
+                <a:spcPts val="500"/>
+              </a:spcAft>
+            </a:pPr>
+            <a:r>
+              <a:rPr sz="3000" b="1">
+                <a:solidFill>
+                  <a:srgbClr val="1F2937"/>
+                </a:solidFill>
+                <a:latin typeface="微软雅黑"/>
+                <a:ea typeface="微软雅黑"/>
+              </a:rPr>
+              <a:t>总结与展望</a:t>
+            </a:r>
+          </a:p>
+        </p:txBody>
+      </p:sp>
+      <p:sp>
+        <p:nvSpPr>
+          <p:cNvPr id="4" name="TextBox 3"/>
+          <p:cNvSpPr txBox="1"/>
+          <p:nvPr/>
+        </p:nvSpPr>
+        <p:spPr>
+          <a:xfrm>
+            <a:off x="10515600" y="457200"/>
+            <a:ext cx="1234440" cy="457200"/>
+          </a:xfrm>
+          <a:prstGeom prst="rect">
+            <a:avLst/>
+          </a:prstGeom>
+          <a:noFill/>
+        </p:spPr>
+        <p:txBody>
+          <a:bodyPr wrap="square" anchor="t">
+            <a:spAutoFit/>
+          </a:bodyPr>
+          <a:lstStyle/>
+          <a:p>
+            <a:pPr algn="r">
+              <a:lnSpc>
+                <a:spcPct val="112000"/>
+              </a:lnSpc>
+              <a:spcAft>
+                <a:spcPts val="500"/>
+              </a:spcAft>
+            </a:pPr>
+            <a:r>
+              <a:rPr sz="1800" b="1">
+                <a:solidFill>
+                  <a:srgbClr val="6B7280"/>
+                </a:solidFill>
+                <a:latin typeface="微软雅黑"/>
+                <a:ea typeface="微软雅黑"/>
+              </a:rPr>
+              <a:t>14 / 14</a:t>
+            </a:r>
+          </a:p>
+        </p:txBody>
+      </p:sp>
+      <p:sp>
+        <p:nvSpPr>
+          <p:cNvPr id="5" name="Rectangle 4"/>
+          <p:cNvSpPr/>
+          <p:nvPr/>
+        </p:nvSpPr>
+        <p:spPr>
+          <a:xfrm>
+            <a:off x="502920" y="1298448"/>
+            <a:ext cx="11155680" cy="18288"/>
+          </a:xfrm>
+          <a:prstGeom prst="rect">
+            <a:avLst/>
+          </a:prstGeom>
+          <a:solidFill>
+            <a:srgbClr val="E5E7EB"/>
+          </a:solidFill>
+          <a:ln>
+            <a:noFill/>
+          </a:ln>
+          <a:effectLst/>
+        </p:spPr>
+        <p:style>
+          <a:lnRef idx="1">
+            <a:schemeClr val="accent1"/>
+          </a:lnRef>
+          <a:fillRef idx="3">
+            <a:schemeClr val="accent1"/>
+          </a:fillRef>
+          <a:effectRef idx="2">
+            <a:schemeClr val="accent1"/>
+          </a:effectRef>
+          <a:fontRef idx="minor">
+            <a:schemeClr val="lt1"/>
+          </a:fontRef>
+        </p:style>
+        <p:txBody>
+          <a:bodyPr rtlCol="0" anchor="ctr" wrap="square"/>
+          <a:lstStyle/>
+          <a:p>
+            <a:pPr algn="ctr"/>
           </a:p>
         </p:txBody>
       </p:sp>
@@ -7418,11 +7786,10 @@
           </a:fontRef>
         </p:style>
         <p:txBody>
-          <a:bodyPr wrap="square" rtlCol="0" anchor="ctr"/>
+          <a:bodyPr rtlCol="0" anchor="ctr" wrap="square"/>
           <a:lstStyle/>
           <a:p>
             <a:pPr algn="ctr"/>
-            <a:endParaRPr/>
           </a:p>
         </p:txBody>
       </p:sp>
@@ -7568,6 +7935,26 @@
                 <a:ea typeface="微软雅黑"/>
               </a:rPr>
               <a:t>•  限流防爆破、敏感词等安全设计</a:t>
+            </a:r>
+          </a:p>
+          <a:p>
+            <a:pPr algn="l">
+              <a:lnSpc>
+                <a:spcPct val="112000"/>
+              </a:lnSpc>
+              <a:spcAft>
+                <a:spcPts val="500"/>
+              </a:spcAft>
+            </a:pPr>
+            <a:r>
+              <a:rPr sz="1500" b="0">
+                <a:solidFill>
+                  <a:srgbClr val="1F2937"/>
+                </a:solidFill>
+                <a:latin typeface="微软雅黑"/>
+                <a:ea typeface="微软雅黑"/>
+              </a:rPr>
+              <a:t>•  长期记忆：会话摘要 + 用户画像</a:t>
             </a:r>
           </a:p>
           <a:p>
@@ -7631,11 +8018,10 @@
           </a:fontRef>
         </p:style>
         <p:txBody>
-          <a:bodyPr wrap="square" rtlCol="0" anchor="ctr"/>
+          <a:bodyPr rtlCol="0" anchor="ctr" wrap="square"/>
           <a:lstStyle/>
           <a:p>
             <a:pPr algn="ctr"/>
-            <a:endParaRPr/>
           </a:p>
         </p:txBody>
       </p:sp>
@@ -7880,7 +8266,7 @@
 </file>
 
 <file path=ppt/slides/slide2.xml><?xml version="1.0" encoding="utf-8"?>
-<p:sld xmlns:a="http://schemas.openxmlformats.org/drawingml/2006/main" xmlns:r="http://schemas.openxmlformats.org/officeDocument/2006/relationships" xmlns:p="http://schemas.openxmlformats.org/presentationml/2006/main">
+<p:sld xmlns:a="http://schemas.openxmlformats.org/drawingml/2006/main" xmlns:p="http://schemas.openxmlformats.org/presentationml/2006/main" xmlns:r="http://schemas.openxmlformats.org/officeDocument/2006/relationships">
   <p:cSld>
     <p:spTree>
       <p:nvGrpSpPr>
@@ -7888,14 +8274,7 @@
         <p:cNvGrpSpPr/>
         <p:nvPr/>
       </p:nvGrpSpPr>
-      <p:grpSpPr>
-        <a:xfrm>
-          <a:off x="0" y="0"/>
-          <a:ext cx="0" cy="0"/>
-          <a:chOff x="0" y="0"/>
-          <a:chExt cx="0" cy="0"/>
-        </a:xfrm>
-      </p:grpSpPr>
+      <p:grpSpPr/>
       <p:sp>
         <p:nvSpPr>
           <p:cNvPr id="2" name="Rectangle 1"/>
@@ -7933,11 +8312,10 @@
           </a:fontRef>
         </p:style>
         <p:txBody>
-          <a:bodyPr wrap="square" rtlCol="0" anchor="ctr"/>
+          <a:bodyPr rtlCol="0" anchor="ctr" wrap="square"/>
           <a:lstStyle/>
           <a:p>
             <a:pPr algn="ctr"/>
-            <a:endParaRPr/>
           </a:p>
         </p:txBody>
       </p:sp>
@@ -8022,7 +8400,7 @@
                 <a:latin typeface="微软雅黑"/>
                 <a:ea typeface="微软雅黑"/>
               </a:rPr>
-              <a:t>02 / 13</a:t>
+              <a:t>02 / 14</a:t>
             </a:r>
           </a:p>
         </p:txBody>
@@ -8064,11 +8442,10 @@
           </a:fontRef>
         </p:style>
         <p:txBody>
-          <a:bodyPr wrap="square" rtlCol="0" anchor="ctr"/>
+          <a:bodyPr rtlCol="0" anchor="ctr" wrap="square"/>
           <a:lstStyle/>
           <a:p>
             <a:pPr algn="ctr"/>
-            <a:endParaRPr/>
           </a:p>
         </p:txBody>
       </p:sp>
@@ -8111,11 +8488,10 @@
           </a:fontRef>
         </p:style>
         <p:txBody>
-          <a:bodyPr wrap="square" rtlCol="0" anchor="ctr"/>
+          <a:bodyPr rtlCol="0" anchor="ctr" wrap="square"/>
           <a:lstStyle/>
           <a:p>
             <a:pPr algn="ctr"/>
-            <a:endParaRPr/>
           </a:p>
         </p:txBody>
       </p:sp>
@@ -8244,11 +8620,10 @@
           </a:fontRef>
         </p:style>
         <p:txBody>
-          <a:bodyPr wrap="square" rtlCol="0" anchor="ctr"/>
+          <a:bodyPr rtlCol="0" anchor="ctr" wrap="square"/>
           <a:lstStyle/>
           <a:p>
             <a:pPr algn="ctr"/>
-            <a:endParaRPr/>
           </a:p>
         </p:txBody>
       </p:sp>
@@ -8377,11 +8752,10 @@
           </a:fontRef>
         </p:style>
         <p:txBody>
-          <a:bodyPr wrap="square" rtlCol="0" anchor="ctr"/>
+          <a:bodyPr rtlCol="0" anchor="ctr" wrap="square"/>
           <a:lstStyle/>
           <a:p>
             <a:pPr algn="ctr"/>
-            <a:endParaRPr/>
           </a:p>
         </p:txBody>
       </p:sp>
@@ -8510,11 +8884,10 @@
           </a:fontRef>
         </p:style>
         <p:txBody>
-          <a:bodyPr wrap="square" rtlCol="0" anchor="ctr"/>
+          <a:bodyPr rtlCol="0" anchor="ctr" wrap="square"/>
           <a:lstStyle/>
           <a:p>
             <a:pPr algn="ctr"/>
-            <a:endParaRPr/>
           </a:p>
         </p:txBody>
       </p:sp>
@@ -8633,7 +9006,7 @@
 </file>
 
 <file path=ppt/slides/slide3.xml><?xml version="1.0" encoding="utf-8"?>
-<p:sld xmlns:a="http://schemas.openxmlformats.org/drawingml/2006/main" xmlns:r="http://schemas.openxmlformats.org/officeDocument/2006/relationships" xmlns:p="http://schemas.openxmlformats.org/presentationml/2006/main">
+<p:sld xmlns:a="http://schemas.openxmlformats.org/drawingml/2006/main" xmlns:p="http://schemas.openxmlformats.org/presentationml/2006/main" xmlns:r="http://schemas.openxmlformats.org/officeDocument/2006/relationships">
   <p:cSld>
     <p:spTree>
       <p:nvGrpSpPr>
@@ -8641,14 +9014,7 @@
         <p:cNvGrpSpPr/>
         <p:nvPr/>
       </p:nvGrpSpPr>
-      <p:grpSpPr>
-        <a:xfrm>
-          <a:off x="0" y="0"/>
-          <a:ext cx="0" cy="0"/>
-          <a:chOff x="0" y="0"/>
-          <a:chExt cx="0" cy="0"/>
-        </a:xfrm>
-      </p:grpSpPr>
+      <p:grpSpPr/>
       <p:sp>
         <p:nvSpPr>
           <p:cNvPr id="2" name="Rectangle 1"/>
@@ -8686,11 +9052,10 @@
           </a:fontRef>
         </p:style>
         <p:txBody>
-          <a:bodyPr wrap="square" rtlCol="0" anchor="ctr"/>
+          <a:bodyPr rtlCol="0" anchor="ctr" wrap="square"/>
           <a:lstStyle/>
           <a:p>
             <a:pPr algn="ctr"/>
-            <a:endParaRPr/>
           </a:p>
         </p:txBody>
       </p:sp>
@@ -8775,7 +9140,7 @@
                 <a:latin typeface="微软雅黑"/>
                 <a:ea typeface="微软雅黑"/>
               </a:rPr>
-              <a:t>03 / 13</a:t>
+              <a:t>03 / 14</a:t>
             </a:r>
           </a:p>
         </p:txBody>
@@ -8817,11 +9182,10 @@
           </a:fontRef>
         </p:style>
         <p:txBody>
-          <a:bodyPr wrap="square" rtlCol="0" anchor="ctr"/>
+          <a:bodyPr rtlCol="0" anchor="ctr" wrap="square"/>
           <a:lstStyle/>
           <a:p>
             <a:pPr algn="ctr"/>
-            <a:endParaRPr/>
           </a:p>
         </p:txBody>
       </p:sp>
@@ -8927,11 +9291,10 @@
           </a:fontRef>
         </p:style>
         <p:txBody>
-          <a:bodyPr wrap="square" rtlCol="0" anchor="ctr"/>
+          <a:bodyPr rtlCol="0" anchor="ctr" wrap="square"/>
           <a:lstStyle/>
           <a:p>
             <a:pPr algn="ctr"/>
-            <a:endParaRPr/>
           </a:p>
         </p:txBody>
       </p:sp>
@@ -9146,11 +9509,10 @@
           </a:fontRef>
         </p:style>
         <p:txBody>
-          <a:bodyPr wrap="square" rtlCol="0" anchor="ctr"/>
+          <a:bodyPr rtlCol="0" anchor="ctr" wrap="square"/>
           <a:lstStyle/>
           <a:p>
             <a:pPr algn="ctr"/>
-            <a:endParaRPr/>
           </a:p>
         </p:txBody>
       </p:sp>
@@ -9365,11 +9727,10 @@
           </a:fontRef>
         </p:style>
         <p:txBody>
-          <a:bodyPr wrap="square" rtlCol="0" anchor="ctr"/>
+          <a:bodyPr rtlCol="0" anchor="ctr" wrap="square"/>
           <a:lstStyle/>
           <a:p>
             <a:pPr algn="ctr"/>
-            <a:endParaRPr/>
           </a:p>
         </p:txBody>
       </p:sp>
@@ -9533,7 +9894,7 @@
               </a:spcAft>
             </a:pPr>
             <a:r>
-              <a:rPr sz="1400" b="0" dirty="0" err="1">
+              <a:rPr sz="1400" b="0">
                 <a:solidFill>
                   <a:srgbClr val="DDE2FF"/>
                 </a:solidFill>
@@ -9542,13 +9903,6 @@
               </a:rPr>
               <a:t>执行代码</a:t>
             </a:r>
-            <a:endParaRPr sz="1400" b="0" dirty="0">
-              <a:solidFill>
-                <a:srgbClr val="DDE2FF"/>
-              </a:solidFill>
-              <a:latin typeface="微软雅黑"/>
-              <a:ea typeface="微软雅黑"/>
-            </a:endParaRPr>
           </a:p>
         </p:txBody>
       </p:sp>
@@ -9591,11 +9945,10 @@
           </a:fontRef>
         </p:style>
         <p:txBody>
-          <a:bodyPr wrap="square" rtlCol="0" anchor="ctr"/>
+          <a:bodyPr rtlCol="0" anchor="ctr" wrap="square"/>
           <a:lstStyle/>
           <a:p>
             <a:pPr algn="ctr"/>
-            <a:endParaRPr/>
           </a:p>
         </p:txBody>
       </p:sp>
@@ -9823,7 +10176,7 @@
 </file>
 
 <file path=ppt/slides/slide4.xml><?xml version="1.0" encoding="utf-8"?>
-<p:sld xmlns:a="http://schemas.openxmlformats.org/drawingml/2006/main" xmlns:r="http://schemas.openxmlformats.org/officeDocument/2006/relationships" xmlns:p="http://schemas.openxmlformats.org/presentationml/2006/main">
+<p:sld xmlns:a="http://schemas.openxmlformats.org/drawingml/2006/main" xmlns:p="http://schemas.openxmlformats.org/presentationml/2006/main" xmlns:r="http://schemas.openxmlformats.org/officeDocument/2006/relationships">
   <p:cSld>
     <p:spTree>
       <p:nvGrpSpPr>
@@ -9831,14 +10184,7 @@
         <p:cNvGrpSpPr/>
         <p:nvPr/>
       </p:nvGrpSpPr>
-      <p:grpSpPr>
-        <a:xfrm>
-          <a:off x="0" y="0"/>
-          <a:ext cx="0" cy="0"/>
-          <a:chOff x="0" y="0"/>
-          <a:chExt cx="0" cy="0"/>
-        </a:xfrm>
-      </p:grpSpPr>
+      <p:grpSpPr/>
       <p:sp>
         <p:nvSpPr>
           <p:cNvPr id="2" name="Rectangle 1"/>
@@ -9876,11 +10222,10 @@
           </a:fontRef>
         </p:style>
         <p:txBody>
-          <a:bodyPr wrap="square" rtlCol="0" anchor="ctr"/>
+          <a:bodyPr rtlCol="0" anchor="ctr" wrap="square"/>
           <a:lstStyle/>
           <a:p>
             <a:pPr algn="ctr"/>
-            <a:endParaRPr/>
           </a:p>
         </p:txBody>
       </p:sp>
@@ -9965,7 +10310,7 @@
                 <a:latin typeface="微软雅黑"/>
                 <a:ea typeface="微软雅黑"/>
               </a:rPr>
-              <a:t>04 / 13</a:t>
+              <a:t>04 / 14</a:t>
             </a:r>
           </a:p>
         </p:txBody>
@@ -10007,11 +10352,10 @@
           </a:fontRef>
         </p:style>
         <p:txBody>
-          <a:bodyPr wrap="square" rtlCol="0" anchor="ctr"/>
+          <a:bodyPr rtlCol="0" anchor="ctr" wrap="square"/>
           <a:lstStyle/>
           <a:p>
             <a:pPr algn="ctr"/>
-            <a:endParaRPr/>
           </a:p>
         </p:txBody>
       </p:sp>
@@ -10034,32 +10378,14 @@
                 <a:tableStyleId>{5C22544A-7EE6-4342-B048-85BDC9FD1C3A}</a:tableStyleId>
               </a:tblPr>
               <a:tblGrid>
-                <a:gridCol w="2194560">
-                  <a:extLst>
-                    <a:ext uri="{9D8B030D-6E8A-4147-A177-3AD203B41FA5}">
-                      <a16:colId xmlns:a16="http://schemas.microsoft.com/office/drawing/2014/main" val="20000"/>
-                    </a:ext>
-                  </a:extLst>
-                </a:gridCol>
-                <a:gridCol w="5623560">
-                  <a:extLst>
-                    <a:ext uri="{9D8B030D-6E8A-4147-A177-3AD203B41FA5}">
-                      <a16:colId xmlns:a16="http://schemas.microsoft.com/office/drawing/2014/main" val="20001"/>
-                    </a:ext>
-                  </a:extLst>
-                </a:gridCol>
-                <a:gridCol w="3291840">
-                  <a:extLst>
-                    <a:ext uri="{9D8B030D-6E8A-4147-A177-3AD203B41FA5}">
-                      <a16:colId xmlns:a16="http://schemas.microsoft.com/office/drawing/2014/main" val="20002"/>
-                    </a:ext>
-                  </a:extLst>
-                </a:gridCol>
+                <a:gridCol w="2194560"/>
+                <a:gridCol w="5623560"/>
+                <a:gridCol w="3291840"/>
               </a:tblGrid>
               <a:tr h="716280">
                 <a:tc>
                   <a:txBody>
-                    <a:bodyPr/>
+                    <a:bodyPr wrap="square"/>
                     <a:lstStyle/>
                     <a:p>
                       <a:pPr algn="ctr"/>
@@ -10075,7 +10401,7 @@
                       </a:r>
                     </a:p>
                   </a:txBody>
-                  <a:tcPr marL="137160" marT="54864" marB="54864" anchor="ctr">
+                  <a:tcPr marL="137160" marR="91440" marT="54864" marB="54864" anchor="ctr">
                     <a:solidFill>
                       <a:srgbClr val="4F46E5"/>
                     </a:solidFill>
@@ -10083,12 +10409,12 @@
                 </a:tc>
                 <a:tc>
                   <a:txBody>
-                    <a:bodyPr/>
+                    <a:bodyPr wrap="square"/>
                     <a:lstStyle/>
                     <a:p>
                       <a:pPr algn="ctr"/>
                       <a:r>
-                        <a:rPr sz="1600" b="1" dirty="0" err="1">
+                        <a:rPr sz="1600" b="1">
                           <a:solidFill>
                             <a:srgbClr val="FFFFFF"/>
                           </a:solidFill>
@@ -10097,16 +10423,9 @@
                         </a:rPr>
                         <a:t>核心能力</a:t>
                       </a:r>
-                      <a:endParaRPr sz="1600" b="1" dirty="0">
-                        <a:solidFill>
-                          <a:srgbClr val="FFFFFF"/>
-                        </a:solidFill>
-                        <a:latin typeface="微软雅黑"/>
-                        <a:ea typeface="微软雅黑"/>
-                      </a:endParaRPr>
                     </a:p>
                   </a:txBody>
-                  <a:tcPr marL="137160" marT="54864" marB="54864" anchor="ctr">
+                  <a:tcPr marL="137160" marR="91440" marT="54864" marB="54864" anchor="ctr">
                     <a:solidFill>
                       <a:srgbClr val="4F46E5"/>
                     </a:solidFill>
@@ -10114,7 +10433,7 @@
                 </a:tc>
                 <a:tc>
                   <a:txBody>
-                    <a:bodyPr/>
+                    <a:bodyPr wrap="square"/>
                     <a:lstStyle/>
                     <a:p>
                       <a:pPr algn="ctr"/>
@@ -10130,22 +10449,17 @@
                       </a:r>
                     </a:p>
                   </a:txBody>
-                  <a:tcPr marL="137160" marT="54864" marB="54864" anchor="ctr">
+                  <a:tcPr marL="137160" marR="91440" marT="54864" marB="54864" anchor="ctr">
                     <a:solidFill>
                       <a:srgbClr val="4F46E5"/>
                     </a:solidFill>
                   </a:tcPr>
                 </a:tc>
-                <a:extLst>
-                  <a:ext uri="{0D108BD9-81ED-4DB2-BD59-A6C34878D82A}">
-                    <a16:rowId xmlns:a16="http://schemas.microsoft.com/office/drawing/2014/main" val="10000"/>
-                  </a:ext>
-                </a:extLst>
               </a:tr>
               <a:tr h="716280">
                 <a:tc>
                   <a:txBody>
-                    <a:bodyPr/>
+                    <a:bodyPr wrap="square"/>
                     <a:lstStyle/>
                     <a:p>
                       <a:pPr algn="l"/>
@@ -10161,7 +10475,7 @@
                       </a:r>
                     </a:p>
                   </a:txBody>
-                  <a:tcPr marL="137160" marT="54864" marB="54864" anchor="ctr">
+                  <a:tcPr marL="137160" marR="91440" marT="54864" marB="54864" anchor="ctr">
                     <a:solidFill>
                       <a:srgbClr val="F5F6FA"/>
                     </a:solidFill>
@@ -10169,7 +10483,7 @@
                 </a:tc>
                 <a:tc>
                   <a:txBody>
-                    <a:bodyPr/>
+                    <a:bodyPr wrap="square"/>
                     <a:lstStyle/>
                     <a:p>
                       <a:pPr algn="l"/>
@@ -10185,7 +10499,7 @@
                       </a:r>
                     </a:p>
                   </a:txBody>
-                  <a:tcPr marL="137160" marT="54864" marB="54864" anchor="ctr">
+                  <a:tcPr marL="137160" marR="91440" marT="54864" marB="54864" anchor="ctr">
                     <a:solidFill>
                       <a:srgbClr val="F5F6FA"/>
                     </a:solidFill>
@@ -10193,7 +10507,7 @@
                 </a:tc>
                 <a:tc>
                   <a:txBody>
-                    <a:bodyPr/>
+                    <a:bodyPr wrap="square"/>
                     <a:lstStyle/>
                     <a:p>
                       <a:pPr algn="l"/>
@@ -10209,22 +10523,17 @@
                       </a:r>
                     </a:p>
                   </a:txBody>
-                  <a:tcPr marL="137160" marT="54864" marB="54864" anchor="ctr">
+                  <a:tcPr marL="137160" marR="91440" marT="54864" marB="54864" anchor="ctr">
                     <a:solidFill>
                       <a:srgbClr val="F5F6FA"/>
                     </a:solidFill>
                   </a:tcPr>
                 </a:tc>
-                <a:extLst>
-                  <a:ext uri="{0D108BD9-81ED-4DB2-BD59-A6C34878D82A}">
-                    <a16:rowId xmlns:a16="http://schemas.microsoft.com/office/drawing/2014/main" val="10001"/>
-                  </a:ext>
-                </a:extLst>
               </a:tr>
               <a:tr h="716280">
                 <a:tc>
                   <a:txBody>
-                    <a:bodyPr/>
+                    <a:bodyPr wrap="square"/>
                     <a:lstStyle/>
                     <a:p>
                       <a:pPr algn="l"/>
@@ -10240,7 +10549,7 @@
                       </a:r>
                     </a:p>
                   </a:txBody>
-                  <a:tcPr marL="137160" marT="54864" marB="54864" anchor="ctr">
+                  <a:tcPr marL="137160" marR="91440" marT="54864" marB="54864" anchor="ctr">
                     <a:solidFill>
                       <a:srgbClr val="EEF2FF"/>
                     </a:solidFill>
@@ -10248,7 +10557,7 @@
                 </a:tc>
                 <a:tc>
                   <a:txBody>
-                    <a:bodyPr/>
+                    <a:bodyPr wrap="square"/>
                     <a:lstStyle/>
                     <a:p>
                       <a:pPr algn="l"/>
@@ -10264,7 +10573,7 @@
                       </a:r>
                     </a:p>
                   </a:txBody>
-                  <a:tcPr marL="137160" marT="54864" marB="54864" anchor="ctr">
+                  <a:tcPr marL="137160" marR="91440" marT="54864" marB="54864" anchor="ctr">
                     <a:solidFill>
                       <a:srgbClr val="EEF2FF"/>
                     </a:solidFill>
@@ -10272,7 +10581,7 @@
                 </a:tc>
                 <a:tc>
                   <a:txBody>
-                    <a:bodyPr/>
+                    <a:bodyPr wrap="square"/>
                     <a:lstStyle/>
                     <a:p>
                       <a:pPr algn="l"/>
@@ -10288,22 +10597,17 @@
                       </a:r>
                     </a:p>
                   </a:txBody>
-                  <a:tcPr marL="137160" marT="54864" marB="54864" anchor="ctr">
+                  <a:tcPr marL="137160" marR="91440" marT="54864" marB="54864" anchor="ctr">
                     <a:solidFill>
                       <a:srgbClr val="EEF2FF"/>
                     </a:solidFill>
                   </a:tcPr>
                 </a:tc>
-                <a:extLst>
-                  <a:ext uri="{0D108BD9-81ED-4DB2-BD59-A6C34878D82A}">
-                    <a16:rowId xmlns:a16="http://schemas.microsoft.com/office/drawing/2014/main" val="10002"/>
-                  </a:ext>
-                </a:extLst>
               </a:tr>
               <a:tr h="716280">
                 <a:tc>
                   <a:txBody>
-                    <a:bodyPr/>
+                    <a:bodyPr wrap="square"/>
                     <a:lstStyle/>
                     <a:p>
                       <a:pPr algn="l"/>
@@ -10319,7 +10623,7 @@
                       </a:r>
                     </a:p>
                   </a:txBody>
-                  <a:tcPr marL="137160" marT="54864" marB="54864" anchor="ctr">
+                  <a:tcPr marL="137160" marR="91440" marT="54864" marB="54864" anchor="ctr">
                     <a:solidFill>
                       <a:srgbClr val="F5F6FA"/>
                     </a:solidFill>
@@ -10327,7 +10631,7 @@
                 </a:tc>
                 <a:tc>
                   <a:txBody>
-                    <a:bodyPr/>
+                    <a:bodyPr wrap="square"/>
                     <a:lstStyle/>
                     <a:p>
                       <a:pPr algn="l"/>
@@ -10343,7 +10647,7 @@
                       </a:r>
                     </a:p>
                   </a:txBody>
-                  <a:tcPr marL="137160" marT="54864" marB="54864" anchor="ctr">
+                  <a:tcPr marL="137160" marR="91440" marT="54864" marB="54864" anchor="ctr">
                     <a:solidFill>
                       <a:srgbClr val="F5F6FA"/>
                     </a:solidFill>
@@ -10351,7 +10655,7 @@
                 </a:tc>
                 <a:tc>
                   <a:txBody>
-                    <a:bodyPr/>
+                    <a:bodyPr wrap="square"/>
                     <a:lstStyle/>
                     <a:p>
                       <a:pPr algn="l"/>
@@ -10367,22 +10671,17 @@
                       </a:r>
                     </a:p>
                   </a:txBody>
-                  <a:tcPr marL="137160" marT="54864" marB="54864" anchor="ctr">
+                  <a:tcPr marL="137160" marR="91440" marT="54864" marB="54864" anchor="ctr">
                     <a:solidFill>
                       <a:srgbClr val="F5F6FA"/>
                     </a:solidFill>
                   </a:tcPr>
                 </a:tc>
-                <a:extLst>
-                  <a:ext uri="{0D108BD9-81ED-4DB2-BD59-A6C34878D82A}">
-                    <a16:rowId xmlns:a16="http://schemas.microsoft.com/office/drawing/2014/main" val="10003"/>
-                  </a:ext>
-                </a:extLst>
               </a:tr>
               <a:tr h="716280">
                 <a:tc>
                   <a:txBody>
-                    <a:bodyPr/>
+                    <a:bodyPr wrap="square"/>
                     <a:lstStyle/>
                     <a:p>
                       <a:pPr algn="l"/>
@@ -10398,7 +10697,7 @@
                       </a:r>
                     </a:p>
                   </a:txBody>
-                  <a:tcPr marL="137160" marT="54864" marB="54864" anchor="ctr">
+                  <a:tcPr marL="137160" marR="91440" marT="54864" marB="54864" anchor="ctr">
                     <a:solidFill>
                       <a:srgbClr val="EEF2FF"/>
                     </a:solidFill>
@@ -10406,7 +10705,7 @@
                 </a:tc>
                 <a:tc>
                   <a:txBody>
-                    <a:bodyPr/>
+                    <a:bodyPr wrap="square"/>
                     <a:lstStyle/>
                     <a:p>
                       <a:pPr algn="l"/>
@@ -10422,7 +10721,7 @@
                       </a:r>
                     </a:p>
                   </a:txBody>
-                  <a:tcPr marL="137160" marT="54864" marB="54864" anchor="ctr">
+                  <a:tcPr marL="137160" marR="91440" marT="54864" marB="54864" anchor="ctr">
                     <a:solidFill>
                       <a:srgbClr val="EEF2FF"/>
                     </a:solidFill>
@@ -10430,7 +10729,7 @@
                 </a:tc>
                 <a:tc>
                   <a:txBody>
-                    <a:bodyPr/>
+                    <a:bodyPr wrap="square"/>
                     <a:lstStyle/>
                     <a:p>
                       <a:pPr algn="l"/>
@@ -10446,22 +10745,17 @@
                       </a:r>
                     </a:p>
                   </a:txBody>
-                  <a:tcPr marL="137160" marT="54864" marB="54864" anchor="ctr">
+                  <a:tcPr marL="137160" marR="91440" marT="54864" marB="54864" anchor="ctr">
                     <a:solidFill>
                       <a:srgbClr val="EEF2FF"/>
                     </a:solidFill>
                   </a:tcPr>
                 </a:tc>
-                <a:extLst>
-                  <a:ext uri="{0D108BD9-81ED-4DB2-BD59-A6C34878D82A}">
-                    <a16:rowId xmlns:a16="http://schemas.microsoft.com/office/drawing/2014/main" val="10004"/>
-                  </a:ext>
-                </a:extLst>
               </a:tr>
               <a:tr h="716280">
                 <a:tc>
                   <a:txBody>
-                    <a:bodyPr/>
+                    <a:bodyPr wrap="square"/>
                     <a:lstStyle/>
                     <a:p>
                       <a:pPr algn="l"/>
@@ -10477,7 +10771,7 @@
                       </a:r>
                     </a:p>
                   </a:txBody>
-                  <a:tcPr marL="137160" marT="54864" marB="54864" anchor="ctr">
+                  <a:tcPr marL="137160" marR="91440" marT="54864" marB="54864" anchor="ctr">
                     <a:solidFill>
                       <a:srgbClr val="F5F6FA"/>
                     </a:solidFill>
@@ -10485,7 +10779,7 @@
                 </a:tc>
                 <a:tc>
                   <a:txBody>
-                    <a:bodyPr/>
+                    <a:bodyPr wrap="square"/>
                     <a:lstStyle/>
                     <a:p>
                       <a:pPr algn="l"/>
@@ -10501,7 +10795,7 @@
                       </a:r>
                     </a:p>
                   </a:txBody>
-                  <a:tcPr marL="137160" marT="54864" marB="54864" anchor="ctr">
+                  <a:tcPr marL="137160" marR="91440" marT="54864" marB="54864" anchor="ctr">
                     <a:solidFill>
                       <a:srgbClr val="F5F6FA"/>
                     </a:solidFill>
@@ -10509,12 +10803,12 @@
                 </a:tc>
                 <a:tc>
                   <a:txBody>
-                    <a:bodyPr/>
+                    <a:bodyPr wrap="square"/>
                     <a:lstStyle/>
                     <a:p>
                       <a:pPr algn="l"/>
                       <a:r>
-                        <a:rPr sz="1500" b="0" dirty="0" err="1">
+                        <a:rPr sz="1500" b="0">
                           <a:solidFill>
                             <a:srgbClr val="6B7280"/>
                           </a:solidFill>
@@ -10523,26 +10817,14 @@
                         </a:rPr>
                         <a:t>移动端适配，一键脚本部署</a:t>
                       </a:r>
-                      <a:endParaRPr sz="1500" b="0" dirty="0">
-                        <a:solidFill>
-                          <a:srgbClr val="6B7280"/>
-                        </a:solidFill>
-                        <a:latin typeface="微软雅黑"/>
-                        <a:ea typeface="微软雅黑"/>
-                      </a:endParaRPr>
                     </a:p>
                   </a:txBody>
-                  <a:tcPr marL="137160" marT="54864" marB="54864" anchor="ctr">
+                  <a:tcPr marL="137160" marR="91440" marT="54864" marB="54864" anchor="ctr">
                     <a:solidFill>
                       <a:srgbClr val="F5F6FA"/>
                     </a:solidFill>
                   </a:tcPr>
                 </a:tc>
-                <a:extLst>
-                  <a:ext uri="{0D108BD9-81ED-4DB2-BD59-A6C34878D82A}">
-                    <a16:rowId xmlns:a16="http://schemas.microsoft.com/office/drawing/2014/main" val="10005"/>
-                  </a:ext>
-                </a:extLst>
               </a:tr>
             </a:tbl>
           </a:graphicData>
@@ -10600,7 +10882,7 @@
 </file>
 
 <file path=ppt/slides/slide5.xml><?xml version="1.0" encoding="utf-8"?>
-<p:sld xmlns:a="http://schemas.openxmlformats.org/drawingml/2006/main" xmlns:r="http://schemas.openxmlformats.org/officeDocument/2006/relationships" xmlns:p="http://schemas.openxmlformats.org/presentationml/2006/main">
+<p:sld xmlns:a="http://schemas.openxmlformats.org/drawingml/2006/main" xmlns:p="http://schemas.openxmlformats.org/presentationml/2006/main" xmlns:r="http://schemas.openxmlformats.org/officeDocument/2006/relationships">
   <p:cSld>
     <p:spTree>
       <p:nvGrpSpPr>
@@ -10608,14 +10890,7 @@
         <p:cNvGrpSpPr/>
         <p:nvPr/>
       </p:nvGrpSpPr>
-      <p:grpSpPr>
-        <a:xfrm>
-          <a:off x="0" y="0"/>
-          <a:ext cx="0" cy="0"/>
-          <a:chOff x="0" y="0"/>
-          <a:chExt cx="0" cy="0"/>
-        </a:xfrm>
-      </p:grpSpPr>
+      <p:grpSpPr/>
       <p:sp>
         <p:nvSpPr>
           <p:cNvPr id="2" name="Rectangle 1"/>
@@ -10653,11 +10928,10 @@
           </a:fontRef>
         </p:style>
         <p:txBody>
-          <a:bodyPr wrap="square" rtlCol="0" anchor="ctr"/>
+          <a:bodyPr rtlCol="0" anchor="ctr" wrap="square"/>
           <a:lstStyle/>
           <a:p>
             <a:pPr algn="ctr"/>
-            <a:endParaRPr/>
           </a:p>
         </p:txBody>
       </p:sp>
@@ -10742,7 +11016,7 @@
                 <a:latin typeface="微软雅黑"/>
                 <a:ea typeface="微软雅黑"/>
               </a:rPr>
-              <a:t>05 / 13</a:t>
+              <a:t>05 / 14</a:t>
             </a:r>
           </a:p>
         </p:txBody>
@@ -10784,11 +11058,10 @@
           </a:fontRef>
         </p:style>
         <p:txBody>
-          <a:bodyPr wrap="square" rtlCol="0" anchor="ctr"/>
+          <a:bodyPr rtlCol="0" anchor="ctr" wrap="square"/>
           <a:lstStyle/>
           <a:p>
             <a:pPr algn="ctr"/>
-            <a:endParaRPr/>
           </a:p>
         </p:txBody>
       </p:sp>
@@ -10831,11 +11104,10 @@
           </a:fontRef>
         </p:style>
         <p:txBody>
-          <a:bodyPr wrap="square" rtlCol="0" anchor="ctr"/>
+          <a:bodyPr rtlCol="0" anchor="ctr" wrap="square"/>
           <a:lstStyle/>
           <a:p>
             <a:pPr algn="ctr"/>
-            <a:endParaRPr/>
           </a:p>
         </p:txBody>
       </p:sp>
@@ -11044,11 +11316,10 @@
           </a:fontRef>
         </p:style>
         <p:txBody>
-          <a:bodyPr wrap="square" rtlCol="0" anchor="ctr"/>
+          <a:bodyPr rtlCol="0" anchor="ctr" wrap="square"/>
           <a:lstStyle/>
           <a:p>
             <a:pPr algn="ctr"/>
-            <a:endParaRPr/>
           </a:p>
         </p:txBody>
       </p:sp>
@@ -11290,7 +11561,7 @@
 </file>
 
 <file path=ppt/slides/slide6.xml><?xml version="1.0" encoding="utf-8"?>
-<p:sld xmlns:a="http://schemas.openxmlformats.org/drawingml/2006/main" xmlns:r="http://schemas.openxmlformats.org/officeDocument/2006/relationships" xmlns:p="http://schemas.openxmlformats.org/presentationml/2006/main">
+<p:sld xmlns:a="http://schemas.openxmlformats.org/drawingml/2006/main" xmlns:p="http://schemas.openxmlformats.org/presentationml/2006/main" xmlns:r="http://schemas.openxmlformats.org/officeDocument/2006/relationships">
   <p:cSld>
     <p:spTree>
       <p:nvGrpSpPr>
@@ -11298,14 +11569,7 @@
         <p:cNvGrpSpPr/>
         <p:nvPr/>
       </p:nvGrpSpPr>
-      <p:grpSpPr>
-        <a:xfrm>
-          <a:off x="0" y="0"/>
-          <a:ext cx="0" cy="0"/>
-          <a:chOff x="0" y="0"/>
-          <a:chExt cx="0" cy="0"/>
-        </a:xfrm>
-      </p:grpSpPr>
+      <p:grpSpPr/>
       <p:sp>
         <p:nvSpPr>
           <p:cNvPr id="2" name="Rectangle 1"/>
@@ -11343,11 +11607,10 @@
           </a:fontRef>
         </p:style>
         <p:txBody>
-          <a:bodyPr wrap="square" rtlCol="0" anchor="ctr"/>
+          <a:bodyPr rtlCol="0" anchor="ctr" wrap="square"/>
           <a:lstStyle/>
           <a:p>
             <a:pPr algn="ctr"/>
-            <a:endParaRPr/>
           </a:p>
         </p:txBody>
       </p:sp>
@@ -11432,7 +11695,7 @@
                 <a:latin typeface="微软雅黑"/>
                 <a:ea typeface="微软雅黑"/>
               </a:rPr>
-              <a:t>06 / 13</a:t>
+              <a:t>06 / 14</a:t>
             </a:r>
           </a:p>
         </p:txBody>
@@ -11474,11 +11737,10 @@
           </a:fontRef>
         </p:style>
         <p:txBody>
-          <a:bodyPr wrap="square" rtlCol="0" anchor="ctr"/>
+          <a:bodyPr rtlCol="0" anchor="ctr" wrap="square"/>
           <a:lstStyle/>
           <a:p>
             <a:pPr algn="ctr"/>
-            <a:endParaRPr/>
           </a:p>
         </p:txBody>
       </p:sp>
@@ -11564,11 +11826,10 @@
           </a:fontRef>
         </p:style>
         <p:txBody>
-          <a:bodyPr wrap="square" rtlCol="0" anchor="ctr"/>
+          <a:bodyPr rtlCol="0" anchor="ctr" wrap="square"/>
           <a:lstStyle/>
           <a:p>
             <a:pPr algn="ctr"/>
-            <a:endParaRPr/>
           </a:p>
         </p:txBody>
       </p:sp>
@@ -11697,11 +11958,10 @@
           </a:fontRef>
         </p:style>
         <p:txBody>
-          <a:bodyPr wrap="square" rtlCol="0" anchor="ctr"/>
+          <a:bodyPr rtlCol="0" anchor="ctr" wrap="square"/>
           <a:lstStyle/>
           <a:p>
             <a:pPr algn="ctr"/>
-            <a:endParaRPr/>
           </a:p>
         </p:txBody>
       </p:sp>
@@ -11830,11 +12090,10 @@
           </a:fontRef>
         </p:style>
         <p:txBody>
-          <a:bodyPr wrap="square" rtlCol="0" anchor="ctr"/>
+          <a:bodyPr rtlCol="0" anchor="ctr" wrap="square"/>
           <a:lstStyle/>
           <a:p>
             <a:pPr algn="ctr"/>
-            <a:endParaRPr/>
           </a:p>
         </p:txBody>
       </p:sp>
@@ -11963,11 +12222,10 @@
           </a:fontRef>
         </p:style>
         <p:txBody>
-          <a:bodyPr wrap="square" rtlCol="0" anchor="ctr"/>
+          <a:bodyPr rtlCol="0" anchor="ctr" wrap="square"/>
           <a:lstStyle/>
           <a:p>
             <a:pPr algn="ctr"/>
-            <a:endParaRPr/>
           </a:p>
         </p:txBody>
       </p:sp>
@@ -12096,11 +12354,10 @@
           </a:fontRef>
         </p:style>
         <p:txBody>
-          <a:bodyPr wrap="square" rtlCol="0" anchor="ctr"/>
+          <a:bodyPr rtlCol="0" anchor="ctr" wrap="square"/>
           <a:lstStyle/>
           <a:p>
             <a:pPr algn="ctr"/>
-            <a:endParaRPr/>
           </a:p>
         </p:txBody>
       </p:sp>
@@ -12229,11 +12486,10 @@
           </a:fontRef>
         </p:style>
         <p:txBody>
-          <a:bodyPr wrap="square" rtlCol="0" anchor="ctr"/>
+          <a:bodyPr rtlCol="0" anchor="ctr" wrap="square"/>
           <a:lstStyle/>
           <a:p>
             <a:pPr algn="ctr"/>
-            <a:endParaRPr/>
           </a:p>
         </p:txBody>
       </p:sp>
@@ -12362,11 +12618,10 @@
           </a:fontRef>
         </p:style>
         <p:txBody>
-          <a:bodyPr wrap="square" rtlCol="0" anchor="ctr"/>
+          <a:bodyPr rtlCol="0" anchor="ctr" wrap="square"/>
           <a:lstStyle/>
           <a:p>
             <a:pPr algn="ctr"/>
-            <a:endParaRPr/>
           </a:p>
         </p:txBody>
       </p:sp>
@@ -12407,11 +12662,10 @@
           </a:fontRef>
         </p:style>
         <p:txBody>
-          <a:bodyPr wrap="square" rtlCol="0" anchor="ctr"/>
+          <a:bodyPr rtlCol="0" anchor="ctr" wrap="square"/>
           <a:lstStyle/>
           <a:p>
             <a:pPr algn="ctr"/>
-            <a:endParaRPr/>
           </a:p>
         </p:txBody>
       </p:sp>
@@ -12583,11 +12837,10 @@
           </a:fontRef>
         </p:style>
         <p:txBody>
-          <a:bodyPr wrap="square" rtlCol="0" anchor="ctr"/>
+          <a:bodyPr rtlCol="0" anchor="ctr" wrap="square"/>
           <a:lstStyle/>
           <a:p>
             <a:pPr algn="ctr"/>
-            <a:endParaRPr/>
           </a:p>
         </p:txBody>
       </p:sp>
@@ -12628,11 +12881,10 @@
           </a:fontRef>
         </p:style>
         <p:txBody>
-          <a:bodyPr wrap="square" rtlCol="0" anchor="ctr"/>
+          <a:bodyPr rtlCol="0" anchor="ctr" wrap="square"/>
           <a:lstStyle/>
           <a:p>
             <a:pPr algn="ctr"/>
-            <a:endParaRPr/>
           </a:p>
         </p:txBody>
       </p:sp>
@@ -12804,11 +13056,10 @@
           </a:fontRef>
         </p:style>
         <p:txBody>
-          <a:bodyPr wrap="square" rtlCol="0" anchor="ctr"/>
+          <a:bodyPr rtlCol="0" anchor="ctr" wrap="square"/>
           <a:lstStyle/>
           <a:p>
             <a:pPr algn="ctr"/>
-            <a:endParaRPr/>
           </a:p>
         </p:txBody>
       </p:sp>
@@ -12849,11 +13100,10 @@
           </a:fontRef>
         </p:style>
         <p:txBody>
-          <a:bodyPr wrap="square" rtlCol="0" anchor="ctr"/>
+          <a:bodyPr rtlCol="0" anchor="ctr" wrap="square"/>
           <a:lstStyle/>
           <a:p>
             <a:pPr algn="ctr"/>
-            <a:endParaRPr/>
           </a:p>
         </p:txBody>
       </p:sp>
@@ -13101,7 +13351,7 @@
 </file>
 
 <file path=ppt/slides/slide7.xml><?xml version="1.0" encoding="utf-8"?>
-<p:sld xmlns:a="http://schemas.openxmlformats.org/drawingml/2006/main" xmlns:r="http://schemas.openxmlformats.org/officeDocument/2006/relationships" xmlns:p="http://schemas.openxmlformats.org/presentationml/2006/main">
+<p:sld xmlns:a="http://schemas.openxmlformats.org/drawingml/2006/main" xmlns:p="http://schemas.openxmlformats.org/presentationml/2006/main" xmlns:r="http://schemas.openxmlformats.org/officeDocument/2006/relationships">
   <p:cSld>
     <p:spTree>
       <p:nvGrpSpPr>
@@ -13109,14 +13359,7 @@
         <p:cNvGrpSpPr/>
         <p:nvPr/>
       </p:nvGrpSpPr>
-      <p:grpSpPr>
-        <a:xfrm>
-          <a:off x="0" y="0"/>
-          <a:ext cx="0" cy="0"/>
-          <a:chOff x="0" y="0"/>
-          <a:chExt cx="0" cy="0"/>
-        </a:xfrm>
-      </p:grpSpPr>
+      <p:grpSpPr/>
       <p:sp>
         <p:nvSpPr>
           <p:cNvPr id="2" name="Rectangle 1"/>
@@ -13154,11 +13397,10 @@
           </a:fontRef>
         </p:style>
         <p:txBody>
-          <a:bodyPr wrap="square" rtlCol="0" anchor="ctr"/>
+          <a:bodyPr rtlCol="0" anchor="ctr" wrap="square"/>
           <a:lstStyle/>
           <a:p>
             <a:pPr algn="ctr"/>
-            <a:endParaRPr/>
           </a:p>
         </p:txBody>
       </p:sp>
@@ -13243,7 +13485,7 @@
                 <a:latin typeface="微软雅黑"/>
                 <a:ea typeface="微软雅黑"/>
               </a:rPr>
-              <a:t>07 / 13</a:t>
+              <a:t>07 / 14</a:t>
             </a:r>
           </a:p>
         </p:txBody>
@@ -13285,11 +13527,10 @@
           </a:fontRef>
         </p:style>
         <p:txBody>
-          <a:bodyPr wrap="square" rtlCol="0" anchor="ctr"/>
+          <a:bodyPr rtlCol="0" anchor="ctr" wrap="square"/>
           <a:lstStyle/>
           <a:p>
             <a:pPr algn="ctr"/>
-            <a:endParaRPr/>
           </a:p>
         </p:txBody>
       </p:sp>
@@ -13375,11 +13616,10 @@
           </a:fontRef>
         </p:style>
         <p:txBody>
-          <a:bodyPr wrap="square" rtlCol="0" anchor="ctr"/>
+          <a:bodyPr rtlCol="0" anchor="ctr" wrap="square"/>
           <a:lstStyle/>
           <a:p>
             <a:pPr algn="ctr"/>
-            <a:endParaRPr/>
           </a:p>
         </p:txBody>
       </p:sp>
@@ -13588,11 +13828,10 @@
           </a:fontRef>
         </p:style>
         <p:txBody>
-          <a:bodyPr wrap="square" rtlCol="0" anchor="ctr"/>
+          <a:bodyPr rtlCol="0" anchor="ctr" wrap="square"/>
           <a:lstStyle/>
           <a:p>
             <a:pPr algn="ctr"/>
-            <a:endParaRPr/>
           </a:p>
         </p:txBody>
       </p:sp>
@@ -13857,7 +14096,7 @@
 </file>
 
 <file path=ppt/slides/slide8.xml><?xml version="1.0" encoding="utf-8"?>
-<p:sld xmlns:a="http://schemas.openxmlformats.org/drawingml/2006/main" xmlns:r="http://schemas.openxmlformats.org/officeDocument/2006/relationships" xmlns:p="http://schemas.openxmlformats.org/presentationml/2006/main">
+<p:sld xmlns:a="http://schemas.openxmlformats.org/drawingml/2006/main" xmlns:p="http://schemas.openxmlformats.org/presentationml/2006/main" xmlns:r="http://schemas.openxmlformats.org/officeDocument/2006/relationships">
   <p:cSld>
     <p:spTree>
       <p:nvGrpSpPr>
@@ -13865,14 +14104,7 @@
         <p:cNvGrpSpPr/>
         <p:nvPr/>
       </p:nvGrpSpPr>
-      <p:grpSpPr>
-        <a:xfrm>
-          <a:off x="0" y="0"/>
-          <a:ext cx="0" cy="0"/>
-          <a:chOff x="0" y="0"/>
-          <a:chExt cx="0" cy="0"/>
-        </a:xfrm>
-      </p:grpSpPr>
+      <p:grpSpPr/>
       <p:sp>
         <p:nvSpPr>
           <p:cNvPr id="2" name="Rectangle 1"/>
@@ -13888,7 +14120,7 @@
             <a:avLst/>
           </a:prstGeom>
           <a:solidFill>
-            <a:srgbClr val="4F46E5"/>
+            <a:srgbClr val="EC4899"/>
           </a:solidFill>
           <a:ln>
             <a:noFill/>
@@ -13910,11 +14142,10 @@
           </a:fontRef>
         </p:style>
         <p:txBody>
-          <a:bodyPr wrap="square" rtlCol="0" anchor="ctr"/>
+          <a:bodyPr rtlCol="0" anchor="ctr" wrap="square"/>
           <a:lstStyle/>
           <a:p>
             <a:pPr algn="ctr"/>
-            <a:endParaRPr/>
           </a:p>
         </p:txBody>
       </p:sp>
@@ -13956,7 +14187,7 @@
                 <a:latin typeface="微软雅黑"/>
                 <a:ea typeface="微软雅黑"/>
               </a:rPr>
-              <a:t>交互体验亮点</a:t>
+              <a:t>长期记忆：越聊越懂你</a:t>
             </a:r>
           </a:p>
         </p:txBody>
@@ -13999,7 +14230,7 @@
                 <a:latin typeface="微软雅黑"/>
                 <a:ea typeface="微软雅黑"/>
               </a:rPr>
-              <a:t>08 / 13</a:t>
+              <a:t>08 / 14</a:t>
             </a:r>
           </a:p>
         </p:txBody>
@@ -14041,24 +14272,238 @@
           </a:fontRef>
         </p:style>
         <p:txBody>
-          <a:bodyPr wrap="square" rtlCol="0" anchor="ctr"/>
+          <a:bodyPr rtlCol="0" anchor="ctr" wrap="square"/>
           <a:lstStyle/>
           <a:p>
             <a:pPr algn="ctr"/>
-            <a:endParaRPr/>
-          </a:p>
-        </p:txBody>
-      </p:sp>
-      <p:sp>
-        <p:nvSpPr>
-          <p:cNvPr id="6" name="Rounded Rectangle 5"/>
+          </a:p>
+        </p:txBody>
+      </p:sp>
+      <p:sp>
+        <p:nvSpPr>
+          <p:cNvPr id="6" name="TextBox 5"/>
+          <p:cNvSpPr txBox="1"/>
+          <p:nvPr/>
+        </p:nvSpPr>
+        <p:spPr>
+          <a:xfrm>
+            <a:off x="548640" y="1554480"/>
+            <a:ext cx="11064240" cy="548640"/>
+          </a:xfrm>
+          <a:prstGeom prst="rect">
+            <a:avLst/>
+          </a:prstGeom>
+          <a:noFill/>
+        </p:spPr>
+        <p:txBody>
+          <a:bodyPr wrap="square" anchor="t">
+            <a:spAutoFit/>
+          </a:bodyPr>
+          <a:lstStyle/>
+          <a:p>
+            <a:pPr algn="l">
+              <a:lnSpc>
+                <a:spcPct val="112000"/>
+              </a:lnSpc>
+              <a:spcAft>
+                <a:spcPts val="500"/>
+              </a:spcAft>
+            </a:pPr>
+            <a:r>
+              <a:rPr sz="1700" b="0">
+                <a:solidFill>
+                  <a:srgbClr val="1F2937"/>
+                </a:solidFill>
+                <a:latin typeface="微软雅黑"/>
+                <a:ea typeface="微软雅黑"/>
+              </a:rPr>
+              <a:t>会话级摘要记忆 + 用户级画像记忆，让助手记住你的背景与历史，跨会话持续可用。</a:t>
+            </a:r>
+          </a:p>
+        </p:txBody>
+      </p:sp>
+      <p:sp>
+        <p:nvSpPr>
+          <p:cNvPr id="7" name="Rounded Rectangle 6"/>
           <p:cNvSpPr/>
           <p:nvPr/>
         </p:nvSpPr>
         <p:spPr>
           <a:xfrm>
-            <a:off x="548640" y="1828800"/>
-            <a:ext cx="5440680" cy="2011680"/>
+            <a:off x="548640" y="2286000"/>
+            <a:ext cx="5486400" cy="3291840"/>
+          </a:xfrm>
+          <a:prstGeom prst="roundRect">
+            <a:avLst>
+              <a:gd name="adj" fmla="val 6000"/>
+            </a:avLst>
+          </a:prstGeom>
+          <a:solidFill>
+            <a:srgbClr val="FFF6E9"/>
+          </a:solidFill>
+          <a:ln>
+            <a:noFill/>
+          </a:ln>
+          <a:effectLst/>
+        </p:spPr>
+        <p:style>
+          <a:lnRef idx="1">
+            <a:schemeClr val="accent1"/>
+          </a:lnRef>
+          <a:fillRef idx="3">
+            <a:schemeClr val="accent1"/>
+          </a:fillRef>
+          <a:effectRef idx="2">
+            <a:schemeClr val="accent1"/>
+          </a:effectRef>
+          <a:fontRef idx="minor">
+            <a:schemeClr val="lt1"/>
+          </a:fontRef>
+        </p:style>
+        <p:txBody>
+          <a:bodyPr rtlCol="0" anchor="ctr" wrap="square"/>
+          <a:lstStyle/>
+          <a:p>
+            <a:pPr algn="ctr"/>
+          </a:p>
+        </p:txBody>
+      </p:sp>
+      <p:sp>
+        <p:nvSpPr>
+          <p:cNvPr id="8" name="TextBox 7"/>
+          <p:cNvSpPr txBox="1"/>
+          <p:nvPr/>
+        </p:nvSpPr>
+        <p:spPr>
+          <a:xfrm>
+            <a:off x="777240" y="2450592"/>
+            <a:ext cx="5029200" cy="457200"/>
+          </a:xfrm>
+          <a:prstGeom prst="rect">
+            <a:avLst/>
+          </a:prstGeom>
+          <a:noFill/>
+        </p:spPr>
+        <p:txBody>
+          <a:bodyPr wrap="square" anchor="t">
+            <a:spAutoFit/>
+          </a:bodyPr>
+          <a:lstStyle/>
+          <a:p>
+            <a:pPr algn="l">
+              <a:lnSpc>
+                <a:spcPct val="112000"/>
+              </a:lnSpc>
+              <a:spcAft>
+                <a:spcPts val="500"/>
+              </a:spcAft>
+            </a:pPr>
+            <a:r>
+              <a:rPr sz="1800" b="1">
+                <a:solidFill>
+                  <a:srgbClr val="EC4899"/>
+                </a:solidFill>
+                <a:latin typeface="微软雅黑"/>
+                <a:ea typeface="微软雅黑"/>
+              </a:rPr>
+              <a:t>会话摘要记忆</a:t>
+            </a:r>
+          </a:p>
+        </p:txBody>
+      </p:sp>
+      <p:sp>
+        <p:nvSpPr>
+          <p:cNvPr id="9" name="TextBox 8"/>
+          <p:cNvSpPr txBox="1"/>
+          <p:nvPr/>
+        </p:nvSpPr>
+        <p:spPr>
+          <a:xfrm>
+            <a:off x="777240" y="2944368"/>
+            <a:ext cx="5029200" cy="2468880"/>
+          </a:xfrm>
+          <a:prstGeom prst="rect">
+            <a:avLst/>
+          </a:prstGeom>
+          <a:noFill/>
+        </p:spPr>
+        <p:txBody>
+          <a:bodyPr wrap="square" anchor="t">
+            <a:spAutoFit/>
+          </a:bodyPr>
+          <a:lstStyle/>
+          <a:p>
+            <a:pPr algn="l">
+              <a:lnSpc>
+                <a:spcPct val="112000"/>
+              </a:lnSpc>
+              <a:spcAft>
+                <a:spcPts val="500"/>
+              </a:spcAft>
+            </a:pPr>
+            <a:r>
+              <a:rPr sz="1500" b="0">
+                <a:solidFill>
+                  <a:srgbClr val="1F2937"/>
+                </a:solidFill>
+                <a:latin typeface="微软雅黑"/>
+                <a:ea typeface="微软雅黑"/>
+              </a:rPr>
+              <a:t>•  每轮对话后 LLM 滚动压缩历史摘要</a:t>
+            </a:r>
+          </a:p>
+          <a:p>
+            <a:pPr algn="l">
+              <a:lnSpc>
+                <a:spcPct val="112000"/>
+              </a:lnSpc>
+              <a:spcAft>
+                <a:spcPts val="500"/>
+              </a:spcAft>
+            </a:pPr>
+            <a:r>
+              <a:rPr sz="1500" b="0">
+                <a:solidFill>
+                  <a:srgbClr val="1F2937"/>
+                </a:solidFill>
+                <a:latin typeface="微软雅黑"/>
+                <a:ea typeface="微软雅黑"/>
+              </a:rPr>
+              <a:t>•  长对话被截断后仍保留关键信息</a:t>
+            </a:r>
+          </a:p>
+          <a:p>
+            <a:pPr algn="l">
+              <a:lnSpc>
+                <a:spcPct val="112000"/>
+              </a:lnSpc>
+              <a:spcAft>
+                <a:spcPts val="500"/>
+              </a:spcAft>
+            </a:pPr>
+            <a:r>
+              <a:rPr sz="1500" b="0">
+                <a:solidFill>
+                  <a:srgbClr val="1F2937"/>
+                </a:solidFill>
+                <a:latin typeface="微软雅黑"/>
+                <a:ea typeface="微软雅黑"/>
+              </a:rPr>
+              <a:t>•  可追问早前聊过的话题</a:t>
+            </a:r>
+          </a:p>
+        </p:txBody>
+      </p:sp>
+      <p:sp>
+        <p:nvSpPr>
+          <p:cNvPr id="10" name="Rounded Rectangle 9"/>
+          <p:cNvSpPr/>
+          <p:nvPr/>
+        </p:nvSpPr>
+        <p:spPr>
+          <a:xfrm>
+            <a:off x="6217920" y="2286000"/>
+            <a:ext cx="5394960" cy="3291840"/>
           </a:xfrm>
           <a:prstGeom prst="roundRect">
             <a:avLst>
@@ -14088,24 +14533,23 @@
           </a:fontRef>
         </p:style>
         <p:txBody>
-          <a:bodyPr wrap="square" rtlCol="0" anchor="ctr"/>
+          <a:bodyPr rtlCol="0" anchor="ctr" wrap="square"/>
           <a:lstStyle/>
           <a:p>
             <a:pPr algn="ctr"/>
-            <a:endParaRPr/>
-          </a:p>
-        </p:txBody>
-      </p:sp>
-      <p:sp>
-        <p:nvSpPr>
-          <p:cNvPr id="7" name="TextBox 6"/>
-          <p:cNvSpPr txBox="1"/>
-          <p:nvPr/>
-        </p:nvSpPr>
-        <p:spPr>
-          <a:xfrm>
-            <a:off x="777240" y="1993392"/>
-            <a:ext cx="4983480" cy="457200"/>
+          </a:p>
+        </p:txBody>
+      </p:sp>
+      <p:sp>
+        <p:nvSpPr>
+          <p:cNvPr id="11" name="TextBox 10"/>
+          <p:cNvSpPr txBox="1"/>
+          <p:nvPr/>
+        </p:nvSpPr>
+        <p:spPr>
+          <a:xfrm>
+            <a:off x="6446520" y="2450592"/>
+            <a:ext cx="4937760" cy="457200"/>
           </a:xfrm>
           <a:prstGeom prst="rect">
             <a:avLst/>
@@ -14134,21 +14578,21 @@
                 <a:latin typeface="微软雅黑"/>
                 <a:ea typeface="微软雅黑"/>
               </a:rPr>
-              <a:t>🔗  引用可点击下载</a:t>
-            </a:r>
-          </a:p>
-        </p:txBody>
-      </p:sp>
-      <p:sp>
-        <p:nvSpPr>
-          <p:cNvPr id="8" name="TextBox 7"/>
-          <p:cNvSpPr txBox="1"/>
-          <p:nvPr/>
-        </p:nvSpPr>
-        <p:spPr>
-          <a:xfrm>
-            <a:off x="777240" y="2487168"/>
-            <a:ext cx="4983480" cy="1188720"/>
+              <a:t>用户画像记忆</a:t>
+            </a:r>
+          </a:p>
+        </p:txBody>
+      </p:sp>
+      <p:sp>
+        <p:nvSpPr>
+          <p:cNvPr id="12" name="TextBox 11"/>
+          <p:cNvSpPr txBox="1"/>
+          <p:nvPr/>
+        </p:nvSpPr>
+        <p:spPr>
+          <a:xfrm>
+            <a:off x="6446520" y="2944368"/>
+            <a:ext cx="4937760" cy="2468880"/>
           </a:xfrm>
           <a:prstGeom prst="rect">
             <a:avLst/>
@@ -14170,75 +14614,68 @@
               </a:spcAft>
             </a:pPr>
             <a:r>
-              <a:rPr sz="1400" b="0">
-                <a:solidFill>
-                  <a:srgbClr val="6B7280"/>
-                </a:solidFill>
-                <a:latin typeface="微软雅黑"/>
-                <a:ea typeface="微软雅黑"/>
-              </a:rPr>
-              <a:t>RAG 答案引用来源可点击，个人文档支持直接下载</a:t>
-            </a:r>
-          </a:p>
-        </p:txBody>
-      </p:sp>
-      <p:sp>
-        <p:nvSpPr>
-          <p:cNvPr id="9" name="Rounded Rectangle 8"/>
-          <p:cNvSpPr/>
-          <p:nvPr/>
-        </p:nvSpPr>
-        <p:spPr>
-          <a:xfrm>
-            <a:off x="6172200" y="1828800"/>
-            <a:ext cx="5440680" cy="2011680"/>
-          </a:xfrm>
-          <a:prstGeom prst="roundRect">
-            <a:avLst>
-              <a:gd name="adj" fmla="val 6000"/>
-            </a:avLst>
-          </a:prstGeom>
-          <a:solidFill>
-            <a:srgbClr val="F3EFFF"/>
-          </a:solidFill>
-          <a:ln>
-            <a:noFill/>
-          </a:ln>
-          <a:effectLst/>
-        </p:spPr>
-        <p:style>
-          <a:lnRef idx="1">
-            <a:schemeClr val="accent1"/>
-          </a:lnRef>
-          <a:fillRef idx="3">
-            <a:schemeClr val="accent1"/>
-          </a:fillRef>
-          <a:effectRef idx="2">
-            <a:schemeClr val="accent1"/>
-          </a:effectRef>
-          <a:fontRef idx="minor">
-            <a:schemeClr val="lt1"/>
-          </a:fontRef>
-        </p:style>
-        <p:txBody>
-          <a:bodyPr wrap="square" rtlCol="0" anchor="ctr"/>
-          <a:lstStyle/>
-          <a:p>
-            <a:pPr algn="ctr"/>
-            <a:endParaRPr/>
-          </a:p>
-        </p:txBody>
-      </p:sp>
-      <p:sp>
-        <p:nvSpPr>
-          <p:cNvPr id="10" name="TextBox 9"/>
-          <p:cNvSpPr txBox="1"/>
-          <p:nvPr/>
-        </p:nvSpPr>
-        <p:spPr>
-          <a:xfrm>
-            <a:off x="6400800" y="1993392"/>
-            <a:ext cx="4983480" cy="457200"/>
+              <a:rPr sz="1500" b="0">
+                <a:solidFill>
+                  <a:srgbClr val="1F2937"/>
+                </a:solidFill>
+                <a:latin typeface="微软雅黑"/>
+                <a:ea typeface="微软雅黑"/>
+              </a:rPr>
+              <a:t>•  自动提取专业 / 年级 / 目标 / 偏好</a:t>
+            </a:r>
+          </a:p>
+          <a:p>
+            <a:pPr algn="l">
+              <a:lnSpc>
+                <a:spcPct val="112000"/>
+              </a:lnSpc>
+              <a:spcAft>
+                <a:spcPts val="500"/>
+              </a:spcAft>
+            </a:pPr>
+            <a:r>
+              <a:rPr sz="1500" b="0">
+                <a:solidFill>
+                  <a:srgbClr val="1F2937"/>
+                </a:solidFill>
+                <a:latin typeface="微软雅黑"/>
+                <a:ea typeface="微软雅黑"/>
+              </a:rPr>
+              <a:t>•  跨会话记住你是谁</a:t>
+            </a:r>
+          </a:p>
+          <a:p>
+            <a:pPr algn="l">
+              <a:lnSpc>
+                <a:spcPct val="112000"/>
+              </a:lnSpc>
+              <a:spcAft>
+                <a:spcPts val="500"/>
+              </a:spcAft>
+            </a:pPr>
+            <a:r>
+              <a:rPr sz="1500" b="0">
+                <a:solidFill>
+                  <a:srgbClr val="1F2937"/>
+                </a:solidFill>
+                <a:latin typeface="微软雅黑"/>
+                <a:ea typeface="微软雅黑"/>
+              </a:rPr>
+              <a:t>•  新会话自动注入画像，回答更贴合</a:t>
+            </a:r>
+          </a:p>
+        </p:txBody>
+      </p:sp>
+      <p:sp>
+        <p:nvSpPr>
+          <p:cNvPr id="13" name="TextBox 12"/>
+          <p:cNvSpPr txBox="1"/>
+          <p:nvPr/>
+        </p:nvSpPr>
+        <p:spPr>
+          <a:xfrm>
+            <a:off x="548640" y="5806440"/>
+            <a:ext cx="11064240" cy="457200"/>
           </a:xfrm>
           <a:prstGeom prst="rect">
             <a:avLst/>
@@ -14260,147 +14697,14 @@
               </a:spcAft>
             </a:pPr>
             <a:r>
-              <a:rPr sz="1800" b="1">
-                <a:solidFill>
-                  <a:srgbClr val="7C3AED"/>
-                </a:solidFill>
-                <a:latin typeface="微软雅黑"/>
-                <a:ea typeface="微软雅黑"/>
-              </a:rPr>
-              <a:t>🌙  暗色模式</a:t>
-            </a:r>
-          </a:p>
-        </p:txBody>
-      </p:sp>
-      <p:sp>
-        <p:nvSpPr>
-          <p:cNvPr id="11" name="TextBox 10"/>
-          <p:cNvSpPr txBox="1"/>
-          <p:nvPr/>
-        </p:nvSpPr>
-        <p:spPr>
-          <a:xfrm>
-            <a:off x="6400800" y="2487168"/>
-            <a:ext cx="4983480" cy="1188720"/>
-          </a:xfrm>
-          <a:prstGeom prst="rect">
-            <a:avLst/>
-          </a:prstGeom>
-          <a:noFill/>
-        </p:spPr>
-        <p:txBody>
-          <a:bodyPr wrap="square" anchor="t">
-            <a:spAutoFit/>
-          </a:bodyPr>
-          <a:lstStyle/>
-          <a:p>
-            <a:pPr algn="l">
-              <a:lnSpc>
-                <a:spcPct val="112000"/>
-              </a:lnSpc>
-              <a:spcAft>
-                <a:spcPts val="500"/>
-              </a:spcAft>
-            </a:pPr>
-            <a:r>
-              <a:rPr sz="1400" b="0">
-                <a:solidFill>
-                  <a:srgbClr val="6B7280"/>
-                </a:solidFill>
-                <a:latin typeface="微软雅黑"/>
-                <a:ea typeface="微软雅黑"/>
-              </a:rPr>
-              <a:t>跟随系统偏好 + 本地记忆，一键切换主题</a:t>
-            </a:r>
-          </a:p>
-        </p:txBody>
-      </p:sp>
-      <p:sp>
-        <p:nvSpPr>
-          <p:cNvPr id="12" name="Rounded Rectangle 11"/>
-          <p:cNvSpPr/>
-          <p:nvPr/>
-        </p:nvSpPr>
-        <p:spPr>
-          <a:xfrm>
-            <a:off x="548640" y="4206240"/>
-            <a:ext cx="5440680" cy="2011680"/>
-          </a:xfrm>
-          <a:prstGeom prst="roundRect">
-            <a:avLst>
-              <a:gd name="adj" fmla="val 6000"/>
-            </a:avLst>
-          </a:prstGeom>
-          <a:solidFill>
-            <a:srgbClr val="EAFBF3"/>
-          </a:solidFill>
-          <a:ln>
-            <a:noFill/>
-          </a:ln>
-          <a:effectLst/>
-        </p:spPr>
-        <p:style>
-          <a:lnRef idx="1">
-            <a:schemeClr val="accent1"/>
-          </a:lnRef>
-          <a:fillRef idx="3">
-            <a:schemeClr val="accent1"/>
-          </a:fillRef>
-          <a:effectRef idx="2">
-            <a:schemeClr val="accent1"/>
-          </a:effectRef>
-          <a:fontRef idx="minor">
-            <a:schemeClr val="lt1"/>
-          </a:fontRef>
-        </p:style>
-        <p:txBody>
-          <a:bodyPr wrap="square" rtlCol="0" anchor="ctr"/>
-          <a:lstStyle/>
-          <a:p>
-            <a:pPr algn="ctr"/>
-            <a:endParaRPr/>
-          </a:p>
-        </p:txBody>
-      </p:sp>
-      <p:sp>
-        <p:nvSpPr>
-          <p:cNvPr id="13" name="TextBox 12"/>
-          <p:cNvSpPr txBox="1"/>
-          <p:nvPr/>
-        </p:nvSpPr>
-        <p:spPr>
-          <a:xfrm>
-            <a:off x="777240" y="4370831"/>
-            <a:ext cx="4983480" cy="457200"/>
-          </a:xfrm>
-          <a:prstGeom prst="rect">
-            <a:avLst/>
-          </a:prstGeom>
-          <a:noFill/>
-        </p:spPr>
-        <p:txBody>
-          <a:bodyPr wrap="square" anchor="t">
-            <a:spAutoFit/>
-          </a:bodyPr>
-          <a:lstStyle/>
-          <a:p>
-            <a:pPr algn="l">
-              <a:lnSpc>
-                <a:spcPct val="112000"/>
-              </a:lnSpc>
-              <a:spcAft>
-                <a:spcPts val="500"/>
-              </a:spcAft>
-            </a:pPr>
-            <a:r>
-              <a:rPr sz="1800" b="1">
-                <a:solidFill>
-                  <a:srgbClr val="10B981"/>
-                </a:solidFill>
-                <a:latin typeface="微软雅黑"/>
-                <a:ea typeface="微软雅黑"/>
-              </a:rPr>
-              <a:t>📱  移动端适配</a:t>
+              <a:rPr sz="1500" b="0">
+                <a:solidFill>
+                  <a:srgbClr val="EC4899"/>
+                </a:solidFill>
+                <a:latin typeface="微软雅黑"/>
+                <a:ea typeface="微软雅黑"/>
+              </a:rPr>
+              <a:t>演示：告诉助手 我是计算机大三、目标浙大考研 → 新建会话后它依然记得。</a:t>
             </a:r>
           </a:p>
         </p:txBody>
@@ -14408,49 +14712,6 @@
       <p:sp>
         <p:nvSpPr>
           <p:cNvPr id="14" name="TextBox 13"/>
-          <p:cNvSpPr txBox="1"/>
-          <p:nvPr/>
-        </p:nvSpPr>
-        <p:spPr>
-          <a:xfrm>
-            <a:off x="777240" y="4864607"/>
-            <a:ext cx="4983480" cy="1188720"/>
-          </a:xfrm>
-          <a:prstGeom prst="rect">
-            <a:avLst/>
-          </a:prstGeom>
-          <a:noFill/>
-        </p:spPr>
-        <p:txBody>
-          <a:bodyPr wrap="square" anchor="t">
-            <a:spAutoFit/>
-          </a:bodyPr>
-          <a:lstStyle/>
-          <a:p>
-            <a:pPr algn="l">
-              <a:lnSpc>
-                <a:spcPct val="112000"/>
-              </a:lnSpc>
-              <a:spcAft>
-                <a:spcPts val="500"/>
-              </a:spcAft>
-            </a:pPr>
-            <a:r>
-              <a:rPr sz="1400" b="0">
-                <a:solidFill>
-                  <a:srgbClr val="6B7280"/>
-                </a:solidFill>
-                <a:latin typeface="微软雅黑"/>
-                <a:ea typeface="微软雅黑"/>
-              </a:rPr>
-              <a:t>窄屏自动切换抽屉式会话列表，触控友好</a:t>
-            </a:r>
-          </a:p>
-        </p:txBody>
-      </p:sp>
-      <p:sp>
-        <p:nvSpPr>
-          <p:cNvPr id="18" name="TextBox 17"/>
           <p:cNvSpPr txBox="1"/>
           <p:nvPr/>
         </p:nvSpPr>
@@ -14500,7 +14761,7 @@
 </file>
 
 <file path=ppt/slides/slide9.xml><?xml version="1.0" encoding="utf-8"?>
-<p:sld xmlns:a="http://schemas.openxmlformats.org/drawingml/2006/main" xmlns:r="http://schemas.openxmlformats.org/officeDocument/2006/relationships" xmlns:p="http://schemas.openxmlformats.org/presentationml/2006/main">
+<p:sld xmlns:a="http://schemas.openxmlformats.org/drawingml/2006/main" xmlns:p="http://schemas.openxmlformats.org/presentationml/2006/main" xmlns:r="http://schemas.openxmlformats.org/officeDocument/2006/relationships">
   <p:cSld>
     <p:spTree>
       <p:nvGrpSpPr>
@@ -14508,14 +14769,7 @@
         <p:cNvGrpSpPr/>
         <p:nvPr/>
       </p:nvGrpSpPr>
-      <p:grpSpPr>
-        <a:xfrm>
-          <a:off x="0" y="0"/>
-          <a:ext cx="0" cy="0"/>
-          <a:chOff x="0" y="0"/>
-          <a:chExt cx="0" cy="0"/>
-        </a:xfrm>
-      </p:grpSpPr>
+      <p:grpSpPr/>
       <p:sp>
         <p:nvSpPr>
           <p:cNvPr id="2" name="Rectangle 1"/>
@@ -14553,11 +14807,10 @@
           </a:fontRef>
         </p:style>
         <p:txBody>
-          <a:bodyPr wrap="square" rtlCol="0" anchor="ctr"/>
+          <a:bodyPr rtlCol="0" anchor="ctr" wrap="square"/>
           <a:lstStyle/>
           <a:p>
             <a:pPr algn="ctr"/>
-            <a:endParaRPr/>
           </a:p>
         </p:txBody>
       </p:sp>
@@ -14599,7 +14852,7 @@
                 <a:latin typeface="微软雅黑"/>
                 <a:ea typeface="微软雅黑"/>
               </a:rPr>
-              <a:t>系统架构</a:t>
+              <a:t>交互体验亮点</a:t>
             </a:r>
           </a:p>
         </p:txBody>
@@ -14642,7 +14895,7 @@
                 <a:latin typeface="微软雅黑"/>
                 <a:ea typeface="微软雅黑"/>
               </a:rPr>
-              <a:t>09 / 13</a:t>
+              <a:t>09 / 14</a:t>
             </a:r>
           </a:p>
         </p:txBody>
@@ -14684,11 +14937,10 @@
           </a:fontRef>
         </p:style>
         <p:txBody>
-          <a:bodyPr wrap="square" rtlCol="0" anchor="ctr"/>
+          <a:bodyPr rtlCol="0" anchor="ctr" wrap="square"/>
           <a:lstStyle/>
           <a:p>
             <a:pPr algn="ctr"/>
-            <a:endParaRPr/>
           </a:p>
         </p:txBody>
       </p:sp>
@@ -14700,16 +14952,16 @@
         </p:nvSpPr>
         <p:spPr>
           <a:xfrm>
-            <a:off x="3566160" y="1554480"/>
-            <a:ext cx="5029200" cy="822960"/>
+            <a:off x="548640" y="1828800"/>
+            <a:ext cx="5440680" cy="2011680"/>
           </a:xfrm>
           <a:prstGeom prst="roundRect">
             <a:avLst>
-              <a:gd name="adj" fmla="val 12000"/>
+              <a:gd name="adj" fmla="val 6000"/>
             </a:avLst>
           </a:prstGeom>
           <a:solidFill>
-            <a:srgbClr val="4F46E5"/>
+            <a:srgbClr val="EEF2FF"/>
           </a:solidFill>
           <a:ln>
             <a:noFill/>
@@ -14731,11 +14983,10 @@
           </a:fontRef>
         </p:style>
         <p:txBody>
-          <a:bodyPr wrap="square" rtlCol="0" anchor="ctr"/>
+          <a:bodyPr rtlCol="0" anchor="ctr" wrap="square"/>
           <a:lstStyle/>
           <a:p>
             <a:pPr algn="ctr"/>
-            <a:endParaRPr/>
           </a:p>
         </p:txBody>
       </p:sp>
@@ -14747,57 +14998,102 @@
         </p:nvSpPr>
         <p:spPr>
           <a:xfrm>
-            <a:off x="3657600" y="1554480"/>
-            <a:ext cx="4846320" cy="822960"/>
-          </a:xfrm>
-          <a:prstGeom prst="rect">
-            <a:avLst/>
-          </a:prstGeom>
-          <a:noFill/>
-        </p:spPr>
-        <p:txBody>
-          <a:bodyPr wrap="square" anchor="ctr">
-            <a:spAutoFit/>
-          </a:bodyPr>
-          <a:lstStyle/>
-          <a:p>
-            <a:pPr algn="ctr">
-              <a:lnSpc>
-                <a:spcPct val="112000"/>
-              </a:lnSpc>
-              <a:spcAft>
-                <a:spcPts val="500"/>
-              </a:spcAft>
-            </a:pPr>
-            <a:r>
-              <a:rPr sz="1500" b="1">
-                <a:solidFill>
-                  <a:srgbClr val="FFFFFF"/>
-                </a:solidFill>
-                <a:latin typeface="微软雅黑"/>
-                <a:ea typeface="微软雅黑"/>
-              </a:rPr>
-              <a:t>前端  Vue3 · Vite · Element Plus</a:t>
-            </a:r>
-          </a:p>
-        </p:txBody>
-      </p:sp>
-      <p:sp>
-        <p:nvSpPr>
-          <p:cNvPr id="8" name="Down Arrow 7"/>
+            <a:off x="777240" y="1993392"/>
+            <a:ext cx="4983480" cy="457200"/>
+          </a:xfrm>
+          <a:prstGeom prst="rect">
+            <a:avLst/>
+          </a:prstGeom>
+          <a:noFill/>
+        </p:spPr>
+        <p:txBody>
+          <a:bodyPr wrap="square" anchor="t">
+            <a:spAutoFit/>
+          </a:bodyPr>
+          <a:lstStyle/>
+          <a:p>
+            <a:pPr algn="l">
+              <a:lnSpc>
+                <a:spcPct val="112000"/>
+              </a:lnSpc>
+              <a:spcAft>
+                <a:spcPts val="500"/>
+              </a:spcAft>
+            </a:pPr>
+            <a:r>
+              <a:rPr sz="1800" b="1">
+                <a:solidFill>
+                  <a:srgbClr val="4F46E5"/>
+                </a:solidFill>
+                <a:latin typeface="微软雅黑"/>
+                <a:ea typeface="微软雅黑"/>
+              </a:rPr>
+              <a:t>🔗  引用可点击下载</a:t>
+            </a:r>
+          </a:p>
+        </p:txBody>
+      </p:sp>
+      <p:sp>
+        <p:nvSpPr>
+          <p:cNvPr id="8" name="TextBox 7"/>
+          <p:cNvSpPr txBox="1"/>
+          <p:nvPr/>
+        </p:nvSpPr>
+        <p:spPr>
+          <a:xfrm>
+            <a:off x="777240" y="2487168"/>
+            <a:ext cx="4983480" cy="1188720"/>
+          </a:xfrm>
+          <a:prstGeom prst="rect">
+            <a:avLst/>
+          </a:prstGeom>
+          <a:noFill/>
+        </p:spPr>
+        <p:txBody>
+          <a:bodyPr wrap="square" anchor="t">
+            <a:spAutoFit/>
+          </a:bodyPr>
+          <a:lstStyle/>
+          <a:p>
+            <a:pPr algn="l">
+              <a:lnSpc>
+                <a:spcPct val="112000"/>
+              </a:lnSpc>
+              <a:spcAft>
+                <a:spcPts val="500"/>
+              </a:spcAft>
+            </a:pPr>
+            <a:r>
+              <a:rPr sz="1400" b="0">
+                <a:solidFill>
+                  <a:srgbClr val="6B7280"/>
+                </a:solidFill>
+                <a:latin typeface="微软雅黑"/>
+                <a:ea typeface="微软雅黑"/>
+              </a:rPr>
+              <a:t>RAG 答案引用来源可点击，个人文档支持直接下载</a:t>
+            </a:r>
+          </a:p>
+        </p:txBody>
+      </p:sp>
+      <p:sp>
+        <p:nvSpPr>
+          <p:cNvPr id="9" name="Rounded Rectangle 8"/>
           <p:cNvSpPr/>
           <p:nvPr/>
         </p:nvSpPr>
         <p:spPr>
           <a:xfrm>
-            <a:off x="5394960" y="2377440"/>
-            <a:ext cx="457200" cy="384048"/>
-          </a:xfrm>
-          <a:prstGeom prst="downArrow">
-            <a:avLst/>
+            <a:off x="6172200" y="1828800"/>
+            <a:ext cx="5440680" cy="2011680"/>
+          </a:xfrm>
+          <a:prstGeom prst="roundRect">
+            <a:avLst>
+              <a:gd name="adj" fmla="val 6000"/>
+            </a:avLst>
           </a:prstGeom>
           <a:solidFill>
-            <a:srgbClr val="4F46E5"/>
+            <a:srgbClr val="F3EFFF"/>
           </a:solidFill>
           <a:ln>
             <a:noFill/>
@@ -14819,32 +15115,117 @@
           </a:fontRef>
         </p:style>
         <p:txBody>
-          <a:bodyPr wrap="square" rtlCol="0" anchor="ctr"/>
+          <a:bodyPr rtlCol="0" anchor="ctr" wrap="square"/>
           <a:lstStyle/>
           <a:p>
             <a:pPr algn="ctr"/>
-            <a:endParaRPr/>
-          </a:p>
-        </p:txBody>
-      </p:sp>
-      <p:sp>
-        <p:nvSpPr>
-          <p:cNvPr id="9" name="Rounded Rectangle 8"/>
+          </a:p>
+        </p:txBody>
+      </p:sp>
+      <p:sp>
+        <p:nvSpPr>
+          <p:cNvPr id="10" name="TextBox 9"/>
+          <p:cNvSpPr txBox="1"/>
+          <p:nvPr/>
+        </p:nvSpPr>
+        <p:spPr>
+          <a:xfrm>
+            <a:off x="6400800" y="1993392"/>
+            <a:ext cx="4983480" cy="457200"/>
+          </a:xfrm>
+          <a:prstGeom prst="rect">
+            <a:avLst/>
+          </a:prstGeom>
+          <a:noFill/>
+        </p:spPr>
+        <p:txBody>
+          <a:bodyPr wrap="square" anchor="t">
+            <a:spAutoFit/>
+          </a:bodyPr>
+          <a:lstStyle/>
+          <a:p>
+            <a:pPr algn="l">
+              <a:lnSpc>
+                <a:spcPct val="112000"/>
+              </a:lnSpc>
+              <a:spcAft>
+                <a:spcPts val="500"/>
+              </a:spcAft>
+            </a:pPr>
+            <a:r>
+              <a:rPr sz="1800" b="1">
+                <a:solidFill>
+                  <a:srgbClr val="7C3AED"/>
+                </a:solidFill>
+                <a:latin typeface="微软雅黑"/>
+                <a:ea typeface="微软雅黑"/>
+              </a:rPr>
+              <a:t>🌙  暗色模式</a:t>
+            </a:r>
+          </a:p>
+        </p:txBody>
+      </p:sp>
+      <p:sp>
+        <p:nvSpPr>
+          <p:cNvPr id="11" name="TextBox 10"/>
+          <p:cNvSpPr txBox="1"/>
+          <p:nvPr/>
+        </p:nvSpPr>
+        <p:spPr>
+          <a:xfrm>
+            <a:off x="6400800" y="2487168"/>
+            <a:ext cx="4983480" cy="1188720"/>
+          </a:xfrm>
+          <a:prstGeom prst="rect">
+            <a:avLst/>
+          </a:prstGeom>
+          <a:noFill/>
+        </p:spPr>
+        <p:txBody>
+          <a:bodyPr wrap="square" anchor="t">
+            <a:spAutoFit/>
+          </a:bodyPr>
+          <a:lstStyle/>
+          <a:p>
+            <a:pPr algn="l">
+              <a:lnSpc>
+                <a:spcPct val="112000"/>
+              </a:lnSpc>
+              <a:spcAft>
+                <a:spcPts val="500"/>
+              </a:spcAft>
+            </a:pPr>
+            <a:r>
+              <a:rPr sz="1400" b="0">
+                <a:solidFill>
+                  <a:srgbClr val="6B7280"/>
+                </a:solidFill>
+                <a:latin typeface="微软雅黑"/>
+                <a:ea typeface="微软雅黑"/>
+              </a:rPr>
+              <a:t>跟随系统偏好 + 本地记忆，一键切换主题</a:t>
+            </a:r>
+          </a:p>
+        </p:txBody>
+      </p:sp>
+      <p:sp>
+        <p:nvSpPr>
+          <p:cNvPr id="12" name="Rounded Rectangle 11"/>
           <p:cNvSpPr/>
           <p:nvPr/>
         </p:nvSpPr>
         <p:spPr>
           <a:xfrm>
-            <a:off x="3566160" y="2761488"/>
-            <a:ext cx="5029200" cy="822960"/>
+            <a:off x="548640" y="4206240"/>
+            <a:ext cx="5440680" cy="2011680"/>
           </a:xfrm>
           <a:prstGeom prst="roundRect">
             <a:avLst>
-              <a:gd name="adj" fmla="val 12000"/>
+              <a:gd name="adj" fmla="val 6000"/>
             </a:avLst>
           </a:prstGeom>
           <a:solidFill>
-            <a:srgbClr val="7C3AED"/>
+            <a:srgbClr val="EAFBF3"/>
           </a:solidFill>
           <a:ln>
             <a:noFill/>
@@ -14866,73 +15247,117 @@
           </a:fontRef>
         </p:style>
         <p:txBody>
-          <a:bodyPr wrap="square" rtlCol="0" anchor="ctr"/>
+          <a:bodyPr rtlCol="0" anchor="ctr" wrap="square"/>
           <a:lstStyle/>
           <a:p>
             <a:pPr algn="ctr"/>
-            <a:endParaRPr/>
-          </a:p>
-        </p:txBody>
-      </p:sp>
-      <p:sp>
-        <p:nvSpPr>
-          <p:cNvPr id="10" name="TextBox 9"/>
-          <p:cNvSpPr txBox="1"/>
-          <p:nvPr/>
-        </p:nvSpPr>
-        <p:spPr>
-          <a:xfrm>
-            <a:off x="3657600" y="2761488"/>
-            <a:ext cx="4846320" cy="822960"/>
-          </a:xfrm>
-          <a:prstGeom prst="rect">
-            <a:avLst/>
-          </a:prstGeom>
-          <a:noFill/>
-        </p:spPr>
-        <p:txBody>
-          <a:bodyPr wrap="square" anchor="ctr">
-            <a:spAutoFit/>
-          </a:bodyPr>
-          <a:lstStyle/>
-          <a:p>
-            <a:pPr algn="ctr">
-              <a:lnSpc>
-                <a:spcPct val="112000"/>
-              </a:lnSpc>
-              <a:spcAft>
-                <a:spcPts val="500"/>
-              </a:spcAft>
-            </a:pPr>
-            <a:r>
-              <a:rPr sz="1500" b="1">
-                <a:solidFill>
-                  <a:srgbClr val="FFFFFF"/>
-                </a:solidFill>
-                <a:latin typeface="微软雅黑"/>
-                <a:ea typeface="微软雅黑"/>
-              </a:rPr>
-              <a:t>后端  FastAPI · SQLAlchemy · SSE 流式</a:t>
-            </a:r>
-          </a:p>
-        </p:txBody>
-      </p:sp>
-      <p:sp>
-        <p:nvSpPr>
-          <p:cNvPr id="11" name="Down Arrow 10"/>
+          </a:p>
+        </p:txBody>
+      </p:sp>
+      <p:sp>
+        <p:nvSpPr>
+          <p:cNvPr id="13" name="TextBox 12"/>
+          <p:cNvSpPr txBox="1"/>
+          <p:nvPr/>
+        </p:nvSpPr>
+        <p:spPr>
+          <a:xfrm>
+            <a:off x="777240" y="4370831"/>
+            <a:ext cx="4983480" cy="457200"/>
+          </a:xfrm>
+          <a:prstGeom prst="rect">
+            <a:avLst/>
+          </a:prstGeom>
+          <a:noFill/>
+        </p:spPr>
+        <p:txBody>
+          <a:bodyPr wrap="square" anchor="t">
+            <a:spAutoFit/>
+          </a:bodyPr>
+          <a:lstStyle/>
+          <a:p>
+            <a:pPr algn="l">
+              <a:lnSpc>
+                <a:spcPct val="112000"/>
+              </a:lnSpc>
+              <a:spcAft>
+                <a:spcPts val="500"/>
+              </a:spcAft>
+            </a:pPr>
+            <a:r>
+              <a:rPr sz="1800" b="1">
+                <a:solidFill>
+                  <a:srgbClr val="10B981"/>
+                </a:solidFill>
+                <a:latin typeface="微软雅黑"/>
+                <a:ea typeface="微软雅黑"/>
+              </a:rPr>
+              <a:t>📱  移动端适配</a:t>
+            </a:r>
+          </a:p>
+        </p:txBody>
+      </p:sp>
+      <p:sp>
+        <p:nvSpPr>
+          <p:cNvPr id="14" name="TextBox 13"/>
+          <p:cNvSpPr txBox="1"/>
+          <p:nvPr/>
+        </p:nvSpPr>
+        <p:spPr>
+          <a:xfrm>
+            <a:off x="777240" y="4864607"/>
+            <a:ext cx="4983480" cy="1188720"/>
+          </a:xfrm>
+          <a:prstGeom prst="rect">
+            <a:avLst/>
+          </a:prstGeom>
+          <a:noFill/>
+        </p:spPr>
+        <p:txBody>
+          <a:bodyPr wrap="square" anchor="t">
+            <a:spAutoFit/>
+          </a:bodyPr>
+          <a:lstStyle/>
+          <a:p>
+            <a:pPr algn="l">
+              <a:lnSpc>
+                <a:spcPct val="112000"/>
+              </a:lnSpc>
+              <a:spcAft>
+                <a:spcPts val="500"/>
+              </a:spcAft>
+            </a:pPr>
+            <a:r>
+              <a:rPr sz="1400" b="0">
+                <a:solidFill>
+                  <a:srgbClr val="6B7280"/>
+                </a:solidFill>
+                <a:latin typeface="微软雅黑"/>
+                <a:ea typeface="微软雅黑"/>
+              </a:rPr>
+              <a:t>窄屏自动切换抽屉式会话列表，触控友好</a:t>
+            </a:r>
+          </a:p>
+        </p:txBody>
+      </p:sp>
+      <p:sp>
+        <p:nvSpPr>
+          <p:cNvPr id="15" name="Rounded Rectangle 14"/>
           <p:cNvSpPr/>
           <p:nvPr/>
         </p:nvSpPr>
         <p:spPr>
           <a:xfrm>
-            <a:off x="5394960" y="3584448"/>
-            <a:ext cx="457200" cy="384048"/>
-          </a:xfrm>
-          <a:prstGeom prst="downArrow">
-            <a:avLst/>
+            <a:off x="6172200" y="4206240"/>
+            <a:ext cx="5440680" cy="2011680"/>
+          </a:xfrm>
+          <a:prstGeom prst="roundRect">
+            <a:avLst>
+              <a:gd name="adj" fmla="val 6000"/>
+            </a:avLst>
           </a:prstGeom>
           <a:solidFill>
-            <a:srgbClr val="4F46E5"/>
+            <a:srgbClr val="FFF6E9"/>
           </a:solidFill>
           <a:ln>
             <a:noFill/>
@@ -14954,240 +15379,53 @@
           </a:fontRef>
         </p:style>
         <p:txBody>
-          <a:bodyPr wrap="square" rtlCol="0" anchor="ctr"/>
+          <a:bodyPr rtlCol="0" anchor="ctr" wrap="square"/>
           <a:lstStyle/>
           <a:p>
             <a:pPr algn="ctr"/>
-            <a:endParaRPr/>
-          </a:p>
-        </p:txBody>
-      </p:sp>
-      <p:sp>
-        <p:nvSpPr>
-          <p:cNvPr id="12" name="Rounded Rectangle 11"/>
-          <p:cNvSpPr/>
-          <p:nvPr/>
-        </p:nvSpPr>
-        <p:spPr>
-          <a:xfrm>
-            <a:off x="822960" y="3968496"/>
-            <a:ext cx="3200400" cy="868680"/>
-          </a:xfrm>
-          <a:prstGeom prst="roundRect">
-            <a:avLst>
-              <a:gd name="adj" fmla="val 12000"/>
-            </a:avLst>
-          </a:prstGeom>
-          <a:solidFill>
-            <a:srgbClr val="3733A1"/>
-          </a:solidFill>
-          <a:ln>
-            <a:noFill/>
-          </a:ln>
-          <a:effectLst/>
-        </p:spPr>
-        <p:style>
-          <a:lnRef idx="1">
-            <a:schemeClr val="accent1"/>
-          </a:lnRef>
-          <a:fillRef idx="3">
-            <a:schemeClr val="accent1"/>
-          </a:fillRef>
-          <a:effectRef idx="2">
-            <a:schemeClr val="accent1"/>
-          </a:effectRef>
-          <a:fontRef idx="minor">
-            <a:schemeClr val="lt1"/>
-          </a:fontRef>
-        </p:style>
-        <p:txBody>
-          <a:bodyPr wrap="square" rtlCol="0" anchor="ctr"/>
-          <a:lstStyle/>
-          <a:p>
-            <a:pPr algn="ctr"/>
-            <a:endParaRPr/>
-          </a:p>
-        </p:txBody>
-      </p:sp>
-      <p:sp>
-        <p:nvSpPr>
-          <p:cNvPr id="13" name="TextBox 12"/>
-          <p:cNvSpPr txBox="1"/>
-          <p:nvPr/>
-        </p:nvSpPr>
-        <p:spPr>
-          <a:xfrm>
-            <a:off x="914400" y="3968496"/>
-            <a:ext cx="3017520" cy="868680"/>
-          </a:xfrm>
-          <a:prstGeom prst="rect">
-            <a:avLst/>
-          </a:prstGeom>
-          <a:noFill/>
-        </p:spPr>
-        <p:txBody>
-          <a:bodyPr wrap="square" anchor="ctr">
-            <a:spAutoFit/>
-          </a:bodyPr>
-          <a:lstStyle/>
-          <a:p>
-            <a:pPr algn="ctr">
-              <a:lnSpc>
-                <a:spcPct val="112000"/>
-              </a:lnSpc>
-              <a:spcAft>
-                <a:spcPts val="500"/>
-              </a:spcAft>
-            </a:pPr>
-            <a:r>
-              <a:rPr sz="1300" b="1">
-                <a:solidFill>
-                  <a:srgbClr val="FFFFFF"/>
-                </a:solidFill>
-                <a:latin typeface="微软雅黑"/>
-                <a:ea typeface="微软雅黑"/>
-              </a:rPr>
-              <a:t>MySQL
-用户 / 会话 / 文档</a:t>
-            </a:r>
-          </a:p>
-        </p:txBody>
-      </p:sp>
-      <p:sp>
-        <p:nvSpPr>
-          <p:cNvPr id="14" name="Rounded Rectangle 13"/>
-          <p:cNvSpPr/>
-          <p:nvPr/>
-        </p:nvSpPr>
-        <p:spPr>
-          <a:xfrm>
-            <a:off x="4480560" y="3968496"/>
-            <a:ext cx="3200400" cy="868680"/>
-          </a:xfrm>
-          <a:prstGeom prst="roundRect">
-            <a:avLst>
-              <a:gd name="adj" fmla="val 12000"/>
-            </a:avLst>
-          </a:prstGeom>
-          <a:solidFill>
-            <a:srgbClr val="3733A1"/>
-          </a:solidFill>
-          <a:ln>
-            <a:noFill/>
-          </a:ln>
-          <a:effectLst/>
-        </p:spPr>
-        <p:style>
-          <a:lnRef idx="1">
-            <a:schemeClr val="accent1"/>
-          </a:lnRef>
-          <a:fillRef idx="3">
-            <a:schemeClr val="accent1"/>
-          </a:fillRef>
-          <a:effectRef idx="2">
-            <a:schemeClr val="accent1"/>
-          </a:effectRef>
-          <a:fontRef idx="minor">
-            <a:schemeClr val="lt1"/>
-          </a:fontRef>
-        </p:style>
-        <p:txBody>
-          <a:bodyPr wrap="square" rtlCol="0" anchor="ctr"/>
-          <a:lstStyle/>
-          <a:p>
-            <a:pPr algn="ctr"/>
-            <a:endParaRPr/>
-          </a:p>
-        </p:txBody>
-      </p:sp>
-      <p:sp>
-        <p:nvSpPr>
-          <p:cNvPr id="15" name="TextBox 14"/>
-          <p:cNvSpPr txBox="1"/>
-          <p:nvPr/>
-        </p:nvSpPr>
-        <p:spPr>
-          <a:xfrm>
-            <a:off x="4572000" y="3968496"/>
-            <a:ext cx="3017520" cy="868680"/>
-          </a:xfrm>
-          <a:prstGeom prst="rect">
-            <a:avLst/>
-          </a:prstGeom>
-          <a:noFill/>
-        </p:spPr>
-        <p:txBody>
-          <a:bodyPr wrap="square" anchor="ctr">
-            <a:spAutoFit/>
-          </a:bodyPr>
-          <a:lstStyle/>
-          <a:p>
-            <a:pPr algn="ctr">
-              <a:lnSpc>
-                <a:spcPct val="112000"/>
-              </a:lnSpc>
-              <a:spcAft>
-                <a:spcPts val="500"/>
-              </a:spcAft>
-            </a:pPr>
-            <a:r>
-              <a:rPr sz="1300" b="1">
-                <a:solidFill>
-                  <a:srgbClr val="FFFFFF"/>
-                </a:solidFill>
-                <a:latin typeface="微软雅黑"/>
-                <a:ea typeface="微软雅黑"/>
-              </a:rPr>
-              <a:t>Redis
-缓存 / 限流计数</a:t>
-            </a:r>
-          </a:p>
-        </p:txBody>
-      </p:sp>
-      <p:sp>
-        <p:nvSpPr>
-          <p:cNvPr id="16" name="Rounded Rectangle 15"/>
-          <p:cNvSpPr/>
-          <p:nvPr/>
-        </p:nvSpPr>
-        <p:spPr>
-          <a:xfrm>
-            <a:off x="8138160" y="3968496"/>
-            <a:ext cx="3200400" cy="868680"/>
-          </a:xfrm>
-          <a:prstGeom prst="roundRect">
-            <a:avLst>
-              <a:gd name="adj" fmla="val 12000"/>
-            </a:avLst>
-          </a:prstGeom>
-          <a:solidFill>
-            <a:srgbClr val="3733A1"/>
-          </a:solidFill>
-          <a:ln>
-            <a:noFill/>
-          </a:ln>
-          <a:effectLst/>
-        </p:spPr>
-        <p:style>
-          <a:lnRef idx="1">
-            <a:schemeClr val="accent1"/>
-          </a:lnRef>
-          <a:fillRef idx="3">
-            <a:schemeClr val="accent1"/>
-          </a:fillRef>
-          <a:effectRef idx="2">
-            <a:schemeClr val="accent1"/>
-          </a:effectRef>
-          <a:fontRef idx="minor">
-            <a:schemeClr val="lt1"/>
-          </a:fontRef>
-        </p:style>
-        <p:txBody>
-          <a:bodyPr wrap="square" rtlCol="0" anchor="ctr"/>
-          <a:lstStyle/>
-          <a:p>
-            <a:pPr algn="ctr"/>
-            <a:endParaRPr/>
+          </a:p>
+        </p:txBody>
+      </p:sp>
+      <p:sp>
+        <p:nvSpPr>
+          <p:cNvPr id="16" name="TextBox 15"/>
+          <p:cNvSpPr txBox="1"/>
+          <p:nvPr/>
+        </p:nvSpPr>
+        <p:spPr>
+          <a:xfrm>
+            <a:off x="6400800" y="4370831"/>
+            <a:ext cx="4983480" cy="457200"/>
+          </a:xfrm>
+          <a:prstGeom prst="rect">
+            <a:avLst/>
+          </a:prstGeom>
+          <a:noFill/>
+        </p:spPr>
+        <p:txBody>
+          <a:bodyPr wrap="square" anchor="t">
+            <a:spAutoFit/>
+          </a:bodyPr>
+          <a:lstStyle/>
+          <a:p>
+            <a:pPr algn="l">
+              <a:lnSpc>
+                <a:spcPct val="112000"/>
+              </a:lnSpc>
+              <a:spcAft>
+                <a:spcPts val="500"/>
+              </a:spcAft>
+            </a:pPr>
+            <a:r>
+              <a:rPr sz="1800" b="1">
+                <a:solidFill>
+                  <a:srgbClr val="F59E0B"/>
+                </a:solidFill>
+                <a:latin typeface="微软雅黑"/>
+                <a:ea typeface="微软雅黑"/>
+              </a:rPr>
+              <a:t>⚡  PWA 应用</a:t>
+            </a:r>
           </a:p>
         </p:txBody>
       </p:sp>
@@ -15199,187 +15437,8 @@
         </p:nvSpPr>
         <p:spPr>
           <a:xfrm>
-            <a:off x="8229600" y="3968496"/>
-            <a:ext cx="3017520" cy="868680"/>
-          </a:xfrm>
-          <a:prstGeom prst="rect">
-            <a:avLst/>
-          </a:prstGeom>
-          <a:noFill/>
-        </p:spPr>
-        <p:txBody>
-          <a:bodyPr wrap="square" anchor="ctr">
-            <a:spAutoFit/>
-          </a:bodyPr>
-          <a:lstStyle/>
-          <a:p>
-            <a:pPr algn="ctr">
-              <a:lnSpc>
-                <a:spcPct val="112000"/>
-              </a:lnSpc>
-              <a:spcAft>
-                <a:spcPts val="500"/>
-              </a:spcAft>
-            </a:pPr>
-            <a:r>
-              <a:rPr sz="1300" b="1">
-                <a:solidFill>
-                  <a:srgbClr val="FFFFFF"/>
-                </a:solidFill>
-                <a:latin typeface="微软雅黑"/>
-                <a:ea typeface="微软雅黑"/>
-              </a:rPr>
-              <a:t>Chroma 向量库
-文档嵌入检索</a:t>
-            </a:r>
-          </a:p>
-        </p:txBody>
-      </p:sp>
-      <p:sp>
-        <p:nvSpPr>
-          <p:cNvPr id="18" name="Down Arrow 17"/>
-          <p:cNvSpPr/>
-          <p:nvPr/>
-        </p:nvSpPr>
-        <p:spPr>
-          <a:xfrm>
-            <a:off x="5394960" y="4846320"/>
-            <a:ext cx="457200" cy="384048"/>
-          </a:xfrm>
-          <a:prstGeom prst="downArrow">
-            <a:avLst/>
-          </a:prstGeom>
-          <a:solidFill>
-            <a:srgbClr val="4F46E5"/>
-          </a:solidFill>
-          <a:ln>
-            <a:noFill/>
-          </a:ln>
-          <a:effectLst/>
-        </p:spPr>
-        <p:style>
-          <a:lnRef idx="1">
-            <a:schemeClr val="accent1"/>
-          </a:lnRef>
-          <a:fillRef idx="3">
-            <a:schemeClr val="accent1"/>
-          </a:fillRef>
-          <a:effectRef idx="2">
-            <a:schemeClr val="accent1"/>
-          </a:effectRef>
-          <a:fontRef idx="minor">
-            <a:schemeClr val="lt1"/>
-          </a:fontRef>
-        </p:style>
-        <p:txBody>
-          <a:bodyPr wrap="square" rtlCol="0" anchor="ctr"/>
-          <a:lstStyle/>
-          <a:p>
-            <a:pPr algn="ctr"/>
-            <a:endParaRPr/>
-          </a:p>
-        </p:txBody>
-      </p:sp>
-      <p:sp>
-        <p:nvSpPr>
-          <p:cNvPr id="19" name="Rounded Rectangle 18"/>
-          <p:cNvSpPr/>
-          <p:nvPr/>
-        </p:nvSpPr>
-        <p:spPr>
-          <a:xfrm>
-            <a:off x="3566160" y="5230368"/>
-            <a:ext cx="5029200" cy="868680"/>
-          </a:xfrm>
-          <a:prstGeom prst="roundRect">
-            <a:avLst>
-              <a:gd name="adj" fmla="val 12000"/>
-            </a:avLst>
-          </a:prstGeom>
-          <a:solidFill>
-            <a:srgbClr val="10B981"/>
-          </a:solidFill>
-          <a:ln>
-            <a:noFill/>
-          </a:ln>
-          <a:effectLst/>
-        </p:spPr>
-        <p:style>
-          <a:lnRef idx="1">
-            <a:schemeClr val="accent1"/>
-          </a:lnRef>
-          <a:fillRef idx="3">
-            <a:schemeClr val="accent1"/>
-          </a:fillRef>
-          <a:effectRef idx="2">
-            <a:schemeClr val="accent1"/>
-          </a:effectRef>
-          <a:fontRef idx="minor">
-            <a:schemeClr val="lt1"/>
-          </a:fontRef>
-        </p:style>
-        <p:txBody>
-          <a:bodyPr wrap="square" rtlCol="0" anchor="ctr"/>
-          <a:lstStyle/>
-          <a:p>
-            <a:pPr algn="ctr"/>
-            <a:endParaRPr/>
-          </a:p>
-        </p:txBody>
-      </p:sp>
-      <p:sp>
-        <p:nvSpPr>
-          <p:cNvPr id="20" name="TextBox 19"/>
-          <p:cNvSpPr txBox="1"/>
-          <p:nvPr/>
-        </p:nvSpPr>
-        <p:spPr>
-          <a:xfrm>
-            <a:off x="3657600" y="5230368"/>
-            <a:ext cx="4846320" cy="868680"/>
-          </a:xfrm>
-          <a:prstGeom prst="rect">
-            <a:avLst/>
-          </a:prstGeom>
-          <a:noFill/>
-        </p:spPr>
-        <p:txBody>
-          <a:bodyPr wrap="square" anchor="ctr">
-            <a:spAutoFit/>
-          </a:bodyPr>
-          <a:lstStyle/>
-          <a:p>
-            <a:pPr algn="ctr">
-              <a:lnSpc>
-                <a:spcPct val="112000"/>
-              </a:lnSpc>
-              <a:spcAft>
-                <a:spcPts val="500"/>
-              </a:spcAft>
-            </a:pPr>
-            <a:r>
-              <a:rPr sz="1400" b="1">
-                <a:solidFill>
-                  <a:srgbClr val="FFFFFF"/>
-                </a:solidFill>
-                <a:latin typeface="微软雅黑"/>
-                <a:ea typeface="微软雅黑"/>
-              </a:rPr>
-              <a:t>DeepSeek LLM · 博查搜索 · 工具 API</a:t>
-            </a:r>
-          </a:p>
-        </p:txBody>
-      </p:sp>
-      <p:sp>
-        <p:nvSpPr>
-          <p:cNvPr id="21" name="TextBox 20"/>
-          <p:cNvSpPr txBox="1"/>
-          <p:nvPr/>
-        </p:nvSpPr>
-        <p:spPr>
-          <a:xfrm>
-            <a:off x="548640" y="6309360"/>
-            <a:ext cx="11064240" cy="457200"/>
+            <a:off x="6400800" y="4864607"/>
+            <a:ext cx="4983480" cy="1188720"/>
           </a:xfrm>
           <a:prstGeom prst="rect">
             <a:avLst/>
@@ -15408,14 +15467,14 @@
                 <a:latin typeface="微软雅黑"/>
                 <a:ea typeface="微软雅黑"/>
               </a:rPr>
-              <a:t>部署：Docker Compose 编排数据层（MySQL + Redis + Chroma），一键启动脚本拉起全部服务。</a:t>
-            </a:r>
-          </a:p>
-        </p:txBody>
-      </p:sp>
-      <p:sp>
-        <p:nvSpPr>
-          <p:cNvPr id="22" name="TextBox 21"/>
+              <a:t>可安装到桌面、独立窗口运行、离线可用</a:t>
+            </a:r>
+          </a:p>
+        </p:txBody>
+      </p:sp>
+      <p:sp>
+        <p:nvSpPr>
+          <p:cNvPr id="18" name="TextBox 17"/>
           <p:cNvSpPr txBox="1"/>
           <p:nvPr/>
         </p:nvSpPr>
@@ -15782,299 +15841,4 @@
   </a:objectDefaults>
   <a:extraClrSchemeLst/>
 </a:theme>
-</file>
-
-<file path=ppt/theme/theme2.xml><?xml version="1.0" encoding="utf-8"?>
-<a:theme xmlns:a="http://schemas.openxmlformats.org/drawingml/2006/main" name="Office 主题​​">
-  <a:themeElements>
-    <a:clrScheme name="Office">
-      <a:dk1>
-        <a:sysClr val="windowText" lastClr="000000"/>
-      </a:dk1>
-      <a:lt1>
-        <a:sysClr val="window" lastClr="FFFFFF"/>
-      </a:lt1>
-      <a:dk2>
-        <a:srgbClr val="44546A"/>
-      </a:dk2>
-      <a:lt2>
-        <a:srgbClr val="E7E6E6"/>
-      </a:lt2>
-      <a:accent1>
-        <a:srgbClr val="4472C4"/>
-      </a:accent1>
-      <a:accent2>
-        <a:srgbClr val="ED7D31"/>
-      </a:accent2>
-      <a:accent3>
-        <a:srgbClr val="A5A5A5"/>
-      </a:accent3>
-      <a:accent4>
-        <a:srgbClr val="FFC000"/>
-      </a:accent4>
-      <a:accent5>
-        <a:srgbClr val="5B9BD5"/>
-      </a:accent5>
-      <a:accent6>
-        <a:srgbClr val="70AD47"/>
-      </a:accent6>
-      <a:hlink>
-        <a:srgbClr val="0563C1"/>
-      </a:hlink>
-      <a:folHlink>
-        <a:srgbClr val="954F72"/>
-      </a:folHlink>
-    </a:clrScheme>
-    <a:fontScheme name="Office">
-      <a:majorFont>
-        <a:latin typeface="等线 Light" panose="020F0302020204030204"/>
-        <a:ea typeface=""/>
-        <a:cs typeface=""/>
-        <a:font script="Jpan" typeface="游ゴシック Light"/>
-        <a:font script="Hang" typeface="맑은 고딕"/>
-        <a:font script="Hans" typeface="等线 Light"/>
-        <a:font script="Hant" typeface="新細明體"/>
-        <a:font script="Arab" typeface="Times New Roman"/>
-        <a:font script="Hebr" typeface="Times New Roman"/>
-        <a:font script="Thai" typeface="Angsana New"/>
-        <a:font script="Ethi" typeface="Nyala"/>
-        <a:font script="Beng" typeface="Vrinda"/>
-        <a:font script="Gujr" typeface="Shruti"/>
-        <a:font script="Khmr" typeface="MoolBoran"/>
-        <a:font script="Knda" typeface="Tunga"/>
-        <a:font script="Guru" typeface="Raavi"/>
-        <a:font script="Cans" typeface="Euphemia"/>
-        <a:font script="Cher" typeface="Plantagenet Cherokee"/>
-        <a:font script="Yiii" typeface="Microsoft Yi Baiti"/>
-        <a:font script="Tibt" typeface="Microsoft Himalaya"/>
-        <a:font script="Thaa" typeface="MV Boli"/>
-        <a:font script="Deva" typeface="Mangal"/>
-        <a:font script="Telu" typeface="Gautami"/>
-        <a:font script="Taml" typeface="Latha"/>
-        <a:font script="Syrc" typeface="Estrangelo Edessa"/>
-        <a:font script="Orya" typeface="Kalinga"/>
-        <a:font script="Mlym" typeface="Kartika"/>
-        <a:font script="Laoo" typeface="DokChampa"/>
-        <a:font script="Sinh" typeface="Iskoola Pota"/>
-        <a:font script="Mong" typeface="Mongolian Baiti"/>
-        <a:font script="Viet" typeface="Times New Roman"/>
-        <a:font script="Uigh" typeface="Microsoft Uighur"/>
-        <a:font script="Geor" typeface="Sylfaen"/>
-        <a:font script="Armn" typeface="Arial"/>
-        <a:font script="Bugi" typeface="Leelawadee UI"/>
-        <a:font script="Bopo" typeface="Microsoft JhengHei"/>
-        <a:font script="Java" typeface="Javanese Text"/>
-        <a:font script="Lisu" typeface="Segoe UI"/>
-        <a:font script="Mymr" typeface="Myanmar Text"/>
-        <a:font script="Nkoo" typeface="Ebrima"/>
-        <a:font script="Olck" typeface="Nirmala UI"/>
-        <a:font script="Osma" typeface="Ebrima"/>
-        <a:font script="Phag" typeface="Phagspa"/>
-        <a:font script="Syrn" typeface="Estrangelo Edessa"/>
-        <a:font script="Syrj" typeface="Estrangelo Edessa"/>
-        <a:font script="Syre" typeface="Estrangelo Edessa"/>
-        <a:font script="Sora" typeface="Nirmala UI"/>
-        <a:font script="Tale" typeface="Microsoft Tai Le"/>
-        <a:font script="Talu" typeface="Microsoft New Tai Lue"/>
-        <a:font script="Tfng" typeface="Ebrima"/>
-      </a:majorFont>
-      <a:minorFont>
-        <a:latin typeface="等线" panose="020F0502020204030204"/>
-        <a:ea typeface=""/>
-        <a:cs typeface=""/>
-        <a:font script="Jpan" typeface="游ゴシック"/>
-        <a:font script="Hang" typeface="맑은 고딕"/>
-        <a:font script="Hans" typeface="等线"/>
-        <a:font script="Hant" typeface="新細明體"/>
-        <a:font script="Arab" typeface="Arial"/>
-        <a:font script="Hebr" typeface="Arial"/>
-        <a:font script="Thai" typeface="Cordia New"/>
-        <a:font script="Ethi" typeface="Nyala"/>
-        <a:font script="Beng" typeface="Vrinda"/>
-        <a:font script="Gujr" typeface="Shruti"/>
-        <a:font script="Khmr" typeface="DaunPenh"/>
-        <a:font script="Knda" typeface="Tunga"/>
-        <a:font script="Guru" typeface="Raavi"/>
-        <a:font script="Cans" typeface="Euphemia"/>
-        <a:font script="Cher" typeface="Plantagenet Cherokee"/>
-        <a:font script="Yiii" typeface="Microsoft Yi Baiti"/>
-        <a:font script="Tibt" typeface="Microsoft Himalaya"/>
-        <a:font script="Thaa" typeface="MV Boli"/>
-        <a:font script="Deva" typeface="Mangal"/>
-        <a:font script="Telu" typeface="Gautami"/>
-        <a:font script="Taml" typeface="Latha"/>
-        <a:font script="Syrc" typeface="Estrangelo Edessa"/>
-        <a:font script="Orya" typeface="Kalinga"/>
-        <a:font script="Mlym" typeface="Kartika"/>
-        <a:font script="Laoo" typeface="DokChampa"/>
-        <a:font script="Sinh" typeface="Iskoola Pota"/>
-        <a:font script="Mong" typeface="Mongolian Baiti"/>
-        <a:font script="Viet" typeface="Arial"/>
-        <a:font script="Uigh" typeface="Microsoft Uighur"/>
-        <a:font script="Geor" typeface="Sylfaen"/>
-        <a:font script="Armn" typeface="Arial"/>
-        <a:font script="Bugi" typeface="Leelawadee UI"/>
-        <a:font script="Bopo" typeface="Microsoft JhengHei"/>
-        <a:font script="Java" typeface="Javanese Text"/>
-        <a:font script="Lisu" typeface="Segoe UI"/>
-        <a:font script="Mymr" typeface="Myanmar Text"/>
-        <a:font script="Nkoo" typeface="Ebrima"/>
-        <a:font script="Olck" typeface="Nirmala UI"/>
-        <a:font script="Osma" typeface="Ebrima"/>
-        <a:font script="Phag" typeface="Phagspa"/>
-        <a:font script="Syrn" typeface="Estrangelo Edessa"/>
-        <a:font script="Syrj" typeface="Estrangelo Edessa"/>
-        <a:font script="Syre" typeface="Estrangelo Edessa"/>
-        <a:font script="Sora" typeface="Nirmala UI"/>
-        <a:font script="Tale" typeface="Microsoft Tai Le"/>
-        <a:font script="Talu" typeface="Microsoft New Tai Lue"/>
-        <a:font script="Tfng" typeface="Ebrima"/>
-      </a:minorFont>
-    </a:fontScheme>
-    <a:fmtScheme name="Office">
-      <a:fillStyleLst>
-        <a:solidFill>
-          <a:schemeClr val="phClr"/>
-        </a:solidFill>
-        <a:gradFill rotWithShape="1">
-          <a:gsLst>
-            <a:gs pos="0">
-              <a:schemeClr val="phClr">
-                <a:lumMod val="110000"/>
-                <a:satMod val="105000"/>
-                <a:tint val="67000"/>
-              </a:schemeClr>
-            </a:gs>
-            <a:gs pos="50000">
-              <a:schemeClr val="phClr">
-                <a:lumMod val="105000"/>
-                <a:satMod val="103000"/>
-                <a:tint val="73000"/>
-              </a:schemeClr>
-            </a:gs>
-            <a:gs pos="100000">
-              <a:schemeClr val="phClr">
-                <a:lumMod val="105000"/>
-                <a:satMod val="109000"/>
-                <a:tint val="81000"/>
-              </a:schemeClr>
-            </a:gs>
-          </a:gsLst>
-          <a:lin ang="5400000" scaled="0"/>
-        </a:gradFill>
-        <a:gradFill rotWithShape="1">
-          <a:gsLst>
-            <a:gs pos="0">
-              <a:schemeClr val="phClr">
-                <a:satMod val="103000"/>
-                <a:lumMod val="102000"/>
-                <a:tint val="94000"/>
-              </a:schemeClr>
-            </a:gs>
-            <a:gs pos="50000">
-              <a:schemeClr val="phClr">
-                <a:satMod val="110000"/>
-                <a:lumMod val="100000"/>
-                <a:shade val="100000"/>
-              </a:schemeClr>
-            </a:gs>
-            <a:gs pos="100000">
-              <a:schemeClr val="phClr">
-                <a:lumMod val="99000"/>
-                <a:satMod val="120000"/>
-                <a:shade val="78000"/>
-              </a:schemeClr>
-            </a:gs>
-          </a:gsLst>
-          <a:lin ang="5400000" scaled="0"/>
-        </a:gradFill>
-      </a:fillStyleLst>
-      <a:lnStyleLst>
-        <a:ln w="6350" cap="flat" cmpd="sng" algn="ctr">
-          <a:solidFill>
-            <a:schemeClr val="phClr"/>
-          </a:solidFill>
-          <a:prstDash val="solid"/>
-          <a:miter lim="800000"/>
-        </a:ln>
-        <a:ln w="12700" cap="flat" cmpd="sng" algn="ctr">
-          <a:solidFill>
-            <a:schemeClr val="phClr"/>
-          </a:solidFill>
-          <a:prstDash val="solid"/>
-          <a:miter lim="800000"/>
-        </a:ln>
-        <a:ln w="19050" cap="flat" cmpd="sng" algn="ctr">
-          <a:solidFill>
-            <a:schemeClr val="phClr"/>
-          </a:solidFill>
-          <a:prstDash val="solid"/>
-          <a:miter lim="800000"/>
-        </a:ln>
-      </a:lnStyleLst>
-      <a:effectStyleLst>
-        <a:effectStyle>
-          <a:effectLst/>
-        </a:effectStyle>
-        <a:effectStyle>
-          <a:effectLst/>
-        </a:effectStyle>
-        <a:effectStyle>
-          <a:effectLst>
-            <a:outerShdw blurRad="57150" dist="19050" dir="5400000" algn="ctr" rotWithShape="0">
-              <a:srgbClr val="000000">
-                <a:alpha val="63000"/>
-              </a:srgbClr>
-            </a:outerShdw>
-          </a:effectLst>
-        </a:effectStyle>
-      </a:effectStyleLst>
-      <a:bgFillStyleLst>
-        <a:solidFill>
-          <a:schemeClr val="phClr"/>
-        </a:solidFill>
-        <a:solidFill>
-          <a:schemeClr val="phClr">
-            <a:tint val="95000"/>
-            <a:satMod val="170000"/>
-          </a:schemeClr>
-        </a:solidFill>
-        <a:gradFill rotWithShape="1">
-          <a:gsLst>
-            <a:gs pos="0">
-              <a:schemeClr val="phClr">
-                <a:tint val="93000"/>
-                <a:satMod val="150000"/>
-                <a:shade val="98000"/>
-                <a:lumMod val="102000"/>
-              </a:schemeClr>
-            </a:gs>
-            <a:gs pos="50000">
-              <a:schemeClr val="phClr">
-                <a:tint val="98000"/>
-                <a:satMod val="130000"/>
-                <a:shade val="90000"/>
-                <a:lumMod val="103000"/>
-              </a:schemeClr>
-            </a:gs>
-            <a:gs pos="100000">
-              <a:schemeClr val="phClr">
-                <a:shade val="63000"/>
-                <a:satMod val="120000"/>
-              </a:schemeClr>
-            </a:gs>
-          </a:gsLst>
-          <a:lin ang="5400000" scaled="0"/>
-        </a:gradFill>
-      </a:bgFillStyleLst>
-    </a:fmtScheme>
-  </a:themeElements>
-  <a:objectDefaults/>
-  <a:extraClrSchemeLst/>
-  <a:extLst>
-    <a:ext uri="{05A4C25C-085E-4340-85A3-A5531E510DB2}">
-      <thm15:themeFamily xmlns:thm15="http://schemas.microsoft.com/office/thememl/2012/main" name="Office Theme" id="{62F939B6-93AF-4DB8-9C6B-D6C7DFDC589F}" vid="{4A3C46E8-61CC-4603-A589-7422A47A8E4A}"/>
-    </a:ext>
-  </a:extLst>
-</a:theme>
 </file>
--- a/大学生学习与求职智能助手-介绍.pptx
+++ b/大学生学习与求职智能助手-介绍.pptx
@@ -4173,7 +4173,7 @@
                 <a:ea typeface="微软雅黑"/>
               </a:rPr>
               <a:t>Redis
-缓存 / 限流计数</a:t>
+限流计数（固定窗口）</a:t>
             </a:r>
           </a:p>
         </p:txBody>
@@ -5849,7 +5849,7 @@
                 <a:latin typeface="微软雅黑"/>
                 <a:ea typeface="微软雅黑"/>
               </a:rPr>
-              <a:t>•  接口限流 + 登录防爆破</a:t>
+              <a:t>•  Redis 接口限流 + 登录防爆破</a:t>
             </a:r>
           </a:p>
           <a:p>
@@ -6021,7 +6021,7 @@
                 <a:latin typeface="微软雅黑"/>
                 <a:ea typeface="微软雅黑"/>
               </a:rPr>
-              <a:t>•  全局单 IP 300 次 / 分钟限流</a:t>
+              <a:t>•  全局单 IP 300 次 / 分钟限流（Redis）</a:t>
             </a:r>
           </a:p>
           <a:p>
@@ -7934,7 +7934,7 @@
                 <a:latin typeface="微软雅黑"/>
                 <a:ea typeface="微软雅黑"/>
               </a:rPr>
-              <a:t>•  限流防爆破、敏感词等安全设计</a:t>
+              <a:t>•  Redis 限流防爆破、敏感词过滤</a:t>
             </a:r>
           </a:p>
           <a:p>
